--- a/presentation/FY2025_progress_report.pptx
+++ b/presentation/FY2025_progress_report.pptx
@@ -16,10 +16,9 @@
     <p:sldId id="264" r:id="rId10"/>
     <p:sldId id="265" r:id="rId11"/>
     <p:sldId id="266" r:id="rId12"/>
-    <p:sldId id="267" r:id="rId13"/>
   </p:sldIdLst>
   <p:notesMasterIdLst>
-    <p:notesMasterId r:id="rId14"/>
+    <p:notesMasterId r:id="rId13"/>
   </p:notesMasterIdLst>
   <p:sldSz cx="12192000" cy="6858000"/>
   <p:notesSz cx="6858000" cy="12192000"/>
@@ -513,7 +512,7 @@
           <a:p>
             <a:r>
               <a:rPr lang="en-US" dirty="0"/>
-              <a:t>Good morning. This is a progress report on the Mitsubishi Electric forecasting project. In ten minutes: the problem, what we built, what the forecast says, how much to trust it, and what we will do next. (~40s)</a:t>
+              <a:t>Good morning. This is a progress report on the Mitsubishi Electric forecasting project: the problem we were given, the work completed so far, and the plan to the semi-final and final presentations. (~40s)</a:t>
             </a:r>
             <a:endParaRPr lang="en-US" dirty="0"/>
           </a:p>
@@ -601,7 +600,7 @@
           <a:p>
             <a:r>
               <a:rPr lang="en-US" dirty="0"/>
-              <a:t>Three genuine ambiguities we found in the data itself, flagged rather than guessed. The VIP pricing question alone is worth 461 million baht of forecast revenue. And we would like to align on which official numbers the forecast will be compared against. (~55s)</a:t>
+              <a:t>The plan from here. Today: the build is done. At the semi-final on 7 September we present the outcomes - the FY2025 numbers with the accuracy evidence behind them, improved by whatever we take from today's discussion. The final on 28 September delivers the final forecast, the written report, and the handover. (~50s)</a:t>
             </a:r>
             <a:endParaRPr lang="en-US" dirty="0"/>
           </a:p>
@@ -689,7 +688,7 @@
           <a:p>
             <a:r>
               <a:rPr lang="en-US" dirty="0"/>
-              <a:t>This is a progress report - the system is designed to keep improving. When the real FY2025 numbers arrive, they retrain it automatically and give the first true validation. The single biggest gain available is not an algorithm: it is thirty minutes a month of sales knowledge on fifty products. (~55s)</a:t>
+              <a:t>To close: the build phase is complete, the data is understood, and the open questions are on the table. The numbers and their evidence arrive at the semi-final. The dashboard is live if anyone would like to see it now. Thank you. (~30s)</a:t>
             </a:r>
             <a:endParaRPr lang="en-US" dirty="0"/>
           </a:p>
@@ -713,94 +712,6 @@
             <a:fld id="{F7021451-1387-4CA6-816F-3879F97B5CBC}" type="slidenum">
               <a:rPr lang="en-US"/>
               <a:t>11</a:t>
-            </a:fld>
-            <a:endParaRPr lang="en-US"/>
-          </a:p>
-        </p:txBody>
-      </p:sp>
-    </p:spTree>
-    <p:extLst>
-      <p:ext uri="{BB962C8B-B14F-4D97-AF65-F5344CB8AC3E}">
-        <p14:creationId xmlns:p14="http://schemas.microsoft.com/office/powerpoint/2010/main" val="1024086991"/>
-      </p:ext>
-    </p:extLst>
-  </p:cSld>
-  <p:clrMapOvr>
-    <a:masterClrMapping/>
-  </p:clrMapOvr>
-</p:notes>
-</file>
-
-<file path=ppt/notesSlides/notesSlide12.xml><?xml version="1.0" encoding="utf-8"?>
-<p:notes xmlns:a="http://schemas.openxmlformats.org/drawingml/2006/main" xmlns:r="http://schemas.openxmlformats.org/officeDocument/2006/relationships" xmlns:p="http://schemas.openxmlformats.org/presentationml/2006/main">
-  <p:cSld>
-    <p:spTree>
-      <p:nvGrpSpPr>
-        <p:cNvPr id="1" name=""/>
-        <p:cNvGrpSpPr/>
-        <p:nvPr/>
-      </p:nvGrpSpPr>
-      <p:grpSpPr>
-        <a:xfrm>
-          <a:off x="0" y="0"/>
-          <a:ext cx="0" cy="0"/>
-          <a:chOff x="0" y="0"/>
-          <a:chExt cx="0" cy="0"/>
-        </a:xfrm>
-      </p:grpSpPr>
-      <p:sp>
-        <p:nvSpPr>
-          <p:cNvPr id="2" name="Slide Image Placeholder 1"/>
-          <p:cNvSpPr>
-            <a:spLocks noGrp="1" noRot="1" noChangeAspect="1"/>
-          </p:cNvSpPr>
-          <p:nvPr>
-            <p:ph type="sldImg"/>
-          </p:nvPr>
-        </p:nvSpPr>
-        <p:spPr/>
-      </p:sp>
-      <p:sp>
-        <p:nvSpPr>
-          <p:cNvPr id="3" name="Notes Placeholder 2"/>
-          <p:cNvSpPr>
-            <a:spLocks noGrp="1"/>
-          </p:cNvSpPr>
-          <p:nvPr>
-            <p:ph type="body" idx="1"/>
-          </p:nvPr>
-        </p:nvSpPr>
-        <p:spPr/>
-        <p:txBody>
-          <a:bodyPr/>
-          <a:lstStyle/>
-          <a:p>
-            <a:r>
-              <a:rPr lang="en-US" dirty="0"/>
-              <a:t>To close: the forecast, the range, and a system Mitsubishi's own team can re-run without us. Happy to open the live dashboard for any product or question. (~30s)</a:t>
-            </a:r>
-            <a:endParaRPr lang="en-US" dirty="0"/>
-          </a:p>
-        </p:txBody>
-      </p:sp>
-      <p:sp>
-        <p:nvSpPr>
-          <p:cNvPr id="4" name="Slide Number Placeholder 3"/>
-          <p:cNvSpPr>
-            <a:spLocks noGrp="1"/>
-          </p:cNvSpPr>
-          <p:nvPr>
-            <p:ph type="sldNum" sz="quarter" idx="10"/>
-          </p:nvPr>
-        </p:nvSpPr>
-        <p:spPr/>
-        <p:txBody>
-          <a:bodyPr/>
-          <a:lstStyle/>
-          <a:p>
-            <a:fld id="{F7021451-1387-4CA6-816F-3879F97B5CBC}" type="slidenum">
-              <a:rPr lang="en-US"/>
-              <a:t>12</a:t>
             </a:fld>
             <a:endParaRPr lang="en-US"/>
           </a:p>
@@ -865,7 +776,7 @@
           <a:p>
             <a:r>
               <a:rPr lang="en-US" dirty="0"/>
-              <a:t>The brief from Mitsubishi: both surplus and shortage at once, so no just-in-time supply. They gave us four fiscal years of order history, an item master, and a customer master. (~45s)</a:t>
+              <a:t>The brief from Mitsubishi: both surplus and shortage at once, so no just-in-time supply. Our task: a monthly demand forecast for every product, a revenue forecast, and a system their whole team can use. They gave us four fiscal years of order history plus the item and customer masters. (~50s)</a:t>
             </a:r>
             <a:endParaRPr lang="en-US" dirty="0"/>
           </a:p>
@@ -953,7 +864,7 @@
           <a:p>
             <a:r>
               <a:rPr lang="en-US" dirty="0"/>
-              <a:t>We did not pick a model. Every product runs a tournament: up to 24 methods each forecast two years we hid, and the most accurate wins that product. The dashboard needs no analyst - anyone can upload next year's file and re-run. (~60s)</a:t>
+              <a:t>Where the project stands today. The heavy engineering is done: data pipeline, the forecasting system itself, and a dashboard Mitsubishi's team can operate without us. A first FY2025 forecast exists end-to-end; we are holding the numbers for the semi-final, once the evidence pack is final. (~55s)</a:t>
             </a:r>
             <a:endParaRPr lang="en-US" dirty="0"/>
           </a:p>
@@ -1041,7 +952,7 @@
           <a:p>
             <a:r>
               <a:rPr lang="en-US" dirty="0"/>
-              <a:t>Before the numbers, the key finding. This catalogue is extremely sparse and extremely concentrated. Half a percent of order lines carry 16 percent of volume. Statistical methods forecast patterns; much of this demand is discrete events - single large orders from a handful of accounts. That shapes everything that follows. (~60s)</a:t>
+              <a:t>Phase one was the data itself. The good news: Mitsubishi's data is exceptionally clean - the master lists reconcile perfectly. Where we found oddities, we investigated rather than guessed: the duplicate lines turned out to be genuine ERP behaviour, and zero prices are a business convention, not missing data. Everything is documented. (~55s)</a:t>
             </a:r>
             <a:endParaRPr lang="en-US" dirty="0"/>
           </a:p>
@@ -1129,7 +1040,7 @@
           <a:p>
             <a:r>
               <a:rPr lang="en-US" dirty="0"/>
-              <a:t>The forecast itself: 176 thousand units, 1.91 billion baht on a billed basis. The range is not a guess - it is how far this method actually landed from reality on two years we hid from it. Slightly below last year on units, level on revenue. (~50s)</a:t>
+              <a:t>The most important analytical finding so far. This catalogue is extremely sparse and extremely concentrated - half a percent of order lines carry 16 percent of volume, and ten customers carry two-thirds of it. Much of this demand is discrete events, not smooth patterns. That diagnosis drives the system design you are about to see, and the roadmap after it. (~55s)</a:t>
             </a:r>
             <a:endParaRPr lang="en-US" dirty="0"/>
           </a:p>
@@ -1217,7 +1128,7 @@
           <a:p>
             <a:r>
               <a:rPr lang="en-US" dirty="0"/>
-              <a:t>We built the forecast a second time by hand - pure analyst reasoning on run rates, the event layer, and customer momentum, no statistics. It lands within four percent of the system. Two independent routes agreeing is the strongest corroboration available before the real FY2025 numbers exist. (~55s)</a:t>
+              <a:t>The system in one slide. We did not pick a model - every product runs a tournament of up to 24 methods, judged on two years we hid from them. Because demand behaviour varies so much across the catalogue, seventeen different methods currently earn their place somewhere. (~50s)</a:t>
             </a:r>
             <a:endParaRPr lang="en-US" dirty="0"/>
           </a:p>
@@ -1305,7 +1216,7 @@
           <a:p>
             <a:r>
               <a:rPr lang="en-US" dirty="0"/>
-              <a:t>Is the machinery worth it? Against the two things any business could do without modelling - repeat last year, or spread it flat - the system cuts error by 8 to 17 percent, and in an inventory simulation serves about 4 points more demand at the same stock level. (~50s)</a:t>
+              <a:t>The deliverable Mitsubishi's team actually touches. Plain language throughout, every forecast shown next to the evidence behind it, and the key requirement from the brief: anyone can upload a new data file and the entire system re-runs in about two minutes - no code, no analyst. Happy to demo it live afterwards. (~50s)</a:t>
             </a:r>
             <a:endParaRPr lang="en-US" dirty="0"/>
           </a:p>
@@ -1393,7 +1304,7 @@
           <a:p>
             <a:r>
               <a:rPr lang="en-US" dirty="0"/>
-              <a:t>One number cannot describe accuracy honestly. At the hardest level - one product, one month - 36 percent, and no method on this data does much better; a forecast that KNOWS each product's annual total still scores badly monthly. At the levels where budgets are set, we measure around 80 percent. Match the figure to the decision. (~60s)</a:t>
+              <a:t>The working method, because for a graded forecast the process is the product. Every improvement idea is scored against a year we hid before any adoption - twelve tested so far, three survived. The failures are documented with their numbers, which is exactly what makes the successes credible. (~45s)</a:t>
             </a:r>
             <a:endParaRPr lang="en-US" dirty="0"/>
           </a:p>
@@ -1481,7 +1392,7 @@
           <a:p>
             <a:r>
               <a:rPr lang="en-US" dirty="0"/>
-              <a:t>The discipline behind the numbers: twelve improvement ideas built and tested this cycle, three adopted. The rejections matter as much - reconciliation and ensembles are popular techniques, and we can show exactly why they do not help on THIS data. Everything is documented so nobody re-tests a dead end. (~50s)</a:t>
+              <a:t>We read every sheet of the supplied documentation, and it paid off twice. First, the status question resolved itself: Closed means cancelled, and our treatment matches. Second, a genuine open item: the dictionary grants VIP customers 37 percent off, but on identical products VIP and End User pay exactly the same Base Price - so the discount is applied somewhere outside this file. That single answer from Mitsubishi is worth 461 million baht of revenue interpretation. (~55s)</a:t>
             </a:r>
             <a:endParaRPr lang="en-US" dirty="0"/>
           </a:p>
@@ -2041,7 +1952,7 @@
                 <a:ea typeface="Calibri" pitchFamily="34" charset="-122"/>
                 <a:cs typeface="Calibri" pitchFamily="34" charset="-120"/>
               </a:rPr>
-              <a:t>FY2025 demand and revenue forecast, a planning dashboard,</a:t>
+              <a:t>Where the project stands, what we found in the data,</a:t>
             </a:r>
             <a:endParaRPr lang="en-US" sz="1500" dirty="0"/>
           </a:p>
@@ -2061,7 +1972,7 @@
                 <a:ea typeface="Calibri" pitchFamily="34" charset="-122"/>
                 <a:cs typeface="Calibri" pitchFamily="34" charset="-120"/>
               </a:rPr>
-              <a:t>and the evidence behind both.</a:t>
+              <a:t>and the road to the final forecast.</a:t>
             </a:r>
             <a:endParaRPr lang="en-US" sz="1500" dirty="0"/>
           </a:p>
@@ -2171,7 +2082,7 @@
                 <a:ea typeface="Calibri" pitchFamily="34" charset="-122"/>
                 <a:cs typeface="Calibri" pitchFamily="34" charset="-120"/>
               </a:rPr>
-              <a:t>09 — FOR MITSUBISHI</a:t>
+              <a:t>09 — THE ROAD AHEAD</a:t>
             </a:r>
             <a:endParaRPr lang="en-US" sz="1050" dirty="0"/>
           </a:p>
@@ -2210,7 +2121,7 @@
                 <a:ea typeface="Cambria" pitchFamily="34" charset="-122"/>
                 <a:cs typeface="Cambria" pitchFamily="34" charset="-120"/>
               </a:rPr>
-              <a:t>Three answers would sharpen this.</a:t>
+              <a:t>Two milestones to the final forecast.</a:t>
             </a:r>
             <a:endParaRPr lang="en-US" sz="3800" dirty="0"/>
           </a:p>
@@ -2218,118 +2129,106 @@
       </p:sp>
       <p:sp>
         <p:nvSpPr>
-          <p:cNvPr id="4" name="Text 2"/>
-          <p:cNvSpPr/>
-          <p:nvPr/>
-        </p:nvSpPr>
-        <p:spPr>
-          <a:xfrm>
-            <a:off x="685800" y="2286000"/>
-            <a:ext cx="777240" cy="640080"/>
-          </a:xfrm>
-          <a:prstGeom prst="rect">
-            <a:avLst/>
-          </a:prstGeom>
-          <a:noFill/>
-          <a:ln/>
-        </p:spPr>
-        <p:txBody>
-          <a:bodyPr wrap="square" lIns="0" tIns="0" rIns="0" bIns="0" rtlCol="0" anchor="ctr"/>
-          <a:lstStyle/>
-          <a:p>
-            <a:pPr indent="0" marL="0">
-              <a:buNone/>
-            </a:pPr>
-            <a:r>
-              <a:rPr lang="en-US" sz="2400" i="1" dirty="0">
-                <a:solidFill>
-                  <a:srgbClr val="C8102E"/>
+          <p:cNvPr id="4" name="Shape 2"/>
+          <p:cNvSpPr/>
+          <p:nvPr/>
+        </p:nvSpPr>
+        <p:spPr>
+          <a:xfrm>
+            <a:off x="685800" y="2331720"/>
+            <a:ext cx="3429000" cy="2926080"/>
+          </a:xfrm>
+          <a:prstGeom prst="roundRect">
+            <a:avLst>
+              <a:gd name="adj" fmla="val 2500"/>
+            </a:avLst>
+          </a:prstGeom>
+          <a:solidFill>
+            <a:srgbClr val="1C2530"/>
+          </a:solidFill>
+          <a:ln w="12700">
+            <a:solidFill>
+              <a:srgbClr val="1C2530"/>
+            </a:solidFill>
+            <a:prstDash val="solid"/>
+          </a:ln>
+        </p:spPr>
+      </p:sp>
+      <p:sp>
+        <p:nvSpPr>
+          <p:cNvPr id="5" name="Text 3"/>
+          <p:cNvSpPr/>
+          <p:nvPr/>
+        </p:nvSpPr>
+        <p:spPr>
+          <a:xfrm>
+            <a:off x="1005840" y="2697480"/>
+            <a:ext cx="2788920" cy="320040"/>
+          </a:xfrm>
+          <a:prstGeom prst="rect">
+            <a:avLst/>
+          </a:prstGeom>
+          <a:noFill/>
+          <a:ln/>
+        </p:spPr>
+        <p:txBody>
+          <a:bodyPr wrap="square" lIns="0" tIns="0" rIns="0" bIns="0" rtlCol="0" anchor="ctr"/>
+          <a:lstStyle/>
+          <a:p>
+            <a:pPr indent="0" marL="0">
+              <a:buNone/>
+            </a:pPr>
+            <a:r>
+              <a:rPr lang="en-US" sz="1050" b="1" spc="200" kern="0" dirty="0">
+                <a:solidFill>
+                  <a:srgbClr val="9AA4B0"/>
+                </a:solidFill>
+                <a:latin typeface="Calibri" pitchFamily="34" charset="0"/>
+                <a:ea typeface="Calibri" pitchFamily="34" charset="-122"/>
+                <a:cs typeface="Calibri" pitchFamily="34" charset="-120"/>
+              </a:rPr>
+              <a:t>TODAY — 10 AUG</a:t>
+            </a:r>
+            <a:endParaRPr lang="en-US" sz="1050" dirty="0"/>
+          </a:p>
+        </p:txBody>
+      </p:sp>
+      <p:sp>
+        <p:nvSpPr>
+          <p:cNvPr id="6" name="Text 4"/>
+          <p:cNvSpPr/>
+          <p:nvPr/>
+        </p:nvSpPr>
+        <p:spPr>
+          <a:xfrm>
+            <a:off x="1005840" y="3063240"/>
+            <a:ext cx="2788920" cy="777240"/>
+          </a:xfrm>
+          <a:prstGeom prst="rect">
+            <a:avLst/>
+          </a:prstGeom>
+          <a:noFill/>
+          <a:ln/>
+        </p:spPr>
+        <p:txBody>
+          <a:bodyPr wrap="square" lIns="0" tIns="0" rIns="0" bIns="0" rtlCol="0" anchor="ctr"/>
+          <a:lstStyle/>
+          <a:p>
+            <a:pPr indent="0" marL="0">
+              <a:buNone/>
+            </a:pPr>
+            <a:r>
+              <a:rPr lang="en-US" sz="1900" b="1" dirty="0">
+                <a:solidFill>
+                  <a:srgbClr val="F5F7FA"/>
                 </a:solidFill>
                 <a:latin typeface="Cambria" pitchFamily="34" charset="0"/>
                 <a:ea typeface="Cambria" pitchFamily="34" charset="-122"/>
                 <a:cs typeface="Cambria" pitchFamily="34" charset="-120"/>
               </a:rPr>
-              <a:t>01</a:t>
-            </a:r>
-            <a:endParaRPr lang="en-US" sz="2400" dirty="0"/>
-          </a:p>
-        </p:txBody>
-      </p:sp>
-      <p:sp>
-        <p:nvSpPr>
-          <p:cNvPr id="5" name="Text 3"/>
-          <p:cNvSpPr/>
-          <p:nvPr/>
-        </p:nvSpPr>
-        <p:spPr>
-          <a:xfrm>
-            <a:off x="1691640" y="2304288"/>
-            <a:ext cx="9418320" cy="411480"/>
-          </a:xfrm>
-          <a:prstGeom prst="rect">
-            <a:avLst/>
-          </a:prstGeom>
-          <a:noFill/>
-          <a:ln/>
-        </p:spPr>
-        <p:txBody>
-          <a:bodyPr wrap="square" lIns="0" tIns="0" rIns="0" bIns="0" rtlCol="0" anchor="ctr"/>
-          <a:lstStyle/>
-          <a:p>
-            <a:pPr indent="0" marL="0">
-              <a:buNone/>
-            </a:pPr>
-            <a:r>
-              <a:rPr lang="en-US" sz="1550" b="1" dirty="0">
-                <a:solidFill>
-                  <a:srgbClr val="1C2530"/>
-                </a:solidFill>
-                <a:latin typeface="Calibri" pitchFamily="34" charset="0"/>
-                <a:ea typeface="Calibri" pitchFamily="34" charset="-122"/>
-                <a:cs typeface="Calibri" pitchFamily="34" charset="-120"/>
-              </a:rPr>
-              <a:t>What does order status “Closed” mean?</a:t>
-            </a:r>
-            <a:endParaRPr lang="en-US" sz="1550" dirty="0"/>
-          </a:p>
-        </p:txBody>
-      </p:sp>
-      <p:sp>
-        <p:nvSpPr>
-          <p:cNvPr id="6" name="Text 4"/>
-          <p:cNvSpPr/>
-          <p:nvPr/>
-        </p:nvSpPr>
-        <p:spPr>
-          <a:xfrm>
-            <a:off x="1691640" y="2743200"/>
-            <a:ext cx="9418320" cy="548640"/>
-          </a:xfrm>
-          <a:prstGeom prst="rect">
-            <a:avLst/>
-          </a:prstGeom>
-          <a:noFill/>
-          <a:ln/>
-        </p:spPr>
-        <p:txBody>
-          <a:bodyPr wrap="square" lIns="0" tIns="0" rIns="0" bIns="0" rtlCol="0" anchor="ctr"/>
-          <a:lstStyle/>
-          <a:p>
-            <a:pPr indent="0" marL="0">
-              <a:buNone/>
-            </a:pPr>
-            <a:r>
-              <a:rPr lang="en-US" sz="1200" dirty="0">
-                <a:solidFill>
-                  <a:srgbClr val="6B7280"/>
-                </a:solidFill>
-                <a:latin typeface="Calibri" pitchFamily="34" charset="0"/>
-                <a:ea typeface="Calibri" pitchFamily="34" charset="-122"/>
-                <a:cs typeface="Calibri" pitchFamily="34" charset="-120"/>
-              </a:rPr>
-              <a:t>The data dictionary defines it two contradictory ways — 14.5% of volume rides on it</a:t>
-            </a:r>
-            <a:endParaRPr lang="en-US" sz="1200" dirty="0"/>
+              <a:t>Progress report</a:t>
+            </a:r>
+            <a:endParaRPr lang="en-US" sz="1900" dirty="0"/>
           </a:p>
         </p:txBody>
       </p:sp>
@@ -2341,219 +2240,360 @@
         </p:nvSpPr>
         <p:spPr>
           <a:xfrm>
-            <a:off x="685800" y="3493008"/>
-            <a:ext cx="777240" cy="640080"/>
-          </a:xfrm>
-          <a:prstGeom prst="rect">
-            <a:avLst/>
-          </a:prstGeom>
-          <a:noFill/>
-          <a:ln/>
-        </p:spPr>
-        <p:txBody>
-          <a:bodyPr wrap="square" lIns="0" tIns="0" rIns="0" bIns="0" rtlCol="0" anchor="ctr"/>
-          <a:lstStyle/>
-          <a:p>
-            <a:pPr indent="0" marL="0">
-              <a:buNone/>
-            </a:pPr>
-            <a:r>
-              <a:rPr lang="en-US" sz="2400" i="1" dirty="0">
-                <a:solidFill>
-                  <a:srgbClr val="C8102E"/>
+            <a:off x="1005840" y="3886200"/>
+            <a:ext cx="2788920" cy="1234440"/>
+          </a:xfrm>
+          <a:prstGeom prst="rect">
+            <a:avLst/>
+          </a:prstGeom>
+          <a:noFill/>
+          <a:ln/>
+        </p:spPr>
+        <p:txBody>
+          <a:bodyPr wrap="square" lIns="0" tIns="0" rIns="0" bIns="0" rtlCol="0" anchor="ctr"/>
+          <a:lstStyle/>
+          <a:p>
+            <a:pPr indent="0" marL="0">
+              <a:lnSpc>
+                <a:spcPct val="120000"/>
+              </a:lnSpc>
+              <a:buNone/>
+            </a:pPr>
+            <a:r>
+              <a:rPr lang="en-US" sz="1150" dirty="0">
+                <a:solidFill>
+                  <a:srgbClr val="C9D2DB"/>
+                </a:solidFill>
+                <a:latin typeface="Calibri" pitchFamily="34" charset="0"/>
+                <a:ea typeface="Calibri" pitchFamily="34" charset="-122"/>
+                <a:cs typeface="Calibri" pitchFamily="34" charset="-120"/>
+              </a:rPr>
+              <a:t>system built and running; data understood; questions raised</a:t>
+            </a:r>
+            <a:endParaRPr lang="en-US" sz="1150" dirty="0"/>
+          </a:p>
+        </p:txBody>
+      </p:sp>
+      <p:sp>
+        <p:nvSpPr>
+          <p:cNvPr id="8" name="Shape 6"/>
+          <p:cNvSpPr/>
+          <p:nvPr/>
+        </p:nvSpPr>
+        <p:spPr>
+          <a:xfrm>
+            <a:off x="4398264" y="2331720"/>
+            <a:ext cx="3429000" cy="2926080"/>
+          </a:xfrm>
+          <a:prstGeom prst="roundRect">
+            <a:avLst>
+              <a:gd name="adj" fmla="val 2500"/>
+            </a:avLst>
+          </a:prstGeom>
+          <a:solidFill>
+            <a:srgbClr val="C8102E"/>
+          </a:solidFill>
+          <a:ln w="12700">
+            <a:solidFill>
+              <a:srgbClr val="C8102E"/>
+            </a:solidFill>
+            <a:prstDash val="solid"/>
+          </a:ln>
+        </p:spPr>
+      </p:sp>
+      <p:sp>
+        <p:nvSpPr>
+          <p:cNvPr id="9" name="Text 7"/>
+          <p:cNvSpPr/>
+          <p:nvPr/>
+        </p:nvSpPr>
+        <p:spPr>
+          <a:xfrm>
+            <a:off x="4718304" y="2697480"/>
+            <a:ext cx="2788920" cy="320040"/>
+          </a:xfrm>
+          <a:prstGeom prst="rect">
+            <a:avLst/>
+          </a:prstGeom>
+          <a:noFill/>
+          <a:ln/>
+        </p:spPr>
+        <p:txBody>
+          <a:bodyPr wrap="square" lIns="0" tIns="0" rIns="0" bIns="0" rtlCol="0" anchor="ctr"/>
+          <a:lstStyle/>
+          <a:p>
+            <a:pPr indent="0" marL="0">
+              <a:buNone/>
+            </a:pPr>
+            <a:r>
+              <a:rPr lang="en-US" sz="1050" b="1" spc="200" kern="0" dirty="0">
+                <a:solidFill>
+                  <a:srgbClr val="F3C2CB"/>
+                </a:solidFill>
+                <a:latin typeface="Calibri" pitchFamily="34" charset="0"/>
+                <a:ea typeface="Calibri" pitchFamily="34" charset="-122"/>
+                <a:cs typeface="Calibri" pitchFamily="34" charset="-120"/>
+              </a:rPr>
+              <a:t>SEMI-FINAL — 7 SEP</a:t>
+            </a:r>
+            <a:endParaRPr lang="en-US" sz="1050" dirty="0"/>
+          </a:p>
+        </p:txBody>
+      </p:sp>
+      <p:sp>
+        <p:nvSpPr>
+          <p:cNvPr id="10" name="Text 8"/>
+          <p:cNvSpPr/>
+          <p:nvPr/>
+        </p:nvSpPr>
+        <p:spPr>
+          <a:xfrm>
+            <a:off x="4718304" y="3063240"/>
+            <a:ext cx="2788920" cy="777240"/>
+          </a:xfrm>
+          <a:prstGeom prst="rect">
+            <a:avLst/>
+          </a:prstGeom>
+          <a:noFill/>
+          <a:ln/>
+        </p:spPr>
+        <p:txBody>
+          <a:bodyPr wrap="square" lIns="0" tIns="0" rIns="0" bIns="0" rtlCol="0" anchor="ctr"/>
+          <a:lstStyle/>
+          <a:p>
+            <a:pPr indent="0" marL="0">
+              <a:buNone/>
+            </a:pPr>
+            <a:r>
+              <a:rPr lang="en-US" sz="1900" b="1" dirty="0">
+                <a:solidFill>
+                  <a:srgbClr val="F5F7FA"/>
                 </a:solidFill>
                 <a:latin typeface="Cambria" pitchFamily="34" charset="0"/>
                 <a:ea typeface="Cambria" pitchFamily="34" charset="-122"/>
                 <a:cs typeface="Cambria" pitchFamily="34" charset="-120"/>
               </a:rPr>
-              <a:t>02</a:t>
-            </a:r>
-            <a:endParaRPr lang="en-US" sz="2400" dirty="0"/>
-          </a:p>
-        </p:txBody>
-      </p:sp>
-      <p:sp>
-        <p:nvSpPr>
-          <p:cNvPr id="8" name="Text 6"/>
-          <p:cNvSpPr/>
-          <p:nvPr/>
-        </p:nvSpPr>
-        <p:spPr>
-          <a:xfrm>
-            <a:off x="1691640" y="3511296"/>
-            <a:ext cx="9418320" cy="411480"/>
-          </a:xfrm>
-          <a:prstGeom prst="rect">
-            <a:avLst/>
-          </a:prstGeom>
-          <a:noFill/>
-          <a:ln/>
-        </p:spPr>
-        <p:txBody>
-          <a:bodyPr wrap="square" lIns="0" tIns="0" rIns="0" bIns="0" rtlCol="0" anchor="ctr"/>
-          <a:lstStyle/>
-          <a:p>
-            <a:pPr indent="0" marL="0">
-              <a:buNone/>
-            </a:pPr>
-            <a:r>
-              <a:rPr lang="en-US" sz="1550" b="1" dirty="0">
-                <a:solidFill>
-                  <a:srgbClr val="1C2530"/>
-                </a:solidFill>
-                <a:latin typeface="Calibri" pitchFamily="34" charset="0"/>
-                <a:ea typeface="Calibri" pitchFamily="34" charset="-122"/>
-                <a:cs typeface="Calibri" pitchFamily="34" charset="-120"/>
-              </a:rPr>
-              <a:t>Is Base Price before or after the VIP discount?</a:t>
-            </a:r>
-            <a:endParaRPr lang="en-US" sz="1550" dirty="0"/>
-          </a:p>
-        </p:txBody>
-      </p:sp>
-      <p:sp>
-        <p:nvSpPr>
-          <p:cNvPr id="9" name="Text 7"/>
-          <p:cNvSpPr/>
-          <p:nvPr/>
-        </p:nvSpPr>
-        <p:spPr>
-          <a:xfrm>
-            <a:off x="1691640" y="3950208"/>
-            <a:ext cx="9418320" cy="548640"/>
-          </a:xfrm>
-          <a:prstGeom prst="rect">
-            <a:avLst/>
-          </a:prstGeom>
-          <a:noFill/>
-          <a:ln/>
-        </p:spPr>
-        <p:txBody>
-          <a:bodyPr wrap="square" lIns="0" tIns="0" rIns="0" bIns="0" rtlCol="0" anchor="ctr"/>
-          <a:lstStyle/>
-          <a:p>
-            <a:pPr indent="0" marL="0">
-              <a:buNone/>
-            </a:pPr>
-            <a:r>
-              <a:rPr lang="en-US" sz="1200" dirty="0">
-                <a:solidFill>
-                  <a:srgbClr val="6B7280"/>
-                </a:solidFill>
-                <a:latin typeface="Calibri" pitchFamily="34" charset="0"/>
-                <a:ea typeface="Calibri" pitchFamily="34" charset="-122"/>
-                <a:cs typeface="Calibri" pitchFamily="34" charset="-120"/>
-              </a:rPr>
-              <a:t>The dictionary says VIP receive 37% off list; prices in the data suggest it is not yet applied — ฿461m of forecast revenue rides on it</a:t>
-            </a:r>
-            <a:endParaRPr lang="en-US" sz="1200" dirty="0"/>
-          </a:p>
-        </p:txBody>
-      </p:sp>
-      <p:sp>
-        <p:nvSpPr>
-          <p:cNvPr id="10" name="Text 8"/>
-          <p:cNvSpPr/>
-          <p:nvPr/>
-        </p:nvSpPr>
-        <p:spPr>
-          <a:xfrm>
-            <a:off x="685800" y="4700016"/>
-            <a:ext cx="777240" cy="640080"/>
-          </a:xfrm>
-          <a:prstGeom prst="rect">
-            <a:avLst/>
-          </a:prstGeom>
-          <a:noFill/>
-          <a:ln/>
-        </p:spPr>
-        <p:txBody>
-          <a:bodyPr wrap="square" lIns="0" tIns="0" rIns="0" bIns="0" rtlCol="0" anchor="ctr"/>
-          <a:lstStyle/>
-          <a:p>
-            <a:pPr indent="0" marL="0">
-              <a:buNone/>
-            </a:pPr>
-            <a:r>
-              <a:rPr lang="en-US" sz="2400" i="1" dirty="0">
-                <a:solidFill>
-                  <a:srgbClr val="C8102E"/>
+              <a:t>Results &amp; evidence</a:t>
+            </a:r>
+            <a:endParaRPr lang="en-US" sz="1900" dirty="0"/>
+          </a:p>
+        </p:txBody>
+      </p:sp>
+      <p:sp>
+        <p:nvSpPr>
+          <p:cNvPr id="11" name="Text 9"/>
+          <p:cNvSpPr/>
+          <p:nvPr/>
+        </p:nvSpPr>
+        <p:spPr>
+          <a:xfrm>
+            <a:off x="4718304" y="3886200"/>
+            <a:ext cx="2788920" cy="1234440"/>
+          </a:xfrm>
+          <a:prstGeom prst="rect">
+            <a:avLst/>
+          </a:prstGeom>
+          <a:noFill/>
+          <a:ln/>
+        </p:spPr>
+        <p:txBody>
+          <a:bodyPr wrap="square" lIns="0" tIns="0" rIns="0" bIns="0" rtlCol="0" anchor="ctr"/>
+          <a:lstStyle/>
+          <a:p>
+            <a:pPr indent="0" marL="0">
+              <a:lnSpc>
+                <a:spcPct val="120000"/>
+              </a:lnSpc>
+              <a:buNone/>
+            </a:pPr>
+            <a:r>
+              <a:rPr lang="en-US" sz="1150" dirty="0">
+                <a:solidFill>
+                  <a:srgbClr val="F3D9DD"/>
+                </a:solidFill>
+                <a:latin typeface="Calibri" pitchFamily="34" charset="0"/>
+                <a:ea typeface="Calibri" pitchFamily="34" charset="-122"/>
+                <a:cs typeface="Calibri" pitchFamily="34" charset="-120"/>
+              </a:rPr>
+              <a:t>the FY2025 numbers, accuracy against withheld years, inventory trade-off, refinements from your feedback</a:t>
+            </a:r>
+            <a:endParaRPr lang="en-US" sz="1150" dirty="0"/>
+          </a:p>
+        </p:txBody>
+      </p:sp>
+      <p:sp>
+        <p:nvSpPr>
+          <p:cNvPr id="12" name="Shape 10"/>
+          <p:cNvSpPr/>
+          <p:nvPr/>
+        </p:nvSpPr>
+        <p:spPr>
+          <a:xfrm>
+            <a:off x="8110728" y="2331720"/>
+            <a:ext cx="3429000" cy="2926080"/>
+          </a:xfrm>
+          <a:prstGeom prst="roundRect">
+            <a:avLst>
+              <a:gd name="adj" fmla="val 2500"/>
+            </a:avLst>
+          </a:prstGeom>
+          <a:solidFill>
+            <a:srgbClr val="1C2530"/>
+          </a:solidFill>
+          <a:ln w="12700">
+            <a:solidFill>
+              <a:srgbClr val="1C2530"/>
+            </a:solidFill>
+            <a:prstDash val="solid"/>
+          </a:ln>
+        </p:spPr>
+      </p:sp>
+      <p:sp>
+        <p:nvSpPr>
+          <p:cNvPr id="13" name="Text 11"/>
+          <p:cNvSpPr/>
+          <p:nvPr/>
+        </p:nvSpPr>
+        <p:spPr>
+          <a:xfrm>
+            <a:off x="8430768" y="2697480"/>
+            <a:ext cx="2788920" cy="320040"/>
+          </a:xfrm>
+          <a:prstGeom prst="rect">
+            <a:avLst/>
+          </a:prstGeom>
+          <a:noFill/>
+          <a:ln/>
+        </p:spPr>
+        <p:txBody>
+          <a:bodyPr wrap="square" lIns="0" tIns="0" rIns="0" bIns="0" rtlCol="0" anchor="ctr"/>
+          <a:lstStyle/>
+          <a:p>
+            <a:pPr indent="0" marL="0">
+              <a:buNone/>
+            </a:pPr>
+            <a:r>
+              <a:rPr lang="en-US" sz="1050" b="1" spc="200" kern="0" dirty="0">
+                <a:solidFill>
+                  <a:srgbClr val="9AA4B0"/>
+                </a:solidFill>
+                <a:latin typeface="Calibri" pitchFamily="34" charset="0"/>
+                <a:ea typeface="Calibri" pitchFamily="34" charset="-122"/>
+                <a:cs typeface="Calibri" pitchFamily="34" charset="-120"/>
+              </a:rPr>
+              <a:t>FINAL — 28 SEP</a:t>
+            </a:r>
+            <a:endParaRPr lang="en-US" sz="1050" dirty="0"/>
+          </a:p>
+        </p:txBody>
+      </p:sp>
+      <p:sp>
+        <p:nvSpPr>
+          <p:cNvPr id="14" name="Text 12"/>
+          <p:cNvSpPr/>
+          <p:nvPr/>
+        </p:nvSpPr>
+        <p:spPr>
+          <a:xfrm>
+            <a:off x="8430768" y="3063240"/>
+            <a:ext cx="2788920" cy="777240"/>
+          </a:xfrm>
+          <a:prstGeom prst="rect">
+            <a:avLst/>
+          </a:prstGeom>
+          <a:noFill/>
+          <a:ln/>
+        </p:spPr>
+        <p:txBody>
+          <a:bodyPr wrap="square" lIns="0" tIns="0" rIns="0" bIns="0" rtlCol="0" anchor="ctr"/>
+          <a:lstStyle/>
+          <a:p>
+            <a:pPr indent="0" marL="0">
+              <a:buNone/>
+            </a:pPr>
+            <a:r>
+              <a:rPr lang="en-US" sz="1900" b="1" dirty="0">
+                <a:solidFill>
+                  <a:srgbClr val="F5F7FA"/>
                 </a:solidFill>
                 <a:latin typeface="Cambria" pitchFamily="34" charset="0"/>
                 <a:ea typeface="Cambria" pitchFamily="34" charset="-122"/>
                 <a:cs typeface="Cambria" pitchFamily="34" charset="-120"/>
               </a:rPr>
-              <a:t>03</a:t>
-            </a:r>
-            <a:endParaRPr lang="en-US" sz="2400" dirty="0"/>
-          </a:p>
-        </p:txBody>
-      </p:sp>
-      <p:sp>
-        <p:nvSpPr>
-          <p:cNvPr id="11" name="Text 9"/>
-          <p:cNvSpPr/>
-          <p:nvPr/>
-        </p:nvSpPr>
-        <p:spPr>
-          <a:xfrm>
-            <a:off x="1691640" y="4718304"/>
-            <a:ext cx="9418320" cy="411480"/>
-          </a:xfrm>
-          <a:prstGeom prst="rect">
-            <a:avLst/>
-          </a:prstGeom>
-          <a:noFill/>
-          <a:ln/>
-        </p:spPr>
-        <p:txBody>
-          <a:bodyPr wrap="square" lIns="0" tIns="0" rIns="0" bIns="0" rtlCol="0" anchor="ctr"/>
-          <a:lstStyle/>
-          <a:p>
-            <a:pPr indent="0" marL="0">
-              <a:buNone/>
-            </a:pPr>
-            <a:r>
-              <a:rPr lang="en-US" sz="1550" b="1" dirty="0">
-                <a:solidFill>
-                  <a:srgbClr val="1C2530"/>
-                </a:solidFill>
-                <a:latin typeface="Calibri" pitchFamily="34" charset="0"/>
-                <a:ea typeface="Calibri" pitchFamily="34" charset="-122"/>
-                <a:cs typeface="Calibri" pitchFamily="34" charset="-120"/>
-              </a:rPr>
-              <a:t>Which FY2025 figures will grade this forecast?</a:t>
-            </a:r>
-            <a:endParaRPr lang="en-US" sz="1550" dirty="0"/>
-          </a:p>
-        </p:txBody>
-      </p:sp>
-      <p:sp>
-        <p:nvSpPr>
-          <p:cNvPr id="12" name="Text 10"/>
-          <p:cNvSpPr/>
-          <p:nvPr/>
-        </p:nvSpPr>
-        <p:spPr>
-          <a:xfrm>
-            <a:off x="1691640" y="5157216"/>
-            <a:ext cx="9418320" cy="548640"/>
-          </a:xfrm>
-          <a:prstGeom prst="rect">
-            <a:avLst/>
-          </a:prstGeom>
-          <a:noFill/>
-          <a:ln/>
-        </p:spPr>
-        <p:txBody>
-          <a:bodyPr wrap="square" lIns="0" tIns="0" rIns="0" bIns="0" rtlCol="0" anchor="ctr"/>
-          <a:lstStyle/>
-          <a:p>
-            <a:pPr indent="0" marL="0">
-              <a:buNone/>
-            </a:pPr>
-            <a:r>
-              <a:rPr lang="en-US" sz="1200" dirty="0">
+              <a:t>Final forecast &amp; handover</a:t>
+            </a:r>
+            <a:endParaRPr lang="en-US" sz="1900" dirty="0"/>
+          </a:p>
+        </p:txBody>
+      </p:sp>
+      <p:sp>
+        <p:nvSpPr>
+          <p:cNvPr id="15" name="Text 13"/>
+          <p:cNvSpPr/>
+          <p:nvPr/>
+        </p:nvSpPr>
+        <p:spPr>
+          <a:xfrm>
+            <a:off x="8430768" y="3886200"/>
+            <a:ext cx="2788920" cy="1234440"/>
+          </a:xfrm>
+          <a:prstGeom prst="rect">
+            <a:avLst/>
+          </a:prstGeom>
+          <a:noFill/>
+          <a:ln/>
+        </p:spPr>
+        <p:txBody>
+          <a:bodyPr wrap="square" lIns="0" tIns="0" rIns="0" bIns="0" rtlCol="0" anchor="ctr"/>
+          <a:lstStyle/>
+          <a:p>
+            <a:pPr indent="0" marL="0">
+              <a:lnSpc>
+                <a:spcPct val="120000"/>
+              </a:lnSpc>
+              <a:buNone/>
+            </a:pPr>
+            <a:r>
+              <a:rPr lang="en-US" sz="1150" dirty="0">
+                <a:solidFill>
+                  <a:srgbClr val="C9D2DB"/>
+                </a:solidFill>
+                <a:latin typeface="Calibri" pitchFamily="34" charset="0"/>
+                <a:ea typeface="Calibri" pitchFamily="34" charset="-122"/>
+                <a:cs typeface="Calibri" pitchFamily="34" charset="-120"/>
+              </a:rPr>
+              <a:t>final forecast with full written report, documented assumptions, and the dashboard handed over</a:t>
+            </a:r>
+            <a:endParaRPr lang="en-US" sz="1150" dirty="0"/>
+          </a:p>
+        </p:txBody>
+      </p:sp>
+      <p:sp>
+        <p:nvSpPr>
+          <p:cNvPr id="16" name="Text 14"/>
+          <p:cNvSpPr/>
+          <p:nvPr/>
+        </p:nvSpPr>
+        <p:spPr>
+          <a:xfrm>
+            <a:off x="685800" y="5760720"/>
+            <a:ext cx="10817352" cy="548640"/>
+          </a:xfrm>
+          <a:prstGeom prst="rect">
+            <a:avLst/>
+          </a:prstGeom>
+          <a:noFill/>
+          <a:ln/>
+        </p:spPr>
+        <p:txBody>
+          <a:bodyPr wrap="square" lIns="0" tIns="0" rIns="0" bIns="0" rtlCol="0" anchor="ctr"/>
+          <a:lstStyle/>
+          <a:p>
+            <a:pPr indent="0" marL="0">
+              <a:buNone/>
+            </a:pPr>
+            <a:r>
+              <a:rPr lang="en-US" sz="1250" i="1" dirty="0">
                 <a:solidFill>
                   <a:srgbClr val="6B7280"/>
                 </a:solidFill>
@@ -2561,46 +2601,7 @@
                 <a:ea typeface="Calibri" pitchFamily="34" charset="-122"/>
                 <a:cs typeface="Calibri" pitchFamily="34" charset="-120"/>
               </a:rPr>
-              <a:t>All-status quantity or billed only — a definition mismatch would read as forecast error</a:t>
-            </a:r>
-            <a:endParaRPr lang="en-US" sz="1200" dirty="0"/>
-          </a:p>
-        </p:txBody>
-      </p:sp>
-      <p:sp>
-        <p:nvSpPr>
-          <p:cNvPr id="13" name="Text 11"/>
-          <p:cNvSpPr/>
-          <p:nvPr/>
-        </p:nvSpPr>
-        <p:spPr>
-          <a:xfrm>
-            <a:off x="685800" y="5897880"/>
-            <a:ext cx="10817352" cy="457200"/>
-          </a:xfrm>
-          <a:prstGeom prst="rect">
-            <a:avLst/>
-          </a:prstGeom>
-          <a:noFill/>
-          <a:ln/>
-        </p:spPr>
-        <p:txBody>
-          <a:bodyPr wrap="square" lIns="0" tIns="0" rIns="0" bIns="0" rtlCol="0" anchor="ctr"/>
-          <a:lstStyle/>
-          <a:p>
-            <a:pPr indent="0" marL="0">
-              <a:buNone/>
-            </a:pPr>
-            <a:r>
-              <a:rPr lang="en-US" sz="1250" i="1" dirty="0">
-                <a:solidFill>
-                  <a:srgbClr val="6B7280"/>
-                </a:solidFill>
-                <a:latin typeface="Calibri" pitchFamily="34" charset="0"/>
-                <a:ea typeface="Calibri" pitchFamily="34" charset="-122"/>
-                <a:cs typeface="Calibri" pitchFamily="34" charset="-120"/>
-              </a:rPr>
-              <a:t>Each is a one-line configuration change once answered — the system re-runs in two minutes.</a:t>
+              <a:t>Between milestones: sales-input channel for the event-driven products, monthly re-forecast rhythm, and refinements from today’s discussion.</a:t>
             </a:r>
             <a:endParaRPr lang="en-US" sz="1250" dirty="0"/>
           </a:p>
@@ -2617,635 +2618,6 @@
 <file path=ppt/slides/slide11.xml><?xml version="1.0" encoding="utf-8"?>
 <p:sld xmlns:a="http://schemas.openxmlformats.org/drawingml/2006/main" xmlns:r="http://schemas.openxmlformats.org/officeDocument/2006/relationships" xmlns:p="http://schemas.openxmlformats.org/presentationml/2006/main">
   <p:cSld name="Slide 11">
-    <p:bg>
-      <p:bgPr>
-        <a:solidFill>
-          <a:srgbClr val="FFFFFF"/>
-        </a:solidFill>
-      </p:bgPr>
-    </p:bg>
-    <p:spTree>
-      <p:nvGrpSpPr>
-        <p:cNvPr id="1" name=""/>
-        <p:cNvGrpSpPr/>
-        <p:nvPr/>
-      </p:nvGrpSpPr>
-      <p:grpSpPr>
-        <a:xfrm>
-          <a:off x="0" y="0"/>
-          <a:ext cx="0" cy="0"/>
-          <a:chOff x="0" y="0"/>
-          <a:chExt cx="0" cy="0"/>
-        </a:xfrm>
-      </p:grpSpPr>
-      <p:sp>
-        <p:nvSpPr>
-          <p:cNvPr id="2" name="Text 0"/>
-          <p:cNvSpPr/>
-          <p:nvPr/>
-        </p:nvSpPr>
-        <p:spPr>
-          <a:xfrm>
-            <a:off x="685800" y="566928"/>
-            <a:ext cx="10817352" cy="274320"/>
-          </a:xfrm>
-          <a:prstGeom prst="rect">
-            <a:avLst/>
-          </a:prstGeom>
-          <a:noFill/>
-          <a:ln/>
-        </p:spPr>
-        <p:txBody>
-          <a:bodyPr wrap="square" lIns="0" tIns="0" rIns="0" bIns="0" rtlCol="0" anchor="ctr"/>
-          <a:lstStyle/>
-          <a:p>
-            <a:pPr algn="l" indent="0" marL="0">
-              <a:buNone/>
-            </a:pPr>
-            <a:r>
-              <a:rPr lang="en-US" sz="1050" b="1" spc="300" kern="0" dirty="0">
-                <a:solidFill>
-                  <a:srgbClr val="6B7280"/>
-                </a:solidFill>
-                <a:latin typeface="Calibri" pitchFamily="34" charset="0"/>
-                <a:ea typeface="Calibri" pitchFamily="34" charset="-122"/>
-                <a:cs typeface="Calibri" pitchFamily="34" charset="-120"/>
-              </a:rPr>
-              <a:t>10 — NEXT</a:t>
-            </a:r>
-            <a:endParaRPr lang="en-US" sz="1050" dirty="0"/>
-          </a:p>
-        </p:txBody>
-      </p:sp>
-      <p:sp>
-        <p:nvSpPr>
-          <p:cNvPr id="3" name="Text 1"/>
-          <p:cNvSpPr/>
-          <p:nvPr/>
-        </p:nvSpPr>
-        <p:spPr>
-          <a:xfrm>
-            <a:off x="685800" y="914400"/>
-            <a:ext cx="10817352" cy="1051560"/>
-          </a:xfrm>
-          <a:prstGeom prst="rect">
-            <a:avLst/>
-          </a:prstGeom>
-          <a:noFill/>
-          <a:ln/>
-        </p:spPr>
-        <p:txBody>
-          <a:bodyPr wrap="square" lIns="0" tIns="0" rIns="0" bIns="0" rtlCol="0" anchor="ctr"/>
-          <a:lstStyle/>
-          <a:p>
-            <a:pPr algn="l" indent="0" marL="0">
-              <a:buNone/>
-            </a:pPr>
-            <a:r>
-              <a:rPr lang="en-US" sz="3800" b="1" dirty="0">
-                <a:solidFill>
-                  <a:srgbClr val="1C2530"/>
-                </a:solidFill>
-                <a:latin typeface="Cambria" pitchFamily="34" charset="0"/>
-                <a:ea typeface="Cambria" pitchFamily="34" charset="-122"/>
-                <a:cs typeface="Cambria" pitchFamily="34" charset="-120"/>
-              </a:rPr>
-              <a:t>Built to improve as it is fed.</a:t>
-            </a:r>
-            <a:endParaRPr lang="en-US" sz="3800" dirty="0"/>
-          </a:p>
-        </p:txBody>
-      </p:sp>
-      <p:sp>
-        <p:nvSpPr>
-          <p:cNvPr id="4" name="Text 2"/>
-          <p:cNvSpPr/>
-          <p:nvPr/>
-        </p:nvSpPr>
-        <p:spPr>
-          <a:xfrm>
-            <a:off x="685800" y="2286000"/>
-            <a:ext cx="2384298" cy="685800"/>
-          </a:xfrm>
-          <a:prstGeom prst="rect">
-            <a:avLst/>
-          </a:prstGeom>
-          <a:noFill/>
-          <a:ln/>
-        </p:spPr>
-        <p:txBody>
-          <a:bodyPr wrap="square" lIns="0" tIns="0" rIns="0" bIns="0" rtlCol="0" anchor="ctr"/>
-          <a:lstStyle/>
-          <a:p>
-            <a:pPr indent="0" marL="0">
-              <a:buNone/>
-            </a:pPr>
-            <a:r>
-              <a:rPr lang="en-US" sz="3000" i="1" dirty="0">
-                <a:solidFill>
-                  <a:srgbClr val="C8102E"/>
-                </a:solidFill>
-                <a:latin typeface="Cambria" pitchFamily="34" charset="0"/>
-                <a:ea typeface="Cambria" pitchFamily="34" charset="-122"/>
-                <a:cs typeface="Cambria" pitchFamily="34" charset="-120"/>
-              </a:rPr>
-              <a:t>01</a:t>
-            </a:r>
-            <a:endParaRPr lang="en-US" sz="3000" dirty="0"/>
-          </a:p>
-        </p:txBody>
-      </p:sp>
-      <p:sp>
-        <p:nvSpPr>
-          <p:cNvPr id="5" name="Text 3"/>
-          <p:cNvSpPr/>
-          <p:nvPr/>
-        </p:nvSpPr>
-        <p:spPr>
-          <a:xfrm>
-            <a:off x="685800" y="3017520"/>
-            <a:ext cx="2384298" cy="411480"/>
-          </a:xfrm>
-          <a:prstGeom prst="rect">
-            <a:avLst/>
-          </a:prstGeom>
-          <a:noFill/>
-          <a:ln/>
-        </p:spPr>
-        <p:txBody>
-          <a:bodyPr wrap="square" lIns="0" tIns="0" rIns="0" bIns="0" rtlCol="0" anchor="ctr"/>
-          <a:lstStyle/>
-          <a:p>
-            <a:pPr indent="0" marL="0">
-              <a:buNone/>
-            </a:pPr>
-            <a:r>
-              <a:rPr lang="en-US" sz="1600" b="1" dirty="0">
-                <a:solidFill>
-                  <a:srgbClr val="1C2530"/>
-                </a:solidFill>
-                <a:latin typeface="Calibri" pitchFamily="34" charset="0"/>
-                <a:ea typeface="Calibri" pitchFamily="34" charset="-122"/>
-                <a:cs typeface="Calibri" pitchFamily="34" charset="-120"/>
-              </a:rPr>
-              <a:t>FY2025 actuals</a:t>
-            </a:r>
-            <a:endParaRPr lang="en-US" sz="1600" dirty="0"/>
-          </a:p>
-        </p:txBody>
-      </p:sp>
-      <p:sp>
-        <p:nvSpPr>
-          <p:cNvPr id="6" name="Text 4"/>
-          <p:cNvSpPr/>
-          <p:nvPr/>
-        </p:nvSpPr>
-        <p:spPr>
-          <a:xfrm>
-            <a:off x="685800" y="3474720"/>
-            <a:ext cx="2384298" cy="1463040"/>
-          </a:xfrm>
-          <a:prstGeom prst="rect">
-            <a:avLst/>
-          </a:prstGeom>
-          <a:noFill/>
-          <a:ln/>
-        </p:spPr>
-        <p:txBody>
-          <a:bodyPr wrap="square" lIns="0" tIns="0" rIns="0" bIns="0" rtlCol="0" anchor="ctr"/>
-          <a:lstStyle/>
-          <a:p>
-            <a:pPr indent="0" marL="0">
-              <a:lnSpc>
-                <a:spcPct val="115000"/>
-              </a:lnSpc>
-              <a:buNone/>
-            </a:pPr>
-            <a:r>
-              <a:rPr lang="en-US" sz="1200" dirty="0">
-                <a:solidFill>
-                  <a:srgbClr val="6B7280"/>
-                </a:solidFill>
-                <a:latin typeface="Calibri" pitchFamily="34" charset="0"/>
-                <a:ea typeface="Calibri" pitchFamily="34" charset="-122"/>
-                <a:cs typeface="Calibri" pitchFamily="34" charset="-120"/>
-              </a:rPr>
-              <a:t>25% more history; seasonal models unlock automatically; first true validation</a:t>
-            </a:r>
-            <a:endParaRPr lang="en-US" sz="1200" dirty="0"/>
-          </a:p>
-        </p:txBody>
-      </p:sp>
-      <p:sp>
-        <p:nvSpPr>
-          <p:cNvPr id="7" name="Text 5"/>
-          <p:cNvSpPr/>
-          <p:nvPr/>
-        </p:nvSpPr>
-        <p:spPr>
-          <a:xfrm>
-            <a:off x="3390138" y="2286000"/>
-            <a:ext cx="2384298" cy="685800"/>
-          </a:xfrm>
-          <a:prstGeom prst="rect">
-            <a:avLst/>
-          </a:prstGeom>
-          <a:noFill/>
-          <a:ln/>
-        </p:spPr>
-        <p:txBody>
-          <a:bodyPr wrap="square" lIns="0" tIns="0" rIns="0" bIns="0" rtlCol="0" anchor="ctr"/>
-          <a:lstStyle/>
-          <a:p>
-            <a:pPr indent="0" marL="0">
-              <a:buNone/>
-            </a:pPr>
-            <a:r>
-              <a:rPr lang="en-US" sz="3000" i="1" dirty="0">
-                <a:solidFill>
-                  <a:srgbClr val="C8102E"/>
-                </a:solidFill>
-                <a:latin typeface="Cambria" pitchFamily="34" charset="0"/>
-                <a:ea typeface="Cambria" pitchFamily="34" charset="-122"/>
-                <a:cs typeface="Cambria" pitchFamily="34" charset="-120"/>
-              </a:rPr>
-              <a:t>02</a:t>
-            </a:r>
-            <a:endParaRPr lang="en-US" sz="3000" dirty="0"/>
-          </a:p>
-        </p:txBody>
-      </p:sp>
-      <p:sp>
-        <p:nvSpPr>
-          <p:cNvPr id="8" name="Text 6"/>
-          <p:cNvSpPr/>
-          <p:nvPr/>
-        </p:nvSpPr>
-        <p:spPr>
-          <a:xfrm>
-            <a:off x="3390138" y="3017520"/>
-            <a:ext cx="2384298" cy="411480"/>
-          </a:xfrm>
-          <a:prstGeom prst="rect">
-            <a:avLst/>
-          </a:prstGeom>
-          <a:noFill/>
-          <a:ln/>
-        </p:spPr>
-        <p:txBody>
-          <a:bodyPr wrap="square" lIns="0" tIns="0" rIns="0" bIns="0" rtlCol="0" anchor="ctr"/>
-          <a:lstStyle/>
-          <a:p>
-            <a:pPr indent="0" marL="0">
-              <a:buNone/>
-            </a:pPr>
-            <a:r>
-              <a:rPr lang="en-US" sz="1600" b="1" dirty="0">
-                <a:solidFill>
-                  <a:srgbClr val="1C2530"/>
-                </a:solidFill>
-                <a:latin typeface="Calibri" pitchFamily="34" charset="0"/>
-                <a:ea typeface="Calibri" pitchFamily="34" charset="-122"/>
-                <a:cs typeface="Calibri" pitchFamily="34" charset="-120"/>
-              </a:rPr>
-              <a:t>Sales-input channel</a:t>
-            </a:r>
-            <a:endParaRPr lang="en-US" sz="1600" dirty="0"/>
-          </a:p>
-        </p:txBody>
-      </p:sp>
-      <p:sp>
-        <p:nvSpPr>
-          <p:cNvPr id="9" name="Text 7"/>
-          <p:cNvSpPr/>
-          <p:nvPr/>
-        </p:nvSpPr>
-        <p:spPr>
-          <a:xfrm>
-            <a:off x="3390138" y="3474720"/>
-            <a:ext cx="2384298" cy="1463040"/>
-          </a:xfrm>
-          <a:prstGeom prst="rect">
-            <a:avLst/>
-          </a:prstGeom>
-          <a:noFill/>
-          <a:ln/>
-        </p:spPr>
-        <p:txBody>
-          <a:bodyPr wrap="square" lIns="0" tIns="0" rIns="0" bIns="0" rtlCol="0" anchor="ctr"/>
-          <a:lstStyle/>
-          <a:p>
-            <a:pPr indent="0" marL="0">
-              <a:lnSpc>
-                <a:spcPct val="115000"/>
-              </a:lnSpc>
-              <a:buNone/>
-            </a:pPr>
-            <a:r>
-              <a:rPr lang="en-US" sz="1200" dirty="0">
-                <a:solidFill>
-                  <a:srgbClr val="6B7280"/>
-                </a:solidFill>
-                <a:latin typeface="Calibri" pitchFamily="34" charset="0"/>
-                <a:ea typeface="Calibri" pitchFamily="34" charset="-122"/>
-                <a:cs typeface="Calibri" pitchFamily="34" charset="-120"/>
-              </a:rPr>
-              <a:t>30 minutes a month on the ~50 products that carry 40% of the error</a:t>
-            </a:r>
-            <a:endParaRPr lang="en-US" sz="1200" dirty="0"/>
-          </a:p>
-        </p:txBody>
-      </p:sp>
-      <p:sp>
-        <p:nvSpPr>
-          <p:cNvPr id="10" name="Text 8"/>
-          <p:cNvSpPr/>
-          <p:nvPr/>
-        </p:nvSpPr>
-        <p:spPr>
-          <a:xfrm>
-            <a:off x="6094476" y="2286000"/>
-            <a:ext cx="2384298" cy="685800"/>
-          </a:xfrm>
-          <a:prstGeom prst="rect">
-            <a:avLst/>
-          </a:prstGeom>
-          <a:noFill/>
-          <a:ln/>
-        </p:spPr>
-        <p:txBody>
-          <a:bodyPr wrap="square" lIns="0" tIns="0" rIns="0" bIns="0" rtlCol="0" anchor="ctr"/>
-          <a:lstStyle/>
-          <a:p>
-            <a:pPr indent="0" marL="0">
-              <a:buNone/>
-            </a:pPr>
-            <a:r>
-              <a:rPr lang="en-US" sz="3000" i="1" dirty="0">
-                <a:solidFill>
-                  <a:srgbClr val="C8102E"/>
-                </a:solidFill>
-                <a:latin typeface="Cambria" pitchFamily="34" charset="0"/>
-                <a:ea typeface="Cambria" pitchFamily="34" charset="-122"/>
-                <a:cs typeface="Cambria" pitchFamily="34" charset="-120"/>
-              </a:rPr>
-              <a:t>03</a:t>
-            </a:r>
-            <a:endParaRPr lang="en-US" sz="3000" dirty="0"/>
-          </a:p>
-        </p:txBody>
-      </p:sp>
-      <p:sp>
-        <p:nvSpPr>
-          <p:cNvPr id="11" name="Text 9"/>
-          <p:cNvSpPr/>
-          <p:nvPr/>
-        </p:nvSpPr>
-        <p:spPr>
-          <a:xfrm>
-            <a:off x="6094476" y="3017520"/>
-            <a:ext cx="2384298" cy="411480"/>
-          </a:xfrm>
-          <a:prstGeom prst="rect">
-            <a:avLst/>
-          </a:prstGeom>
-          <a:noFill/>
-          <a:ln/>
-        </p:spPr>
-        <p:txBody>
-          <a:bodyPr wrap="square" lIns="0" tIns="0" rIns="0" bIns="0" rtlCol="0" anchor="ctr"/>
-          <a:lstStyle/>
-          <a:p>
-            <a:pPr indent="0" marL="0">
-              <a:buNone/>
-            </a:pPr>
-            <a:r>
-              <a:rPr lang="en-US" sz="1600" b="1" dirty="0">
-                <a:solidFill>
-                  <a:srgbClr val="1C2530"/>
-                </a:solidFill>
-                <a:latin typeface="Calibri" pitchFamily="34" charset="0"/>
-                <a:ea typeface="Calibri" pitchFamily="34" charset="-122"/>
-                <a:cs typeface="Calibri" pitchFamily="34" charset="-120"/>
-              </a:rPr>
-              <a:t>Monthly re-forecasts</a:t>
-            </a:r>
-            <a:endParaRPr lang="en-US" sz="1600" dirty="0"/>
-          </a:p>
-        </p:txBody>
-      </p:sp>
-      <p:sp>
-        <p:nvSpPr>
-          <p:cNvPr id="12" name="Text 10"/>
-          <p:cNvSpPr/>
-          <p:nvPr/>
-        </p:nvSpPr>
-        <p:spPr>
-          <a:xfrm>
-            <a:off x="6094476" y="3474720"/>
-            <a:ext cx="2384298" cy="1463040"/>
-          </a:xfrm>
-          <a:prstGeom prst="rect">
-            <a:avLst/>
-          </a:prstGeom>
-          <a:noFill/>
-          <a:ln/>
-        </p:spPr>
-        <p:txBody>
-          <a:bodyPr wrap="square" lIns="0" tIns="0" rIns="0" bIns="0" rtlCol="0" anchor="ctr"/>
-          <a:lstStyle/>
-          <a:p>
-            <a:pPr indent="0" marL="0">
-              <a:lnSpc>
-                <a:spcPct val="115000"/>
-              </a:lnSpc>
-              <a:buNone/>
-            </a:pPr>
-            <a:r>
-              <a:rPr lang="en-US" sz="1200" dirty="0">
-                <a:solidFill>
-                  <a:srgbClr val="6B7280"/>
-                </a:solidFill>
-                <a:latin typeface="Calibri" pitchFamily="34" charset="0"/>
-                <a:ea typeface="Calibri" pitchFamily="34" charset="-122"/>
-                <a:cs typeface="Calibri" pitchFamily="34" charset="-120"/>
-              </a:rPr>
-              <a:t>upload the latest orders; the whole system re-runs in two minutes</a:t>
-            </a:r>
-            <a:endParaRPr lang="en-US" sz="1200" dirty="0"/>
-          </a:p>
-        </p:txBody>
-      </p:sp>
-      <p:sp>
-        <p:nvSpPr>
-          <p:cNvPr id="13" name="Text 11"/>
-          <p:cNvSpPr/>
-          <p:nvPr/>
-        </p:nvSpPr>
-        <p:spPr>
-          <a:xfrm>
-            <a:off x="8798814" y="2286000"/>
-            <a:ext cx="2384298" cy="685800"/>
-          </a:xfrm>
-          <a:prstGeom prst="rect">
-            <a:avLst/>
-          </a:prstGeom>
-          <a:noFill/>
-          <a:ln/>
-        </p:spPr>
-        <p:txBody>
-          <a:bodyPr wrap="square" lIns="0" tIns="0" rIns="0" bIns="0" rtlCol="0" anchor="ctr"/>
-          <a:lstStyle/>
-          <a:p>
-            <a:pPr indent="0" marL="0">
-              <a:buNone/>
-            </a:pPr>
-            <a:r>
-              <a:rPr lang="en-US" sz="3000" i="1" dirty="0">
-                <a:solidFill>
-                  <a:srgbClr val="C8102E"/>
-                </a:solidFill>
-                <a:latin typeface="Cambria" pitchFamily="34" charset="0"/>
-                <a:ea typeface="Cambria" pitchFamily="34" charset="-122"/>
-                <a:cs typeface="Cambria" pitchFamily="34" charset="-120"/>
-              </a:rPr>
-              <a:t>04</a:t>
-            </a:r>
-            <a:endParaRPr lang="en-US" sz="3000" dirty="0"/>
-          </a:p>
-        </p:txBody>
-      </p:sp>
-      <p:sp>
-        <p:nvSpPr>
-          <p:cNvPr id="14" name="Text 12"/>
-          <p:cNvSpPr/>
-          <p:nvPr/>
-        </p:nvSpPr>
-        <p:spPr>
-          <a:xfrm>
-            <a:off x="8798814" y="3017520"/>
-            <a:ext cx="2384298" cy="411480"/>
-          </a:xfrm>
-          <a:prstGeom prst="rect">
-            <a:avLst/>
-          </a:prstGeom>
-          <a:noFill/>
-          <a:ln/>
-        </p:spPr>
-        <p:txBody>
-          <a:bodyPr wrap="square" lIns="0" tIns="0" rIns="0" bIns="0" rtlCol="0" anchor="ctr"/>
-          <a:lstStyle/>
-          <a:p>
-            <a:pPr indent="0" marL="0">
-              <a:buNone/>
-            </a:pPr>
-            <a:r>
-              <a:rPr lang="en-US" sz="1600" b="1" dirty="0">
-                <a:solidFill>
-                  <a:srgbClr val="1C2530"/>
-                </a:solidFill>
-                <a:latin typeface="Calibri" pitchFamily="34" charset="0"/>
-                <a:ea typeface="Calibri" pitchFamily="34" charset="-122"/>
-                <a:cs typeface="Calibri" pitchFamily="34" charset="-120"/>
-              </a:rPr>
-              <a:t>Final report</a:t>
-            </a:r>
-            <a:endParaRPr lang="en-US" sz="1600" dirty="0"/>
-          </a:p>
-        </p:txBody>
-      </p:sp>
-      <p:sp>
-        <p:nvSpPr>
-          <p:cNvPr id="15" name="Text 13"/>
-          <p:cNvSpPr/>
-          <p:nvPr/>
-        </p:nvSpPr>
-        <p:spPr>
-          <a:xfrm>
-            <a:off x="8798814" y="3474720"/>
-            <a:ext cx="2384298" cy="1463040"/>
-          </a:xfrm>
-          <a:prstGeom prst="rect">
-            <a:avLst/>
-          </a:prstGeom>
-          <a:noFill/>
-          <a:ln/>
-        </p:spPr>
-        <p:txBody>
-          <a:bodyPr wrap="square" lIns="0" tIns="0" rIns="0" bIns="0" rtlCol="0" anchor="ctr"/>
-          <a:lstStyle/>
-          <a:p>
-            <a:pPr indent="0" marL="0">
-              <a:lnSpc>
-                <a:spcPct val="115000"/>
-              </a:lnSpc>
-              <a:buNone/>
-            </a:pPr>
-            <a:r>
-              <a:rPr lang="en-US" sz="1200" dirty="0">
-                <a:solidFill>
-                  <a:srgbClr val="6B7280"/>
-                </a:solidFill>
-                <a:latin typeface="Calibri" pitchFamily="34" charset="0"/>
-                <a:ea typeface="Calibri" pitchFamily="34" charset="-122"/>
-                <a:cs typeface="Calibri" pitchFamily="34" charset="-120"/>
-              </a:rPr>
-              <a:t>every method, decision and verdict, written for hand-over</a:t>
-            </a:r>
-            <a:endParaRPr lang="en-US" sz="1200" dirty="0"/>
-          </a:p>
-        </p:txBody>
-      </p:sp>
-      <p:sp>
-        <p:nvSpPr>
-          <p:cNvPr id="16" name="Text 14"/>
-          <p:cNvSpPr/>
-          <p:nvPr/>
-        </p:nvSpPr>
-        <p:spPr>
-          <a:xfrm>
-            <a:off x="685800" y="5623560"/>
-            <a:ext cx="10817352" cy="548640"/>
-          </a:xfrm>
-          <a:prstGeom prst="rect">
-            <a:avLst/>
-          </a:prstGeom>
-          <a:noFill/>
-          <a:ln/>
-        </p:spPr>
-        <p:txBody>
-          <a:bodyPr wrap="square" lIns="0" tIns="0" rIns="0" bIns="0" rtlCol="0" anchor="ctr"/>
-          <a:lstStyle/>
-          <a:p>
-            <a:pPr indent="0" marL="0">
-              <a:buNone/>
-            </a:pPr>
-            <a:r>
-              <a:rPr lang="en-US" sz="1250" i="1" dirty="0">
-                <a:solidFill>
-                  <a:srgbClr val="6B7280"/>
-                </a:solidFill>
-                <a:latin typeface="Calibri" pitchFamily="34" charset="0"/>
-                <a:ea typeface="Calibri" pitchFamily="34" charset="-122"/>
-                <a:cs typeface="Calibri" pitchFamily="34" charset="-120"/>
-              </a:rPr>
-              <a:t>The remaining error needs event information — the sales pipeline — not more elaborate models. That is a measured conclusion, not a hope.</a:t>
-            </a:r>
-            <a:endParaRPr lang="en-US" sz="1250" dirty="0"/>
-          </a:p>
-        </p:txBody>
-      </p:sp>
-    </p:spTree>
-  </p:cSld>
-  <p:clrMapOvr>
-    <a:masterClrMapping/>
-  </p:clrMapOvr>
-</p:sld>
-</file>
-
-<file path=ppt/slides/slide12.xml><?xml version="1.0" encoding="utf-8"?>
-<p:sld xmlns:a="http://schemas.openxmlformats.org/drawingml/2006/main" xmlns:r="http://schemas.openxmlformats.org/officeDocument/2006/relationships" xmlns:p="http://schemas.openxmlformats.org/presentationml/2006/main">
-  <p:cSld name="Slide 12">
     <p:bg>
       <p:bgPr>
         <a:solidFill>
@@ -3300,7 +2672,7 @@
         </p:nvSpPr>
         <p:spPr>
           <a:xfrm>
-            <a:off x="685800" y="1920240"/>
+            <a:off x="685800" y="2103120"/>
             <a:ext cx="10817352" cy="320040"/>
           </a:xfrm>
           <a:prstGeom prst="rect">
@@ -3339,8 +2711,8 @@
         </p:nvSpPr>
         <p:spPr>
           <a:xfrm>
-            <a:off x="685800" y="2377440"/>
-            <a:ext cx="9601200" cy="2377440"/>
+            <a:off x="685800" y="2560320"/>
+            <a:ext cx="9601200" cy="1737360"/>
           </a:xfrm>
           <a:prstGeom prst="rect">
             <a:avLst/>
@@ -3354,12 +2726,12 @@
           <a:p>
             <a:pPr indent="0" marL="0">
               <a:lnSpc>
-                <a:spcPct val="115000"/>
+                <a:spcPct val="112000"/>
               </a:lnSpc>
               <a:buNone/>
             </a:pPr>
             <a:r>
-              <a:rPr lang="en-US" sz="3800" b="1" dirty="0">
+              <a:rPr lang="en-US" sz="4000" b="1" dirty="0">
                 <a:solidFill>
                   <a:srgbClr val="FFFFFF"/>
                 </a:solidFill>
@@ -3367,19 +2739,19 @@
                 <a:ea typeface="Cambria" pitchFamily="34" charset="-122"/>
                 <a:cs typeface="Cambria" pitchFamily="34" charset="-120"/>
               </a:rPr>
-              <a:t>176,044 units.</a:t>
-            </a:r>
-            <a:endParaRPr lang="en-US" sz="3800" dirty="0"/>
+              <a:t>The system is built.</a:t>
+            </a:r>
+            <a:endParaRPr lang="en-US" sz="4000" dirty="0"/>
           </a:p>
           <a:p>
             <a:pPr indent="0" marL="0">
               <a:lnSpc>
-                <a:spcPct val="115000"/>
+                <a:spcPct val="112000"/>
               </a:lnSpc>
               <a:buNone/>
             </a:pPr>
             <a:r>
-              <a:rPr lang="en-US" sz="3800" b="1" dirty="0">
+              <a:rPr lang="en-US" sz="4000" b="1" dirty="0">
                 <a:solidFill>
                   <a:srgbClr val="FFFFFF"/>
                 </a:solidFill>
@@ -3387,57 +2759,40 @@
                 <a:ea typeface="Cambria" pitchFamily="34" charset="-122"/>
                 <a:cs typeface="Cambria" pitchFamily="34" charset="-120"/>
               </a:rPr>
-              <a:t>฿1.91 billion.</a:t>
-            </a:r>
-            <a:endParaRPr lang="en-US" sz="3800" dirty="0"/>
-          </a:p>
+              <a:t>The evidence comes next.</a:t>
+            </a:r>
+            <a:endParaRPr lang="en-US" sz="4000" dirty="0"/>
+          </a:p>
+        </p:txBody>
+      </p:sp>
+      <p:sp>
+        <p:nvSpPr>
+          <p:cNvPr id="5" name="Text 3"/>
+          <p:cNvSpPr/>
+          <p:nvPr/>
+        </p:nvSpPr>
+        <p:spPr>
+          <a:xfrm>
+            <a:off x="685800" y="4709160"/>
+            <a:ext cx="8686800" cy="731520"/>
+          </a:xfrm>
+          <a:prstGeom prst="rect">
+            <a:avLst/>
+          </a:prstGeom>
+          <a:noFill/>
+          <a:ln/>
+        </p:spPr>
+        <p:txBody>
+          <a:bodyPr wrap="square" lIns="0" tIns="0" rIns="0" bIns="0" rtlCol="0" anchor="ctr"/>
+          <a:lstStyle/>
           <a:p>
             <a:pPr indent="0" marL="0">
               <a:lnSpc>
-                <a:spcPct val="115000"/>
+                <a:spcPct val="125000"/>
               </a:lnSpc>
               <a:buNone/>
             </a:pPr>
             <a:r>
-              <a:rPr lang="en-US" sz="3800" b="1" dirty="0">
-                <a:solidFill>
-                  <a:srgbClr val="FFFFFF"/>
-                </a:solidFill>
-                <a:latin typeface="Cambria" pitchFamily="34" charset="0"/>
-                <a:ea typeface="Cambria" pitchFamily="34" charset="-122"/>
-                <a:cs typeface="Cambria" pitchFamily="34" charset="-120"/>
-              </a:rPr>
-              <a:t>And the evidence to defend both.</a:t>
-            </a:r>
-            <a:endParaRPr lang="en-US" sz="3800" dirty="0"/>
-          </a:p>
-        </p:txBody>
-      </p:sp>
-      <p:sp>
-        <p:nvSpPr>
-          <p:cNvPr id="5" name="Text 3"/>
-          <p:cNvSpPr/>
-          <p:nvPr/>
-        </p:nvSpPr>
-        <p:spPr>
-          <a:xfrm>
-            <a:off x="685800" y="5257800"/>
-            <a:ext cx="8229600" cy="365760"/>
-          </a:xfrm>
-          <a:prstGeom prst="rect">
-            <a:avLst/>
-          </a:prstGeom>
-          <a:noFill/>
-          <a:ln/>
-        </p:spPr>
-        <p:txBody>
-          <a:bodyPr wrap="square" lIns="0" tIns="0" rIns="0" bIns="0" rtlCol="0" anchor="ctr"/>
-          <a:lstStyle/>
-          <a:p>
-            <a:pPr indent="0" marL="0">
-              <a:buNone/>
-            </a:pPr>
-            <a:r>
               <a:rPr lang="en-US" sz="1400" dirty="0">
                 <a:solidFill>
                   <a:srgbClr val="A9B4C2"/>
@@ -3446,7 +2801,27 @@
                 <a:ea typeface="Calibri" pitchFamily="34" charset="-122"/>
                 <a:cs typeface="Calibri" pitchFamily="34" charset="-120"/>
               </a:rPr>
-              <a:t>Live dashboard available — questions welcome.</a:t>
+              <a:t>Results and accuracy evidence — semi-final, 7 September.</a:t>
+            </a:r>
+            <a:endParaRPr lang="en-US" sz="1400" dirty="0"/>
+          </a:p>
+          <a:p>
+            <a:pPr indent="0" marL="0">
+              <a:lnSpc>
+                <a:spcPct val="125000"/>
+              </a:lnSpc>
+              <a:buNone/>
+            </a:pPr>
+            <a:r>
+              <a:rPr lang="en-US" sz="1400" dirty="0">
+                <a:solidFill>
+                  <a:srgbClr val="A9B4C2"/>
+                </a:solidFill>
+                <a:latin typeface="Calibri" pitchFamily="34" charset="0"/>
+                <a:ea typeface="Calibri" pitchFamily="34" charset="-122"/>
+                <a:cs typeface="Calibri" pitchFamily="34" charset="-120"/>
+              </a:rPr>
+              <a:t>Live dashboard available now; questions welcome.</a:t>
             </a:r>
             <a:endParaRPr lang="en-US" sz="1400" dirty="0"/>
           </a:p>
@@ -3903,7 +3278,7 @@
                 <a:ea typeface="Calibri" pitchFamily="34" charset="-122"/>
                 <a:cs typeface="Calibri" pitchFamily="34" charset="-120"/>
               </a:rPr>
-              <a:t>02 — THE SYSTEM</a:t>
+              <a:t>02 — WHERE WE STAND</a:t>
             </a:r>
             <a:endParaRPr lang="en-US" sz="1050" dirty="0"/>
           </a:p>
@@ -3942,7 +3317,7 @@
                 <a:ea typeface="Cambria" pitchFamily="34" charset="-122"/>
                 <a:cs typeface="Cambria" pitchFamily="34" charset="-120"/>
               </a:rPr>
-              <a:t>One pipeline, four steps.</a:t>
+              <a:t>The build phase is complete.</a:t>
             </a:r>
             <a:endParaRPr lang="en-US" sz="3800" dirty="0"/>
           </a:p>
@@ -3956,24 +3331,24 @@
         </p:nvSpPr>
         <p:spPr>
           <a:xfrm>
-            <a:off x="685800" y="2286000"/>
-            <a:ext cx="2384298" cy="685800"/>
-          </a:xfrm>
-          <a:prstGeom prst="rect">
-            <a:avLst/>
-          </a:prstGeom>
-          <a:noFill/>
-          <a:ln/>
-        </p:spPr>
-        <p:txBody>
-          <a:bodyPr wrap="square" lIns="0" tIns="0" rIns="0" bIns="0" rtlCol="0" anchor="ctr"/>
-          <a:lstStyle/>
-          <a:p>
-            <a:pPr indent="0" marL="0">
-              <a:buNone/>
-            </a:pPr>
-            <a:r>
-              <a:rPr lang="en-US" sz="3000" i="1" dirty="0">
+            <a:off x="685800" y="2313432"/>
+            <a:ext cx="777240" cy="548640"/>
+          </a:xfrm>
+          <a:prstGeom prst="rect">
+            <a:avLst/>
+          </a:prstGeom>
+          <a:noFill/>
+          <a:ln/>
+        </p:spPr>
+        <p:txBody>
+          <a:bodyPr wrap="square" lIns="0" tIns="0" rIns="0" bIns="0" rtlCol="0" anchor="ctr"/>
+          <a:lstStyle/>
+          <a:p>
+            <a:pPr indent="0" marL="0">
+              <a:buNone/>
+            </a:pPr>
+            <a:r>
+              <a:rPr lang="en-US" sz="2200" i="1" dirty="0">
                 <a:solidFill>
                   <a:srgbClr val="C8102E"/>
                 </a:solidFill>
@@ -3983,7 +3358,7 @@
               </a:rPr>
               <a:t>01</a:t>
             </a:r>
-            <a:endParaRPr lang="en-US" sz="3000" dirty="0"/>
+            <a:endParaRPr lang="en-US" sz="2200" dirty="0"/>
           </a:p>
         </p:txBody>
       </p:sp>
@@ -3995,24 +3370,24 @@
         </p:nvSpPr>
         <p:spPr>
           <a:xfrm>
-            <a:off x="685800" y="3017520"/>
-            <a:ext cx="2384298" cy="411480"/>
-          </a:xfrm>
-          <a:prstGeom prst="rect">
-            <a:avLst/>
-          </a:prstGeom>
-          <a:noFill/>
-          <a:ln/>
-        </p:spPr>
-        <p:txBody>
-          <a:bodyPr wrap="square" lIns="0" tIns="0" rIns="0" bIns="0" rtlCol="0" anchor="ctr"/>
-          <a:lstStyle/>
-          <a:p>
-            <a:pPr indent="0" marL="0">
-              <a:buNone/>
-            </a:pPr>
-            <a:r>
-              <a:rPr lang="en-US" sz="1700" b="1" dirty="0">
+            <a:off x="1645920" y="2286000"/>
+            <a:ext cx="4480560" cy="548640"/>
+          </a:xfrm>
+          <a:prstGeom prst="rect">
+            <a:avLst/>
+          </a:prstGeom>
+          <a:noFill/>
+          <a:ln/>
+        </p:spPr>
+        <p:txBody>
+          <a:bodyPr wrap="square" lIns="0" tIns="0" rIns="0" bIns="0" rtlCol="0" anchor="ctr"/>
+          <a:lstStyle/>
+          <a:p>
+            <a:pPr indent="0" marL="0">
+              <a:buNone/>
+            </a:pPr>
+            <a:r>
+              <a:rPr lang="en-US" sz="1550" b="1" dirty="0">
                 <a:solidFill>
                   <a:srgbClr val="1C2530"/>
                 </a:solidFill>
@@ -4020,9 +3395,9 @@
                 <a:ea typeface="Calibri" pitchFamily="34" charset="-122"/>
                 <a:cs typeface="Calibri" pitchFamily="34" charset="-120"/>
               </a:rPr>
-              <a:t>Clean</a:t>
-            </a:r>
-            <a:endParaRPr lang="en-US" sz="1700" dirty="0"/>
+              <a:t>Data cleaned and reconciled</a:t>
+            </a:r>
+            <a:endParaRPr lang="en-US" sz="1550" dirty="0"/>
           </a:p>
         </p:txBody>
       </p:sp>
@@ -4034,8 +3409,8 @@
         </p:nvSpPr>
         <p:spPr>
           <a:xfrm>
-            <a:off x="685800" y="3474720"/>
-            <a:ext cx="2384298" cy="1371600"/>
+            <a:off x="6355080" y="2322576"/>
+            <a:ext cx="5148072" cy="594360"/>
           </a:xfrm>
           <a:prstGeom prst="rect">
             <a:avLst/>
@@ -4049,12 +3424,12 @@
           <a:p>
             <a:pPr indent="0" marL="0">
               <a:lnSpc>
-                <a:spcPct val="115000"/>
+                <a:spcPct val="110000"/>
               </a:lnSpc>
               <a:buNone/>
             </a:pPr>
             <a:r>
-              <a:rPr lang="en-US" sz="1200" dirty="0">
+              <a:rPr lang="en-US" sz="1150" dirty="0">
                 <a:solidFill>
                   <a:srgbClr val="6B7280"/>
                 </a:solidFill>
@@ -4062,38 +3437,61 @@
                 <a:ea typeface="Calibri" pitchFamily="34" charset="-122"/>
                 <a:cs typeface="Calibri" pitchFamily="34" charset="-120"/>
               </a:rPr>
-              <a:t>272,000 lines reconciled against both master lists; every decision logged</a:t>
-            </a:r>
-            <a:endParaRPr lang="en-US" sz="1200" dirty="0"/>
-          </a:p>
-        </p:txBody>
-      </p:sp>
-      <p:sp>
-        <p:nvSpPr>
-          <p:cNvPr id="7" name="Text 5"/>
-          <p:cNvSpPr/>
-          <p:nvPr/>
-        </p:nvSpPr>
-        <p:spPr>
-          <a:xfrm>
-            <a:off x="3390138" y="2286000"/>
-            <a:ext cx="2384298" cy="685800"/>
-          </a:xfrm>
-          <a:prstGeom prst="rect">
-            <a:avLst/>
-          </a:prstGeom>
-          <a:noFill/>
-          <a:ln/>
-        </p:spPr>
-        <p:txBody>
-          <a:bodyPr wrap="square" lIns="0" tIns="0" rIns="0" bIns="0" rtlCol="0" anchor="ctr"/>
-          <a:lstStyle/>
-          <a:p>
-            <a:pPr indent="0" marL="0">
-              <a:buNone/>
-            </a:pPr>
-            <a:r>
-              <a:rPr lang="en-US" sz="3000" i="1" dirty="0">
+              <a:t>every order line checked against both master lists; every decision documented</a:t>
+            </a:r>
+            <a:endParaRPr lang="en-US" sz="1150" dirty="0"/>
+          </a:p>
+        </p:txBody>
+      </p:sp>
+      <p:sp>
+        <p:nvSpPr>
+          <p:cNvPr id="7" name="Shape 5"/>
+          <p:cNvSpPr/>
+          <p:nvPr/>
+        </p:nvSpPr>
+        <p:spPr>
+          <a:xfrm>
+            <a:off x="685800" y="3035808"/>
+            <a:ext cx="10817352" cy="0"/>
+          </a:xfrm>
+          <a:prstGeom prst="line">
+            <a:avLst/>
+          </a:prstGeom>
+          <a:noFill/>
+          <a:ln w="9525">
+            <a:solidFill>
+              <a:srgbClr val="E2E6EA"/>
+            </a:solidFill>
+            <a:prstDash val="solid"/>
+          </a:ln>
+        </p:spPr>
+      </p:sp>
+      <p:sp>
+        <p:nvSpPr>
+          <p:cNvPr id="8" name="Text 6"/>
+          <p:cNvSpPr/>
+          <p:nvPr/>
+        </p:nvSpPr>
+        <p:spPr>
+          <a:xfrm>
+            <a:off x="685800" y="3209544"/>
+            <a:ext cx="777240" cy="548640"/>
+          </a:xfrm>
+          <a:prstGeom prst="rect">
+            <a:avLst/>
+          </a:prstGeom>
+          <a:noFill/>
+          <a:ln/>
+        </p:spPr>
+        <p:txBody>
+          <a:bodyPr wrap="square" lIns="0" tIns="0" rIns="0" bIns="0" rtlCol="0" anchor="ctr"/>
+          <a:lstStyle/>
+          <a:p>
+            <a:pPr indent="0" marL="0">
+              <a:buNone/>
+            </a:pPr>
+            <a:r>
+              <a:rPr lang="en-US" sz="2200" i="1" dirty="0">
                 <a:solidFill>
                   <a:srgbClr val="C8102E"/>
                 </a:solidFill>
@@ -4103,36 +3501,36 @@
               </a:rPr>
               <a:t>02</a:t>
             </a:r>
-            <a:endParaRPr lang="en-US" sz="3000" dirty="0"/>
-          </a:p>
-        </p:txBody>
-      </p:sp>
-      <p:sp>
-        <p:nvSpPr>
-          <p:cNvPr id="8" name="Text 6"/>
-          <p:cNvSpPr/>
-          <p:nvPr/>
-        </p:nvSpPr>
-        <p:spPr>
-          <a:xfrm>
-            <a:off x="3390138" y="3017520"/>
-            <a:ext cx="2384298" cy="411480"/>
-          </a:xfrm>
-          <a:prstGeom prst="rect">
-            <a:avLst/>
-          </a:prstGeom>
-          <a:noFill/>
-          <a:ln/>
-        </p:spPr>
-        <p:txBody>
-          <a:bodyPr wrap="square" lIns="0" tIns="0" rIns="0" bIns="0" rtlCol="0" anchor="ctr"/>
-          <a:lstStyle/>
-          <a:p>
-            <a:pPr indent="0" marL="0">
-              <a:buNone/>
-            </a:pPr>
-            <a:r>
-              <a:rPr lang="en-US" sz="1700" b="1" dirty="0">
+            <a:endParaRPr lang="en-US" sz="2200" dirty="0"/>
+          </a:p>
+        </p:txBody>
+      </p:sp>
+      <p:sp>
+        <p:nvSpPr>
+          <p:cNvPr id="9" name="Text 7"/>
+          <p:cNvSpPr/>
+          <p:nvPr/>
+        </p:nvSpPr>
+        <p:spPr>
+          <a:xfrm>
+            <a:off x="1645920" y="3182112"/>
+            <a:ext cx="4480560" cy="548640"/>
+          </a:xfrm>
+          <a:prstGeom prst="rect">
+            <a:avLst/>
+          </a:prstGeom>
+          <a:noFill/>
+          <a:ln/>
+        </p:spPr>
+        <p:txBody>
+          <a:bodyPr wrap="square" lIns="0" tIns="0" rIns="0" bIns="0" rtlCol="0" anchor="ctr"/>
+          <a:lstStyle/>
+          <a:p>
+            <a:pPr indent="0" marL="0">
+              <a:buNone/>
+            </a:pPr>
+            <a:r>
+              <a:rPr lang="en-US" sz="1550" b="1" dirty="0">
                 <a:solidFill>
                   <a:srgbClr val="1C2530"/>
                 </a:solidFill>
@@ -4140,22 +3538,22 @@
                 <a:ea typeface="Calibri" pitchFamily="34" charset="-122"/>
                 <a:cs typeface="Calibri" pitchFamily="34" charset="-120"/>
               </a:rPr>
-              <a:t>Compete</a:t>
-            </a:r>
-            <a:endParaRPr lang="en-US" sz="1700" dirty="0"/>
-          </a:p>
-        </p:txBody>
-      </p:sp>
-      <p:sp>
-        <p:nvSpPr>
-          <p:cNvPr id="9" name="Text 7"/>
-          <p:cNvSpPr/>
-          <p:nvPr/>
-        </p:nvSpPr>
-        <p:spPr>
-          <a:xfrm>
-            <a:off x="3390138" y="3474720"/>
-            <a:ext cx="2384298" cy="1371600"/>
+              <a:t>Forecasting system built</a:t>
+            </a:r>
+            <a:endParaRPr lang="en-US" sz="1550" dirty="0"/>
+          </a:p>
+        </p:txBody>
+      </p:sp>
+      <p:sp>
+        <p:nvSpPr>
+          <p:cNvPr id="10" name="Text 8"/>
+          <p:cNvSpPr/>
+          <p:nvPr/>
+        </p:nvSpPr>
+        <p:spPr>
+          <a:xfrm>
+            <a:off x="6355080" y="3218688"/>
+            <a:ext cx="5148072" cy="594360"/>
           </a:xfrm>
           <a:prstGeom prst="rect">
             <a:avLst/>
@@ -4169,12 +3567,12 @@
           <a:p>
             <a:pPr indent="0" marL="0">
               <a:lnSpc>
-                <a:spcPct val="115000"/>
+                <a:spcPct val="110000"/>
               </a:lnSpc>
               <a:buNone/>
             </a:pPr>
             <a:r>
-              <a:rPr lang="en-US" sz="1200" dirty="0">
+              <a:rPr lang="en-US" sz="1150" dirty="0">
                 <a:solidFill>
                   <a:srgbClr val="6B7280"/>
                 </a:solidFill>
@@ -4182,38 +3580,61 @@
                 <a:ea typeface="Calibri" pitchFamily="34" charset="-122"/>
                 <a:cs typeface="Calibri" pitchFamily="34" charset="-120"/>
               </a:rPr>
-              <a:t>Up to 24 forecasting methods fight per product on two hidden years</a:t>
-            </a:r>
-            <a:endParaRPr lang="en-US" sz="1200" dirty="0"/>
-          </a:p>
-        </p:txBody>
-      </p:sp>
-      <p:sp>
-        <p:nvSpPr>
-          <p:cNvPr id="10" name="Text 8"/>
-          <p:cNvSpPr/>
-          <p:nvPr/>
-        </p:nvSpPr>
-        <p:spPr>
-          <a:xfrm>
-            <a:off x="6094476" y="2286000"/>
-            <a:ext cx="2384298" cy="685800"/>
-          </a:xfrm>
-          <a:prstGeom prst="rect">
-            <a:avLst/>
-          </a:prstGeom>
-          <a:noFill/>
-          <a:ln/>
-        </p:spPr>
-        <p:txBody>
-          <a:bodyPr wrap="square" lIns="0" tIns="0" rIns="0" bIns="0" rtlCol="0" anchor="ctr"/>
-          <a:lstStyle/>
-          <a:p>
-            <a:pPr indent="0" marL="0">
-              <a:buNone/>
-            </a:pPr>
-            <a:r>
-              <a:rPr lang="en-US" sz="3000" i="1" dirty="0">
+              <a:t>per-product method competition, validated by back-testing on withheld years</a:t>
+            </a:r>
+            <a:endParaRPr lang="en-US" sz="1150" dirty="0"/>
+          </a:p>
+        </p:txBody>
+      </p:sp>
+      <p:sp>
+        <p:nvSpPr>
+          <p:cNvPr id="11" name="Shape 9"/>
+          <p:cNvSpPr/>
+          <p:nvPr/>
+        </p:nvSpPr>
+        <p:spPr>
+          <a:xfrm>
+            <a:off x="685800" y="3931920"/>
+            <a:ext cx="10817352" cy="0"/>
+          </a:xfrm>
+          <a:prstGeom prst="line">
+            <a:avLst/>
+          </a:prstGeom>
+          <a:noFill/>
+          <a:ln w="9525">
+            <a:solidFill>
+              <a:srgbClr val="E2E6EA"/>
+            </a:solidFill>
+            <a:prstDash val="solid"/>
+          </a:ln>
+        </p:spPr>
+      </p:sp>
+      <p:sp>
+        <p:nvSpPr>
+          <p:cNvPr id="12" name="Text 10"/>
+          <p:cNvSpPr/>
+          <p:nvPr/>
+        </p:nvSpPr>
+        <p:spPr>
+          <a:xfrm>
+            <a:off x="685800" y="4105656"/>
+            <a:ext cx="777240" cy="548640"/>
+          </a:xfrm>
+          <a:prstGeom prst="rect">
+            <a:avLst/>
+          </a:prstGeom>
+          <a:noFill/>
+          <a:ln/>
+        </p:spPr>
+        <p:txBody>
+          <a:bodyPr wrap="square" lIns="0" tIns="0" rIns="0" bIns="0" rtlCol="0" anchor="ctr"/>
+          <a:lstStyle/>
+          <a:p>
+            <a:pPr indent="0" marL="0">
+              <a:buNone/>
+            </a:pPr>
+            <a:r>
+              <a:rPr lang="en-US" sz="2200" i="1" dirty="0">
                 <a:solidFill>
                   <a:srgbClr val="C8102E"/>
                 </a:solidFill>
@@ -4223,36 +3644,36 @@
               </a:rPr>
               <a:t>03</a:t>
             </a:r>
-            <a:endParaRPr lang="en-US" sz="3000" dirty="0"/>
-          </a:p>
-        </p:txBody>
-      </p:sp>
-      <p:sp>
-        <p:nvSpPr>
-          <p:cNvPr id="11" name="Text 9"/>
-          <p:cNvSpPr/>
-          <p:nvPr/>
-        </p:nvSpPr>
-        <p:spPr>
-          <a:xfrm>
-            <a:off x="6094476" y="3017520"/>
-            <a:ext cx="2384298" cy="411480"/>
-          </a:xfrm>
-          <a:prstGeom prst="rect">
-            <a:avLst/>
-          </a:prstGeom>
-          <a:noFill/>
-          <a:ln/>
-        </p:spPr>
-        <p:txBody>
-          <a:bodyPr wrap="square" lIns="0" tIns="0" rIns="0" bIns="0" rtlCol="0" anchor="ctr"/>
-          <a:lstStyle/>
-          <a:p>
-            <a:pPr indent="0" marL="0">
-              <a:buNone/>
-            </a:pPr>
-            <a:r>
-              <a:rPr lang="en-US" sz="1700" b="1" dirty="0">
+            <a:endParaRPr lang="en-US" sz="2200" dirty="0"/>
+          </a:p>
+        </p:txBody>
+      </p:sp>
+      <p:sp>
+        <p:nvSpPr>
+          <p:cNvPr id="13" name="Text 11"/>
+          <p:cNvSpPr/>
+          <p:nvPr/>
+        </p:nvSpPr>
+        <p:spPr>
+          <a:xfrm>
+            <a:off x="1645920" y="4078224"/>
+            <a:ext cx="4480560" cy="548640"/>
+          </a:xfrm>
+          <a:prstGeom prst="rect">
+            <a:avLst/>
+          </a:prstGeom>
+          <a:noFill/>
+          <a:ln/>
+        </p:spPr>
+        <p:txBody>
+          <a:bodyPr wrap="square" lIns="0" tIns="0" rIns="0" bIns="0" rtlCol="0" anchor="ctr"/>
+          <a:lstStyle/>
+          <a:p>
+            <a:pPr indent="0" marL="0">
+              <a:buNone/>
+            </a:pPr>
+            <a:r>
+              <a:rPr lang="en-US" sz="1550" b="1" dirty="0">
                 <a:solidFill>
                   <a:srgbClr val="1C2530"/>
                 </a:solidFill>
@@ -4260,22 +3681,22 @@
                 <a:ea typeface="Calibri" pitchFamily="34" charset="-122"/>
                 <a:cs typeface="Calibri" pitchFamily="34" charset="-120"/>
               </a:rPr>
-              <a:t>Forecast</a:t>
-            </a:r>
-            <a:endParaRPr lang="en-US" sz="1700" dirty="0"/>
-          </a:p>
-        </p:txBody>
-      </p:sp>
-      <p:sp>
-        <p:nvSpPr>
-          <p:cNvPr id="12" name="Text 10"/>
-          <p:cNvSpPr/>
-          <p:nvPr/>
-        </p:nvSpPr>
-        <p:spPr>
-          <a:xfrm>
-            <a:off x="6094476" y="3474720"/>
-            <a:ext cx="2384298" cy="1371600"/>
+              <a:t>Planning dashboard live</a:t>
+            </a:r>
+            <a:endParaRPr lang="en-US" sz="1550" dirty="0"/>
+          </a:p>
+        </p:txBody>
+      </p:sp>
+      <p:sp>
+        <p:nvSpPr>
+          <p:cNvPr id="14" name="Text 12"/>
+          <p:cNvSpPr/>
+          <p:nvPr/>
+        </p:nvSpPr>
+        <p:spPr>
+          <a:xfrm>
+            <a:off x="6355080" y="4114800"/>
+            <a:ext cx="5148072" cy="594360"/>
           </a:xfrm>
           <a:prstGeom prst="rect">
             <a:avLst/>
@@ -4289,12 +3710,12 @@
           <a:p>
             <a:pPr indent="0" marL="0">
               <a:lnSpc>
-                <a:spcPct val="115000"/>
+                <a:spcPct val="110000"/>
               </a:lnSpc>
               <a:buNone/>
             </a:pPr>
             <a:r>
-              <a:rPr lang="en-US" sz="1200" dirty="0">
+              <a:rPr lang="en-US" sz="1150" dirty="0">
                 <a:solidFill>
                   <a:srgbClr val="6B7280"/>
                 </a:solidFill>
@@ -4302,38 +3723,61 @@
                 <a:ea typeface="Calibri" pitchFamily="34" charset="-122"/>
                 <a:cs typeface="Calibri" pitchFamily="34" charset="-120"/>
               </a:rPr>
-              <a:t>FY2025 by product and month, with a measured confidence range</a:t>
-            </a:r>
-            <a:endParaRPr lang="en-US" sz="1200" dirty="0"/>
-          </a:p>
-        </p:txBody>
-      </p:sp>
-      <p:sp>
-        <p:nvSpPr>
-          <p:cNvPr id="13" name="Text 11"/>
-          <p:cNvSpPr/>
-          <p:nvPr/>
-        </p:nvSpPr>
-        <p:spPr>
-          <a:xfrm>
-            <a:off x="8798814" y="2286000"/>
-            <a:ext cx="2384298" cy="685800"/>
-          </a:xfrm>
-          <a:prstGeom prst="rect">
-            <a:avLst/>
-          </a:prstGeom>
-          <a:noFill/>
-          <a:ln/>
-        </p:spPr>
-        <p:txBody>
-          <a:bodyPr wrap="square" lIns="0" tIns="0" rIns="0" bIns="0" rtlCol="0" anchor="ctr"/>
-          <a:lstStyle/>
-          <a:p>
-            <a:pPr indent="0" marL="0">
-              <a:buNone/>
-            </a:pPr>
-            <a:r>
-              <a:rPr lang="en-US" sz="3000" i="1" dirty="0">
+              <a:t>eight pages, written for non-analysts; new data re-runs everything in two minutes</a:t>
+            </a:r>
+            <a:endParaRPr lang="en-US" sz="1150" dirty="0"/>
+          </a:p>
+        </p:txBody>
+      </p:sp>
+      <p:sp>
+        <p:nvSpPr>
+          <p:cNvPr id="15" name="Shape 13"/>
+          <p:cNvSpPr/>
+          <p:nvPr/>
+        </p:nvSpPr>
+        <p:spPr>
+          <a:xfrm>
+            <a:off x="685800" y="4828032"/>
+            <a:ext cx="10817352" cy="0"/>
+          </a:xfrm>
+          <a:prstGeom prst="line">
+            <a:avLst/>
+          </a:prstGeom>
+          <a:noFill/>
+          <a:ln w="9525">
+            <a:solidFill>
+              <a:srgbClr val="E2E6EA"/>
+            </a:solidFill>
+            <a:prstDash val="solid"/>
+          </a:ln>
+        </p:spPr>
+      </p:sp>
+      <p:sp>
+        <p:nvSpPr>
+          <p:cNvPr id="16" name="Text 14"/>
+          <p:cNvSpPr/>
+          <p:nvPr/>
+        </p:nvSpPr>
+        <p:spPr>
+          <a:xfrm>
+            <a:off x="685800" y="5001768"/>
+            <a:ext cx="777240" cy="548640"/>
+          </a:xfrm>
+          <a:prstGeom prst="rect">
+            <a:avLst/>
+          </a:prstGeom>
+          <a:noFill/>
+          <a:ln/>
+        </p:spPr>
+        <p:txBody>
+          <a:bodyPr wrap="square" lIns="0" tIns="0" rIns="0" bIns="0" rtlCol="0" anchor="ctr"/>
+          <a:lstStyle/>
+          <a:p>
+            <a:pPr indent="0" marL="0">
+              <a:buNone/>
+            </a:pPr>
+            <a:r>
+              <a:rPr lang="en-US" sz="2200" i="1" dirty="0">
                 <a:solidFill>
                   <a:srgbClr val="C8102E"/>
                 </a:solidFill>
@@ -4343,36 +3787,36 @@
               </a:rPr>
               <a:t>04</a:t>
             </a:r>
-            <a:endParaRPr lang="en-US" sz="3000" dirty="0"/>
-          </a:p>
-        </p:txBody>
-      </p:sp>
-      <p:sp>
-        <p:nvSpPr>
-          <p:cNvPr id="14" name="Text 12"/>
-          <p:cNvSpPr/>
-          <p:nvPr/>
-        </p:nvSpPr>
-        <p:spPr>
-          <a:xfrm>
-            <a:off x="8798814" y="3017520"/>
-            <a:ext cx="2384298" cy="411480"/>
-          </a:xfrm>
-          <a:prstGeom prst="rect">
-            <a:avLst/>
-          </a:prstGeom>
-          <a:noFill/>
-          <a:ln/>
-        </p:spPr>
-        <p:txBody>
-          <a:bodyPr wrap="square" lIns="0" tIns="0" rIns="0" bIns="0" rtlCol="0" anchor="ctr"/>
-          <a:lstStyle/>
-          <a:p>
-            <a:pPr indent="0" marL="0">
-              <a:buNone/>
-            </a:pPr>
-            <a:r>
-              <a:rPr lang="en-US" sz="1700" b="1" dirty="0">
+            <a:endParaRPr lang="en-US" sz="2200" dirty="0"/>
+          </a:p>
+        </p:txBody>
+      </p:sp>
+      <p:sp>
+        <p:nvSpPr>
+          <p:cNvPr id="17" name="Text 15"/>
+          <p:cNvSpPr/>
+          <p:nvPr/>
+        </p:nvSpPr>
+        <p:spPr>
+          <a:xfrm>
+            <a:off x="1645920" y="4974336"/>
+            <a:ext cx="4480560" cy="548640"/>
+          </a:xfrm>
+          <a:prstGeom prst="rect">
+            <a:avLst/>
+          </a:prstGeom>
+          <a:noFill/>
+          <a:ln/>
+        </p:spPr>
+        <p:txBody>
+          <a:bodyPr wrap="square" lIns="0" tIns="0" rIns="0" bIns="0" rtlCol="0" anchor="ctr"/>
+          <a:lstStyle/>
+          <a:p>
+            <a:pPr indent="0" marL="0">
+              <a:buNone/>
+            </a:pPr>
+            <a:r>
+              <a:rPr lang="en-US" sz="1550" b="1" dirty="0">
                 <a:solidFill>
                   <a:srgbClr val="1C2530"/>
                 </a:solidFill>
@@ -4380,22 +3824,22 @@
                 <a:ea typeface="Calibri" pitchFamily="34" charset="-122"/>
                 <a:cs typeface="Calibri" pitchFamily="34" charset="-120"/>
               </a:rPr>
-              <a:t>Decide</a:t>
-            </a:r>
-            <a:endParaRPr lang="en-US" sz="1700" dirty="0"/>
-          </a:p>
-        </p:txBody>
-      </p:sp>
-      <p:sp>
-        <p:nvSpPr>
-          <p:cNvPr id="15" name="Text 13"/>
-          <p:cNvSpPr/>
-          <p:nvPr/>
-        </p:nvSpPr>
-        <p:spPr>
-          <a:xfrm>
-            <a:off x="8798814" y="3474720"/>
-            <a:ext cx="2384298" cy="1371600"/>
+              <a:t>FY2025 forecast produced</a:t>
+            </a:r>
+            <a:endParaRPr lang="en-US" sz="1550" dirty="0"/>
+          </a:p>
+        </p:txBody>
+      </p:sp>
+      <p:sp>
+        <p:nvSpPr>
+          <p:cNvPr id="18" name="Text 16"/>
+          <p:cNvSpPr/>
+          <p:nvPr/>
+        </p:nvSpPr>
+        <p:spPr>
+          <a:xfrm>
+            <a:off x="6355080" y="5010912"/>
+            <a:ext cx="5148072" cy="594360"/>
           </a:xfrm>
           <a:prstGeom prst="rect">
             <a:avLst/>
@@ -4409,12 +3853,12 @@
           <a:p>
             <a:pPr indent="0" marL="0">
               <a:lnSpc>
-                <a:spcPct val="115000"/>
+                <a:spcPct val="110000"/>
               </a:lnSpc>
               <a:buNone/>
             </a:pPr>
             <a:r>
-              <a:rPr lang="en-US" sz="1200" dirty="0">
+              <a:rPr lang="en-US" sz="1150" dirty="0">
                 <a:solidFill>
                   <a:srgbClr val="6B7280"/>
                 </a:solidFill>
@@ -4422,48 +3866,9 @@
                 <a:ea typeface="Calibri" pitchFamily="34" charset="-122"/>
                 <a:cs typeface="Calibri" pitchFamily="34" charset="-120"/>
               </a:rPr>
-              <a:t>A dashboard for non-analysts; new data re-runs everything in two minutes</a:t>
-            </a:r>
-            <a:endParaRPr lang="en-US" sz="1200" dirty="0"/>
-          </a:p>
-        </p:txBody>
-      </p:sp>
-      <p:sp>
-        <p:nvSpPr>
-          <p:cNvPr id="16" name="Text 14"/>
-          <p:cNvSpPr/>
-          <p:nvPr/>
-        </p:nvSpPr>
-        <p:spPr>
-          <a:xfrm>
-            <a:off x="685800" y="5623560"/>
-            <a:ext cx="10817352" cy="548640"/>
-          </a:xfrm>
-          <a:prstGeom prst="rect">
-            <a:avLst/>
-          </a:prstGeom>
-          <a:noFill/>
-          <a:ln/>
-        </p:spPr>
-        <p:txBody>
-          <a:bodyPr wrap="square" lIns="0" tIns="0" rIns="0" bIns="0" rtlCol="0" anchor="ctr"/>
-          <a:lstStyle/>
-          <a:p>
-            <a:pPr indent="0" marL="0">
-              <a:buNone/>
-            </a:pPr>
-            <a:r>
-              <a:rPr lang="en-US" sz="1250" i="1" dirty="0">
-                <a:solidFill>
-                  <a:srgbClr val="6B7280"/>
-                </a:solidFill>
-                <a:latin typeface="Calibri" pitchFamily="34" charset="0"/>
-                <a:ea typeface="Calibri" pitchFamily="34" charset="-122"/>
-                <a:cs typeface="Calibri" pitchFamily="34" charset="-120"/>
-              </a:rPr>
-              <a:t>No model was assumed. Each product's method won a back-test against every alternative its history could support.</a:t>
-            </a:r>
-            <a:endParaRPr lang="en-US" sz="1250" dirty="0"/>
+              <a:t>first full run complete — results and accuracy evidence presented at the semi-final</a:t>
+            </a:r>
+            <a:endParaRPr lang="en-US" sz="1150" dirty="0"/>
           </a:p>
         </p:txBody>
       </p:sp>
@@ -4532,7 +3937,7 @@
                 <a:ea typeface="Calibri" pitchFamily="34" charset="-122"/>
                 <a:cs typeface="Calibri" pitchFamily="34" charset="-120"/>
               </a:rPr>
-              <a:t>03 — WHAT THE DATA TOLD US</a:t>
+              <a:t>03 — WORK DONE: THE DATA</a:t>
             </a:r>
             <a:endParaRPr lang="en-US" sz="1050" dirty="0"/>
           </a:p>
@@ -4571,7 +3976,7 @@
                 <a:ea typeface="Cambria" pitchFamily="34" charset="-122"/>
                 <a:cs typeface="Cambria" pitchFamily="34" charset="-120"/>
               </a:rPr>
-              <a:t>Demand here is events, not patterns.</a:t>
+              <a:t>Cleaned, reconciled, understood.</a:t>
             </a:r>
             <a:endParaRPr lang="en-US" sz="3800" dirty="0"/>
           </a:p>
@@ -4585,34 +3990,34 @@
         </p:nvSpPr>
         <p:spPr>
           <a:xfrm>
-            <a:off x="685800" y="2423160"/>
-            <a:ext cx="2834640" cy="777240"/>
-          </a:xfrm>
-          <a:prstGeom prst="rect">
-            <a:avLst/>
-          </a:prstGeom>
-          <a:noFill/>
-          <a:ln/>
-        </p:spPr>
-        <p:txBody>
-          <a:bodyPr wrap="square" lIns="0" tIns="0" rIns="0" bIns="0" rtlCol="0" anchor="ctr"/>
-          <a:lstStyle/>
-          <a:p>
-            <a:pPr indent="0" marL="0">
-              <a:buNone/>
-            </a:pPr>
-            <a:r>
-              <a:rPr lang="en-US" sz="2800" b="1" dirty="0">
+            <a:off x="685800" y="2286000"/>
+            <a:ext cx="4023360" cy="548640"/>
+          </a:xfrm>
+          <a:prstGeom prst="rect">
+            <a:avLst/>
+          </a:prstGeom>
+          <a:noFill/>
+          <a:ln/>
+        </p:spPr>
+        <p:txBody>
+          <a:bodyPr wrap="square" lIns="0" tIns="0" rIns="0" bIns="0" rtlCol="0" anchor="ctr"/>
+          <a:lstStyle/>
+          <a:p>
+            <a:pPr indent="0" marL="0">
+              <a:buNone/>
+            </a:pPr>
+            <a:r>
+              <a:rPr lang="en-US" sz="1500" b="1" dirty="0">
                 <a:solidFill>
                   <a:srgbClr val="1C2530"/>
                 </a:solidFill>
-                <a:latin typeface="Cambria" pitchFamily="34" charset="0"/>
-                <a:ea typeface="Cambria" pitchFamily="34" charset="-122"/>
-                <a:cs typeface="Cambria" pitchFamily="34" charset="-120"/>
-              </a:rPr>
-              <a:t>3 of 48</a:t>
-            </a:r>
-            <a:endParaRPr lang="en-US" sz="2800" dirty="0"/>
+                <a:latin typeface="Calibri" pitchFamily="34" charset="0"/>
+                <a:ea typeface="Calibri" pitchFamily="34" charset="-122"/>
+                <a:cs typeface="Calibri" pitchFamily="34" charset="-120"/>
+              </a:rPr>
+              <a:t>Perfect reconciliation</a:t>
+            </a:r>
+            <a:endParaRPr lang="en-US" sz="1500" dirty="0"/>
           </a:p>
         </p:txBody>
       </p:sp>
@@ -4624,24 +4029,27 @@
         </p:nvSpPr>
         <p:spPr>
           <a:xfrm>
-            <a:off x="3794760" y="2532888"/>
-            <a:ext cx="7708392" cy="640080"/>
-          </a:xfrm>
-          <a:prstGeom prst="rect">
-            <a:avLst/>
-          </a:prstGeom>
-          <a:noFill/>
-          <a:ln/>
-        </p:spPr>
-        <p:txBody>
-          <a:bodyPr wrap="square" lIns="0" tIns="0" rIns="0" bIns="0" rtlCol="0" anchor="ctr"/>
-          <a:lstStyle/>
-          <a:p>
-            <a:pPr indent="0" marL="0">
-              <a:buNone/>
-            </a:pPr>
-            <a:r>
-              <a:rPr lang="en-US" sz="1350" dirty="0">
+            <a:off x="5074920" y="2313432"/>
+            <a:ext cx="6428232" cy="594360"/>
+          </a:xfrm>
+          <a:prstGeom prst="rect">
+            <a:avLst/>
+          </a:prstGeom>
+          <a:noFill/>
+          <a:ln/>
+        </p:spPr>
+        <p:txBody>
+          <a:bodyPr wrap="square" lIns="0" tIns="0" rIns="0" bIns="0" rtlCol="0" anchor="ctr"/>
+          <a:lstStyle/>
+          <a:p>
+            <a:pPr indent="0" marL="0">
+              <a:lnSpc>
+                <a:spcPct val="110000"/>
+              </a:lnSpc>
+              <a:buNone/>
+            </a:pPr>
+            <a:r>
+              <a:rPr lang="en-US" sz="1150" dirty="0">
                 <a:solidFill>
                   <a:srgbClr val="6B7280"/>
                 </a:solidFill>
@@ -4649,9 +4057,9 @@
                 <a:ea typeface="Calibri" pitchFamily="34" charset="-122"/>
                 <a:cs typeface="Calibri" pitchFamily="34" charset="-120"/>
               </a:rPr>
-              <a:t>months in which the median product records any sale at all</a:t>
-            </a:r>
-            <a:endParaRPr lang="en-US" sz="1350" dirty="0"/>
+              <a:t>every product and customer in the sales history exists in the master lists — no orphans</a:t>
+            </a:r>
+            <a:endParaRPr lang="en-US" sz="1150" dirty="0"/>
           </a:p>
         </p:txBody>
       </p:sp>
@@ -4663,7 +4071,7 @@
         </p:nvSpPr>
         <p:spPr>
           <a:xfrm>
-            <a:off x="685800" y="3255264"/>
+            <a:off x="685800" y="3035808"/>
             <a:ext cx="10817352" cy="0"/>
           </a:xfrm>
           <a:prstGeom prst="line">
@@ -4686,34 +4094,34 @@
         </p:nvSpPr>
         <p:spPr>
           <a:xfrm>
-            <a:off x="685800" y="3383280"/>
-            <a:ext cx="2834640" cy="777240"/>
-          </a:xfrm>
-          <a:prstGeom prst="rect">
-            <a:avLst/>
-          </a:prstGeom>
-          <a:noFill/>
-          <a:ln/>
-        </p:spPr>
-        <p:txBody>
-          <a:bodyPr wrap="square" lIns="0" tIns="0" rIns="0" bIns="0" rtlCol="0" anchor="ctr"/>
-          <a:lstStyle/>
-          <a:p>
-            <a:pPr indent="0" marL="0">
-              <a:buNone/>
-            </a:pPr>
-            <a:r>
-              <a:rPr lang="en-US" sz="2800" b="1" dirty="0">
+            <a:off x="685800" y="3182112"/>
+            <a:ext cx="4023360" cy="548640"/>
+          </a:xfrm>
+          <a:prstGeom prst="rect">
+            <a:avLst/>
+          </a:prstGeom>
+          <a:noFill/>
+          <a:ln/>
+        </p:spPr>
+        <p:txBody>
+          <a:bodyPr wrap="square" lIns="0" tIns="0" rIns="0" bIns="0" rtlCol="0" anchor="ctr"/>
+          <a:lstStyle/>
+          <a:p>
+            <a:pPr indent="0" marL="0">
+              <a:buNone/>
+            </a:pPr>
+            <a:r>
+              <a:rPr lang="en-US" sz="1500" b="1" dirty="0">
                 <a:solidFill>
                   <a:srgbClr val="1C2530"/>
                 </a:solidFill>
-                <a:latin typeface="Cambria" pitchFamily="34" charset="0"/>
-                <a:ea typeface="Cambria" pitchFamily="34" charset="-122"/>
-                <a:cs typeface="Cambria" pitchFamily="34" charset="-120"/>
-              </a:rPr>
-              <a:t>0.4% → 16%</a:t>
-            </a:r>
-            <a:endParaRPr lang="en-US" sz="2800" dirty="0"/>
+                <a:latin typeface="Calibri" pitchFamily="34" charset="0"/>
+                <a:ea typeface="Calibri" pitchFamily="34" charset="-122"/>
+                <a:cs typeface="Calibri" pitchFamily="34" charset="-120"/>
+              </a:rPr>
+              <a:t>Duplicates investigated</a:t>
+            </a:r>
+            <a:endParaRPr lang="en-US" sz="1500" dirty="0"/>
           </a:p>
         </p:txBody>
       </p:sp>
@@ -4725,24 +4133,27 @@
         </p:nvSpPr>
         <p:spPr>
           <a:xfrm>
-            <a:off x="3794760" y="3493008"/>
-            <a:ext cx="7708392" cy="640080"/>
-          </a:xfrm>
-          <a:prstGeom prst="rect">
-            <a:avLst/>
-          </a:prstGeom>
-          <a:noFill/>
-          <a:ln/>
-        </p:spPr>
-        <p:txBody>
-          <a:bodyPr wrap="square" lIns="0" tIns="0" rIns="0" bIns="0" rtlCol="0" anchor="ctr"/>
-          <a:lstStyle/>
-          <a:p>
-            <a:pPr indent="0" marL="0">
-              <a:buNone/>
-            </a:pPr>
-            <a:r>
-              <a:rPr lang="en-US" sz="1350" dirty="0">
+            <a:off x="5074920" y="3209544"/>
+            <a:ext cx="6428232" cy="594360"/>
+          </a:xfrm>
+          <a:prstGeom prst="rect">
+            <a:avLst/>
+          </a:prstGeom>
+          <a:noFill/>
+          <a:ln/>
+        </p:spPr>
+        <p:txBody>
+          <a:bodyPr wrap="square" lIns="0" tIns="0" rIns="0" bIns="0" rtlCol="0" anchor="ctr"/>
+          <a:lstStyle/>
+          <a:p>
+            <a:pPr indent="0" marL="0">
+              <a:lnSpc>
+                <a:spcPct val="110000"/>
+              </a:lnSpc>
+              <a:buNone/>
+            </a:pPr>
+            <a:r>
+              <a:rPr lang="en-US" sz="1150" dirty="0">
                 <a:solidFill>
                   <a:srgbClr val="6B7280"/>
                 </a:solidFill>
@@ -4750,9 +4161,9 @@
                 <a:ea typeface="Calibri" pitchFamily="34" charset="-122"/>
                 <a:cs typeface="Calibri" pitchFamily="34" charset="-120"/>
               </a:rPr>
-              <a:t>share of volume carried by the largest half-percent of order lines</a:t>
-            </a:r>
-            <a:endParaRPr lang="en-US" sz="1350" dirty="0"/>
+              <a:t>6,865 identical lines forensically tested — genuine ERP entries, kept with evidence</a:t>
+            </a:r>
+            <a:endParaRPr lang="en-US" sz="1150" dirty="0"/>
           </a:p>
         </p:txBody>
       </p:sp>
@@ -4764,7 +4175,7 @@
         </p:nvSpPr>
         <p:spPr>
           <a:xfrm>
-            <a:off x="685800" y="4215384"/>
+            <a:off x="685800" y="3931920"/>
             <a:ext cx="10817352" cy="0"/>
           </a:xfrm>
           <a:prstGeom prst="line">
@@ -4787,34 +4198,34 @@
         </p:nvSpPr>
         <p:spPr>
           <a:xfrm>
-            <a:off x="685800" y="4343400"/>
-            <a:ext cx="2834640" cy="777240"/>
-          </a:xfrm>
-          <a:prstGeom prst="rect">
-            <a:avLst/>
-          </a:prstGeom>
-          <a:noFill/>
-          <a:ln/>
-        </p:spPr>
-        <p:txBody>
-          <a:bodyPr wrap="square" lIns="0" tIns="0" rIns="0" bIns="0" rtlCol="0" anchor="ctr"/>
-          <a:lstStyle/>
-          <a:p>
-            <a:pPr indent="0" marL="0">
-              <a:buNone/>
-            </a:pPr>
-            <a:r>
-              <a:rPr lang="en-US" sz="2800" b="1" dirty="0">
+            <a:off x="685800" y="4078224"/>
+            <a:ext cx="4023360" cy="548640"/>
+          </a:xfrm>
+          <a:prstGeom prst="rect">
+            <a:avLst/>
+          </a:prstGeom>
+          <a:noFill/>
+          <a:ln/>
+        </p:spPr>
+        <p:txBody>
+          <a:bodyPr wrap="square" lIns="0" tIns="0" rIns="0" bIns="0" rtlCol="0" anchor="ctr"/>
+          <a:lstStyle/>
+          <a:p>
+            <a:pPr indent="0" marL="0">
+              <a:buNone/>
+            </a:pPr>
+            <a:r>
+              <a:rPr lang="en-US" sz="1500" b="1" dirty="0">
                 <a:solidFill>
                   <a:srgbClr val="1C2530"/>
                 </a:solidFill>
-                <a:latin typeface="Cambria" pitchFamily="34" charset="0"/>
-                <a:ea typeface="Cambria" pitchFamily="34" charset="-122"/>
-                <a:cs typeface="Cambria" pitchFamily="34" charset="-120"/>
-              </a:rPr>
-              <a:t>68.5%</a:t>
-            </a:r>
-            <a:endParaRPr lang="en-US" sz="2800" dirty="0"/>
+                <a:latin typeface="Calibri" pitchFamily="34" charset="0"/>
+                <a:ea typeface="Calibri" pitchFamily="34" charset="-122"/>
+                <a:cs typeface="Calibri" pitchFamily="34" charset="-120"/>
+              </a:rPr>
+              <a:t>Variable pricing handled</a:t>
+            </a:r>
+            <a:endParaRPr lang="en-US" sz="1500" dirty="0"/>
           </a:p>
         </p:txBody>
       </p:sp>
@@ -4826,24 +4237,27 @@
         </p:nvSpPr>
         <p:spPr>
           <a:xfrm>
-            <a:off x="3794760" y="4453128"/>
-            <a:ext cx="7708392" cy="640080"/>
-          </a:xfrm>
-          <a:prstGeom prst="rect">
-            <a:avLst/>
-          </a:prstGeom>
-          <a:noFill/>
-          <a:ln/>
-        </p:spPr>
-        <p:txBody>
-          <a:bodyPr wrap="square" lIns="0" tIns="0" rIns="0" bIns="0" rtlCol="0" anchor="ctr"/>
-          <a:lstStyle/>
-          <a:p>
-            <a:pPr indent="0" marL="0">
-              <a:buNone/>
-            </a:pPr>
-            <a:r>
-              <a:rPr lang="en-US" sz="1350" dirty="0">
+            <a:off x="5074920" y="4105656"/>
+            <a:ext cx="6428232" cy="594360"/>
+          </a:xfrm>
+          <a:prstGeom prst="rect">
+            <a:avLst/>
+          </a:prstGeom>
+          <a:noFill/>
+          <a:ln/>
+        </p:spPr>
+        <p:txBody>
+          <a:bodyPr wrap="square" lIns="0" tIns="0" rIns="0" bIns="0" rtlCol="0" anchor="ctr"/>
+          <a:lstStyle/>
+          <a:p>
+            <a:pPr indent="0" marL="0">
+              <a:lnSpc>
+                <a:spcPct val="110000"/>
+              </a:lnSpc>
+              <a:buNone/>
+            </a:pPr>
+            <a:r>
+              <a:rPr lang="en-US" sz="1150" dirty="0">
                 <a:solidFill>
                   <a:srgbClr val="6B7280"/>
                 </a:solidFill>
@@ -4851,22 +4265,126 @@
                 <a:ea typeface="Calibri" pitchFamily="34" charset="-122"/>
                 <a:cs typeface="Calibri" pitchFamily="34" charset="-120"/>
               </a:rPr>
-              <a:t>of all volume comes from just ten customers — three carry 27.6%</a:t>
-            </a:r>
-            <a:endParaRPr lang="en-US" sz="1350" dirty="0"/>
-          </a:p>
-        </p:txBody>
-      </p:sp>
-      <p:sp>
-        <p:nvSpPr>
-          <p:cNvPr id="12" name="Text 10"/>
-          <p:cNvSpPr/>
-          <p:nvPr/>
-        </p:nvSpPr>
-        <p:spPr>
-          <a:xfrm>
-            <a:off x="685800" y="5577840"/>
-            <a:ext cx="10817352" cy="594360"/>
+              <a:t>price-0 means quoted per order by Japan — never counted as zero revenue</a:t>
+            </a:r>
+            <a:endParaRPr lang="en-US" sz="1150" dirty="0"/>
+          </a:p>
+        </p:txBody>
+      </p:sp>
+      <p:sp>
+        <p:nvSpPr>
+          <p:cNvPr id="12" name="Shape 10"/>
+          <p:cNvSpPr/>
+          <p:nvPr/>
+        </p:nvSpPr>
+        <p:spPr>
+          <a:xfrm>
+            <a:off x="685800" y="4828032"/>
+            <a:ext cx="10817352" cy="0"/>
+          </a:xfrm>
+          <a:prstGeom prst="line">
+            <a:avLst/>
+          </a:prstGeom>
+          <a:noFill/>
+          <a:ln w="9525">
+            <a:solidFill>
+              <a:srgbClr val="E2E6EA"/>
+            </a:solidFill>
+            <a:prstDash val="solid"/>
+          </a:ln>
+        </p:spPr>
+      </p:sp>
+      <p:sp>
+        <p:nvSpPr>
+          <p:cNvPr id="13" name="Text 11"/>
+          <p:cNvSpPr/>
+          <p:nvPr/>
+        </p:nvSpPr>
+        <p:spPr>
+          <a:xfrm>
+            <a:off x="685800" y="4974336"/>
+            <a:ext cx="4023360" cy="548640"/>
+          </a:xfrm>
+          <a:prstGeom prst="rect">
+            <a:avLst/>
+          </a:prstGeom>
+          <a:noFill/>
+          <a:ln/>
+        </p:spPr>
+        <p:txBody>
+          <a:bodyPr wrap="square" lIns="0" tIns="0" rIns="0" bIns="0" rtlCol="0" anchor="ctr"/>
+          <a:lstStyle/>
+          <a:p>
+            <a:pPr indent="0" marL="0">
+              <a:buNone/>
+            </a:pPr>
+            <a:r>
+              <a:rPr lang="en-US" sz="1500" b="1" dirty="0">
+                <a:solidFill>
+                  <a:srgbClr val="1C2530"/>
+                </a:solidFill>
+                <a:latin typeface="Calibri" pitchFamily="34" charset="0"/>
+                <a:ea typeface="Calibri" pitchFamily="34" charset="-122"/>
+                <a:cs typeface="Calibri" pitchFamily="34" charset="-120"/>
+              </a:rPr>
+              <a:t>Fiscal year verified</a:t>
+            </a:r>
+            <a:endParaRPr lang="en-US" sz="1500" dirty="0"/>
+          </a:p>
+        </p:txBody>
+      </p:sp>
+      <p:sp>
+        <p:nvSpPr>
+          <p:cNvPr id="14" name="Text 12"/>
+          <p:cNvSpPr/>
+          <p:nvPr/>
+        </p:nvSpPr>
+        <p:spPr>
+          <a:xfrm>
+            <a:off x="5074920" y="5001768"/>
+            <a:ext cx="6428232" cy="594360"/>
+          </a:xfrm>
+          <a:prstGeom prst="rect">
+            <a:avLst/>
+          </a:prstGeom>
+          <a:noFill/>
+          <a:ln/>
+        </p:spPr>
+        <p:txBody>
+          <a:bodyPr wrap="square" lIns="0" tIns="0" rIns="0" bIns="0" rtlCol="0" anchor="ctr"/>
+          <a:lstStyle/>
+          <a:p>
+            <a:pPr indent="0" marL="0">
+              <a:lnSpc>
+                <a:spcPct val="110000"/>
+              </a:lnSpc>
+              <a:buNone/>
+            </a:pPr>
+            <a:r>
+              <a:rPr lang="en-US" sz="1150" dirty="0">
+                <a:solidFill>
+                  <a:srgbClr val="6B7280"/>
+                </a:solidFill>
+                <a:latin typeface="Calibri" pitchFamily="34" charset="0"/>
+                <a:ea typeface="Calibri" pitchFamily="34" charset="-122"/>
+                <a:cs typeface="Calibri" pitchFamily="34" charset="-120"/>
+              </a:rPr>
+              <a:t>April–March, detected from the data three independent ways</a:t>
+            </a:r>
+            <a:endParaRPr lang="en-US" sz="1150" dirty="0"/>
+          </a:p>
+        </p:txBody>
+      </p:sp>
+      <p:sp>
+        <p:nvSpPr>
+          <p:cNvPr id="15" name="Text 13"/>
+          <p:cNvSpPr/>
+          <p:nvPr/>
+        </p:nvSpPr>
+        <p:spPr>
+          <a:xfrm>
+            <a:off x="685800" y="5806440"/>
+            <a:ext cx="10817352" cy="457200"/>
           </a:xfrm>
           <a:prstGeom prst="rect">
             <a:avLst/>
@@ -4890,7 +4408,7 @@
                 <a:ea typeface="Calibri" pitchFamily="34" charset="-122"/>
                 <a:cs typeface="Calibri" pitchFamily="34" charset="-120"/>
               </a:rPr>
-              <a:t>The largest forecast misses come from single large orders — information that exists in the sales pipeline before it ever reaches the sales history.</a:t>
+              <a:t>Every cleaning decision is written down with its evidence, so the numbers can be defended line by line.</a:t>
             </a:r>
             <a:endParaRPr lang="en-US" sz="1250" dirty="0"/>
           </a:p>
@@ -4961,7 +4479,7 @@
                 <a:ea typeface="Calibri" pitchFamily="34" charset="-122"/>
                 <a:cs typeface="Calibri" pitchFamily="34" charset="-120"/>
               </a:rPr>
-              <a:t>04 — THE FY2025 FORECAST</a:t>
+              <a:t>04 — WORK DONE: THE ANALYSIS</a:t>
             </a:r>
             <a:endParaRPr lang="en-US" sz="1050" dirty="0"/>
           </a:p>
@@ -5000,7 +4518,7 @@
                 <a:ea typeface="Cambria" pitchFamily="34" charset="-122"/>
                 <a:cs typeface="Cambria" pitchFamily="34" charset="-120"/>
               </a:rPr>
-              <a:t>April 2025 to March 2026.</a:t>
+              <a:t>Demand here is events, not patterns.</a:t>
             </a:r>
             <a:endParaRPr lang="en-US" sz="3800" dirty="0"/>
           </a:p>
@@ -5008,26 +4526,100 @@
       </p:sp>
       <p:sp>
         <p:nvSpPr>
-          <p:cNvPr id="4" name="Shape 2"/>
-          <p:cNvSpPr/>
-          <p:nvPr/>
-        </p:nvSpPr>
-        <p:spPr>
-          <a:xfrm>
-            <a:off x="685800" y="2377440"/>
-            <a:ext cx="3429000" cy="2651760"/>
-          </a:xfrm>
-          <a:prstGeom prst="roundRect">
-            <a:avLst>
-              <a:gd name="adj" fmla="val 2759"/>
-            </a:avLst>
-          </a:prstGeom>
-          <a:solidFill>
-            <a:srgbClr val="1C2530"/>
-          </a:solidFill>
-          <a:ln w="12700">
+          <p:cNvPr id="4" name="Text 2"/>
+          <p:cNvSpPr/>
+          <p:nvPr/>
+        </p:nvSpPr>
+        <p:spPr>
+          <a:xfrm>
+            <a:off x="685800" y="2423160"/>
+            <a:ext cx="2834640" cy="777240"/>
+          </a:xfrm>
+          <a:prstGeom prst="rect">
+            <a:avLst/>
+          </a:prstGeom>
+          <a:noFill/>
+          <a:ln/>
+        </p:spPr>
+        <p:txBody>
+          <a:bodyPr wrap="square" lIns="0" tIns="0" rIns="0" bIns="0" rtlCol="0" anchor="ctr"/>
+          <a:lstStyle/>
+          <a:p>
+            <a:pPr indent="0" marL="0">
+              <a:buNone/>
+            </a:pPr>
+            <a:r>
+              <a:rPr lang="en-US" sz="2800" b="1" dirty="0">
+                <a:solidFill>
+                  <a:srgbClr val="1C2530"/>
+                </a:solidFill>
+                <a:latin typeface="Cambria" pitchFamily="34" charset="0"/>
+                <a:ea typeface="Cambria" pitchFamily="34" charset="-122"/>
+                <a:cs typeface="Cambria" pitchFamily="34" charset="-120"/>
+              </a:rPr>
+              <a:t>3 of 48</a:t>
+            </a:r>
+            <a:endParaRPr lang="en-US" sz="2800" dirty="0"/>
+          </a:p>
+        </p:txBody>
+      </p:sp>
+      <p:sp>
+        <p:nvSpPr>
+          <p:cNvPr id="5" name="Text 3"/>
+          <p:cNvSpPr/>
+          <p:nvPr/>
+        </p:nvSpPr>
+        <p:spPr>
+          <a:xfrm>
+            <a:off x="3794760" y="2532888"/>
+            <a:ext cx="7708392" cy="640080"/>
+          </a:xfrm>
+          <a:prstGeom prst="rect">
+            <a:avLst/>
+          </a:prstGeom>
+          <a:noFill/>
+          <a:ln/>
+        </p:spPr>
+        <p:txBody>
+          <a:bodyPr wrap="square" lIns="0" tIns="0" rIns="0" bIns="0" rtlCol="0" anchor="ctr"/>
+          <a:lstStyle/>
+          <a:p>
+            <a:pPr indent="0" marL="0">
+              <a:buNone/>
+            </a:pPr>
+            <a:r>
+              <a:rPr lang="en-US" sz="1350" dirty="0">
+                <a:solidFill>
+                  <a:srgbClr val="6B7280"/>
+                </a:solidFill>
+                <a:latin typeface="Calibri" pitchFamily="34" charset="0"/>
+                <a:ea typeface="Calibri" pitchFamily="34" charset="-122"/>
+                <a:cs typeface="Calibri" pitchFamily="34" charset="-120"/>
+              </a:rPr>
+              <a:t>months in which the median product records any sale at all</a:t>
+            </a:r>
+            <a:endParaRPr lang="en-US" sz="1350" dirty="0"/>
+          </a:p>
+        </p:txBody>
+      </p:sp>
+      <p:sp>
+        <p:nvSpPr>
+          <p:cNvPr id="6" name="Shape 4"/>
+          <p:cNvSpPr/>
+          <p:nvPr/>
+        </p:nvSpPr>
+        <p:spPr>
+          <a:xfrm>
+            <a:off x="685800" y="3255264"/>
+            <a:ext cx="10817352" cy="0"/>
+          </a:xfrm>
+          <a:prstGeom prst="line">
+            <a:avLst/>
+          </a:prstGeom>
+          <a:noFill/>
+          <a:ln w="9525">
             <a:solidFill>
-              <a:srgbClr val="1C2530"/>
+              <a:srgbClr val="E2E6EA"/>
             </a:solidFill>
             <a:prstDash val="solid"/>
           </a:ln>
@@ -5035,104 +4627,100 @@
       </p:sp>
       <p:sp>
         <p:nvSpPr>
-          <p:cNvPr id="5" name="Text 3"/>
-          <p:cNvSpPr/>
-          <p:nvPr/>
-        </p:nvSpPr>
-        <p:spPr>
-          <a:xfrm>
-            <a:off x="685800" y="3063240"/>
-            <a:ext cx="3429000" cy="914400"/>
-          </a:xfrm>
-          <a:prstGeom prst="rect">
-            <a:avLst/>
-          </a:prstGeom>
-          <a:noFill/>
-          <a:ln/>
-        </p:spPr>
-        <p:txBody>
-          <a:bodyPr wrap="square" lIns="0" tIns="0" rIns="0" bIns="0" rtlCol="0" anchor="ctr"/>
-          <a:lstStyle/>
-          <a:p>
-            <a:pPr algn="ctr" indent="0" marL="0">
-              <a:buNone/>
-            </a:pPr>
-            <a:r>
-              <a:rPr lang="en-US" sz="3400" b="1" dirty="0">
-                <a:solidFill>
-                  <a:srgbClr val="F5F7FA"/>
+          <p:cNvPr id="7" name="Text 5"/>
+          <p:cNvSpPr/>
+          <p:nvPr/>
+        </p:nvSpPr>
+        <p:spPr>
+          <a:xfrm>
+            <a:off x="685800" y="3383280"/>
+            <a:ext cx="2834640" cy="777240"/>
+          </a:xfrm>
+          <a:prstGeom prst="rect">
+            <a:avLst/>
+          </a:prstGeom>
+          <a:noFill/>
+          <a:ln/>
+        </p:spPr>
+        <p:txBody>
+          <a:bodyPr wrap="square" lIns="0" tIns="0" rIns="0" bIns="0" rtlCol="0" anchor="ctr"/>
+          <a:lstStyle/>
+          <a:p>
+            <a:pPr indent="0" marL="0">
+              <a:buNone/>
+            </a:pPr>
+            <a:r>
+              <a:rPr lang="en-US" sz="2800" b="1" dirty="0">
+                <a:solidFill>
+                  <a:srgbClr val="1C2530"/>
                 </a:solidFill>
                 <a:latin typeface="Cambria" pitchFamily="34" charset="0"/>
                 <a:ea typeface="Cambria" pitchFamily="34" charset="-122"/>
                 <a:cs typeface="Cambria" pitchFamily="34" charset="-120"/>
               </a:rPr>
-              <a:t>฿1.91bn</a:t>
-            </a:r>
-            <a:endParaRPr lang="en-US" sz="3400" dirty="0"/>
-          </a:p>
-        </p:txBody>
-      </p:sp>
-      <p:sp>
-        <p:nvSpPr>
-          <p:cNvPr id="6" name="Text 4"/>
-          <p:cNvSpPr/>
-          <p:nvPr/>
-        </p:nvSpPr>
-        <p:spPr>
-          <a:xfrm>
-            <a:off x="960120" y="3977640"/>
-            <a:ext cx="2880360" cy="640080"/>
-          </a:xfrm>
-          <a:prstGeom prst="rect">
-            <a:avLst/>
-          </a:prstGeom>
-          <a:noFill/>
-          <a:ln/>
-        </p:spPr>
-        <p:txBody>
-          <a:bodyPr wrap="square" lIns="0" tIns="0" rIns="0" bIns="0" rtlCol="0" anchor="ctr"/>
-          <a:lstStyle/>
-          <a:p>
-            <a:pPr algn="ctr" indent="0" marL="0">
-              <a:buNone/>
-            </a:pPr>
-            <a:r>
-              <a:rPr lang="en-US" sz="1200" dirty="0">
-                <a:solidFill>
-                  <a:srgbClr val="C9D2DB"/>
-                </a:solidFill>
-                <a:latin typeface="Calibri" pitchFamily="34" charset="0"/>
-                <a:ea typeface="Calibri" pitchFamily="34" charset="-122"/>
-                <a:cs typeface="Calibri" pitchFamily="34" charset="-120"/>
-              </a:rPr>
-              <a:t>forecast revenue, billed basis</a:t>
-            </a:r>
-            <a:endParaRPr lang="en-US" sz="1200" dirty="0"/>
-          </a:p>
-        </p:txBody>
-      </p:sp>
-      <p:sp>
-        <p:nvSpPr>
-          <p:cNvPr id="7" name="Shape 5"/>
-          <p:cNvSpPr/>
-          <p:nvPr/>
-        </p:nvSpPr>
-        <p:spPr>
-          <a:xfrm>
-            <a:off x="4398264" y="2377440"/>
-            <a:ext cx="3429000" cy="2651760"/>
-          </a:xfrm>
-          <a:prstGeom prst="roundRect">
-            <a:avLst>
-              <a:gd name="adj" fmla="val 2759"/>
-            </a:avLst>
-          </a:prstGeom>
-          <a:solidFill>
-            <a:srgbClr val="C8102E"/>
-          </a:solidFill>
-          <a:ln w="12700">
+              <a:t>0.4% → 16%</a:t>
+            </a:r>
+            <a:endParaRPr lang="en-US" sz="2800" dirty="0"/>
+          </a:p>
+        </p:txBody>
+      </p:sp>
+      <p:sp>
+        <p:nvSpPr>
+          <p:cNvPr id="8" name="Text 6"/>
+          <p:cNvSpPr/>
+          <p:nvPr/>
+        </p:nvSpPr>
+        <p:spPr>
+          <a:xfrm>
+            <a:off x="3794760" y="3493008"/>
+            <a:ext cx="7708392" cy="640080"/>
+          </a:xfrm>
+          <a:prstGeom prst="rect">
+            <a:avLst/>
+          </a:prstGeom>
+          <a:noFill/>
+          <a:ln/>
+        </p:spPr>
+        <p:txBody>
+          <a:bodyPr wrap="square" lIns="0" tIns="0" rIns="0" bIns="0" rtlCol="0" anchor="ctr"/>
+          <a:lstStyle/>
+          <a:p>
+            <a:pPr indent="0" marL="0">
+              <a:buNone/>
+            </a:pPr>
+            <a:r>
+              <a:rPr lang="en-US" sz="1350" dirty="0">
+                <a:solidFill>
+                  <a:srgbClr val="6B7280"/>
+                </a:solidFill>
+                <a:latin typeface="Calibri" pitchFamily="34" charset="0"/>
+                <a:ea typeface="Calibri" pitchFamily="34" charset="-122"/>
+                <a:cs typeface="Calibri" pitchFamily="34" charset="-120"/>
+              </a:rPr>
+              <a:t>share of volume carried by the largest half-percent of order lines</a:t>
+            </a:r>
+            <a:endParaRPr lang="en-US" sz="1350" dirty="0"/>
+          </a:p>
+        </p:txBody>
+      </p:sp>
+      <p:sp>
+        <p:nvSpPr>
+          <p:cNvPr id="9" name="Shape 7"/>
+          <p:cNvSpPr/>
+          <p:nvPr/>
+        </p:nvSpPr>
+        <p:spPr>
+          <a:xfrm>
+            <a:off x="685800" y="4215384"/>
+            <a:ext cx="10817352" cy="0"/>
+          </a:xfrm>
+          <a:prstGeom prst="line">
+            <a:avLst/>
+          </a:prstGeom>
+          <a:noFill/>
+          <a:ln w="9525">
             <a:solidFill>
-              <a:srgbClr val="C8102E"/>
+              <a:srgbClr val="E2E6EA"/>
             </a:solidFill>
             <a:prstDash val="solid"/>
           </a:ln>
@@ -5140,108 +4728,42 @@
       </p:sp>
       <p:sp>
         <p:nvSpPr>
-          <p:cNvPr id="8" name="Text 6"/>
-          <p:cNvSpPr/>
-          <p:nvPr/>
-        </p:nvSpPr>
-        <p:spPr>
-          <a:xfrm>
-            <a:off x="4398264" y="3063240"/>
-            <a:ext cx="3429000" cy="914400"/>
-          </a:xfrm>
-          <a:prstGeom prst="rect">
-            <a:avLst/>
-          </a:prstGeom>
-          <a:noFill/>
-          <a:ln/>
-        </p:spPr>
-        <p:txBody>
-          <a:bodyPr wrap="square" lIns="0" tIns="0" rIns="0" bIns="0" rtlCol="0" anchor="ctr"/>
-          <a:lstStyle/>
-          <a:p>
-            <a:pPr algn="ctr" indent="0" marL="0">
-              <a:buNone/>
-            </a:pPr>
-            <a:r>
-              <a:rPr lang="en-US" sz="3400" b="1" dirty="0">
-                <a:solidFill>
-                  <a:srgbClr val="F5F7FA"/>
+          <p:cNvPr id="10" name="Text 8"/>
+          <p:cNvSpPr/>
+          <p:nvPr/>
+        </p:nvSpPr>
+        <p:spPr>
+          <a:xfrm>
+            <a:off x="685800" y="4343400"/>
+            <a:ext cx="2834640" cy="777240"/>
+          </a:xfrm>
+          <a:prstGeom prst="rect">
+            <a:avLst/>
+          </a:prstGeom>
+          <a:noFill/>
+          <a:ln/>
+        </p:spPr>
+        <p:txBody>
+          <a:bodyPr wrap="square" lIns="0" tIns="0" rIns="0" bIns="0" rtlCol="0" anchor="ctr"/>
+          <a:lstStyle/>
+          <a:p>
+            <a:pPr indent="0" marL="0">
+              <a:buNone/>
+            </a:pPr>
+            <a:r>
+              <a:rPr lang="en-US" sz="2800" b="1" dirty="0">
+                <a:solidFill>
+                  <a:srgbClr val="1C2530"/>
                 </a:solidFill>
                 <a:latin typeface="Cambria" pitchFamily="34" charset="0"/>
                 <a:ea typeface="Cambria" pitchFamily="34" charset="-122"/>
                 <a:cs typeface="Cambria" pitchFamily="34" charset="-120"/>
               </a:rPr>
-              <a:t>176,044</a:t>
-            </a:r>
-            <a:endParaRPr lang="en-US" sz="3400" dirty="0"/>
-          </a:p>
-        </p:txBody>
-      </p:sp>
-      <p:sp>
-        <p:nvSpPr>
-          <p:cNvPr id="9" name="Text 7"/>
-          <p:cNvSpPr/>
-          <p:nvPr/>
-        </p:nvSpPr>
-        <p:spPr>
-          <a:xfrm>
-            <a:off x="4672584" y="3977640"/>
-            <a:ext cx="2880360" cy="640080"/>
-          </a:xfrm>
-          <a:prstGeom prst="rect">
-            <a:avLst/>
-          </a:prstGeom>
-          <a:noFill/>
-          <a:ln/>
-        </p:spPr>
-        <p:txBody>
-          <a:bodyPr wrap="square" lIns="0" tIns="0" rIns="0" bIns="0" rtlCol="0" anchor="ctr"/>
-          <a:lstStyle/>
-          <a:p>
-            <a:pPr algn="ctr" indent="0" marL="0">
-              <a:buNone/>
-            </a:pPr>
-            <a:r>
-              <a:rPr lang="en-US" sz="1200" dirty="0">
-                <a:solidFill>
-                  <a:srgbClr val="C9D2DB"/>
-                </a:solidFill>
-                <a:latin typeface="Calibri" pitchFamily="34" charset="0"/>
-                <a:ea typeface="Calibri" pitchFamily="34" charset="-122"/>
-                <a:cs typeface="Calibri" pitchFamily="34" charset="-120"/>
-              </a:rPr>
-              <a:t>units of expected demand</a:t>
-            </a:r>
-            <a:endParaRPr lang="en-US" sz="1200" dirty="0"/>
-          </a:p>
-        </p:txBody>
-      </p:sp>
-      <p:sp>
-        <p:nvSpPr>
-          <p:cNvPr id="10" name="Shape 8"/>
-          <p:cNvSpPr/>
-          <p:nvPr/>
-        </p:nvSpPr>
-        <p:spPr>
-          <a:xfrm>
-            <a:off x="8110728" y="2377440"/>
-            <a:ext cx="3429000" cy="2651760"/>
-          </a:xfrm>
-          <a:prstGeom prst="roundRect">
-            <a:avLst>
-              <a:gd name="adj" fmla="val 2759"/>
-            </a:avLst>
-          </a:prstGeom>
-          <a:solidFill>
-            <a:srgbClr val="1C2530"/>
-          </a:solidFill>
-          <a:ln w="12700">
-            <a:solidFill>
-              <a:srgbClr val="1C2530"/>
-            </a:solidFill>
-            <a:prstDash val="solid"/>
-          </a:ln>
-        </p:spPr>
+              <a:t>68.5%</a:t>
+            </a:r>
+            <a:endParaRPr lang="en-US" sz="2800" dirty="0"/>
+          </a:p>
+        </p:txBody>
       </p:sp>
       <p:sp>
         <p:nvSpPr>
@@ -5251,34 +4773,34 @@
         </p:nvSpPr>
         <p:spPr>
           <a:xfrm>
-            <a:off x="8110728" y="3063240"/>
-            <a:ext cx="3429000" cy="914400"/>
-          </a:xfrm>
-          <a:prstGeom prst="rect">
-            <a:avLst/>
-          </a:prstGeom>
-          <a:noFill/>
-          <a:ln/>
-        </p:spPr>
-        <p:txBody>
-          <a:bodyPr wrap="square" lIns="0" tIns="0" rIns="0" bIns="0" rtlCol="0" anchor="ctr"/>
-          <a:lstStyle/>
-          <a:p>
-            <a:pPr algn="ctr" indent="0" marL="0">
-              <a:buNone/>
-            </a:pPr>
-            <a:r>
-              <a:rPr lang="en-US" sz="3400" b="1" dirty="0">
-                <a:solidFill>
-                  <a:srgbClr val="F5F7FA"/>
-                </a:solidFill>
-                <a:latin typeface="Cambria" pitchFamily="34" charset="0"/>
-                <a:ea typeface="Cambria" pitchFamily="34" charset="-122"/>
-                <a:cs typeface="Cambria" pitchFamily="34" charset="-120"/>
-              </a:rPr>
-              <a:t>118k – 216k</a:t>
-            </a:r>
-            <a:endParaRPr lang="en-US" sz="3400" dirty="0"/>
+            <a:off x="3794760" y="4453128"/>
+            <a:ext cx="7708392" cy="640080"/>
+          </a:xfrm>
+          <a:prstGeom prst="rect">
+            <a:avLst/>
+          </a:prstGeom>
+          <a:noFill/>
+          <a:ln/>
+        </p:spPr>
+        <p:txBody>
+          <a:bodyPr wrap="square" lIns="0" tIns="0" rIns="0" bIns="0" rtlCol="0" anchor="ctr"/>
+          <a:lstStyle/>
+          <a:p>
+            <a:pPr indent="0" marL="0">
+              <a:buNone/>
+            </a:pPr>
+            <a:r>
+              <a:rPr lang="en-US" sz="1350" dirty="0">
+                <a:solidFill>
+                  <a:srgbClr val="6B7280"/>
+                </a:solidFill>
+                <a:latin typeface="Calibri" pitchFamily="34" charset="0"/>
+                <a:ea typeface="Calibri" pitchFamily="34" charset="-122"/>
+                <a:cs typeface="Calibri" pitchFamily="34" charset="-120"/>
+              </a:rPr>
+              <a:t>of all volume comes from just ten customers — three carry 27.6%</a:t>
+            </a:r>
+            <a:endParaRPr lang="en-US" sz="1350" dirty="0"/>
           </a:p>
         </p:txBody>
       </p:sp>
@@ -5290,47 +4812,8 @@
         </p:nvSpPr>
         <p:spPr>
           <a:xfrm>
-            <a:off x="8385048" y="3977640"/>
-            <a:ext cx="2880360" cy="640080"/>
-          </a:xfrm>
-          <a:prstGeom prst="rect">
-            <a:avLst/>
-          </a:prstGeom>
-          <a:noFill/>
-          <a:ln/>
-        </p:spPr>
-        <p:txBody>
-          <a:bodyPr wrap="square" lIns="0" tIns="0" rIns="0" bIns="0" rtlCol="0" anchor="ctr"/>
-          <a:lstStyle/>
-          <a:p>
-            <a:pPr algn="ctr" indent="0" marL="0">
-              <a:buNone/>
-            </a:pPr>
-            <a:r>
-              <a:rPr lang="en-US" sz="1200" dirty="0">
-                <a:solidFill>
-                  <a:srgbClr val="C9D2DB"/>
-                </a:solidFill>
-                <a:latin typeface="Calibri" pitchFamily="34" charset="0"/>
-                <a:ea typeface="Calibri" pitchFamily="34" charset="-122"/>
-                <a:cs typeface="Calibri" pitchFamily="34" charset="-120"/>
-              </a:rPr>
-              <a:t>measured 8-in-10 range</a:t>
-            </a:r>
-            <a:endParaRPr lang="en-US" sz="1200" dirty="0"/>
-          </a:p>
-        </p:txBody>
-      </p:sp>
-      <p:sp>
-        <p:nvSpPr>
-          <p:cNvPr id="13" name="Text 11"/>
-          <p:cNvSpPr/>
-          <p:nvPr/>
-        </p:nvSpPr>
-        <p:spPr>
-          <a:xfrm>
-            <a:off x="685800" y="5623560"/>
-            <a:ext cx="10817352" cy="457200"/>
+            <a:off x="685800" y="5577840"/>
+            <a:ext cx="10817352" cy="594360"/>
           </a:xfrm>
           <a:prstGeom prst="rect">
             <a:avLst/>
@@ -5354,7 +4837,7 @@
                 <a:ea typeface="Calibri" pitchFamily="34" charset="-122"/>
                 <a:cs typeface="Calibri" pitchFamily="34" charset="-120"/>
               </a:rPr>
-              <a:t>Every product, every month — with the method used and its accuracy attached. Downloadable as one file.</a:t>
+              <a:t>This finding shapes the whole approach: no single model fits such a catalogue, and the largest orders are knowable from the sales pipeline before any statistic sees them.</a:t>
             </a:r>
             <a:endParaRPr lang="en-US" sz="1250" dirty="0"/>
           </a:p>
@@ -5425,7 +4908,7 @@
                 <a:ea typeface="Calibri" pitchFamily="34" charset="-122"/>
                 <a:cs typeface="Calibri" pitchFamily="34" charset="-120"/>
               </a:rPr>
-              <a:t>05 — CROSS-CHECK</a:t>
+              <a:t>05 — WORK DONE: THE SYSTEM</a:t>
             </a:r>
             <a:endParaRPr lang="en-US" sz="1050" dirty="0"/>
           </a:p>
@@ -5464,7 +4947,7 @@
                 <a:ea typeface="Cambria" pitchFamily="34" charset="-122"/>
                 <a:cs typeface="Cambria" pitchFamily="34" charset="-120"/>
               </a:rPr>
-              <a:t>Two independent routes, one answer.</a:t>
+              <a:t>One pipeline, four steps.</a:t>
             </a:r>
             <a:endParaRPr lang="en-US" sz="3800" dirty="0"/>
           </a:p>
@@ -5478,73 +4961,73 @@
         </p:nvSpPr>
         <p:spPr>
           <a:xfrm>
-            <a:off x="685800" y="2377440"/>
-            <a:ext cx="4937760" cy="365760"/>
-          </a:xfrm>
-          <a:prstGeom prst="rect">
-            <a:avLst/>
-          </a:prstGeom>
-          <a:noFill/>
-          <a:ln/>
-        </p:spPr>
-        <p:txBody>
-          <a:bodyPr wrap="square" lIns="0" tIns="0" rIns="0" bIns="0" rtlCol="0" anchor="ctr"/>
-          <a:lstStyle/>
-          <a:p>
-            <a:pPr indent="0" marL="0">
-              <a:buNone/>
-            </a:pPr>
-            <a:r>
-              <a:rPr lang="en-US" sz="1300" b="1" dirty="0">
-                <a:solidFill>
-                  <a:srgbClr val="6B7280"/>
-                </a:solidFill>
-                <a:latin typeface="Calibri" pitchFamily="34" charset="0"/>
-                <a:ea typeface="Calibri" pitchFamily="34" charset="-122"/>
-                <a:cs typeface="Calibri" pitchFamily="34" charset="-120"/>
-              </a:rPr>
-              <a:t>The statistical system</a:t>
-            </a:r>
-            <a:endParaRPr lang="en-US" sz="1300" dirty="0"/>
-          </a:p>
-        </p:txBody>
-      </p:sp>
-      <p:sp>
-        <p:nvSpPr>
-          <p:cNvPr id="5" name="Text 3"/>
-          <p:cNvSpPr/>
-          <p:nvPr/>
-        </p:nvSpPr>
-        <p:spPr>
-          <a:xfrm>
-            <a:off x="685800" y="2788920"/>
-            <a:ext cx="4937760" cy="914400"/>
-          </a:xfrm>
-          <a:prstGeom prst="rect">
-            <a:avLst/>
-          </a:prstGeom>
-          <a:noFill/>
-          <a:ln/>
-        </p:spPr>
-        <p:txBody>
-          <a:bodyPr wrap="square" lIns="0" tIns="0" rIns="0" bIns="0" rtlCol="0" anchor="ctr"/>
-          <a:lstStyle/>
-          <a:p>
-            <a:pPr indent="0" marL="0">
-              <a:buNone/>
-            </a:pPr>
-            <a:r>
-              <a:rPr lang="en-US" sz="4000" b="1" dirty="0">
-                <a:solidFill>
-                  <a:srgbClr val="1C2530"/>
+            <a:off x="685800" y="2286000"/>
+            <a:ext cx="2384298" cy="685800"/>
+          </a:xfrm>
+          <a:prstGeom prst="rect">
+            <a:avLst/>
+          </a:prstGeom>
+          <a:noFill/>
+          <a:ln/>
+        </p:spPr>
+        <p:txBody>
+          <a:bodyPr wrap="square" lIns="0" tIns="0" rIns="0" bIns="0" rtlCol="0" anchor="ctr"/>
+          <a:lstStyle/>
+          <a:p>
+            <a:pPr indent="0" marL="0">
+              <a:buNone/>
+            </a:pPr>
+            <a:r>
+              <a:rPr lang="en-US" sz="3000" i="1" dirty="0">
+                <a:solidFill>
+                  <a:srgbClr val="C8102E"/>
                 </a:solidFill>
                 <a:latin typeface="Cambria" pitchFamily="34" charset="0"/>
                 <a:ea typeface="Cambria" pitchFamily="34" charset="-122"/>
                 <a:cs typeface="Cambria" pitchFamily="34" charset="-120"/>
               </a:rPr>
-              <a:t>176,044</a:t>
-            </a:r>
-            <a:endParaRPr lang="en-US" sz="4000" dirty="0"/>
+              <a:t>01</a:t>
+            </a:r>
+            <a:endParaRPr lang="en-US" sz="3000" dirty="0"/>
+          </a:p>
+        </p:txBody>
+      </p:sp>
+      <p:sp>
+        <p:nvSpPr>
+          <p:cNvPr id="5" name="Text 3"/>
+          <p:cNvSpPr/>
+          <p:nvPr/>
+        </p:nvSpPr>
+        <p:spPr>
+          <a:xfrm>
+            <a:off x="685800" y="3017520"/>
+            <a:ext cx="2384298" cy="411480"/>
+          </a:xfrm>
+          <a:prstGeom prst="rect">
+            <a:avLst/>
+          </a:prstGeom>
+          <a:noFill/>
+          <a:ln/>
+        </p:spPr>
+        <p:txBody>
+          <a:bodyPr wrap="square" lIns="0" tIns="0" rIns="0" bIns="0" rtlCol="0" anchor="ctr"/>
+          <a:lstStyle/>
+          <a:p>
+            <a:pPr indent="0" marL="0">
+              <a:buNone/>
+            </a:pPr>
+            <a:r>
+              <a:rPr lang="en-US" sz="1700" b="1" dirty="0">
+                <a:solidFill>
+                  <a:srgbClr val="1C2530"/>
+                </a:solidFill>
+                <a:latin typeface="Calibri" pitchFamily="34" charset="0"/>
+                <a:ea typeface="Calibri" pitchFamily="34" charset="-122"/>
+                <a:cs typeface="Calibri" pitchFamily="34" charset="-120"/>
+              </a:rPr>
+              <a:t>Clean</a:t>
+            </a:r>
+            <a:endParaRPr lang="en-US" sz="1700" dirty="0"/>
           </a:p>
         </p:txBody>
       </p:sp>
@@ -5556,8 +5039,8 @@
         </p:nvSpPr>
         <p:spPr>
           <a:xfrm>
-            <a:off x="685800" y="3749040"/>
-            <a:ext cx="4937760" cy="731520"/>
+            <a:off x="685800" y="3474720"/>
+            <a:ext cx="2384298" cy="1463040"/>
           </a:xfrm>
           <a:prstGeom prst="rect">
             <a:avLst/>
@@ -5584,7 +5067,7 @@
                 <a:ea typeface="Calibri" pitchFamily="34" charset="-122"/>
                 <a:cs typeface="Calibri" pitchFamily="34" charset="-120"/>
               </a:rPr>
-              <a:t>bottom-up: thousands of per-product model tournaments</a:t>
+              <a:t>272,000 lines reconciled against both master lists; every decision logged</a:t>
             </a:r>
             <a:endParaRPr lang="en-US" sz="1200" dirty="0"/>
           </a:p>
@@ -5598,73 +5081,73 @@
         </p:nvSpPr>
         <p:spPr>
           <a:xfrm>
-            <a:off x="6537960" y="2377440"/>
-            <a:ext cx="4937760" cy="365760"/>
-          </a:xfrm>
-          <a:prstGeom prst="rect">
-            <a:avLst/>
-          </a:prstGeom>
-          <a:noFill/>
-          <a:ln/>
-        </p:spPr>
-        <p:txBody>
-          <a:bodyPr wrap="square" lIns="0" tIns="0" rIns="0" bIns="0" rtlCol="0" anchor="ctr"/>
-          <a:lstStyle/>
-          <a:p>
-            <a:pPr indent="0" marL="0">
-              <a:buNone/>
-            </a:pPr>
-            <a:r>
-              <a:rPr lang="en-US" sz="1300" b="1" dirty="0">
-                <a:solidFill>
-                  <a:srgbClr val="6B7280"/>
-                </a:solidFill>
-                <a:latin typeface="Calibri" pitchFamily="34" charset="0"/>
-                <a:ea typeface="Calibri" pitchFamily="34" charset="-122"/>
-                <a:cs typeface="Calibri" pitchFamily="34" charset="-120"/>
-              </a:rPr>
-              <a:t>An analyst’s reasoning</a:t>
-            </a:r>
-            <a:endParaRPr lang="en-US" sz="1300" dirty="0"/>
-          </a:p>
-        </p:txBody>
-      </p:sp>
-      <p:sp>
-        <p:nvSpPr>
-          <p:cNvPr id="8" name="Text 6"/>
-          <p:cNvSpPr/>
-          <p:nvPr/>
-        </p:nvSpPr>
-        <p:spPr>
-          <a:xfrm>
-            <a:off x="6537960" y="2788920"/>
-            <a:ext cx="4937760" cy="914400"/>
-          </a:xfrm>
-          <a:prstGeom prst="rect">
-            <a:avLst/>
-          </a:prstGeom>
-          <a:noFill/>
-          <a:ln/>
-        </p:spPr>
-        <p:txBody>
-          <a:bodyPr wrap="square" lIns="0" tIns="0" rIns="0" bIns="0" rtlCol="0" anchor="ctr"/>
-          <a:lstStyle/>
-          <a:p>
-            <a:pPr indent="0" marL="0">
-              <a:buNone/>
-            </a:pPr>
-            <a:r>
-              <a:rPr lang="en-US" sz="4000" b="1" dirty="0">
-                <a:solidFill>
-                  <a:srgbClr val="1C2530"/>
+            <a:off x="3390138" y="2286000"/>
+            <a:ext cx="2384298" cy="685800"/>
+          </a:xfrm>
+          <a:prstGeom prst="rect">
+            <a:avLst/>
+          </a:prstGeom>
+          <a:noFill/>
+          <a:ln/>
+        </p:spPr>
+        <p:txBody>
+          <a:bodyPr wrap="square" lIns="0" tIns="0" rIns="0" bIns="0" rtlCol="0" anchor="ctr"/>
+          <a:lstStyle/>
+          <a:p>
+            <a:pPr indent="0" marL="0">
+              <a:buNone/>
+            </a:pPr>
+            <a:r>
+              <a:rPr lang="en-US" sz="3000" i="1" dirty="0">
+                <a:solidFill>
+                  <a:srgbClr val="C8102E"/>
                 </a:solidFill>
                 <a:latin typeface="Cambria" pitchFamily="34" charset="0"/>
                 <a:ea typeface="Cambria" pitchFamily="34" charset="-122"/>
                 <a:cs typeface="Cambria" pitchFamily="34" charset="-120"/>
               </a:rPr>
-              <a:t>≈183,000</a:t>
-            </a:r>
-            <a:endParaRPr lang="en-US" sz="4000" dirty="0"/>
+              <a:t>02</a:t>
+            </a:r>
+            <a:endParaRPr lang="en-US" sz="3000" dirty="0"/>
+          </a:p>
+        </p:txBody>
+      </p:sp>
+      <p:sp>
+        <p:nvSpPr>
+          <p:cNvPr id="8" name="Text 6"/>
+          <p:cNvSpPr/>
+          <p:nvPr/>
+        </p:nvSpPr>
+        <p:spPr>
+          <a:xfrm>
+            <a:off x="3390138" y="3017520"/>
+            <a:ext cx="2384298" cy="411480"/>
+          </a:xfrm>
+          <a:prstGeom prst="rect">
+            <a:avLst/>
+          </a:prstGeom>
+          <a:noFill/>
+          <a:ln/>
+        </p:spPr>
+        <p:txBody>
+          <a:bodyPr wrap="square" lIns="0" tIns="0" rIns="0" bIns="0" rtlCol="0" anchor="ctr"/>
+          <a:lstStyle/>
+          <a:p>
+            <a:pPr indent="0" marL="0">
+              <a:buNone/>
+            </a:pPr>
+            <a:r>
+              <a:rPr lang="en-US" sz="1700" b="1" dirty="0">
+                <a:solidFill>
+                  <a:srgbClr val="1C2530"/>
+                </a:solidFill>
+                <a:latin typeface="Calibri" pitchFamily="34" charset="0"/>
+                <a:ea typeface="Calibri" pitchFamily="34" charset="-122"/>
+                <a:cs typeface="Calibri" pitchFamily="34" charset="-120"/>
+              </a:rPr>
+              <a:t>Compete</a:t>
+            </a:r>
+            <a:endParaRPr lang="en-US" sz="1700" dirty="0"/>
           </a:p>
         </p:txBody>
       </p:sp>
@@ -5676,8 +5159,8 @@
         </p:nvSpPr>
         <p:spPr>
           <a:xfrm>
-            <a:off x="6537960" y="3749040"/>
-            <a:ext cx="4937760" cy="731520"/>
+            <a:off x="3390138" y="3474720"/>
+            <a:ext cx="2384298" cy="1463040"/>
           </a:xfrm>
           <a:prstGeom prst="rect">
             <a:avLst/>
@@ -5704,7 +5187,7 @@
                 <a:ea typeface="Calibri" pitchFamily="34" charset="-122"/>
                 <a:cs typeface="Calibri" pitchFamily="34" charset="-120"/>
               </a:rPr>
-              <a:t>top-down: run rate, event layer, customer momentum — no models</a:t>
+              <a:t>Up to 24 forecasting methods fight per product on two hidden years</a:t>
             </a:r>
             <a:endParaRPr lang="en-US" sz="1200" dirty="0"/>
           </a:p>
@@ -5718,24 +5201,24 @@
         </p:nvSpPr>
         <p:spPr>
           <a:xfrm>
-            <a:off x="685800" y="4892040"/>
-            <a:ext cx="10817352" cy="548640"/>
-          </a:xfrm>
-          <a:prstGeom prst="rect">
-            <a:avLst/>
-          </a:prstGeom>
-          <a:noFill/>
-          <a:ln/>
-        </p:spPr>
-        <p:txBody>
-          <a:bodyPr wrap="square" lIns="0" tIns="0" rIns="0" bIns="0" rtlCol="0" anchor="ctr"/>
-          <a:lstStyle/>
-          <a:p>
-            <a:pPr indent="0" marL="0">
-              <a:buNone/>
-            </a:pPr>
-            <a:r>
-              <a:rPr lang="en-US" sz="2000" i="1" dirty="0">
+            <a:off x="6094476" y="2286000"/>
+            <a:ext cx="2384298" cy="685800"/>
+          </a:xfrm>
+          <a:prstGeom prst="rect">
+            <a:avLst/>
+          </a:prstGeom>
+          <a:noFill/>
+          <a:ln/>
+        </p:spPr>
+        <p:txBody>
+          <a:bodyPr wrap="square" lIns="0" tIns="0" rIns="0" bIns="0" rtlCol="0" anchor="ctr"/>
+          <a:lstStyle/>
+          <a:p>
+            <a:pPr indent="0" marL="0">
+              <a:buNone/>
+            </a:pPr>
+            <a:r>
+              <a:rPr lang="en-US" sz="3000" i="1" dirty="0">
                 <a:solidFill>
                   <a:srgbClr val="C8102E"/>
                 </a:solidFill>
@@ -5743,9 +5226,9 @@
                 <a:ea typeface="Cambria" pitchFamily="34" charset="-122"/>
                 <a:cs typeface="Cambria" pitchFamily="34" charset="-120"/>
               </a:rPr>
-              <a:t>agreement within 4%</a:t>
-            </a:r>
-            <a:endParaRPr lang="en-US" sz="2000" dirty="0"/>
+              <a:t>03</a:t>
+            </a:r>
+            <a:endParaRPr lang="en-US" sz="3000" dirty="0"/>
           </a:p>
         </p:txBody>
       </p:sp>
@@ -5757,8 +5240,209 @@
         </p:nvSpPr>
         <p:spPr>
           <a:xfrm>
-            <a:off x="685800" y="5577840"/>
-            <a:ext cx="10817352" cy="594360"/>
+            <a:off x="6094476" y="3017520"/>
+            <a:ext cx="2384298" cy="411480"/>
+          </a:xfrm>
+          <a:prstGeom prst="rect">
+            <a:avLst/>
+          </a:prstGeom>
+          <a:noFill/>
+          <a:ln/>
+        </p:spPr>
+        <p:txBody>
+          <a:bodyPr wrap="square" lIns="0" tIns="0" rIns="0" bIns="0" rtlCol="0" anchor="ctr"/>
+          <a:lstStyle/>
+          <a:p>
+            <a:pPr indent="0" marL="0">
+              <a:buNone/>
+            </a:pPr>
+            <a:r>
+              <a:rPr lang="en-US" sz="1700" b="1" dirty="0">
+                <a:solidFill>
+                  <a:srgbClr val="1C2530"/>
+                </a:solidFill>
+                <a:latin typeface="Calibri" pitchFamily="34" charset="0"/>
+                <a:ea typeface="Calibri" pitchFamily="34" charset="-122"/>
+                <a:cs typeface="Calibri" pitchFamily="34" charset="-120"/>
+              </a:rPr>
+              <a:t>Forecast</a:t>
+            </a:r>
+            <a:endParaRPr lang="en-US" sz="1700" dirty="0"/>
+          </a:p>
+        </p:txBody>
+      </p:sp>
+      <p:sp>
+        <p:nvSpPr>
+          <p:cNvPr id="12" name="Text 10"/>
+          <p:cNvSpPr/>
+          <p:nvPr/>
+        </p:nvSpPr>
+        <p:spPr>
+          <a:xfrm>
+            <a:off x="6094476" y="3474720"/>
+            <a:ext cx="2384298" cy="1463040"/>
+          </a:xfrm>
+          <a:prstGeom prst="rect">
+            <a:avLst/>
+          </a:prstGeom>
+          <a:noFill/>
+          <a:ln/>
+        </p:spPr>
+        <p:txBody>
+          <a:bodyPr wrap="square" lIns="0" tIns="0" rIns="0" bIns="0" rtlCol="0" anchor="ctr"/>
+          <a:lstStyle/>
+          <a:p>
+            <a:pPr indent="0" marL="0">
+              <a:lnSpc>
+                <a:spcPct val="115000"/>
+              </a:lnSpc>
+              <a:buNone/>
+            </a:pPr>
+            <a:r>
+              <a:rPr lang="en-US" sz="1200" dirty="0">
+                <a:solidFill>
+                  <a:srgbClr val="6B7280"/>
+                </a:solidFill>
+                <a:latin typeface="Calibri" pitchFamily="34" charset="0"/>
+                <a:ea typeface="Calibri" pitchFamily="34" charset="-122"/>
+                <a:cs typeface="Calibri" pitchFamily="34" charset="-120"/>
+              </a:rPr>
+              <a:t>FY2025 by product and month, with a measured confidence range</a:t>
+            </a:r>
+            <a:endParaRPr lang="en-US" sz="1200" dirty="0"/>
+          </a:p>
+        </p:txBody>
+      </p:sp>
+      <p:sp>
+        <p:nvSpPr>
+          <p:cNvPr id="13" name="Text 11"/>
+          <p:cNvSpPr/>
+          <p:nvPr/>
+        </p:nvSpPr>
+        <p:spPr>
+          <a:xfrm>
+            <a:off x="8798814" y="2286000"/>
+            <a:ext cx="2384298" cy="685800"/>
+          </a:xfrm>
+          <a:prstGeom prst="rect">
+            <a:avLst/>
+          </a:prstGeom>
+          <a:noFill/>
+          <a:ln/>
+        </p:spPr>
+        <p:txBody>
+          <a:bodyPr wrap="square" lIns="0" tIns="0" rIns="0" bIns="0" rtlCol="0" anchor="ctr"/>
+          <a:lstStyle/>
+          <a:p>
+            <a:pPr indent="0" marL="0">
+              <a:buNone/>
+            </a:pPr>
+            <a:r>
+              <a:rPr lang="en-US" sz="3000" i="1" dirty="0">
+                <a:solidFill>
+                  <a:srgbClr val="C8102E"/>
+                </a:solidFill>
+                <a:latin typeface="Cambria" pitchFamily="34" charset="0"/>
+                <a:ea typeface="Cambria" pitchFamily="34" charset="-122"/>
+                <a:cs typeface="Cambria" pitchFamily="34" charset="-120"/>
+              </a:rPr>
+              <a:t>04</a:t>
+            </a:r>
+            <a:endParaRPr lang="en-US" sz="3000" dirty="0"/>
+          </a:p>
+        </p:txBody>
+      </p:sp>
+      <p:sp>
+        <p:nvSpPr>
+          <p:cNvPr id="14" name="Text 12"/>
+          <p:cNvSpPr/>
+          <p:nvPr/>
+        </p:nvSpPr>
+        <p:spPr>
+          <a:xfrm>
+            <a:off x="8798814" y="3017520"/>
+            <a:ext cx="2384298" cy="411480"/>
+          </a:xfrm>
+          <a:prstGeom prst="rect">
+            <a:avLst/>
+          </a:prstGeom>
+          <a:noFill/>
+          <a:ln/>
+        </p:spPr>
+        <p:txBody>
+          <a:bodyPr wrap="square" lIns="0" tIns="0" rIns="0" bIns="0" rtlCol="0" anchor="ctr"/>
+          <a:lstStyle/>
+          <a:p>
+            <a:pPr indent="0" marL="0">
+              <a:buNone/>
+            </a:pPr>
+            <a:r>
+              <a:rPr lang="en-US" sz="1700" b="1" dirty="0">
+                <a:solidFill>
+                  <a:srgbClr val="1C2530"/>
+                </a:solidFill>
+                <a:latin typeface="Calibri" pitchFamily="34" charset="0"/>
+                <a:ea typeface="Calibri" pitchFamily="34" charset="-122"/>
+                <a:cs typeface="Calibri" pitchFamily="34" charset="-120"/>
+              </a:rPr>
+              <a:t>Decide</a:t>
+            </a:r>
+            <a:endParaRPr lang="en-US" sz="1700" dirty="0"/>
+          </a:p>
+        </p:txBody>
+      </p:sp>
+      <p:sp>
+        <p:nvSpPr>
+          <p:cNvPr id="15" name="Text 13"/>
+          <p:cNvSpPr/>
+          <p:nvPr/>
+        </p:nvSpPr>
+        <p:spPr>
+          <a:xfrm>
+            <a:off x="8798814" y="3474720"/>
+            <a:ext cx="2384298" cy="1463040"/>
+          </a:xfrm>
+          <a:prstGeom prst="rect">
+            <a:avLst/>
+          </a:prstGeom>
+          <a:noFill/>
+          <a:ln/>
+        </p:spPr>
+        <p:txBody>
+          <a:bodyPr wrap="square" lIns="0" tIns="0" rIns="0" bIns="0" rtlCol="0" anchor="ctr"/>
+          <a:lstStyle/>
+          <a:p>
+            <a:pPr indent="0" marL="0">
+              <a:lnSpc>
+                <a:spcPct val="115000"/>
+              </a:lnSpc>
+              <a:buNone/>
+            </a:pPr>
+            <a:r>
+              <a:rPr lang="en-US" sz="1200" dirty="0">
+                <a:solidFill>
+                  <a:srgbClr val="6B7280"/>
+                </a:solidFill>
+                <a:latin typeface="Calibri" pitchFamily="34" charset="0"/>
+                <a:ea typeface="Calibri" pitchFamily="34" charset="-122"/>
+                <a:cs typeface="Calibri" pitchFamily="34" charset="-120"/>
+              </a:rPr>
+              <a:t>A dashboard for non-analysts; new data re-runs everything in two minutes</a:t>
+            </a:r>
+            <a:endParaRPr lang="en-US" sz="1200" dirty="0"/>
+          </a:p>
+        </p:txBody>
+      </p:sp>
+      <p:sp>
+        <p:nvSpPr>
+          <p:cNvPr id="16" name="Text 14"/>
+          <p:cNvSpPr/>
+          <p:nvPr/>
+        </p:nvSpPr>
+        <p:spPr>
+          <a:xfrm>
+            <a:off x="685800" y="5623560"/>
+            <a:ext cx="10817352" cy="548640"/>
           </a:xfrm>
           <a:prstGeom prst="rect">
             <a:avLst/>
@@ -5782,7 +5466,7 @@
                 <a:ea typeface="Calibri" pitchFamily="34" charset="-122"/>
                 <a:cs typeface="Calibri" pitchFamily="34" charset="-120"/>
               </a:rPr>
-              <a:t>The judgmental route also quantified what per-product models cannot see: roughly 2,000 units a year arrive on products that do not exist yet.</a:t>
+              <a:t>No model was assumed. Each product’s method must win a back-test against every alternative its history can support.</a:t>
             </a:r>
             <a:endParaRPr lang="en-US" sz="1250" dirty="0"/>
           </a:p>
@@ -5853,7 +5537,7 @@
                 <a:ea typeface="Calibri" pitchFamily="34" charset="-122"/>
                 <a:cs typeface="Calibri" pitchFamily="34" charset="-120"/>
               </a:rPr>
-              <a:t>06 — ACCURACY, PART ONE</a:t>
+              <a:t>06 — WORK DONE: THE DASHBOARD</a:t>
             </a:r>
             <a:endParaRPr lang="en-US" sz="1050" dirty="0"/>
           </a:p>
@@ -5892,7 +5576,7 @@
                 <a:ea typeface="Cambria" pitchFamily="34" charset="-122"/>
                 <a:cs typeface="Cambria" pitchFamily="34" charset="-120"/>
               </a:rPr>
-              <a:t>Better than the obvious alternatives.</a:t>
+              <a:t>Built for the whole team, not analysts.</a:t>
             </a:r>
             <a:endParaRPr lang="en-US" sz="3800" dirty="0"/>
           </a:p>
@@ -5900,42 +5584,30 @@
       </p:sp>
       <p:sp>
         <p:nvSpPr>
-          <p:cNvPr id="4" name="Text 2"/>
-          <p:cNvSpPr/>
-          <p:nvPr/>
-        </p:nvSpPr>
-        <p:spPr>
-          <a:xfrm>
-            <a:off x="685800" y="2103120"/>
-            <a:ext cx="10817352" cy="365760"/>
-          </a:xfrm>
-          <a:prstGeom prst="rect">
-            <a:avLst/>
-          </a:prstGeom>
-          <a:noFill/>
-          <a:ln/>
-        </p:spPr>
-        <p:txBody>
-          <a:bodyPr wrap="square" lIns="0" tIns="0" rIns="0" bIns="0" rtlCol="0" anchor="ctr"/>
-          <a:lstStyle/>
-          <a:p>
-            <a:pPr indent="0" marL="0">
-              <a:buNone/>
-            </a:pPr>
-            <a:r>
-              <a:rPr lang="en-US" sz="1250" dirty="0">
-                <a:solidFill>
-                  <a:srgbClr val="6B7280"/>
-                </a:solidFill>
-                <a:latin typeface="Calibri" pitchFamily="34" charset="0"/>
-                <a:ea typeface="Calibri" pitchFamily="34" charset="-122"/>
-                <a:cs typeface="Calibri" pitchFamily="34" charset="-120"/>
-              </a:rPr>
-              <a:t>Error on the withheld year FY2024 (WAPE — error as a share of units sold):</a:t>
-            </a:r>
-            <a:endParaRPr lang="en-US" sz="1250" dirty="0"/>
-          </a:p>
-        </p:txBody>
+          <p:cNvPr id="4" name="Shape 2"/>
+          <p:cNvSpPr/>
+          <p:nvPr/>
+        </p:nvSpPr>
+        <p:spPr>
+          <a:xfrm>
+            <a:off x="685800" y="2377440"/>
+            <a:ext cx="3429000" cy="2651760"/>
+          </a:xfrm>
+          <a:prstGeom prst="roundRect">
+            <a:avLst>
+              <a:gd name="adj" fmla="val 2759"/>
+            </a:avLst>
+          </a:prstGeom>
+          <a:solidFill>
+            <a:srgbClr val="1C2530"/>
+          </a:solidFill>
+          <a:ln w="12700">
+            <a:solidFill>
+              <a:srgbClr val="1C2530"/>
+            </a:solidFill>
+            <a:prstDash val="solid"/>
+          </a:ln>
+        </p:spPr>
       </p:sp>
       <p:sp>
         <p:nvSpPr>
@@ -5945,73 +5617,76 @@
         </p:nvSpPr>
         <p:spPr>
           <a:xfrm>
-            <a:off x="685800" y="2788920"/>
-            <a:ext cx="6858000" cy="548640"/>
-          </a:xfrm>
-          <a:prstGeom prst="rect">
-            <a:avLst/>
-          </a:prstGeom>
-          <a:noFill/>
-          <a:ln/>
-        </p:spPr>
-        <p:txBody>
-          <a:bodyPr wrap="square" lIns="0" tIns="0" rIns="0" bIns="0" rtlCol="0" anchor="ctr"/>
-          <a:lstStyle/>
-          <a:p>
-            <a:pPr indent="0" marL="0">
-              <a:buNone/>
-            </a:pPr>
-            <a:r>
-              <a:rPr lang="en-US" sz="1500" dirty="0">
-                <a:solidFill>
-                  <a:srgbClr val="6B7280"/>
-                </a:solidFill>
-                <a:latin typeface="Calibri" pitchFamily="34" charset="0"/>
-                <a:ea typeface="Calibri" pitchFamily="34" charset="-122"/>
-                <a:cs typeface="Calibri" pitchFamily="34" charset="-120"/>
-              </a:rPr>
-              <a:t>Repeat last year unchanged</a:t>
-            </a:r>
-            <a:endParaRPr lang="en-US" sz="1500" dirty="0"/>
-          </a:p>
-        </p:txBody>
-      </p:sp>
-      <p:sp>
-        <p:nvSpPr>
-          <p:cNvPr id="6" name="Text 4"/>
-          <p:cNvSpPr/>
-          <p:nvPr/>
-        </p:nvSpPr>
-        <p:spPr>
-          <a:xfrm>
-            <a:off x="8183880" y="2788920"/>
-            <a:ext cx="2743200" cy="548640"/>
-          </a:xfrm>
-          <a:prstGeom prst="rect">
-            <a:avLst/>
-          </a:prstGeom>
-          <a:noFill/>
-          <a:ln/>
-        </p:spPr>
-        <p:txBody>
-          <a:bodyPr wrap="square" lIns="0" tIns="0" rIns="0" bIns="0" rtlCol="0" anchor="ctr"/>
-          <a:lstStyle/>
-          <a:p>
-            <a:pPr algn="r" indent="0" marL="0">
-              <a:buNone/>
-            </a:pPr>
-            <a:r>
-              <a:rPr lang="en-US" sz="2000" b="1" dirty="0">
-                <a:solidFill>
-                  <a:srgbClr val="6B7280"/>
+            <a:off x="1005840" y="2788920"/>
+            <a:ext cx="2788920" cy="777240"/>
+          </a:xfrm>
+          <a:prstGeom prst="rect">
+            <a:avLst/>
+          </a:prstGeom>
+          <a:noFill/>
+          <a:ln/>
+        </p:spPr>
+        <p:txBody>
+          <a:bodyPr wrap="square" lIns="0" tIns="0" rIns="0" bIns="0" rtlCol="0" anchor="ctr"/>
+          <a:lstStyle/>
+          <a:p>
+            <a:pPr indent="0" marL="0">
+              <a:buNone/>
+            </a:pPr>
+            <a:r>
+              <a:rPr lang="en-US" sz="1900" b="1" dirty="0">
+                <a:solidFill>
+                  <a:srgbClr val="F5F7FA"/>
                 </a:solidFill>
                 <a:latin typeface="Cambria" pitchFamily="34" charset="0"/>
                 <a:ea typeface="Cambria" pitchFamily="34" charset="-122"/>
                 <a:cs typeface="Cambria" pitchFamily="34" charset="-120"/>
               </a:rPr>
-              <a:t>0.845</a:t>
-            </a:r>
-            <a:endParaRPr lang="en-US" sz="2000" dirty="0"/>
+              <a:t>Forecast views</a:t>
+            </a:r>
+            <a:endParaRPr lang="en-US" sz="1900" dirty="0"/>
+          </a:p>
+        </p:txBody>
+      </p:sp>
+      <p:sp>
+        <p:nvSpPr>
+          <p:cNvPr id="6" name="Text 4"/>
+          <p:cNvSpPr/>
+          <p:nvPr/>
+        </p:nvSpPr>
+        <p:spPr>
+          <a:xfrm>
+            <a:off x="1005840" y="3611880"/>
+            <a:ext cx="2788920" cy="1188720"/>
+          </a:xfrm>
+          <a:prstGeom prst="rect">
+            <a:avLst/>
+          </a:prstGeom>
+          <a:noFill/>
+          <a:ln/>
+        </p:spPr>
+        <p:txBody>
+          <a:bodyPr wrap="square" lIns="0" tIns="0" rIns="0" bIns="0" rtlCol="0" anchor="ctr"/>
+          <a:lstStyle/>
+          <a:p>
+            <a:pPr indent="0" marL="0">
+              <a:lnSpc>
+                <a:spcPct val="120000"/>
+              </a:lnSpc>
+              <a:buNone/>
+            </a:pPr>
+            <a:r>
+              <a:rPr lang="en-US" sz="1200" dirty="0">
+                <a:solidFill>
+                  <a:srgbClr val="C9D2DB"/>
+                </a:solidFill>
+                <a:latin typeface="Calibri" pitchFamily="34" charset="0"/>
+                <a:ea typeface="Calibri" pitchFamily="34" charset="-122"/>
+                <a:cs typeface="Calibri" pitchFamily="34" charset="-120"/>
+              </a:rPr>
+              <a:t>company, category, product and customer — history and forecast on one chart</a:t>
+            </a:r>
+            <a:endParaRPr lang="en-US" sz="1200" dirty="0"/>
           </a:p>
         </p:txBody>
       </p:sp>
@@ -6023,16 +5698,20 @@
         </p:nvSpPr>
         <p:spPr>
           <a:xfrm>
-            <a:off x="685800" y="3456432"/>
-            <a:ext cx="10817352" cy="0"/>
-          </a:xfrm>
-          <a:prstGeom prst="line">
-            <a:avLst/>
-          </a:prstGeom>
-          <a:noFill/>
-          <a:ln w="9525">
+            <a:off x="4398264" y="2377440"/>
+            <a:ext cx="3429000" cy="2651760"/>
+          </a:xfrm>
+          <a:prstGeom prst="roundRect">
+            <a:avLst>
+              <a:gd name="adj" fmla="val 2759"/>
+            </a:avLst>
+          </a:prstGeom>
+          <a:solidFill>
+            <a:srgbClr val="1C2530"/>
+          </a:solidFill>
+          <a:ln w="12700">
             <a:solidFill>
-              <a:srgbClr val="E2E6EA"/>
+              <a:srgbClr val="1C2530"/>
             </a:solidFill>
             <a:prstDash val="solid"/>
           </a:ln>
@@ -6046,73 +5725,76 @@
         </p:nvSpPr>
         <p:spPr>
           <a:xfrm>
-            <a:off x="685800" y="3566160"/>
-            <a:ext cx="6858000" cy="548640"/>
-          </a:xfrm>
-          <a:prstGeom prst="rect">
-            <a:avLst/>
-          </a:prstGeom>
-          <a:noFill/>
-          <a:ln/>
-        </p:spPr>
-        <p:txBody>
-          <a:bodyPr wrap="square" lIns="0" tIns="0" rIns="0" bIns="0" rtlCol="0" anchor="ctr"/>
-          <a:lstStyle/>
-          <a:p>
-            <a:pPr indent="0" marL="0">
-              <a:buNone/>
-            </a:pPr>
-            <a:r>
-              <a:rPr lang="en-US" sz="1500" dirty="0">
-                <a:solidFill>
-                  <a:srgbClr val="6B7280"/>
-                </a:solidFill>
-                <a:latin typeface="Calibri" pitchFamily="34" charset="0"/>
-                <a:ea typeface="Calibri" pitchFamily="34" charset="-122"/>
-                <a:cs typeface="Calibri" pitchFamily="34" charset="-120"/>
-              </a:rPr>
-              <a:t>Spread last year’s total evenly</a:t>
-            </a:r>
-            <a:endParaRPr lang="en-US" sz="1500" dirty="0"/>
-          </a:p>
-        </p:txBody>
-      </p:sp>
-      <p:sp>
-        <p:nvSpPr>
-          <p:cNvPr id="9" name="Text 7"/>
-          <p:cNvSpPr/>
-          <p:nvPr/>
-        </p:nvSpPr>
-        <p:spPr>
-          <a:xfrm>
-            <a:off x="8183880" y="3566160"/>
-            <a:ext cx="2743200" cy="548640"/>
-          </a:xfrm>
-          <a:prstGeom prst="rect">
-            <a:avLst/>
-          </a:prstGeom>
-          <a:noFill/>
-          <a:ln/>
-        </p:spPr>
-        <p:txBody>
-          <a:bodyPr wrap="square" lIns="0" tIns="0" rIns="0" bIns="0" rtlCol="0" anchor="ctr"/>
-          <a:lstStyle/>
-          <a:p>
-            <a:pPr algn="r" indent="0" marL="0">
-              <a:buNone/>
-            </a:pPr>
-            <a:r>
-              <a:rPr lang="en-US" sz="2000" b="1" dirty="0">
-                <a:solidFill>
-                  <a:srgbClr val="6B7280"/>
+            <a:off x="4718304" y="2788920"/>
+            <a:ext cx="2788920" cy="777240"/>
+          </a:xfrm>
+          <a:prstGeom prst="rect">
+            <a:avLst/>
+          </a:prstGeom>
+          <a:noFill/>
+          <a:ln/>
+        </p:spPr>
+        <p:txBody>
+          <a:bodyPr wrap="square" lIns="0" tIns="0" rIns="0" bIns="0" rtlCol="0" anchor="ctr"/>
+          <a:lstStyle/>
+          <a:p>
+            <a:pPr indent="0" marL="0">
+              <a:buNone/>
+            </a:pPr>
+            <a:r>
+              <a:rPr lang="en-US" sz="1900" b="1" dirty="0">
+                <a:solidFill>
+                  <a:srgbClr val="F5F7FA"/>
                 </a:solidFill>
                 <a:latin typeface="Cambria" pitchFamily="34" charset="0"/>
                 <a:ea typeface="Cambria" pitchFamily="34" charset="-122"/>
                 <a:cs typeface="Cambria" pitchFamily="34" charset="-120"/>
               </a:rPr>
-              <a:t>0.692</a:t>
-            </a:r>
-            <a:endParaRPr lang="en-US" sz="2000" dirty="0"/>
+              <a:t>Inventory planning</a:t>
+            </a:r>
+            <a:endParaRPr lang="en-US" sz="1900" dirty="0"/>
+          </a:p>
+        </p:txBody>
+      </p:sp>
+      <p:sp>
+        <p:nvSpPr>
+          <p:cNvPr id="9" name="Text 7"/>
+          <p:cNvSpPr/>
+          <p:nvPr/>
+        </p:nvSpPr>
+        <p:spPr>
+          <a:xfrm>
+            <a:off x="4718304" y="3611880"/>
+            <a:ext cx="2788920" cy="1188720"/>
+          </a:xfrm>
+          <a:prstGeom prst="rect">
+            <a:avLst/>
+          </a:prstGeom>
+          <a:noFill/>
+          <a:ln/>
+        </p:spPr>
+        <p:txBody>
+          <a:bodyPr wrap="square" lIns="0" tIns="0" rIns="0" bIns="0" rtlCol="0" anchor="ctr"/>
+          <a:lstStyle/>
+          <a:p>
+            <a:pPr indent="0" marL="0">
+              <a:lnSpc>
+                <a:spcPct val="120000"/>
+              </a:lnSpc>
+              <a:buNone/>
+            </a:pPr>
+            <a:r>
+              <a:rPr lang="en-US" sz="1200" dirty="0">
+                <a:solidFill>
+                  <a:srgbClr val="C9D2DB"/>
+                </a:solidFill>
+                <a:latin typeface="Calibri" pitchFamily="34" charset="0"/>
+                <a:ea typeface="Calibri" pitchFamily="34" charset="-122"/>
+                <a:cs typeface="Calibri" pitchFamily="34" charset="-120"/>
+              </a:rPr>
+              <a:t>service level against stock held, simulated on a withheld year</a:t>
+            </a:r>
+            <a:endParaRPr lang="en-US" sz="1200" dirty="0"/>
           </a:p>
         </p:txBody>
       </p:sp>
@@ -6124,16 +5806,20 @@
         </p:nvSpPr>
         <p:spPr>
           <a:xfrm>
-            <a:off x="685800" y="4233672"/>
-            <a:ext cx="10817352" cy="0"/>
-          </a:xfrm>
-          <a:prstGeom prst="line">
-            <a:avLst/>
-          </a:prstGeom>
-          <a:noFill/>
-          <a:ln w="9525">
+            <a:off x="8110728" y="2377440"/>
+            <a:ext cx="3429000" cy="2651760"/>
+          </a:xfrm>
+          <a:prstGeom prst="roundRect">
+            <a:avLst>
+              <a:gd name="adj" fmla="val 2759"/>
+            </a:avLst>
+          </a:prstGeom>
+          <a:solidFill>
+            <a:srgbClr val="1C2530"/>
+          </a:solidFill>
+          <a:ln w="12700">
             <a:solidFill>
-              <a:srgbClr val="E2E6EA"/>
+              <a:srgbClr val="1C2530"/>
             </a:solidFill>
             <a:prstDash val="solid"/>
           </a:ln>
@@ -6147,73 +5833,76 @@
         </p:nvSpPr>
         <p:spPr>
           <a:xfrm>
-            <a:off x="685800" y="4343400"/>
-            <a:ext cx="6858000" cy="548640"/>
-          </a:xfrm>
-          <a:prstGeom prst="rect">
-            <a:avLst/>
-          </a:prstGeom>
-          <a:noFill/>
-          <a:ln/>
-        </p:spPr>
-        <p:txBody>
-          <a:bodyPr wrap="square" lIns="0" tIns="0" rIns="0" bIns="0" rtlCol="0" anchor="ctr"/>
-          <a:lstStyle/>
-          <a:p>
-            <a:pPr indent="0" marL="0">
-              <a:buNone/>
-            </a:pPr>
-            <a:r>
-              <a:rPr lang="en-US" sz="1700" b="1" dirty="0">
-                <a:solidFill>
-                  <a:srgbClr val="1C2530"/>
-                </a:solidFill>
-                <a:latin typeface="Calibri" pitchFamily="34" charset="0"/>
-                <a:ea typeface="Calibri" pitchFamily="34" charset="-122"/>
-                <a:cs typeface="Calibri" pitchFamily="34" charset="-120"/>
-              </a:rPr>
-              <a:t>This forecasting system</a:t>
-            </a:r>
-            <a:endParaRPr lang="en-US" sz="1700" dirty="0"/>
-          </a:p>
-        </p:txBody>
-      </p:sp>
-      <p:sp>
-        <p:nvSpPr>
-          <p:cNvPr id="12" name="Text 10"/>
-          <p:cNvSpPr/>
-          <p:nvPr/>
-        </p:nvSpPr>
-        <p:spPr>
-          <a:xfrm>
-            <a:off x="8183880" y="4343400"/>
-            <a:ext cx="2743200" cy="548640"/>
-          </a:xfrm>
-          <a:prstGeom prst="rect">
-            <a:avLst/>
-          </a:prstGeom>
-          <a:noFill/>
-          <a:ln/>
-        </p:spPr>
-        <p:txBody>
-          <a:bodyPr wrap="square" lIns="0" tIns="0" rIns="0" bIns="0" rtlCol="0" anchor="ctr"/>
-          <a:lstStyle/>
-          <a:p>
-            <a:pPr algn="r" indent="0" marL="0">
-              <a:buNone/>
-            </a:pPr>
-            <a:r>
-              <a:rPr lang="en-US" sz="2600" b="1" dirty="0">
-                <a:solidFill>
-                  <a:srgbClr val="C8102E"/>
+            <a:off x="8430768" y="2788920"/>
+            <a:ext cx="2788920" cy="777240"/>
+          </a:xfrm>
+          <a:prstGeom prst="rect">
+            <a:avLst/>
+          </a:prstGeom>
+          <a:noFill/>
+          <a:ln/>
+        </p:spPr>
+        <p:txBody>
+          <a:bodyPr wrap="square" lIns="0" tIns="0" rIns="0" bIns="0" rtlCol="0" anchor="ctr"/>
+          <a:lstStyle/>
+          <a:p>
+            <a:pPr indent="0" marL="0">
+              <a:buNone/>
+            </a:pPr>
+            <a:r>
+              <a:rPr lang="en-US" sz="1900" b="1" dirty="0">
+                <a:solidFill>
+                  <a:srgbClr val="F5F7FA"/>
                 </a:solidFill>
                 <a:latin typeface="Cambria" pitchFamily="34" charset="0"/>
                 <a:ea typeface="Cambria" pitchFamily="34" charset="-122"/>
                 <a:cs typeface="Cambria" pitchFamily="34" charset="-120"/>
               </a:rPr>
-              <a:t>0.636</a:t>
-            </a:r>
-            <a:endParaRPr lang="en-US" sz="2600" dirty="0"/>
+              <a:t>Evidence &amp; refresh</a:t>
+            </a:r>
+            <a:endParaRPr lang="en-US" sz="1900" dirty="0"/>
+          </a:p>
+        </p:txBody>
+      </p:sp>
+      <p:sp>
+        <p:nvSpPr>
+          <p:cNvPr id="12" name="Text 10"/>
+          <p:cNvSpPr/>
+          <p:nvPr/>
+        </p:nvSpPr>
+        <p:spPr>
+          <a:xfrm>
+            <a:off x="8430768" y="3611880"/>
+            <a:ext cx="2788920" cy="1188720"/>
+          </a:xfrm>
+          <a:prstGeom prst="rect">
+            <a:avLst/>
+          </a:prstGeom>
+          <a:noFill/>
+          <a:ln/>
+        </p:spPr>
+        <p:txBody>
+          <a:bodyPr wrap="square" lIns="0" tIns="0" rIns="0" bIns="0" rtlCol="0" anchor="ctr"/>
+          <a:lstStyle/>
+          <a:p>
+            <a:pPr indent="0" marL="0">
+              <a:lnSpc>
+                <a:spcPct val="120000"/>
+              </a:lnSpc>
+              <a:buNone/>
+            </a:pPr>
+            <a:r>
+              <a:rPr lang="en-US" sz="1200" dirty="0">
+                <a:solidFill>
+                  <a:srgbClr val="C9D2DB"/>
+                </a:solidFill>
+                <a:latin typeface="Calibri" pitchFamily="34" charset="0"/>
+                <a:ea typeface="Calibri" pitchFamily="34" charset="-122"/>
+                <a:cs typeface="Calibri" pitchFamily="34" charset="-120"/>
+              </a:rPr>
+              <a:t>accuracy pages in plain language; upload new data and re-run in two minutes</a:t>
+            </a:r>
+            <a:endParaRPr lang="en-US" sz="1200" dirty="0"/>
           </a:p>
         </p:txBody>
       </p:sp>
@@ -6225,8 +5914,8 @@
         </p:nvSpPr>
         <p:spPr>
           <a:xfrm>
-            <a:off x="685800" y="5577840"/>
-            <a:ext cx="10817352" cy="640080"/>
+            <a:off x="685800" y="5623560"/>
+            <a:ext cx="10817352" cy="457200"/>
           </a:xfrm>
           <a:prstGeom prst="rect">
             <a:avLst/>
@@ -6250,7 +5939,7 @@
                 <a:ea typeface="Calibri" pitchFamily="34" charset="-122"/>
                 <a:cs typeface="Calibri" pitchFamily="34" charset="-120"/>
               </a:rPr>
-              <a:t>8–17% less error than the best simple alternative on each withheld year — and 4 points more demand served at identical safety stock in inventory simulation.</a:t>
+              <a:t>Live demonstration available after the presentation.</a:t>
             </a:r>
             <a:endParaRPr lang="en-US" sz="1250" dirty="0"/>
           </a:p>
@@ -6321,7 +6010,7 @@
                 <a:ea typeface="Calibri" pitchFamily="34" charset="-122"/>
                 <a:cs typeface="Calibri" pitchFamily="34" charset="-120"/>
               </a:rPr>
-              <a:t>07 — ACCURACY, PART TWO</a:t>
+              <a:t>07 — HOW WE WORK</a:t>
             </a:r>
             <a:endParaRPr lang="en-US" sz="1050" dirty="0"/>
           </a:p>
@@ -6360,7 +6049,7 @@
                 <a:ea typeface="Cambria" pitchFamily="34" charset="-122"/>
                 <a:cs typeface="Cambria" pitchFamily="34" charset="-120"/>
               </a:rPr>
-              <a:t>Accuracy depends on the question.</a:t>
+              <a:t>Nothing is adopted on plausibility.</a:t>
             </a:r>
             <a:endParaRPr lang="en-US" sz="3800" dirty="0"/>
           </a:p>
@@ -6374,34 +6063,34 @@
         </p:nvSpPr>
         <p:spPr>
           <a:xfrm>
-            <a:off x="685800" y="2331720"/>
-            <a:ext cx="1554480" cy="685800"/>
-          </a:xfrm>
-          <a:prstGeom prst="rect">
-            <a:avLst/>
-          </a:prstGeom>
-          <a:noFill/>
-          <a:ln/>
-        </p:spPr>
-        <p:txBody>
-          <a:bodyPr wrap="square" lIns="0" tIns="0" rIns="0" bIns="0" rtlCol="0" anchor="ctr"/>
-          <a:lstStyle/>
-          <a:p>
-            <a:pPr indent="0" marL="0">
-              <a:buNone/>
-            </a:pPr>
-            <a:r>
-              <a:rPr lang="en-US" sz="2700" b="1" dirty="0">
-                <a:solidFill>
-                  <a:srgbClr val="1C2530"/>
+            <a:off x="685800" y="2286000"/>
+            <a:ext cx="777240" cy="640080"/>
+          </a:xfrm>
+          <a:prstGeom prst="rect">
+            <a:avLst/>
+          </a:prstGeom>
+          <a:noFill/>
+          <a:ln/>
+        </p:spPr>
+        <p:txBody>
+          <a:bodyPr wrap="square" lIns="0" tIns="0" rIns="0" bIns="0" rtlCol="0" anchor="ctr"/>
+          <a:lstStyle/>
+          <a:p>
+            <a:pPr indent="0" marL="0">
+              <a:buNone/>
+            </a:pPr>
+            <a:r>
+              <a:rPr lang="en-US" sz="2400" i="1" dirty="0">
+                <a:solidFill>
+                  <a:srgbClr val="C8102E"/>
                 </a:solidFill>
                 <a:latin typeface="Cambria" pitchFamily="34" charset="0"/>
                 <a:ea typeface="Cambria" pitchFamily="34" charset="-122"/>
                 <a:cs typeface="Cambria" pitchFamily="34" charset="-120"/>
               </a:rPr>
-              <a:t>36%</a:t>
-            </a:r>
-            <a:endParaRPr lang="en-US" sz="2700" dirty="0"/>
+              <a:t>01</a:t>
+            </a:r>
+            <a:endParaRPr lang="en-US" sz="2400" dirty="0"/>
           </a:p>
         </p:txBody>
       </p:sp>
@@ -6413,24 +6102,24 @@
         </p:nvSpPr>
         <p:spPr>
           <a:xfrm>
-            <a:off x="2514600" y="2377440"/>
-            <a:ext cx="4663440" cy="594360"/>
-          </a:xfrm>
-          <a:prstGeom prst="rect">
-            <a:avLst/>
-          </a:prstGeom>
-          <a:noFill/>
-          <a:ln/>
-        </p:spPr>
-        <p:txBody>
-          <a:bodyPr wrap="square" lIns="0" tIns="0" rIns="0" bIns="0" rtlCol="0" anchor="ctr"/>
-          <a:lstStyle/>
-          <a:p>
-            <a:pPr indent="0" marL="0">
-              <a:buNone/>
-            </a:pPr>
-            <a:r>
-              <a:rPr lang="en-US" sz="1450" b="1" dirty="0">
+            <a:off x="1691640" y="2304288"/>
+            <a:ext cx="9418320" cy="411480"/>
+          </a:xfrm>
+          <a:prstGeom prst="rect">
+            <a:avLst/>
+          </a:prstGeom>
+          <a:noFill/>
+          <a:ln/>
+        </p:spPr>
+        <p:txBody>
+          <a:bodyPr wrap="square" lIns="0" tIns="0" rIns="0" bIns="0" rtlCol="0" anchor="ctr"/>
+          <a:lstStyle/>
+          <a:p>
+            <a:pPr indent="0" marL="0">
+              <a:buNone/>
+            </a:pPr>
+            <a:r>
+              <a:rPr lang="en-US" sz="1550" b="1" dirty="0">
                 <a:solidFill>
                   <a:srgbClr val="1C2530"/>
                 </a:solidFill>
@@ -6438,9 +6127,9 @@
                 <a:ea typeface="Calibri" pitchFamily="34" charset="-122"/>
                 <a:cs typeface="Calibri" pitchFamily="34" charset="-120"/>
               </a:rPr>
-              <a:t>One product, one month</a:t>
-            </a:r>
-            <a:endParaRPr lang="en-US" sz="1450" dirty="0"/>
+              <a:t>Every idea is tested on a withheld year</a:t>
+            </a:r>
+            <a:endParaRPr lang="en-US" sz="1550" dirty="0"/>
           </a:p>
         </p:txBody>
       </p:sp>
@@ -6452,8 +6141,8 @@
         </p:nvSpPr>
         <p:spPr>
           <a:xfrm>
-            <a:off x="7360920" y="2414016"/>
-            <a:ext cx="4142232" cy="594360"/>
+            <a:off x="1691640" y="2743200"/>
+            <a:ext cx="9418320" cy="548640"/>
           </a:xfrm>
           <a:prstGeom prst="rect">
             <a:avLst/>
@@ -6477,7 +6166,7 @@
                 <a:ea typeface="Calibri" pitchFamily="34" charset="-122"/>
                 <a:cs typeface="Calibri" pitchFamily="34" charset="-120"/>
               </a:rPr>
-              <a:t>single-SKU reorder — use the range, not the point</a:t>
+              <a:t>twelve improvement ideas built and measured so far — three earned adoption</a:t>
             </a:r>
             <a:endParaRPr lang="en-US" sz="1200" dirty="0"/>
           </a:p>
@@ -6485,63 +6174,79 @@
       </p:sp>
       <p:sp>
         <p:nvSpPr>
-          <p:cNvPr id="7" name="Shape 5"/>
-          <p:cNvSpPr/>
-          <p:nvPr/>
-        </p:nvSpPr>
-        <p:spPr>
-          <a:xfrm>
-            <a:off x="685800" y="3063240"/>
-            <a:ext cx="10817352" cy="0"/>
-          </a:xfrm>
-          <a:prstGeom prst="line">
-            <a:avLst/>
-          </a:prstGeom>
-          <a:noFill/>
-          <a:ln w="9525">
-            <a:solidFill>
-              <a:srgbClr val="E2E6EA"/>
-            </a:solidFill>
-            <a:prstDash val="solid"/>
-          </a:ln>
-        </p:spPr>
-      </p:sp>
-      <p:sp>
-        <p:nvSpPr>
-          <p:cNvPr id="8" name="Text 6"/>
-          <p:cNvSpPr/>
-          <p:nvPr/>
-        </p:nvSpPr>
-        <p:spPr>
-          <a:xfrm>
-            <a:off x="685800" y="3182112"/>
-            <a:ext cx="1554480" cy="685800"/>
-          </a:xfrm>
-          <a:prstGeom prst="rect">
-            <a:avLst/>
-          </a:prstGeom>
-          <a:noFill/>
-          <a:ln/>
-        </p:spPr>
-        <p:txBody>
-          <a:bodyPr wrap="square" lIns="0" tIns="0" rIns="0" bIns="0" rtlCol="0" anchor="ctr"/>
-          <a:lstStyle/>
-          <a:p>
-            <a:pPr indent="0" marL="0">
-              <a:buNone/>
-            </a:pPr>
-            <a:r>
-              <a:rPr lang="en-US" sz="2700" b="1" dirty="0">
-                <a:solidFill>
-                  <a:srgbClr val="1C2530"/>
+          <p:cNvPr id="7" name="Text 5"/>
+          <p:cNvSpPr/>
+          <p:nvPr/>
+        </p:nvSpPr>
+        <p:spPr>
+          <a:xfrm>
+            <a:off x="685800" y="3493008"/>
+            <a:ext cx="777240" cy="640080"/>
+          </a:xfrm>
+          <a:prstGeom prst="rect">
+            <a:avLst/>
+          </a:prstGeom>
+          <a:noFill/>
+          <a:ln/>
+        </p:spPr>
+        <p:txBody>
+          <a:bodyPr wrap="square" lIns="0" tIns="0" rIns="0" bIns="0" rtlCol="0" anchor="ctr"/>
+          <a:lstStyle/>
+          <a:p>
+            <a:pPr indent="0" marL="0">
+              <a:buNone/>
+            </a:pPr>
+            <a:r>
+              <a:rPr lang="en-US" sz="2400" i="1" dirty="0">
+                <a:solidFill>
+                  <a:srgbClr val="C8102E"/>
                 </a:solidFill>
                 <a:latin typeface="Cambria" pitchFamily="34" charset="0"/>
                 <a:ea typeface="Cambria" pitchFamily="34" charset="-122"/>
                 <a:cs typeface="Cambria" pitchFamily="34" charset="-120"/>
               </a:rPr>
-              <a:t>73%</a:t>
-            </a:r>
-            <a:endParaRPr lang="en-US" sz="2700" dirty="0"/>
+              <a:t>02</a:t>
+            </a:r>
+            <a:endParaRPr lang="en-US" sz="2400" dirty="0"/>
+          </a:p>
+        </p:txBody>
+      </p:sp>
+      <p:sp>
+        <p:nvSpPr>
+          <p:cNvPr id="8" name="Text 6"/>
+          <p:cNvSpPr/>
+          <p:nvPr/>
+        </p:nvSpPr>
+        <p:spPr>
+          <a:xfrm>
+            <a:off x="1691640" y="3511296"/>
+            <a:ext cx="9418320" cy="411480"/>
+          </a:xfrm>
+          <a:prstGeom prst="rect">
+            <a:avLst/>
+          </a:prstGeom>
+          <a:noFill/>
+          <a:ln/>
+        </p:spPr>
+        <p:txBody>
+          <a:bodyPr wrap="square" lIns="0" tIns="0" rIns="0" bIns="0" rtlCol="0" anchor="ctr"/>
+          <a:lstStyle/>
+          <a:p>
+            <a:pPr indent="0" marL="0">
+              <a:buNone/>
+            </a:pPr>
+            <a:r>
+              <a:rPr lang="en-US" sz="1550" b="1" dirty="0">
+                <a:solidFill>
+                  <a:srgbClr val="1C2530"/>
+                </a:solidFill>
+                <a:latin typeface="Calibri" pitchFamily="34" charset="0"/>
+                <a:ea typeface="Calibri" pitchFamily="34" charset="-122"/>
+                <a:cs typeface="Calibri" pitchFamily="34" charset="-120"/>
+              </a:rPr>
+              <a:t>Failures are kept, with their numbers</a:t>
+            </a:r>
+            <a:endParaRPr lang="en-US" sz="1550" dirty="0"/>
           </a:p>
         </p:txBody>
       </p:sp>
@@ -6553,34 +6258,34 @@
         </p:nvSpPr>
         <p:spPr>
           <a:xfrm>
-            <a:off x="2514600" y="3227832"/>
-            <a:ext cx="4663440" cy="594360"/>
-          </a:xfrm>
-          <a:prstGeom prst="rect">
-            <a:avLst/>
-          </a:prstGeom>
-          <a:noFill/>
-          <a:ln/>
-        </p:spPr>
-        <p:txBody>
-          <a:bodyPr wrap="square" lIns="0" tIns="0" rIns="0" bIns="0" rtlCol="0" anchor="ctr"/>
-          <a:lstStyle/>
-          <a:p>
-            <a:pPr indent="0" marL="0">
-              <a:buNone/>
-            </a:pPr>
-            <a:r>
-              <a:rPr lang="en-US" sz="1450" b="1" dirty="0">
-                <a:solidFill>
-                  <a:srgbClr val="1C2530"/>
-                </a:solidFill>
-                <a:latin typeface="Calibri" pitchFamily="34" charset="0"/>
-                <a:ea typeface="Calibri" pitchFamily="34" charset="-122"/>
-                <a:cs typeface="Calibri" pitchFamily="34" charset="-120"/>
-              </a:rPr>
-              <a:t>One product, full year</a:t>
-            </a:r>
-            <a:endParaRPr lang="en-US" sz="1450" dirty="0"/>
+            <a:off x="1691640" y="3950208"/>
+            <a:ext cx="9418320" cy="548640"/>
+          </a:xfrm>
+          <a:prstGeom prst="rect">
+            <a:avLst/>
+          </a:prstGeom>
+          <a:noFill/>
+          <a:ln/>
+        </p:spPr>
+        <p:txBody>
+          <a:bodyPr wrap="square" lIns="0" tIns="0" rIns="0" bIns="0" rtlCol="0" anchor="ctr"/>
+          <a:lstStyle/>
+          <a:p>
+            <a:pPr indent="0" marL="0">
+              <a:buNone/>
+            </a:pPr>
+            <a:r>
+              <a:rPr lang="en-US" sz="1200" dirty="0">
+                <a:solidFill>
+                  <a:srgbClr val="6B7280"/>
+                </a:solidFill>
+                <a:latin typeface="Calibri" pitchFamily="34" charset="0"/>
+                <a:ea typeface="Calibri" pitchFamily="34" charset="-122"/>
+                <a:cs typeface="Calibri" pitchFamily="34" charset="-120"/>
+              </a:rPr>
+              <a:t>rejected techniques stay documented so no one re-tests a dead end</a:t>
+            </a:r>
+            <a:endParaRPr lang="en-US" sz="1200" dirty="0"/>
           </a:p>
         </p:txBody>
       </p:sp>
@@ -6592,125 +6297,63 @@
         </p:nvSpPr>
         <p:spPr>
           <a:xfrm>
-            <a:off x="7360920" y="3264408"/>
-            <a:ext cx="4142232" cy="594360"/>
-          </a:xfrm>
-          <a:prstGeom prst="rect">
-            <a:avLst/>
-          </a:prstGeom>
-          <a:noFill/>
-          <a:ln/>
-        </p:spPr>
-        <p:txBody>
-          <a:bodyPr wrap="square" lIns="0" tIns="0" rIns="0" bIns="0" rtlCol="0" anchor="ctr"/>
-          <a:lstStyle/>
-          <a:p>
-            <a:pPr indent="0" marL="0">
-              <a:buNone/>
-            </a:pPr>
-            <a:r>
-              <a:rPr lang="en-US" sz="1200" dirty="0">
-                <a:solidFill>
-                  <a:srgbClr val="6B7280"/>
-                </a:solidFill>
-                <a:latin typeface="Calibri" pitchFamily="34" charset="0"/>
-                <a:ea typeface="Calibri" pitchFamily="34" charset="-122"/>
-                <a:cs typeface="Calibri" pitchFamily="34" charset="-120"/>
-              </a:rPr>
-              <a:t>annual volume commitment per product</a:t>
-            </a:r>
-            <a:endParaRPr lang="en-US" sz="1200" dirty="0"/>
-          </a:p>
-        </p:txBody>
-      </p:sp>
-      <p:sp>
-        <p:nvSpPr>
-          <p:cNvPr id="11" name="Shape 9"/>
-          <p:cNvSpPr/>
-          <p:nvPr/>
-        </p:nvSpPr>
-        <p:spPr>
-          <a:xfrm>
-            <a:off x="685800" y="3913632"/>
-            <a:ext cx="10817352" cy="0"/>
-          </a:xfrm>
-          <a:prstGeom prst="line">
-            <a:avLst/>
-          </a:prstGeom>
-          <a:noFill/>
-          <a:ln w="9525">
-            <a:solidFill>
-              <a:srgbClr val="E2E6EA"/>
-            </a:solidFill>
-            <a:prstDash val="solid"/>
-          </a:ln>
-        </p:spPr>
-      </p:sp>
-      <p:sp>
-        <p:nvSpPr>
-          <p:cNvPr id="12" name="Text 10"/>
-          <p:cNvSpPr/>
-          <p:nvPr/>
-        </p:nvSpPr>
-        <p:spPr>
-          <a:xfrm>
-            <a:off x="685800" y="4032504"/>
-            <a:ext cx="1554480" cy="685800"/>
-          </a:xfrm>
-          <a:prstGeom prst="rect">
-            <a:avLst/>
-          </a:prstGeom>
-          <a:noFill/>
-          <a:ln/>
-        </p:spPr>
-        <p:txBody>
-          <a:bodyPr wrap="square" lIns="0" tIns="0" rIns="0" bIns="0" rtlCol="0" anchor="ctr"/>
-          <a:lstStyle/>
-          <a:p>
-            <a:pPr indent="0" marL="0">
-              <a:buNone/>
-            </a:pPr>
-            <a:r>
-              <a:rPr lang="en-US" sz="2700" b="1" dirty="0">
-                <a:solidFill>
-                  <a:srgbClr val="1C2530"/>
+            <a:off x="685800" y="4700016"/>
+            <a:ext cx="777240" cy="640080"/>
+          </a:xfrm>
+          <a:prstGeom prst="rect">
+            <a:avLst/>
+          </a:prstGeom>
+          <a:noFill/>
+          <a:ln/>
+        </p:spPr>
+        <p:txBody>
+          <a:bodyPr wrap="square" lIns="0" tIns="0" rIns="0" bIns="0" rtlCol="0" anchor="ctr"/>
+          <a:lstStyle/>
+          <a:p>
+            <a:pPr indent="0" marL="0">
+              <a:buNone/>
+            </a:pPr>
+            <a:r>
+              <a:rPr lang="en-US" sz="2400" i="1" dirty="0">
+                <a:solidFill>
+                  <a:srgbClr val="C8102E"/>
                 </a:solidFill>
                 <a:latin typeface="Cambria" pitchFamily="34" charset="0"/>
                 <a:ea typeface="Cambria" pitchFamily="34" charset="-122"/>
                 <a:cs typeface="Cambria" pitchFamily="34" charset="-120"/>
               </a:rPr>
-              <a:t>78%</a:t>
-            </a:r>
-            <a:endParaRPr lang="en-US" sz="2700" dirty="0"/>
-          </a:p>
-        </p:txBody>
-      </p:sp>
-      <p:sp>
-        <p:nvSpPr>
-          <p:cNvPr id="13" name="Text 11"/>
-          <p:cNvSpPr/>
-          <p:nvPr/>
-        </p:nvSpPr>
-        <p:spPr>
-          <a:xfrm>
-            <a:off x="2514600" y="4078224"/>
-            <a:ext cx="4663440" cy="594360"/>
-          </a:xfrm>
-          <a:prstGeom prst="rect">
-            <a:avLst/>
-          </a:prstGeom>
-          <a:noFill/>
-          <a:ln/>
-        </p:spPr>
-        <p:txBody>
-          <a:bodyPr wrap="square" lIns="0" tIns="0" rIns="0" bIns="0" rtlCol="0" anchor="ctr"/>
-          <a:lstStyle/>
-          <a:p>
-            <a:pPr indent="0" marL="0">
-              <a:buNone/>
-            </a:pPr>
-            <a:r>
-              <a:rPr lang="en-US" sz="1450" b="1" dirty="0">
+              <a:t>03</a:t>
+            </a:r>
+            <a:endParaRPr lang="en-US" sz="2400" dirty="0"/>
+          </a:p>
+        </p:txBody>
+      </p:sp>
+      <p:sp>
+        <p:nvSpPr>
+          <p:cNvPr id="11" name="Text 9"/>
+          <p:cNvSpPr/>
+          <p:nvPr/>
+        </p:nvSpPr>
+        <p:spPr>
+          <a:xfrm>
+            <a:off x="1691640" y="4718304"/>
+            <a:ext cx="9418320" cy="411480"/>
+          </a:xfrm>
+          <a:prstGeom prst="rect">
+            <a:avLst/>
+          </a:prstGeom>
+          <a:noFill/>
+          <a:ln/>
+        </p:spPr>
+        <p:txBody>
+          <a:bodyPr wrap="square" lIns="0" tIns="0" rIns="0" bIns="0" rtlCol="0" anchor="ctr"/>
+          <a:lstStyle/>
+          <a:p>
+            <a:pPr indent="0" marL="0">
+              <a:buNone/>
+            </a:pPr>
+            <a:r>
+              <a:rPr lang="en-US" sz="1550" b="1" dirty="0">
                 <a:solidFill>
                   <a:srgbClr val="1C2530"/>
                 </a:solidFill>
@@ -6718,22 +6361,22 @@
                 <a:ea typeface="Calibri" pitchFamily="34" charset="-122"/>
                 <a:cs typeface="Calibri" pitchFamily="34" charset="-120"/>
               </a:rPr>
-              <a:t>Category, quarter</a:t>
-            </a:r>
-            <a:endParaRPr lang="en-US" sz="1450" dirty="0"/>
-          </a:p>
-        </p:txBody>
-      </p:sp>
-      <p:sp>
-        <p:nvSpPr>
-          <p:cNvPr id="14" name="Text 12"/>
-          <p:cNvSpPr/>
-          <p:nvPr/>
-        </p:nvSpPr>
-        <p:spPr>
-          <a:xfrm>
-            <a:off x="7360920" y="4114800"/>
-            <a:ext cx="4142232" cy="594360"/>
+              <a:t>Every assumption is written down</a:t>
+            </a:r>
+            <a:endParaRPr lang="en-US" sz="1550" dirty="0"/>
+          </a:p>
+        </p:txBody>
+      </p:sp>
+      <p:sp>
+        <p:nvSpPr>
+          <p:cNvPr id="12" name="Text 10"/>
+          <p:cNvSpPr/>
+          <p:nvPr/>
+        </p:nvSpPr>
+        <p:spPr>
+          <a:xfrm>
+            <a:off x="1691640" y="5157216"/>
+            <a:ext cx="9418320" cy="548640"/>
           </a:xfrm>
           <a:prstGeom prst="rect">
             <a:avLst/>
@@ -6757,188 +6400,9 @@
                 <a:ea typeface="Calibri" pitchFamily="34" charset="-122"/>
                 <a:cs typeface="Calibri" pitchFamily="34" charset="-120"/>
               </a:rPr>
-              <a:t>capacity and warehouse planning</a:t>
+              <a:t>twenty-one documented decisions, each reversible by one configuration line</a:t>
             </a:r>
             <a:endParaRPr lang="en-US" sz="1200" dirty="0"/>
-          </a:p>
-        </p:txBody>
-      </p:sp>
-      <p:sp>
-        <p:nvSpPr>
-          <p:cNvPr id="15" name="Shape 13"/>
-          <p:cNvSpPr/>
-          <p:nvPr/>
-        </p:nvSpPr>
-        <p:spPr>
-          <a:xfrm>
-            <a:off x="685800" y="4764024"/>
-            <a:ext cx="10817352" cy="0"/>
-          </a:xfrm>
-          <a:prstGeom prst="line">
-            <a:avLst/>
-          </a:prstGeom>
-          <a:noFill/>
-          <a:ln w="9525">
-            <a:solidFill>
-              <a:srgbClr val="E2E6EA"/>
-            </a:solidFill>
-            <a:prstDash val="solid"/>
-          </a:ln>
-        </p:spPr>
-      </p:sp>
-      <p:sp>
-        <p:nvSpPr>
-          <p:cNvPr id="16" name="Text 14"/>
-          <p:cNvSpPr/>
-          <p:nvPr/>
-        </p:nvSpPr>
-        <p:spPr>
-          <a:xfrm>
-            <a:off x="685800" y="4882896"/>
-            <a:ext cx="1554480" cy="685800"/>
-          </a:xfrm>
-          <a:prstGeom prst="rect">
-            <a:avLst/>
-          </a:prstGeom>
-          <a:noFill/>
-          <a:ln/>
-        </p:spPr>
-        <p:txBody>
-          <a:bodyPr wrap="square" lIns="0" tIns="0" rIns="0" bIns="0" rtlCol="0" anchor="ctr"/>
-          <a:lstStyle/>
-          <a:p>
-            <a:pPr indent="0" marL="0">
-              <a:buNone/>
-            </a:pPr>
-            <a:r>
-              <a:rPr lang="en-US" sz="2700" b="1" dirty="0">
-                <a:solidFill>
-                  <a:srgbClr val="1C2530"/>
-                </a:solidFill>
-                <a:latin typeface="Cambria" pitchFamily="34" charset="0"/>
-                <a:ea typeface="Cambria" pitchFamily="34" charset="-122"/>
-                <a:cs typeface="Cambria" pitchFamily="34" charset="-120"/>
-              </a:rPr>
-              <a:t>80%</a:t>
-            </a:r>
-            <a:endParaRPr lang="en-US" sz="2700" dirty="0"/>
-          </a:p>
-        </p:txBody>
-      </p:sp>
-      <p:sp>
-        <p:nvSpPr>
-          <p:cNvPr id="17" name="Text 15"/>
-          <p:cNvSpPr/>
-          <p:nvPr/>
-        </p:nvSpPr>
-        <p:spPr>
-          <a:xfrm>
-            <a:off x="2514600" y="4928616"/>
-            <a:ext cx="4663440" cy="594360"/>
-          </a:xfrm>
-          <a:prstGeom prst="rect">
-            <a:avLst/>
-          </a:prstGeom>
-          <a:noFill/>
-          <a:ln/>
-        </p:spPr>
-        <p:txBody>
-          <a:bodyPr wrap="square" lIns="0" tIns="0" rIns="0" bIns="0" rtlCol="0" anchor="ctr"/>
-          <a:lstStyle/>
-          <a:p>
-            <a:pPr indent="0" marL="0">
-              <a:buNone/>
-            </a:pPr>
-            <a:r>
-              <a:rPr lang="en-US" sz="1450" b="1" dirty="0">
-                <a:solidFill>
-                  <a:srgbClr val="1C2530"/>
-                </a:solidFill>
-                <a:latin typeface="Calibri" pitchFamily="34" charset="0"/>
-                <a:ea typeface="Calibri" pitchFamily="34" charset="-122"/>
-                <a:cs typeface="Calibri" pitchFamily="34" charset="-120"/>
-              </a:rPr>
-              <a:t>Whole company, full year</a:t>
-            </a:r>
-            <a:endParaRPr lang="en-US" sz="1450" dirty="0"/>
-          </a:p>
-        </p:txBody>
-      </p:sp>
-      <p:sp>
-        <p:nvSpPr>
-          <p:cNvPr id="18" name="Text 16"/>
-          <p:cNvSpPr/>
-          <p:nvPr/>
-        </p:nvSpPr>
-        <p:spPr>
-          <a:xfrm>
-            <a:off x="7360920" y="4965192"/>
-            <a:ext cx="4142232" cy="594360"/>
-          </a:xfrm>
-          <a:prstGeom prst="rect">
-            <a:avLst/>
-          </a:prstGeom>
-          <a:noFill/>
-          <a:ln/>
-        </p:spPr>
-        <p:txBody>
-          <a:bodyPr wrap="square" lIns="0" tIns="0" rIns="0" bIns="0" rtlCol="0" anchor="ctr"/>
-          <a:lstStyle/>
-          <a:p>
-            <a:pPr indent="0" marL="0">
-              <a:buNone/>
-            </a:pPr>
-            <a:r>
-              <a:rPr lang="en-US" sz="1200" dirty="0">
-                <a:solidFill>
-                  <a:srgbClr val="6B7280"/>
-                </a:solidFill>
-                <a:latin typeface="Calibri" pitchFamily="34" charset="0"/>
-                <a:ea typeface="Calibri" pitchFamily="34" charset="-122"/>
-                <a:cs typeface="Calibri" pitchFamily="34" charset="-120"/>
-              </a:rPr>
-              <a:t>the annual revenue budget</a:t>
-            </a:r>
-            <a:endParaRPr lang="en-US" sz="1200" dirty="0"/>
-          </a:p>
-        </p:txBody>
-      </p:sp>
-      <p:sp>
-        <p:nvSpPr>
-          <p:cNvPr id="19" name="Text 17"/>
-          <p:cNvSpPr/>
-          <p:nvPr/>
-        </p:nvSpPr>
-        <p:spPr>
-          <a:xfrm>
-            <a:off x="685800" y="5806440"/>
-            <a:ext cx="10817352" cy="457200"/>
-          </a:xfrm>
-          <a:prstGeom prst="rect">
-            <a:avLst/>
-          </a:prstGeom>
-          <a:noFill/>
-          <a:ln/>
-        </p:spPr>
-        <p:txBody>
-          <a:bodyPr wrap="square" lIns="0" tIns="0" rIns="0" bIns="0" rtlCol="0" anchor="ctr"/>
-          <a:lstStyle/>
-          <a:p>
-            <a:pPr indent="0" marL="0">
-              <a:buNone/>
-            </a:pPr>
-            <a:r>
-              <a:rPr lang="en-US" sz="1250" i="1" dirty="0">
-                <a:solidFill>
-                  <a:srgbClr val="6B7280"/>
-                </a:solidFill>
-                <a:latin typeface="Calibri" pitchFamily="34" charset="0"/>
-                <a:ea typeface="Calibri" pitchFamily="34" charset="-122"/>
-                <a:cs typeface="Calibri" pitchFamily="34" charset="-120"/>
-              </a:rPr>
-              <a:t>Aggregation cancels offsetting errors. Each figure is matched to the decision it actually supports.</a:t>
-            </a:r>
-            <a:endParaRPr lang="en-US" sz="1250" dirty="0"/>
           </a:p>
         </p:txBody>
       </p:sp>
@@ -7007,7 +6471,7 @@
                 <a:ea typeface="Calibri" pitchFamily="34" charset="-122"/>
                 <a:cs typeface="Calibri" pitchFamily="34" charset="-120"/>
               </a:rPr>
-              <a:t>08 — METHOD DISCIPLINE</a:t>
+              <a:t>08 — FOUND IN THE FINE PRINT</a:t>
             </a:r>
             <a:endParaRPr lang="en-US" sz="1050" dirty="0"/>
           </a:p>
@@ -7046,7 +6510,7 @@
                 <a:ea typeface="Cambria" pitchFamily="34" charset="-122"/>
                 <a:cs typeface="Cambria" pitchFamily="34" charset="-120"/>
               </a:rPr>
-              <a:t>Twelve ideas. Three survived.</a:t>
+              <a:t>Two findings from careful reading.</a:t>
             </a:r>
             <a:endParaRPr lang="en-US" sz="3800" dirty="0"/>
           </a:p>
@@ -7060,24 +6524,144 @@
         </p:nvSpPr>
         <p:spPr>
           <a:xfrm>
-            <a:off x="685800" y="2331720"/>
-            <a:ext cx="4937760" cy="320040"/>
-          </a:xfrm>
-          <a:prstGeom prst="rect">
-            <a:avLst/>
-          </a:prstGeom>
-          <a:noFill/>
-          <a:ln/>
-        </p:spPr>
-        <p:txBody>
-          <a:bodyPr wrap="square" lIns="0" tIns="0" rIns="0" bIns="0" rtlCol="0" anchor="ctr"/>
-          <a:lstStyle/>
-          <a:p>
-            <a:pPr indent="0" marL="0">
-              <a:buNone/>
-            </a:pPr>
-            <a:r>
-              <a:rPr lang="en-US" sz="1100" b="1" spc="300" kern="0" dirty="0">
+            <a:off x="685800" y="2386584"/>
+            <a:ext cx="1417320" cy="320040"/>
+          </a:xfrm>
+          <a:prstGeom prst="rect">
+            <a:avLst/>
+          </a:prstGeom>
+          <a:noFill/>
+          <a:ln/>
+        </p:spPr>
+        <p:txBody>
+          <a:bodyPr wrap="square" lIns="0" tIns="0" rIns="0" bIns="0" rtlCol="0" anchor="ctr"/>
+          <a:lstStyle/>
+          <a:p>
+            <a:pPr indent="0" marL="0">
+              <a:buNone/>
+            </a:pPr>
+            <a:r>
+              <a:rPr lang="en-US" sz="1100" b="1" spc="200" kern="0" dirty="0">
+                <a:solidFill>
+                  <a:srgbClr val="6B7280"/>
+                </a:solidFill>
+                <a:latin typeface="Calibri" pitchFamily="34" charset="0"/>
+                <a:ea typeface="Calibri" pitchFamily="34" charset="-122"/>
+                <a:cs typeface="Calibri" pitchFamily="34" charset="-120"/>
+              </a:rPr>
+              <a:t>RESOLVED</a:t>
+            </a:r>
+            <a:endParaRPr lang="en-US" sz="1100" dirty="0"/>
+          </a:p>
+        </p:txBody>
+      </p:sp>
+      <p:sp>
+        <p:nvSpPr>
+          <p:cNvPr id="5" name="Text 3"/>
+          <p:cNvSpPr/>
+          <p:nvPr/>
+        </p:nvSpPr>
+        <p:spPr>
+          <a:xfrm>
+            <a:off x="2331720" y="2331720"/>
+            <a:ext cx="8778240" cy="411480"/>
+          </a:xfrm>
+          <a:prstGeom prst="rect">
+            <a:avLst/>
+          </a:prstGeom>
+          <a:noFill/>
+          <a:ln/>
+        </p:spPr>
+        <p:txBody>
+          <a:bodyPr wrap="square" lIns="0" tIns="0" rIns="0" bIns="0" rtlCol="0" anchor="ctr"/>
+          <a:lstStyle/>
+          <a:p>
+            <a:pPr indent="0" marL="0">
+              <a:buNone/>
+            </a:pPr>
+            <a:r>
+              <a:rPr lang="en-US" sz="1550" b="1" dirty="0">
+                <a:solidFill>
+                  <a:srgbClr val="1C2530"/>
+                </a:solidFill>
+                <a:latin typeface="Calibri" pitchFamily="34" charset="0"/>
+                <a:ea typeface="Calibri" pitchFamily="34" charset="-122"/>
+                <a:cs typeface="Calibri" pitchFamily="34" charset="-120"/>
+              </a:rPr>
+              <a:t>“Closed” orders are cancelled work</a:t>
+            </a:r>
+            <a:endParaRPr lang="en-US" sz="1550" dirty="0"/>
+          </a:p>
+        </p:txBody>
+      </p:sp>
+      <p:sp>
+        <p:nvSpPr>
+          <p:cNvPr id="6" name="Text 4"/>
+          <p:cNvSpPr/>
+          <p:nvPr/>
+        </p:nvSpPr>
+        <p:spPr>
+          <a:xfrm>
+            <a:off x="2331720" y="2788920"/>
+            <a:ext cx="8778240" cy="868680"/>
+          </a:xfrm>
+          <a:prstGeom prst="rect">
+            <a:avLst/>
+          </a:prstGeom>
+          <a:noFill/>
+          <a:ln/>
+        </p:spPr>
+        <p:txBody>
+          <a:bodyPr wrap="square" lIns="0" tIns="0" rIns="0" bIns="0" rtlCol="0" anchor="ctr"/>
+          <a:lstStyle/>
+          <a:p>
+            <a:pPr indent="0" marL="0">
+              <a:lnSpc>
+                <a:spcPct val="115000"/>
+              </a:lnSpc>
+              <a:buNone/>
+            </a:pPr>
+            <a:r>
+              <a:rPr lang="en-US" sz="1200" dirty="0">
+                <a:solidFill>
+                  <a:srgbClr val="6B7280"/>
+                </a:solidFill>
+                <a:latin typeface="Calibri" pitchFamily="34" charset="0"/>
+                <a:ea typeface="Calibri" pitchFamily="34" charset="-122"/>
+                <a:cs typeface="Calibri" pitchFamily="34" charset="-120"/>
+              </a:rPr>
+              <a:t>the authoritative dictionary sheet: closed orders are never fulfilled or billed — they count as expressed demand for stock planning, never as revenue</a:t>
+            </a:r>
+            <a:endParaRPr lang="en-US" sz="1200" dirty="0"/>
+          </a:p>
+        </p:txBody>
+      </p:sp>
+      <p:sp>
+        <p:nvSpPr>
+          <p:cNvPr id="7" name="Text 5"/>
+          <p:cNvSpPr/>
+          <p:nvPr/>
+        </p:nvSpPr>
+        <p:spPr>
+          <a:xfrm>
+            <a:off x="685800" y="3986784"/>
+            <a:ext cx="1417320" cy="320040"/>
+          </a:xfrm>
+          <a:prstGeom prst="rect">
+            <a:avLst/>
+          </a:prstGeom>
+          <a:noFill/>
+          <a:ln/>
+        </p:spPr>
+        <p:txBody>
+          <a:bodyPr wrap="square" lIns="0" tIns="0" rIns="0" bIns="0" rtlCol="0" anchor="ctr"/>
+          <a:lstStyle/>
+          <a:p>
+            <a:pPr indent="0" marL="0">
+              <a:buNone/>
+            </a:pPr>
+            <a:r>
+              <a:rPr lang="en-US" sz="1100" b="1" spc="200" kern="0" dirty="0">
                 <a:solidFill>
                   <a:srgbClr val="C8102E"/>
                 </a:solidFill>
@@ -7085,7 +6669,7 @@
                 <a:ea typeface="Calibri" pitchFamily="34" charset="-122"/>
                 <a:cs typeface="Calibri" pitchFamily="34" charset="-120"/>
               </a:rPr>
-              <a:t>ADOPTED</a:t>
+              <a:t>OPEN</a:t>
             </a:r>
             <a:endParaRPr lang="en-US" sz="1100" dirty="0"/>
           </a:p>
@@ -7093,34 +6677,30 @@
       </p:sp>
       <p:sp>
         <p:nvSpPr>
-          <p:cNvPr id="5" name="Text 3"/>
-          <p:cNvSpPr/>
-          <p:nvPr/>
-        </p:nvSpPr>
-        <p:spPr>
-          <a:xfrm>
-            <a:off x="685800" y="2697480"/>
-            <a:ext cx="4937760" cy="1737360"/>
-          </a:xfrm>
-          <a:prstGeom prst="rect">
-            <a:avLst/>
-          </a:prstGeom>
-          <a:noFill/>
-          <a:ln/>
-        </p:spPr>
-        <p:txBody>
-          <a:bodyPr wrap="square" lIns="0" tIns="0" rIns="0" bIns="0" rtlCol="0" anchor="ctr"/>
-          <a:lstStyle/>
-          <a:p>
-            <a:pPr marL="342900" indent="-342900">
-              <a:spcAft>
-                <a:spcPts val="800"/>
-              </a:spcAft>
-              <a:buSzPct val="100000"/>
-              <a:buChar char="•"/>
-            </a:pPr>
-            <a:r>
-              <a:rPr lang="en-US" sz="1350" dirty="0">
+          <p:cNvPr id="8" name="Text 6"/>
+          <p:cNvSpPr/>
+          <p:nvPr/>
+        </p:nvSpPr>
+        <p:spPr>
+          <a:xfrm>
+            <a:off x="2331720" y="3931920"/>
+            <a:ext cx="8778240" cy="411480"/>
+          </a:xfrm>
+          <a:prstGeom prst="rect">
+            <a:avLst/>
+          </a:prstGeom>
+          <a:noFill/>
+          <a:ln/>
+        </p:spPr>
+        <p:txBody>
+          <a:bodyPr wrap="square" lIns="0" tIns="0" rIns="0" bIns="0" rtlCol="0" anchor="ctr"/>
+          <a:lstStyle/>
+          <a:p>
+            <a:pPr indent="0" marL="0">
+              <a:buNone/>
+            </a:pPr>
+            <a:r>
+              <a:rPr lang="en-US" sz="1550" b="1" dirty="0">
                 <a:solidFill>
                   <a:srgbClr val="1C2530"/>
                 </a:solidFill>
@@ -7128,80 +6708,41 @@
                 <a:ea typeface="Calibri" pitchFamily="34" charset="-122"/>
                 <a:cs typeface="Calibri" pitchFamily="34" charset="-120"/>
               </a:rPr>
-              <a:t>TSB — for demand fading toward obsolescence</a:t>
-            </a:r>
-            <a:endParaRPr lang="en-US" sz="1350" dirty="0"/>
-          </a:p>
-          <a:p>
-            <a:pPr marL="342900" indent="-342900">
-              <a:spcAft>
-                <a:spcPts val="800"/>
-              </a:spcAft>
-              <a:buSzPct val="100000"/>
-              <a:buChar char="•"/>
-            </a:pPr>
-            <a:r>
-              <a:rPr lang="en-US" sz="1350" dirty="0">
-                <a:solidFill>
-                  <a:srgbClr val="1C2530"/>
-                </a:solidFill>
-                <a:latin typeface="Calibri" pitchFamily="34" charset="0"/>
-                <a:ea typeface="Calibri" pitchFamily="34" charset="-122"/>
-                <a:cs typeface="Calibri" pitchFamily="34" charset="-120"/>
-              </a:rPr>
-              <a:t>Spike-capped model fitting</a:t>
-            </a:r>
-            <a:endParaRPr lang="en-US" sz="1350" dirty="0"/>
-          </a:p>
-          <a:p>
-            <a:pPr marL="342900" indent="-342900">
-              <a:spcAft>
-                <a:spcPts val="800"/>
-              </a:spcAft>
-              <a:buSzPct val="100000"/>
-              <a:buChar char="•"/>
-            </a:pPr>
-            <a:r>
-              <a:rPr lang="en-US" sz="1350" dirty="0">
-                <a:solidFill>
-                  <a:srgbClr val="1C2530"/>
-                </a:solidFill>
-                <a:latin typeface="Calibri" pitchFamily="34" charset="0"/>
-                <a:ea typeface="Calibri" pitchFamily="34" charset="-122"/>
-                <a:cs typeface="Calibri" pitchFamily="34" charset="-120"/>
-              </a:rPr>
-              <a:t>Event-exposure buffers for planners</a:t>
-            </a:r>
-            <a:endParaRPr lang="en-US" sz="1350" dirty="0"/>
-          </a:p>
-        </p:txBody>
-      </p:sp>
-      <p:sp>
-        <p:nvSpPr>
-          <p:cNvPr id="6" name="Text 4"/>
-          <p:cNvSpPr/>
-          <p:nvPr/>
-        </p:nvSpPr>
-        <p:spPr>
-          <a:xfrm>
-            <a:off x="6537960" y="2331720"/>
-            <a:ext cx="5120640" cy="320040"/>
-          </a:xfrm>
-          <a:prstGeom prst="rect">
-            <a:avLst/>
-          </a:prstGeom>
-          <a:noFill/>
-          <a:ln/>
-        </p:spPr>
-        <p:txBody>
-          <a:bodyPr wrap="square" lIns="0" tIns="0" rIns="0" bIns="0" rtlCol="0" anchor="ctr"/>
-          <a:lstStyle/>
-          <a:p>
-            <a:pPr indent="0" marL="0">
-              <a:buNone/>
-            </a:pPr>
-            <a:r>
-              <a:rPr lang="en-US" sz="1100" b="1" spc="300" kern="0" dirty="0">
+              <a:t>The VIP discount is not inside Base Price</a:t>
+            </a:r>
+            <a:endParaRPr lang="en-US" sz="1550" dirty="0"/>
+          </a:p>
+        </p:txBody>
+      </p:sp>
+      <p:sp>
+        <p:nvSpPr>
+          <p:cNvPr id="9" name="Text 7"/>
+          <p:cNvSpPr/>
+          <p:nvPr/>
+        </p:nvSpPr>
+        <p:spPr>
+          <a:xfrm>
+            <a:off x="2331720" y="4389120"/>
+            <a:ext cx="8778240" cy="868680"/>
+          </a:xfrm>
+          <a:prstGeom prst="rect">
+            <a:avLst/>
+          </a:prstGeom>
+          <a:noFill/>
+          <a:ln/>
+        </p:spPr>
+        <p:txBody>
+          <a:bodyPr wrap="square" lIns="0" tIns="0" rIns="0" bIns="0" rtlCol="0" anchor="ctr"/>
+          <a:lstStyle/>
+          <a:p>
+            <a:pPr indent="0" marL="0">
+              <a:lnSpc>
+                <a:spcPct val="115000"/>
+              </a:lnSpc>
+              <a:buNone/>
+            </a:pPr>
+            <a:r>
+              <a:rPr lang="en-US" sz="1200" dirty="0">
                 <a:solidFill>
                   <a:srgbClr val="6B7280"/>
                 </a:solidFill>
@@ -7209,42 +6750,38 @@
                 <a:ea typeface="Calibri" pitchFamily="34" charset="-122"/>
                 <a:cs typeface="Calibri" pitchFamily="34" charset="-120"/>
               </a:rPr>
-              <a:t>REJECTED, WITH THE EVIDENCE KEPT</a:t>
-            </a:r>
-            <a:endParaRPr lang="en-US" sz="1100" dirty="0"/>
-          </a:p>
-        </p:txBody>
-      </p:sp>
-      <p:sp>
-        <p:nvSpPr>
-          <p:cNvPr id="7" name="Text 5"/>
-          <p:cNvSpPr/>
-          <p:nvPr/>
-        </p:nvSpPr>
-        <p:spPr>
-          <a:xfrm>
-            <a:off x="6537960" y="2697480"/>
-            <a:ext cx="5120640" cy="1737360"/>
-          </a:xfrm>
-          <a:prstGeom prst="rect">
-            <a:avLst/>
-          </a:prstGeom>
-          <a:noFill/>
-          <a:ln/>
-        </p:spPr>
-        <p:txBody>
-          <a:bodyPr wrap="square" lIns="0" tIns="0" rIns="0" bIns="0" rtlCol="0" anchor="ctr"/>
-          <a:lstStyle/>
-          <a:p>
-            <a:pPr marL="342900" indent="-342900">
-              <a:spcAft>
-                <a:spcPts val="800"/>
-              </a:spcAft>
-              <a:buSzPct val="100000"/>
-              <a:buChar char="•"/>
-            </a:pPr>
-            <a:r>
-              <a:rPr lang="en-US" sz="1350" dirty="0">
+              <a:t>the dictionary grants VIP a 37% discount from list — yet on shared products, VIP and End User pay an identical Base Price (median ratio 1.000). The discount must be applied outside this file; ฿461m of revenue interpretation rides on Mitsubishi’s answer</a:t>
+            </a:r>
+            <a:endParaRPr lang="en-US" sz="1200" dirty="0"/>
+          </a:p>
+        </p:txBody>
+      </p:sp>
+      <p:sp>
+        <p:nvSpPr>
+          <p:cNvPr id="10" name="Text 8"/>
+          <p:cNvSpPr/>
+          <p:nvPr/>
+        </p:nvSpPr>
+        <p:spPr>
+          <a:xfrm>
+            <a:off x="685800" y="5760720"/>
+            <a:ext cx="10817352" cy="457200"/>
+          </a:xfrm>
+          <a:prstGeom prst="rect">
+            <a:avLst/>
+          </a:prstGeom>
+          <a:noFill/>
+          <a:ln/>
+        </p:spPr>
+        <p:txBody>
+          <a:bodyPr wrap="square" lIns="0" tIns="0" rIns="0" bIns="0" rtlCol="0" anchor="ctr"/>
+          <a:lstStyle/>
+          <a:p>
+            <a:pPr indent="0" marL="0">
+              <a:buNone/>
+            </a:pPr>
+            <a:r>
+              <a:rPr lang="en-US" sz="1250" i="1" dirty="0">
                 <a:solidFill>
                   <a:srgbClr val="6B7280"/>
                 </a:solidFill>
@@ -7252,88 +6789,7 @@
                 <a:ea typeface="Calibri" pitchFamily="34" charset="-122"/>
                 <a:cs typeface="Calibri" pitchFamily="34" charset="-120"/>
               </a:rPr>
-              <a:t>Category reconciliation — made accuracy worse</a:t>
-            </a:r>
-            <a:endParaRPr lang="en-US" sz="1350" dirty="0"/>
-          </a:p>
-          <a:p>
-            <a:pPr marL="342900" indent="-342900">
-              <a:spcAft>
-                <a:spcPts val="800"/>
-              </a:spcAft>
-              <a:buSzPct val="100000"/>
-              <a:buChar char="•"/>
-            </a:pPr>
-            <a:r>
-              <a:rPr lang="en-US" sz="1350" dirty="0">
-                <a:solidFill>
-                  <a:srgbClr val="6B7280"/>
-                </a:solidFill>
-                <a:latin typeface="Calibri" pitchFamily="34" charset="0"/>
-                <a:ea typeface="Calibri" pitchFamily="34" charset="-122"/>
-                <a:cs typeface="Calibri" pitchFamily="34" charset="-120"/>
-              </a:rPr>
-              <a:t>Top-2 ensembles — gain absorbed by selection</a:t>
-            </a:r>
-            <a:endParaRPr lang="en-US" sz="1350" dirty="0"/>
-          </a:p>
-          <a:p>
-            <a:pPr marL="342900" indent="-342900">
-              <a:spcAft>
-                <a:spcPts val="800"/>
-              </a:spcAft>
-              <a:buSzPct val="100000"/>
-              <a:buChar char="•"/>
-            </a:pPr>
-            <a:r>
-              <a:rPr lang="en-US" sz="1350" dirty="0">
-                <a:solidFill>
-                  <a:srgbClr val="6B7280"/>
-                </a:solidFill>
-                <a:latin typeface="Calibri" pitchFamily="34" charset="0"/>
-                <a:ea typeface="Calibri" pitchFamily="34" charset="-122"/>
-                <a:cs typeface="Calibri" pitchFamily="34" charset="-120"/>
-              </a:rPr>
-              <a:t>Event-decomposition models — lost the back-test</a:t>
-            </a:r>
-            <a:endParaRPr lang="en-US" sz="1350" dirty="0"/>
-          </a:p>
-        </p:txBody>
-      </p:sp>
-      <p:sp>
-        <p:nvSpPr>
-          <p:cNvPr id="8" name="Text 6"/>
-          <p:cNvSpPr/>
-          <p:nvPr/>
-        </p:nvSpPr>
-        <p:spPr>
-          <a:xfrm>
-            <a:off x="685800" y="5577840"/>
-            <a:ext cx="10817352" cy="594360"/>
-          </a:xfrm>
-          <a:prstGeom prst="rect">
-            <a:avLst/>
-          </a:prstGeom>
-          <a:noFill/>
-          <a:ln/>
-        </p:spPr>
-        <p:txBody>
-          <a:bodyPr wrap="square" lIns="0" tIns="0" rIns="0" bIns="0" rtlCol="0" anchor="ctr"/>
-          <a:lstStyle/>
-          <a:p>
-            <a:pPr indent="0" marL="0">
-              <a:buNone/>
-            </a:pPr>
-            <a:r>
-              <a:rPr lang="en-US" sz="1250" i="1" dirty="0">
-                <a:solidFill>
-                  <a:srgbClr val="6B7280"/>
-                </a:solidFill>
-                <a:latin typeface="Calibri" pitchFamily="34" charset="0"/>
-                <a:ea typeface="Calibri" pitchFamily="34" charset="-122"/>
-                <a:cs typeface="Calibri" pitchFamily="34" charset="-120"/>
-              </a:rPr>
-              <a:t>Nothing was adopted on plausibility. Every idea was scored on a withheld year; every verdict — including the failures — is documented in the repository.</a:t>
+              <a:t>Either answer to the pricing question takes effect through one configuration line — the system re-runs in two minutes.</a:t>
             </a:r>
             <a:endParaRPr lang="en-US" sz="1250" dirty="0"/>
           </a:p>

--- a/presentation/FY2025_progress_report.pptx
+++ b/presentation/FY2025_progress_report.pptx
@@ -15,10 +15,9 @@
     <p:sldId id="263" r:id="rId9"/>
     <p:sldId id="264" r:id="rId10"/>
     <p:sldId id="265" r:id="rId11"/>
-    <p:sldId id="266" r:id="rId12"/>
   </p:sldIdLst>
   <p:notesMasterIdLst>
-    <p:notesMasterId r:id="rId13"/>
+    <p:notesMasterId r:id="rId12"/>
   </p:notesMasterIdLst>
   <p:sldSz cx="12192000" cy="6858000"/>
   <p:notesSz cx="6858000" cy="12192000"/>
@@ -600,7 +599,7 @@
           <a:p>
             <a:r>
               <a:rPr lang="en-US" dirty="0"/>
-              <a:t>The plan from here. Today: the build is done. At the semi-final on 7 September we present the outcomes - the FY2025 numbers with the accuracy evidence behind them, improved by whatever we take from today's discussion. The final on 28 September delivers the final forecast, the written report, and the handover. (~50s)</a:t>
+              <a:t>To close: the build phase is complete and the data is understood. The numbers and their evidence arrive at the semi-final on 7 September. Now let me show you the dashboard itself, live. (~25s)</a:t>
             </a:r>
             <a:endParaRPr lang="en-US" dirty="0"/>
           </a:p>
@@ -624,94 +623,6 @@
             <a:fld id="{F7021451-1387-4CA6-816F-3879F97B5CBC}" type="slidenum">
               <a:rPr lang="en-US"/>
               <a:t>10</a:t>
-            </a:fld>
-            <a:endParaRPr lang="en-US"/>
-          </a:p>
-        </p:txBody>
-      </p:sp>
-    </p:spTree>
-    <p:extLst>
-      <p:ext uri="{BB962C8B-B14F-4D97-AF65-F5344CB8AC3E}">
-        <p14:creationId xmlns:p14="http://schemas.microsoft.com/office/powerpoint/2010/main" val="1024086991"/>
-      </p:ext>
-    </p:extLst>
-  </p:cSld>
-  <p:clrMapOvr>
-    <a:masterClrMapping/>
-  </p:clrMapOvr>
-</p:notes>
-</file>
-
-<file path=ppt/notesSlides/notesSlide11.xml><?xml version="1.0" encoding="utf-8"?>
-<p:notes xmlns:a="http://schemas.openxmlformats.org/drawingml/2006/main" xmlns:r="http://schemas.openxmlformats.org/officeDocument/2006/relationships" xmlns:p="http://schemas.openxmlformats.org/presentationml/2006/main">
-  <p:cSld>
-    <p:spTree>
-      <p:nvGrpSpPr>
-        <p:cNvPr id="1" name=""/>
-        <p:cNvGrpSpPr/>
-        <p:nvPr/>
-      </p:nvGrpSpPr>
-      <p:grpSpPr>
-        <a:xfrm>
-          <a:off x="0" y="0"/>
-          <a:ext cx="0" cy="0"/>
-          <a:chOff x="0" y="0"/>
-          <a:chExt cx="0" cy="0"/>
-        </a:xfrm>
-      </p:grpSpPr>
-      <p:sp>
-        <p:nvSpPr>
-          <p:cNvPr id="2" name="Slide Image Placeholder 1"/>
-          <p:cNvSpPr>
-            <a:spLocks noGrp="1" noRot="1" noChangeAspect="1"/>
-          </p:cNvSpPr>
-          <p:nvPr>
-            <p:ph type="sldImg"/>
-          </p:nvPr>
-        </p:nvSpPr>
-        <p:spPr/>
-      </p:sp>
-      <p:sp>
-        <p:nvSpPr>
-          <p:cNvPr id="3" name="Notes Placeholder 2"/>
-          <p:cNvSpPr>
-            <a:spLocks noGrp="1"/>
-          </p:cNvSpPr>
-          <p:nvPr>
-            <p:ph type="body" idx="1"/>
-          </p:nvPr>
-        </p:nvSpPr>
-        <p:spPr/>
-        <p:txBody>
-          <a:bodyPr/>
-          <a:lstStyle/>
-          <a:p>
-            <a:r>
-              <a:rPr lang="en-US" dirty="0"/>
-              <a:t>To close: the build phase is complete, the data is understood, and the open questions are on the table. The numbers and their evidence arrive at the semi-final. The dashboard is live if anyone would like to see it now. Thank you. (~30s)</a:t>
-            </a:r>
-            <a:endParaRPr lang="en-US" dirty="0"/>
-          </a:p>
-        </p:txBody>
-      </p:sp>
-      <p:sp>
-        <p:nvSpPr>
-          <p:cNvPr id="4" name="Slide Number Placeholder 3"/>
-          <p:cNvSpPr>
-            <a:spLocks noGrp="1"/>
-          </p:cNvSpPr>
-          <p:nvPr>
-            <p:ph type="sldNum" sz="quarter" idx="10"/>
-          </p:nvPr>
-        </p:nvSpPr>
-        <p:spPr/>
-        <p:txBody>
-          <a:bodyPr/>
-          <a:lstStyle/>
-          <a:p>
-            <a:fld id="{F7021451-1387-4CA6-816F-3879F97B5CBC}" type="slidenum">
-              <a:rPr lang="en-US"/>
-              <a:t>11</a:t>
             </a:fld>
             <a:endParaRPr lang="en-US"/>
           </a:p>
@@ -1216,7 +1127,7 @@
           <a:p>
             <a:r>
               <a:rPr lang="en-US" dirty="0"/>
-              <a:t>The deliverable Mitsubishi's team actually touches. Plain language throughout, every forecast shown next to the evidence behind it, and the key requirement from the brief: anyone can upload a new data file and the entire system re-runs in about two minutes - no code, no analyst. Happy to demo it live afterwards. (~50s)</a:t>
+              <a:t>The deliverable Mitsubishi's team actually touches. Plain language throughout, and the key requirement from the brief: anyone can upload a new data file and the entire system re-runs in about two minutes - no code, no analyst. I will open it live in a moment and walk through it on the real data. (~45s)</a:t>
             </a:r>
             <a:endParaRPr lang="en-US" dirty="0"/>
           </a:p>
@@ -1392,7 +1303,7 @@
           <a:p>
             <a:r>
               <a:rPr lang="en-US" dirty="0"/>
-              <a:t>We read every sheet of the supplied documentation, and it paid off twice. First, the status question resolved itself: Closed means cancelled, and our treatment matches. Second, a genuine open item: the dictionary grants VIP customers 37 percent off, but on identical products VIP and End User pay exactly the same Base Price - so the discount is applied somewhere outside this file. That single answer from Mitsubishi is worth 461 million baht of revenue interpretation. (~55s)</a:t>
+              <a:t>The plan from here. Today: the build is done. At the semi-final on 7 September we present the outcomes - the FY2025 numbers with the accuracy evidence behind them, improved by whatever we take from today's discussion. The final on 28 September delivers the final forecast, the written report, and the handover. (~50s)</a:t>
             </a:r>
             <a:endParaRPr lang="en-US" dirty="0"/>
           </a:p>
@@ -2031,596 +1942,6 @@
     <p:bg>
       <p:bgPr>
         <a:solidFill>
-          <a:srgbClr val="FFFFFF"/>
-        </a:solidFill>
-      </p:bgPr>
-    </p:bg>
-    <p:spTree>
-      <p:nvGrpSpPr>
-        <p:cNvPr id="1" name=""/>
-        <p:cNvGrpSpPr/>
-        <p:nvPr/>
-      </p:nvGrpSpPr>
-      <p:grpSpPr>
-        <a:xfrm>
-          <a:off x="0" y="0"/>
-          <a:ext cx="0" cy="0"/>
-          <a:chOff x="0" y="0"/>
-          <a:chExt cx="0" cy="0"/>
-        </a:xfrm>
-      </p:grpSpPr>
-      <p:sp>
-        <p:nvSpPr>
-          <p:cNvPr id="2" name="Text 0"/>
-          <p:cNvSpPr/>
-          <p:nvPr/>
-        </p:nvSpPr>
-        <p:spPr>
-          <a:xfrm>
-            <a:off x="685800" y="566928"/>
-            <a:ext cx="10817352" cy="274320"/>
-          </a:xfrm>
-          <a:prstGeom prst="rect">
-            <a:avLst/>
-          </a:prstGeom>
-          <a:noFill/>
-          <a:ln/>
-        </p:spPr>
-        <p:txBody>
-          <a:bodyPr wrap="square" lIns="0" tIns="0" rIns="0" bIns="0" rtlCol="0" anchor="ctr"/>
-          <a:lstStyle/>
-          <a:p>
-            <a:pPr algn="l" indent="0" marL="0">
-              <a:buNone/>
-            </a:pPr>
-            <a:r>
-              <a:rPr lang="en-US" sz="1050" b="1" spc="300" kern="0" dirty="0">
-                <a:solidFill>
-                  <a:srgbClr val="6B7280"/>
-                </a:solidFill>
-                <a:latin typeface="Calibri" pitchFamily="34" charset="0"/>
-                <a:ea typeface="Calibri" pitchFamily="34" charset="-122"/>
-                <a:cs typeface="Calibri" pitchFamily="34" charset="-120"/>
-              </a:rPr>
-              <a:t>09 — THE ROAD AHEAD</a:t>
-            </a:r>
-            <a:endParaRPr lang="en-US" sz="1050" dirty="0"/>
-          </a:p>
-        </p:txBody>
-      </p:sp>
-      <p:sp>
-        <p:nvSpPr>
-          <p:cNvPr id="3" name="Text 1"/>
-          <p:cNvSpPr/>
-          <p:nvPr/>
-        </p:nvSpPr>
-        <p:spPr>
-          <a:xfrm>
-            <a:off x="685800" y="914400"/>
-            <a:ext cx="10817352" cy="1051560"/>
-          </a:xfrm>
-          <a:prstGeom prst="rect">
-            <a:avLst/>
-          </a:prstGeom>
-          <a:noFill/>
-          <a:ln/>
-        </p:spPr>
-        <p:txBody>
-          <a:bodyPr wrap="square" lIns="0" tIns="0" rIns="0" bIns="0" rtlCol="0" anchor="ctr"/>
-          <a:lstStyle/>
-          <a:p>
-            <a:pPr algn="l" indent="0" marL="0">
-              <a:buNone/>
-            </a:pPr>
-            <a:r>
-              <a:rPr lang="en-US" sz="3800" b="1" dirty="0">
-                <a:solidFill>
-                  <a:srgbClr val="1C2530"/>
-                </a:solidFill>
-                <a:latin typeface="Cambria" pitchFamily="34" charset="0"/>
-                <a:ea typeface="Cambria" pitchFamily="34" charset="-122"/>
-                <a:cs typeface="Cambria" pitchFamily="34" charset="-120"/>
-              </a:rPr>
-              <a:t>Two milestones to the final forecast.</a:t>
-            </a:r>
-            <a:endParaRPr lang="en-US" sz="3800" dirty="0"/>
-          </a:p>
-        </p:txBody>
-      </p:sp>
-      <p:sp>
-        <p:nvSpPr>
-          <p:cNvPr id="4" name="Shape 2"/>
-          <p:cNvSpPr/>
-          <p:nvPr/>
-        </p:nvSpPr>
-        <p:spPr>
-          <a:xfrm>
-            <a:off x="685800" y="2331720"/>
-            <a:ext cx="3429000" cy="2926080"/>
-          </a:xfrm>
-          <a:prstGeom prst="roundRect">
-            <a:avLst>
-              <a:gd name="adj" fmla="val 2500"/>
-            </a:avLst>
-          </a:prstGeom>
-          <a:solidFill>
-            <a:srgbClr val="1C2530"/>
-          </a:solidFill>
-          <a:ln w="12700">
-            <a:solidFill>
-              <a:srgbClr val="1C2530"/>
-            </a:solidFill>
-            <a:prstDash val="solid"/>
-          </a:ln>
-        </p:spPr>
-      </p:sp>
-      <p:sp>
-        <p:nvSpPr>
-          <p:cNvPr id="5" name="Text 3"/>
-          <p:cNvSpPr/>
-          <p:nvPr/>
-        </p:nvSpPr>
-        <p:spPr>
-          <a:xfrm>
-            <a:off x="1005840" y="2697480"/>
-            <a:ext cx="2788920" cy="320040"/>
-          </a:xfrm>
-          <a:prstGeom prst="rect">
-            <a:avLst/>
-          </a:prstGeom>
-          <a:noFill/>
-          <a:ln/>
-        </p:spPr>
-        <p:txBody>
-          <a:bodyPr wrap="square" lIns="0" tIns="0" rIns="0" bIns="0" rtlCol="0" anchor="ctr"/>
-          <a:lstStyle/>
-          <a:p>
-            <a:pPr indent="0" marL="0">
-              <a:buNone/>
-            </a:pPr>
-            <a:r>
-              <a:rPr lang="en-US" sz="1050" b="1" spc="200" kern="0" dirty="0">
-                <a:solidFill>
-                  <a:srgbClr val="9AA4B0"/>
-                </a:solidFill>
-                <a:latin typeface="Calibri" pitchFamily="34" charset="0"/>
-                <a:ea typeface="Calibri" pitchFamily="34" charset="-122"/>
-                <a:cs typeface="Calibri" pitchFamily="34" charset="-120"/>
-              </a:rPr>
-              <a:t>TODAY — 10 AUG</a:t>
-            </a:r>
-            <a:endParaRPr lang="en-US" sz="1050" dirty="0"/>
-          </a:p>
-        </p:txBody>
-      </p:sp>
-      <p:sp>
-        <p:nvSpPr>
-          <p:cNvPr id="6" name="Text 4"/>
-          <p:cNvSpPr/>
-          <p:nvPr/>
-        </p:nvSpPr>
-        <p:spPr>
-          <a:xfrm>
-            <a:off x="1005840" y="3063240"/>
-            <a:ext cx="2788920" cy="777240"/>
-          </a:xfrm>
-          <a:prstGeom prst="rect">
-            <a:avLst/>
-          </a:prstGeom>
-          <a:noFill/>
-          <a:ln/>
-        </p:spPr>
-        <p:txBody>
-          <a:bodyPr wrap="square" lIns="0" tIns="0" rIns="0" bIns="0" rtlCol="0" anchor="ctr"/>
-          <a:lstStyle/>
-          <a:p>
-            <a:pPr indent="0" marL="0">
-              <a:buNone/>
-            </a:pPr>
-            <a:r>
-              <a:rPr lang="en-US" sz="1900" b="1" dirty="0">
-                <a:solidFill>
-                  <a:srgbClr val="F5F7FA"/>
-                </a:solidFill>
-                <a:latin typeface="Cambria" pitchFamily="34" charset="0"/>
-                <a:ea typeface="Cambria" pitchFamily="34" charset="-122"/>
-                <a:cs typeface="Cambria" pitchFamily="34" charset="-120"/>
-              </a:rPr>
-              <a:t>Progress report</a:t>
-            </a:r>
-            <a:endParaRPr lang="en-US" sz="1900" dirty="0"/>
-          </a:p>
-        </p:txBody>
-      </p:sp>
-      <p:sp>
-        <p:nvSpPr>
-          <p:cNvPr id="7" name="Text 5"/>
-          <p:cNvSpPr/>
-          <p:nvPr/>
-        </p:nvSpPr>
-        <p:spPr>
-          <a:xfrm>
-            <a:off x="1005840" y="3886200"/>
-            <a:ext cx="2788920" cy="1234440"/>
-          </a:xfrm>
-          <a:prstGeom prst="rect">
-            <a:avLst/>
-          </a:prstGeom>
-          <a:noFill/>
-          <a:ln/>
-        </p:spPr>
-        <p:txBody>
-          <a:bodyPr wrap="square" lIns="0" tIns="0" rIns="0" bIns="0" rtlCol="0" anchor="ctr"/>
-          <a:lstStyle/>
-          <a:p>
-            <a:pPr indent="0" marL="0">
-              <a:lnSpc>
-                <a:spcPct val="120000"/>
-              </a:lnSpc>
-              <a:buNone/>
-            </a:pPr>
-            <a:r>
-              <a:rPr lang="en-US" sz="1150" dirty="0">
-                <a:solidFill>
-                  <a:srgbClr val="C9D2DB"/>
-                </a:solidFill>
-                <a:latin typeface="Calibri" pitchFamily="34" charset="0"/>
-                <a:ea typeface="Calibri" pitchFamily="34" charset="-122"/>
-                <a:cs typeface="Calibri" pitchFamily="34" charset="-120"/>
-              </a:rPr>
-              <a:t>system built and running; data understood; questions raised</a:t>
-            </a:r>
-            <a:endParaRPr lang="en-US" sz="1150" dirty="0"/>
-          </a:p>
-        </p:txBody>
-      </p:sp>
-      <p:sp>
-        <p:nvSpPr>
-          <p:cNvPr id="8" name="Shape 6"/>
-          <p:cNvSpPr/>
-          <p:nvPr/>
-        </p:nvSpPr>
-        <p:spPr>
-          <a:xfrm>
-            <a:off x="4398264" y="2331720"/>
-            <a:ext cx="3429000" cy="2926080"/>
-          </a:xfrm>
-          <a:prstGeom prst="roundRect">
-            <a:avLst>
-              <a:gd name="adj" fmla="val 2500"/>
-            </a:avLst>
-          </a:prstGeom>
-          <a:solidFill>
-            <a:srgbClr val="C8102E"/>
-          </a:solidFill>
-          <a:ln w="12700">
-            <a:solidFill>
-              <a:srgbClr val="C8102E"/>
-            </a:solidFill>
-            <a:prstDash val="solid"/>
-          </a:ln>
-        </p:spPr>
-      </p:sp>
-      <p:sp>
-        <p:nvSpPr>
-          <p:cNvPr id="9" name="Text 7"/>
-          <p:cNvSpPr/>
-          <p:nvPr/>
-        </p:nvSpPr>
-        <p:spPr>
-          <a:xfrm>
-            <a:off x="4718304" y="2697480"/>
-            <a:ext cx="2788920" cy="320040"/>
-          </a:xfrm>
-          <a:prstGeom prst="rect">
-            <a:avLst/>
-          </a:prstGeom>
-          <a:noFill/>
-          <a:ln/>
-        </p:spPr>
-        <p:txBody>
-          <a:bodyPr wrap="square" lIns="0" tIns="0" rIns="0" bIns="0" rtlCol="0" anchor="ctr"/>
-          <a:lstStyle/>
-          <a:p>
-            <a:pPr indent="0" marL="0">
-              <a:buNone/>
-            </a:pPr>
-            <a:r>
-              <a:rPr lang="en-US" sz="1050" b="1" spc="200" kern="0" dirty="0">
-                <a:solidFill>
-                  <a:srgbClr val="F3C2CB"/>
-                </a:solidFill>
-                <a:latin typeface="Calibri" pitchFamily="34" charset="0"/>
-                <a:ea typeface="Calibri" pitchFamily="34" charset="-122"/>
-                <a:cs typeface="Calibri" pitchFamily="34" charset="-120"/>
-              </a:rPr>
-              <a:t>SEMI-FINAL — 7 SEP</a:t>
-            </a:r>
-            <a:endParaRPr lang="en-US" sz="1050" dirty="0"/>
-          </a:p>
-        </p:txBody>
-      </p:sp>
-      <p:sp>
-        <p:nvSpPr>
-          <p:cNvPr id="10" name="Text 8"/>
-          <p:cNvSpPr/>
-          <p:nvPr/>
-        </p:nvSpPr>
-        <p:spPr>
-          <a:xfrm>
-            <a:off x="4718304" y="3063240"/>
-            <a:ext cx="2788920" cy="777240"/>
-          </a:xfrm>
-          <a:prstGeom prst="rect">
-            <a:avLst/>
-          </a:prstGeom>
-          <a:noFill/>
-          <a:ln/>
-        </p:spPr>
-        <p:txBody>
-          <a:bodyPr wrap="square" lIns="0" tIns="0" rIns="0" bIns="0" rtlCol="0" anchor="ctr"/>
-          <a:lstStyle/>
-          <a:p>
-            <a:pPr indent="0" marL="0">
-              <a:buNone/>
-            </a:pPr>
-            <a:r>
-              <a:rPr lang="en-US" sz="1900" b="1" dirty="0">
-                <a:solidFill>
-                  <a:srgbClr val="F5F7FA"/>
-                </a:solidFill>
-                <a:latin typeface="Cambria" pitchFamily="34" charset="0"/>
-                <a:ea typeface="Cambria" pitchFamily="34" charset="-122"/>
-                <a:cs typeface="Cambria" pitchFamily="34" charset="-120"/>
-              </a:rPr>
-              <a:t>Results &amp; evidence</a:t>
-            </a:r>
-            <a:endParaRPr lang="en-US" sz="1900" dirty="0"/>
-          </a:p>
-        </p:txBody>
-      </p:sp>
-      <p:sp>
-        <p:nvSpPr>
-          <p:cNvPr id="11" name="Text 9"/>
-          <p:cNvSpPr/>
-          <p:nvPr/>
-        </p:nvSpPr>
-        <p:spPr>
-          <a:xfrm>
-            <a:off x="4718304" y="3886200"/>
-            <a:ext cx="2788920" cy="1234440"/>
-          </a:xfrm>
-          <a:prstGeom prst="rect">
-            <a:avLst/>
-          </a:prstGeom>
-          <a:noFill/>
-          <a:ln/>
-        </p:spPr>
-        <p:txBody>
-          <a:bodyPr wrap="square" lIns="0" tIns="0" rIns="0" bIns="0" rtlCol="0" anchor="ctr"/>
-          <a:lstStyle/>
-          <a:p>
-            <a:pPr indent="0" marL="0">
-              <a:lnSpc>
-                <a:spcPct val="120000"/>
-              </a:lnSpc>
-              <a:buNone/>
-            </a:pPr>
-            <a:r>
-              <a:rPr lang="en-US" sz="1150" dirty="0">
-                <a:solidFill>
-                  <a:srgbClr val="F3D9DD"/>
-                </a:solidFill>
-                <a:latin typeface="Calibri" pitchFamily="34" charset="0"/>
-                <a:ea typeface="Calibri" pitchFamily="34" charset="-122"/>
-                <a:cs typeface="Calibri" pitchFamily="34" charset="-120"/>
-              </a:rPr>
-              <a:t>the FY2025 numbers, accuracy against withheld years, inventory trade-off, refinements from your feedback</a:t>
-            </a:r>
-            <a:endParaRPr lang="en-US" sz="1150" dirty="0"/>
-          </a:p>
-        </p:txBody>
-      </p:sp>
-      <p:sp>
-        <p:nvSpPr>
-          <p:cNvPr id="12" name="Shape 10"/>
-          <p:cNvSpPr/>
-          <p:nvPr/>
-        </p:nvSpPr>
-        <p:spPr>
-          <a:xfrm>
-            <a:off x="8110728" y="2331720"/>
-            <a:ext cx="3429000" cy="2926080"/>
-          </a:xfrm>
-          <a:prstGeom prst="roundRect">
-            <a:avLst>
-              <a:gd name="adj" fmla="val 2500"/>
-            </a:avLst>
-          </a:prstGeom>
-          <a:solidFill>
-            <a:srgbClr val="1C2530"/>
-          </a:solidFill>
-          <a:ln w="12700">
-            <a:solidFill>
-              <a:srgbClr val="1C2530"/>
-            </a:solidFill>
-            <a:prstDash val="solid"/>
-          </a:ln>
-        </p:spPr>
-      </p:sp>
-      <p:sp>
-        <p:nvSpPr>
-          <p:cNvPr id="13" name="Text 11"/>
-          <p:cNvSpPr/>
-          <p:nvPr/>
-        </p:nvSpPr>
-        <p:spPr>
-          <a:xfrm>
-            <a:off x="8430768" y="2697480"/>
-            <a:ext cx="2788920" cy="320040"/>
-          </a:xfrm>
-          <a:prstGeom prst="rect">
-            <a:avLst/>
-          </a:prstGeom>
-          <a:noFill/>
-          <a:ln/>
-        </p:spPr>
-        <p:txBody>
-          <a:bodyPr wrap="square" lIns="0" tIns="0" rIns="0" bIns="0" rtlCol="0" anchor="ctr"/>
-          <a:lstStyle/>
-          <a:p>
-            <a:pPr indent="0" marL="0">
-              <a:buNone/>
-            </a:pPr>
-            <a:r>
-              <a:rPr lang="en-US" sz="1050" b="1" spc="200" kern="0" dirty="0">
-                <a:solidFill>
-                  <a:srgbClr val="9AA4B0"/>
-                </a:solidFill>
-                <a:latin typeface="Calibri" pitchFamily="34" charset="0"/>
-                <a:ea typeface="Calibri" pitchFamily="34" charset="-122"/>
-                <a:cs typeface="Calibri" pitchFamily="34" charset="-120"/>
-              </a:rPr>
-              <a:t>FINAL — 28 SEP</a:t>
-            </a:r>
-            <a:endParaRPr lang="en-US" sz="1050" dirty="0"/>
-          </a:p>
-        </p:txBody>
-      </p:sp>
-      <p:sp>
-        <p:nvSpPr>
-          <p:cNvPr id="14" name="Text 12"/>
-          <p:cNvSpPr/>
-          <p:nvPr/>
-        </p:nvSpPr>
-        <p:spPr>
-          <a:xfrm>
-            <a:off x="8430768" y="3063240"/>
-            <a:ext cx="2788920" cy="777240"/>
-          </a:xfrm>
-          <a:prstGeom prst="rect">
-            <a:avLst/>
-          </a:prstGeom>
-          <a:noFill/>
-          <a:ln/>
-        </p:spPr>
-        <p:txBody>
-          <a:bodyPr wrap="square" lIns="0" tIns="0" rIns="0" bIns="0" rtlCol="0" anchor="ctr"/>
-          <a:lstStyle/>
-          <a:p>
-            <a:pPr indent="0" marL="0">
-              <a:buNone/>
-            </a:pPr>
-            <a:r>
-              <a:rPr lang="en-US" sz="1900" b="1" dirty="0">
-                <a:solidFill>
-                  <a:srgbClr val="F5F7FA"/>
-                </a:solidFill>
-                <a:latin typeface="Cambria" pitchFamily="34" charset="0"/>
-                <a:ea typeface="Cambria" pitchFamily="34" charset="-122"/>
-                <a:cs typeface="Cambria" pitchFamily="34" charset="-120"/>
-              </a:rPr>
-              <a:t>Final forecast &amp; handover</a:t>
-            </a:r>
-            <a:endParaRPr lang="en-US" sz="1900" dirty="0"/>
-          </a:p>
-        </p:txBody>
-      </p:sp>
-      <p:sp>
-        <p:nvSpPr>
-          <p:cNvPr id="15" name="Text 13"/>
-          <p:cNvSpPr/>
-          <p:nvPr/>
-        </p:nvSpPr>
-        <p:spPr>
-          <a:xfrm>
-            <a:off x="8430768" y="3886200"/>
-            <a:ext cx="2788920" cy="1234440"/>
-          </a:xfrm>
-          <a:prstGeom prst="rect">
-            <a:avLst/>
-          </a:prstGeom>
-          <a:noFill/>
-          <a:ln/>
-        </p:spPr>
-        <p:txBody>
-          <a:bodyPr wrap="square" lIns="0" tIns="0" rIns="0" bIns="0" rtlCol="0" anchor="ctr"/>
-          <a:lstStyle/>
-          <a:p>
-            <a:pPr indent="0" marL="0">
-              <a:lnSpc>
-                <a:spcPct val="120000"/>
-              </a:lnSpc>
-              <a:buNone/>
-            </a:pPr>
-            <a:r>
-              <a:rPr lang="en-US" sz="1150" dirty="0">
-                <a:solidFill>
-                  <a:srgbClr val="C9D2DB"/>
-                </a:solidFill>
-                <a:latin typeface="Calibri" pitchFamily="34" charset="0"/>
-                <a:ea typeface="Calibri" pitchFamily="34" charset="-122"/>
-                <a:cs typeface="Calibri" pitchFamily="34" charset="-120"/>
-              </a:rPr>
-              <a:t>final forecast with full written report, documented assumptions, and the dashboard handed over</a:t>
-            </a:r>
-            <a:endParaRPr lang="en-US" sz="1150" dirty="0"/>
-          </a:p>
-        </p:txBody>
-      </p:sp>
-      <p:sp>
-        <p:nvSpPr>
-          <p:cNvPr id="16" name="Text 14"/>
-          <p:cNvSpPr/>
-          <p:nvPr/>
-        </p:nvSpPr>
-        <p:spPr>
-          <a:xfrm>
-            <a:off x="685800" y="5760720"/>
-            <a:ext cx="10817352" cy="548640"/>
-          </a:xfrm>
-          <a:prstGeom prst="rect">
-            <a:avLst/>
-          </a:prstGeom>
-          <a:noFill/>
-          <a:ln/>
-        </p:spPr>
-        <p:txBody>
-          <a:bodyPr wrap="square" lIns="0" tIns="0" rIns="0" bIns="0" rtlCol="0" anchor="ctr"/>
-          <a:lstStyle/>
-          <a:p>
-            <a:pPr indent="0" marL="0">
-              <a:buNone/>
-            </a:pPr>
-            <a:r>
-              <a:rPr lang="en-US" sz="1250" i="1" dirty="0">
-                <a:solidFill>
-                  <a:srgbClr val="6B7280"/>
-                </a:solidFill>
-                <a:latin typeface="Calibri" pitchFamily="34" charset="0"/>
-                <a:ea typeface="Calibri" pitchFamily="34" charset="-122"/>
-                <a:cs typeface="Calibri" pitchFamily="34" charset="-120"/>
-              </a:rPr>
-              <a:t>Between milestones: sales-input channel for the event-driven products, monthly re-forecast rhythm, and refinements from today’s discussion.</a:t>
-            </a:r>
-            <a:endParaRPr lang="en-US" sz="1250" dirty="0"/>
-          </a:p>
-        </p:txBody>
-      </p:sp>
-    </p:spTree>
-  </p:cSld>
-  <p:clrMapOvr>
-    <a:masterClrMapping/>
-  </p:clrMapOvr>
-</p:sld>
-</file>
-
-<file path=ppt/slides/slide11.xml><?xml version="1.0" encoding="utf-8"?>
-<p:sld xmlns:a="http://schemas.openxmlformats.org/drawingml/2006/main" xmlns:r="http://schemas.openxmlformats.org/officeDocument/2006/relationships" xmlns:p="http://schemas.openxmlformats.org/presentationml/2006/main">
-  <p:cSld name="Slide 11">
-    <p:bg>
-      <p:bgPr>
-        <a:solidFill>
           <a:srgbClr val="1C2530"/>
         </a:solidFill>
       </p:bgPr>
@@ -5939,7 +5260,7 @@
                 <a:ea typeface="Calibri" pitchFamily="34" charset="-122"/>
                 <a:cs typeface="Calibri" pitchFamily="34" charset="-120"/>
               </a:rPr>
-              <a:t>Live demonstration available after the presentation.</a:t>
+              <a:t>Demonstrated live in a moment — on the real data.</a:t>
             </a:r>
             <a:endParaRPr lang="en-US" sz="1250" dirty="0"/>
           </a:p>
@@ -6471,7 +5792,7 @@
                 <a:ea typeface="Calibri" pitchFamily="34" charset="-122"/>
                 <a:cs typeface="Calibri" pitchFamily="34" charset="-120"/>
               </a:rPr>
-              <a:t>08 — FOUND IN THE FINE PRINT</a:t>
+              <a:t>09 — THE ROAD AHEAD</a:t>
             </a:r>
             <a:endParaRPr lang="en-US" sz="1050" dirty="0"/>
           </a:p>
@@ -6510,7 +5831,7 @@
                 <a:ea typeface="Cambria" pitchFamily="34" charset="-122"/>
                 <a:cs typeface="Cambria" pitchFamily="34" charset="-120"/>
               </a:rPr>
-              <a:t>Two findings from careful reading.</a:t>
+              <a:t>Two milestones to the final forecast.</a:t>
             </a:r>
             <a:endParaRPr lang="en-US" sz="3800" dirty="0"/>
           </a:p>
@@ -6518,212 +5839,413 @@
       </p:sp>
       <p:sp>
         <p:nvSpPr>
-          <p:cNvPr id="4" name="Text 2"/>
-          <p:cNvSpPr/>
-          <p:nvPr/>
-        </p:nvSpPr>
-        <p:spPr>
-          <a:xfrm>
-            <a:off x="685800" y="2386584"/>
-            <a:ext cx="1417320" cy="320040"/>
-          </a:xfrm>
-          <a:prstGeom prst="rect">
-            <a:avLst/>
-          </a:prstGeom>
-          <a:noFill/>
-          <a:ln/>
-        </p:spPr>
-        <p:txBody>
-          <a:bodyPr wrap="square" lIns="0" tIns="0" rIns="0" bIns="0" rtlCol="0" anchor="ctr"/>
-          <a:lstStyle/>
-          <a:p>
-            <a:pPr indent="0" marL="0">
-              <a:buNone/>
-            </a:pPr>
-            <a:r>
-              <a:rPr lang="en-US" sz="1100" b="1" spc="200" kern="0" dirty="0">
-                <a:solidFill>
-                  <a:srgbClr val="6B7280"/>
+          <p:cNvPr id="4" name="Shape 2"/>
+          <p:cNvSpPr/>
+          <p:nvPr/>
+        </p:nvSpPr>
+        <p:spPr>
+          <a:xfrm>
+            <a:off x="685800" y="2331720"/>
+            <a:ext cx="3429000" cy="2926080"/>
+          </a:xfrm>
+          <a:prstGeom prst="roundRect">
+            <a:avLst>
+              <a:gd name="adj" fmla="val 2500"/>
+            </a:avLst>
+          </a:prstGeom>
+          <a:solidFill>
+            <a:srgbClr val="1C2530"/>
+          </a:solidFill>
+          <a:ln w="12700">
+            <a:solidFill>
+              <a:srgbClr val="1C2530"/>
+            </a:solidFill>
+            <a:prstDash val="solid"/>
+          </a:ln>
+        </p:spPr>
+      </p:sp>
+      <p:sp>
+        <p:nvSpPr>
+          <p:cNvPr id="5" name="Text 3"/>
+          <p:cNvSpPr/>
+          <p:nvPr/>
+        </p:nvSpPr>
+        <p:spPr>
+          <a:xfrm>
+            <a:off x="1005840" y="2697480"/>
+            <a:ext cx="2788920" cy="320040"/>
+          </a:xfrm>
+          <a:prstGeom prst="rect">
+            <a:avLst/>
+          </a:prstGeom>
+          <a:noFill/>
+          <a:ln/>
+        </p:spPr>
+        <p:txBody>
+          <a:bodyPr wrap="square" lIns="0" tIns="0" rIns="0" bIns="0" rtlCol="0" anchor="ctr"/>
+          <a:lstStyle/>
+          <a:p>
+            <a:pPr indent="0" marL="0">
+              <a:buNone/>
+            </a:pPr>
+            <a:r>
+              <a:rPr lang="en-US" sz="1050" b="1" spc="200" kern="0" dirty="0">
+                <a:solidFill>
+                  <a:srgbClr val="9AA4B0"/>
                 </a:solidFill>
                 <a:latin typeface="Calibri" pitchFamily="34" charset="0"/>
                 <a:ea typeface="Calibri" pitchFamily="34" charset="-122"/>
                 <a:cs typeface="Calibri" pitchFamily="34" charset="-120"/>
               </a:rPr>
-              <a:t>RESOLVED</a:t>
-            </a:r>
-            <a:endParaRPr lang="en-US" sz="1100" dirty="0"/>
-          </a:p>
-        </p:txBody>
-      </p:sp>
-      <p:sp>
-        <p:nvSpPr>
-          <p:cNvPr id="5" name="Text 3"/>
-          <p:cNvSpPr/>
-          <p:nvPr/>
-        </p:nvSpPr>
-        <p:spPr>
-          <a:xfrm>
-            <a:off x="2331720" y="2331720"/>
-            <a:ext cx="8778240" cy="411480"/>
-          </a:xfrm>
-          <a:prstGeom prst="rect">
-            <a:avLst/>
-          </a:prstGeom>
-          <a:noFill/>
-          <a:ln/>
-        </p:spPr>
-        <p:txBody>
-          <a:bodyPr wrap="square" lIns="0" tIns="0" rIns="0" bIns="0" rtlCol="0" anchor="ctr"/>
-          <a:lstStyle/>
-          <a:p>
-            <a:pPr indent="0" marL="0">
-              <a:buNone/>
-            </a:pPr>
-            <a:r>
-              <a:rPr lang="en-US" sz="1550" b="1" dirty="0">
-                <a:solidFill>
-                  <a:srgbClr val="1C2530"/>
+              <a:t>TODAY — 10 AUG</a:t>
+            </a:r>
+            <a:endParaRPr lang="en-US" sz="1050" dirty="0"/>
+          </a:p>
+        </p:txBody>
+      </p:sp>
+      <p:sp>
+        <p:nvSpPr>
+          <p:cNvPr id="6" name="Text 4"/>
+          <p:cNvSpPr/>
+          <p:nvPr/>
+        </p:nvSpPr>
+        <p:spPr>
+          <a:xfrm>
+            <a:off x="1005840" y="3063240"/>
+            <a:ext cx="2788920" cy="777240"/>
+          </a:xfrm>
+          <a:prstGeom prst="rect">
+            <a:avLst/>
+          </a:prstGeom>
+          <a:noFill/>
+          <a:ln/>
+        </p:spPr>
+        <p:txBody>
+          <a:bodyPr wrap="square" lIns="0" tIns="0" rIns="0" bIns="0" rtlCol="0" anchor="ctr"/>
+          <a:lstStyle/>
+          <a:p>
+            <a:pPr indent="0" marL="0">
+              <a:buNone/>
+            </a:pPr>
+            <a:r>
+              <a:rPr lang="en-US" sz="1900" b="1" dirty="0">
+                <a:solidFill>
+                  <a:srgbClr val="F5F7FA"/>
+                </a:solidFill>
+                <a:latin typeface="Cambria" pitchFamily="34" charset="0"/>
+                <a:ea typeface="Cambria" pitchFamily="34" charset="-122"/>
+                <a:cs typeface="Cambria" pitchFamily="34" charset="-120"/>
+              </a:rPr>
+              <a:t>Progress report</a:t>
+            </a:r>
+            <a:endParaRPr lang="en-US" sz="1900" dirty="0"/>
+          </a:p>
+        </p:txBody>
+      </p:sp>
+      <p:sp>
+        <p:nvSpPr>
+          <p:cNvPr id="7" name="Text 5"/>
+          <p:cNvSpPr/>
+          <p:nvPr/>
+        </p:nvSpPr>
+        <p:spPr>
+          <a:xfrm>
+            <a:off x="1005840" y="3886200"/>
+            <a:ext cx="2788920" cy="1234440"/>
+          </a:xfrm>
+          <a:prstGeom prst="rect">
+            <a:avLst/>
+          </a:prstGeom>
+          <a:noFill/>
+          <a:ln/>
+        </p:spPr>
+        <p:txBody>
+          <a:bodyPr wrap="square" lIns="0" tIns="0" rIns="0" bIns="0" rtlCol="0" anchor="ctr"/>
+          <a:lstStyle/>
+          <a:p>
+            <a:pPr indent="0" marL="0">
+              <a:lnSpc>
+                <a:spcPct val="120000"/>
+              </a:lnSpc>
+              <a:buNone/>
+            </a:pPr>
+            <a:r>
+              <a:rPr lang="en-US" sz="1150" dirty="0">
+                <a:solidFill>
+                  <a:srgbClr val="C9D2DB"/>
                 </a:solidFill>
                 <a:latin typeface="Calibri" pitchFamily="34" charset="0"/>
                 <a:ea typeface="Calibri" pitchFamily="34" charset="-122"/>
                 <a:cs typeface="Calibri" pitchFamily="34" charset="-120"/>
               </a:rPr>
-              <a:t>“Closed” orders are cancelled work</a:t>
-            </a:r>
-            <a:endParaRPr lang="en-US" sz="1550" dirty="0"/>
-          </a:p>
-        </p:txBody>
-      </p:sp>
-      <p:sp>
-        <p:nvSpPr>
-          <p:cNvPr id="6" name="Text 4"/>
-          <p:cNvSpPr/>
-          <p:nvPr/>
-        </p:nvSpPr>
-        <p:spPr>
-          <a:xfrm>
-            <a:off x="2331720" y="2788920"/>
-            <a:ext cx="8778240" cy="868680"/>
-          </a:xfrm>
-          <a:prstGeom prst="rect">
-            <a:avLst/>
-          </a:prstGeom>
-          <a:noFill/>
-          <a:ln/>
-        </p:spPr>
-        <p:txBody>
-          <a:bodyPr wrap="square" lIns="0" tIns="0" rIns="0" bIns="0" rtlCol="0" anchor="ctr"/>
-          <a:lstStyle/>
-          <a:p>
-            <a:pPr indent="0" marL="0">
-              <a:lnSpc>
-                <a:spcPct val="115000"/>
-              </a:lnSpc>
-              <a:buNone/>
-            </a:pPr>
-            <a:r>
-              <a:rPr lang="en-US" sz="1200" dirty="0">
-                <a:solidFill>
-                  <a:srgbClr val="6B7280"/>
+              <a:t>system built and running; data understood; questions raised</a:t>
+            </a:r>
+            <a:endParaRPr lang="en-US" sz="1150" dirty="0"/>
+          </a:p>
+        </p:txBody>
+      </p:sp>
+      <p:sp>
+        <p:nvSpPr>
+          <p:cNvPr id="8" name="Shape 6"/>
+          <p:cNvSpPr/>
+          <p:nvPr/>
+        </p:nvSpPr>
+        <p:spPr>
+          <a:xfrm>
+            <a:off x="4398264" y="2331720"/>
+            <a:ext cx="3429000" cy="2926080"/>
+          </a:xfrm>
+          <a:prstGeom prst="roundRect">
+            <a:avLst>
+              <a:gd name="adj" fmla="val 2500"/>
+            </a:avLst>
+          </a:prstGeom>
+          <a:solidFill>
+            <a:srgbClr val="C8102E"/>
+          </a:solidFill>
+          <a:ln w="12700">
+            <a:solidFill>
+              <a:srgbClr val="C8102E"/>
+            </a:solidFill>
+            <a:prstDash val="solid"/>
+          </a:ln>
+        </p:spPr>
+      </p:sp>
+      <p:sp>
+        <p:nvSpPr>
+          <p:cNvPr id="9" name="Text 7"/>
+          <p:cNvSpPr/>
+          <p:nvPr/>
+        </p:nvSpPr>
+        <p:spPr>
+          <a:xfrm>
+            <a:off x="4718304" y="2697480"/>
+            <a:ext cx="2788920" cy="320040"/>
+          </a:xfrm>
+          <a:prstGeom prst="rect">
+            <a:avLst/>
+          </a:prstGeom>
+          <a:noFill/>
+          <a:ln/>
+        </p:spPr>
+        <p:txBody>
+          <a:bodyPr wrap="square" lIns="0" tIns="0" rIns="0" bIns="0" rtlCol="0" anchor="ctr"/>
+          <a:lstStyle/>
+          <a:p>
+            <a:pPr indent="0" marL="0">
+              <a:buNone/>
+            </a:pPr>
+            <a:r>
+              <a:rPr lang="en-US" sz="1050" b="1" spc="200" kern="0" dirty="0">
+                <a:solidFill>
+                  <a:srgbClr val="F3C2CB"/>
                 </a:solidFill>
                 <a:latin typeface="Calibri" pitchFamily="34" charset="0"/>
                 <a:ea typeface="Calibri" pitchFamily="34" charset="-122"/>
                 <a:cs typeface="Calibri" pitchFamily="34" charset="-120"/>
               </a:rPr>
-              <a:t>the authoritative dictionary sheet: closed orders are never fulfilled or billed — they count as expressed demand for stock planning, never as revenue</a:t>
-            </a:r>
-            <a:endParaRPr lang="en-US" sz="1200" dirty="0"/>
-          </a:p>
-        </p:txBody>
-      </p:sp>
-      <p:sp>
-        <p:nvSpPr>
-          <p:cNvPr id="7" name="Text 5"/>
-          <p:cNvSpPr/>
-          <p:nvPr/>
-        </p:nvSpPr>
-        <p:spPr>
-          <a:xfrm>
-            <a:off x="685800" y="3986784"/>
-            <a:ext cx="1417320" cy="320040"/>
-          </a:xfrm>
-          <a:prstGeom prst="rect">
-            <a:avLst/>
-          </a:prstGeom>
-          <a:noFill/>
-          <a:ln/>
-        </p:spPr>
-        <p:txBody>
-          <a:bodyPr wrap="square" lIns="0" tIns="0" rIns="0" bIns="0" rtlCol="0" anchor="ctr"/>
-          <a:lstStyle/>
-          <a:p>
-            <a:pPr indent="0" marL="0">
-              <a:buNone/>
-            </a:pPr>
-            <a:r>
-              <a:rPr lang="en-US" sz="1100" b="1" spc="200" kern="0" dirty="0">
-                <a:solidFill>
-                  <a:srgbClr val="C8102E"/>
+              <a:t>SEMI-FINAL — 7 SEP</a:t>
+            </a:r>
+            <a:endParaRPr lang="en-US" sz="1050" dirty="0"/>
+          </a:p>
+        </p:txBody>
+      </p:sp>
+      <p:sp>
+        <p:nvSpPr>
+          <p:cNvPr id="10" name="Text 8"/>
+          <p:cNvSpPr/>
+          <p:nvPr/>
+        </p:nvSpPr>
+        <p:spPr>
+          <a:xfrm>
+            <a:off x="4718304" y="3063240"/>
+            <a:ext cx="2788920" cy="777240"/>
+          </a:xfrm>
+          <a:prstGeom prst="rect">
+            <a:avLst/>
+          </a:prstGeom>
+          <a:noFill/>
+          <a:ln/>
+        </p:spPr>
+        <p:txBody>
+          <a:bodyPr wrap="square" lIns="0" tIns="0" rIns="0" bIns="0" rtlCol="0" anchor="ctr"/>
+          <a:lstStyle/>
+          <a:p>
+            <a:pPr indent="0" marL="0">
+              <a:buNone/>
+            </a:pPr>
+            <a:r>
+              <a:rPr lang="en-US" sz="1900" b="1" dirty="0">
+                <a:solidFill>
+                  <a:srgbClr val="F5F7FA"/>
+                </a:solidFill>
+                <a:latin typeface="Cambria" pitchFamily="34" charset="0"/>
+                <a:ea typeface="Cambria" pitchFamily="34" charset="-122"/>
+                <a:cs typeface="Cambria" pitchFamily="34" charset="-120"/>
+              </a:rPr>
+              <a:t>Results &amp; evidence</a:t>
+            </a:r>
+            <a:endParaRPr lang="en-US" sz="1900" dirty="0"/>
+          </a:p>
+        </p:txBody>
+      </p:sp>
+      <p:sp>
+        <p:nvSpPr>
+          <p:cNvPr id="11" name="Text 9"/>
+          <p:cNvSpPr/>
+          <p:nvPr/>
+        </p:nvSpPr>
+        <p:spPr>
+          <a:xfrm>
+            <a:off x="4718304" y="3886200"/>
+            <a:ext cx="2788920" cy="1234440"/>
+          </a:xfrm>
+          <a:prstGeom prst="rect">
+            <a:avLst/>
+          </a:prstGeom>
+          <a:noFill/>
+          <a:ln/>
+        </p:spPr>
+        <p:txBody>
+          <a:bodyPr wrap="square" lIns="0" tIns="0" rIns="0" bIns="0" rtlCol="0" anchor="ctr"/>
+          <a:lstStyle/>
+          <a:p>
+            <a:pPr indent="0" marL="0">
+              <a:lnSpc>
+                <a:spcPct val="120000"/>
+              </a:lnSpc>
+              <a:buNone/>
+            </a:pPr>
+            <a:r>
+              <a:rPr lang="en-US" sz="1150" dirty="0">
+                <a:solidFill>
+                  <a:srgbClr val="F3D9DD"/>
                 </a:solidFill>
                 <a:latin typeface="Calibri" pitchFamily="34" charset="0"/>
                 <a:ea typeface="Calibri" pitchFamily="34" charset="-122"/>
                 <a:cs typeface="Calibri" pitchFamily="34" charset="-120"/>
               </a:rPr>
-              <a:t>OPEN</a:t>
-            </a:r>
-            <a:endParaRPr lang="en-US" sz="1100" dirty="0"/>
-          </a:p>
-        </p:txBody>
-      </p:sp>
-      <p:sp>
-        <p:nvSpPr>
-          <p:cNvPr id="8" name="Text 6"/>
-          <p:cNvSpPr/>
-          <p:nvPr/>
-        </p:nvSpPr>
-        <p:spPr>
-          <a:xfrm>
-            <a:off x="2331720" y="3931920"/>
-            <a:ext cx="8778240" cy="411480"/>
-          </a:xfrm>
-          <a:prstGeom prst="rect">
-            <a:avLst/>
-          </a:prstGeom>
-          <a:noFill/>
-          <a:ln/>
-        </p:spPr>
-        <p:txBody>
-          <a:bodyPr wrap="square" lIns="0" tIns="0" rIns="0" bIns="0" rtlCol="0" anchor="ctr"/>
-          <a:lstStyle/>
-          <a:p>
-            <a:pPr indent="0" marL="0">
-              <a:buNone/>
-            </a:pPr>
-            <a:r>
-              <a:rPr lang="en-US" sz="1550" b="1" dirty="0">
-                <a:solidFill>
-                  <a:srgbClr val="1C2530"/>
+              <a:t>the FY2025 numbers, accuracy against withheld years, inventory trade-off, refinements from your feedback</a:t>
+            </a:r>
+            <a:endParaRPr lang="en-US" sz="1150" dirty="0"/>
+          </a:p>
+        </p:txBody>
+      </p:sp>
+      <p:sp>
+        <p:nvSpPr>
+          <p:cNvPr id="12" name="Shape 10"/>
+          <p:cNvSpPr/>
+          <p:nvPr/>
+        </p:nvSpPr>
+        <p:spPr>
+          <a:xfrm>
+            <a:off x="8110728" y="2331720"/>
+            <a:ext cx="3429000" cy="2926080"/>
+          </a:xfrm>
+          <a:prstGeom prst="roundRect">
+            <a:avLst>
+              <a:gd name="adj" fmla="val 2500"/>
+            </a:avLst>
+          </a:prstGeom>
+          <a:solidFill>
+            <a:srgbClr val="1C2530"/>
+          </a:solidFill>
+          <a:ln w="12700">
+            <a:solidFill>
+              <a:srgbClr val="1C2530"/>
+            </a:solidFill>
+            <a:prstDash val="solid"/>
+          </a:ln>
+        </p:spPr>
+      </p:sp>
+      <p:sp>
+        <p:nvSpPr>
+          <p:cNvPr id="13" name="Text 11"/>
+          <p:cNvSpPr/>
+          <p:nvPr/>
+        </p:nvSpPr>
+        <p:spPr>
+          <a:xfrm>
+            <a:off x="8430768" y="2697480"/>
+            <a:ext cx="2788920" cy="320040"/>
+          </a:xfrm>
+          <a:prstGeom prst="rect">
+            <a:avLst/>
+          </a:prstGeom>
+          <a:noFill/>
+          <a:ln/>
+        </p:spPr>
+        <p:txBody>
+          <a:bodyPr wrap="square" lIns="0" tIns="0" rIns="0" bIns="0" rtlCol="0" anchor="ctr"/>
+          <a:lstStyle/>
+          <a:p>
+            <a:pPr indent="0" marL="0">
+              <a:buNone/>
+            </a:pPr>
+            <a:r>
+              <a:rPr lang="en-US" sz="1050" b="1" spc="200" kern="0" dirty="0">
+                <a:solidFill>
+                  <a:srgbClr val="9AA4B0"/>
                 </a:solidFill>
                 <a:latin typeface="Calibri" pitchFamily="34" charset="0"/>
                 <a:ea typeface="Calibri" pitchFamily="34" charset="-122"/>
                 <a:cs typeface="Calibri" pitchFamily="34" charset="-120"/>
               </a:rPr>
-              <a:t>The VIP discount is not inside Base Price</a:t>
-            </a:r>
-            <a:endParaRPr lang="en-US" sz="1550" dirty="0"/>
-          </a:p>
-        </p:txBody>
-      </p:sp>
-      <p:sp>
-        <p:nvSpPr>
-          <p:cNvPr id="9" name="Text 7"/>
-          <p:cNvSpPr/>
-          <p:nvPr/>
-        </p:nvSpPr>
-        <p:spPr>
-          <a:xfrm>
-            <a:off x="2331720" y="4389120"/>
-            <a:ext cx="8778240" cy="868680"/>
+              <a:t>FINAL — 28 SEP</a:t>
+            </a:r>
+            <a:endParaRPr lang="en-US" sz="1050" dirty="0"/>
+          </a:p>
+        </p:txBody>
+      </p:sp>
+      <p:sp>
+        <p:nvSpPr>
+          <p:cNvPr id="14" name="Text 12"/>
+          <p:cNvSpPr/>
+          <p:nvPr/>
+        </p:nvSpPr>
+        <p:spPr>
+          <a:xfrm>
+            <a:off x="8430768" y="3063240"/>
+            <a:ext cx="2788920" cy="777240"/>
+          </a:xfrm>
+          <a:prstGeom prst="rect">
+            <a:avLst/>
+          </a:prstGeom>
+          <a:noFill/>
+          <a:ln/>
+        </p:spPr>
+        <p:txBody>
+          <a:bodyPr wrap="square" lIns="0" tIns="0" rIns="0" bIns="0" rtlCol="0" anchor="ctr"/>
+          <a:lstStyle/>
+          <a:p>
+            <a:pPr indent="0" marL="0">
+              <a:buNone/>
+            </a:pPr>
+            <a:r>
+              <a:rPr lang="en-US" sz="1900" b="1" dirty="0">
+                <a:solidFill>
+                  <a:srgbClr val="F5F7FA"/>
+                </a:solidFill>
+                <a:latin typeface="Cambria" pitchFamily="34" charset="0"/>
+                <a:ea typeface="Cambria" pitchFamily="34" charset="-122"/>
+                <a:cs typeface="Cambria" pitchFamily="34" charset="-120"/>
+              </a:rPr>
+              <a:t>Final forecast &amp; handover</a:t>
+            </a:r>
+            <a:endParaRPr lang="en-US" sz="1900" dirty="0"/>
+          </a:p>
+        </p:txBody>
+      </p:sp>
+      <p:sp>
+        <p:nvSpPr>
+          <p:cNvPr id="15" name="Text 13"/>
+          <p:cNvSpPr/>
+          <p:nvPr/>
+        </p:nvSpPr>
+        <p:spPr>
+          <a:xfrm>
+            <a:off x="8430768" y="3886200"/>
+            <a:ext cx="2788920" cy="1234440"/>
           </a:xfrm>
           <a:prstGeom prst="rect">
             <a:avLst/>
@@ -6737,35 +6259,35 @@
           <a:p>
             <a:pPr indent="0" marL="0">
               <a:lnSpc>
-                <a:spcPct val="115000"/>
+                <a:spcPct val="120000"/>
               </a:lnSpc>
               <a:buNone/>
             </a:pPr>
             <a:r>
-              <a:rPr lang="en-US" sz="1200" dirty="0">
-                <a:solidFill>
-                  <a:srgbClr val="6B7280"/>
+              <a:rPr lang="en-US" sz="1150" dirty="0">
+                <a:solidFill>
+                  <a:srgbClr val="C9D2DB"/>
                 </a:solidFill>
                 <a:latin typeface="Calibri" pitchFamily="34" charset="0"/>
                 <a:ea typeface="Calibri" pitchFamily="34" charset="-122"/>
                 <a:cs typeface="Calibri" pitchFamily="34" charset="-120"/>
               </a:rPr>
-              <a:t>the dictionary grants VIP a 37% discount from list — yet on shared products, VIP and End User pay an identical Base Price (median ratio 1.000). The discount must be applied outside this file; ฿461m of revenue interpretation rides on Mitsubishi’s answer</a:t>
-            </a:r>
-            <a:endParaRPr lang="en-US" sz="1200" dirty="0"/>
-          </a:p>
-        </p:txBody>
-      </p:sp>
-      <p:sp>
-        <p:nvSpPr>
-          <p:cNvPr id="10" name="Text 8"/>
+              <a:t>final forecast with full written report, documented assumptions, and the dashboard handed over</a:t>
+            </a:r>
+            <a:endParaRPr lang="en-US" sz="1150" dirty="0"/>
+          </a:p>
+        </p:txBody>
+      </p:sp>
+      <p:sp>
+        <p:nvSpPr>
+          <p:cNvPr id="16" name="Text 14"/>
           <p:cNvSpPr/>
           <p:nvPr/>
         </p:nvSpPr>
         <p:spPr>
           <a:xfrm>
             <a:off x="685800" y="5760720"/>
-            <a:ext cx="10817352" cy="457200"/>
+            <a:ext cx="10817352" cy="548640"/>
           </a:xfrm>
           <a:prstGeom prst="rect">
             <a:avLst/>
@@ -6789,7 +6311,7 @@
                 <a:ea typeface="Calibri" pitchFamily="34" charset="-122"/>
                 <a:cs typeface="Calibri" pitchFamily="34" charset="-120"/>
               </a:rPr>
-              <a:t>Either answer to the pricing question takes effect through one configuration line — the system re-runs in two minutes.</a:t>
+              <a:t>Between milestones: sales-input channel for the event-driven products, monthly re-forecast rhythm, and refinements from today’s discussion.</a:t>
             </a:r>
             <a:endParaRPr lang="en-US" sz="1250" dirty="0"/>
           </a:p>

--- a/presentation/FY2025_progress_report.pptx
+++ b/presentation/FY2025_progress_report.pptx
@@ -13,11 +13,9 @@
     <p:sldId id="261" r:id="rId7"/>
     <p:sldId id="262" r:id="rId8"/>
     <p:sldId id="263" r:id="rId9"/>
-    <p:sldId id="264" r:id="rId10"/>
-    <p:sldId id="265" r:id="rId11"/>
   </p:sldIdLst>
   <p:notesMasterIdLst>
-    <p:notesMasterId r:id="rId12"/>
+    <p:notesMasterId r:id="rId10"/>
   </p:notesMasterIdLst>
   <p:sldSz cx="12192000" cy="6858000"/>
   <p:notesSz cx="6858000" cy="12192000"/>
@@ -511,7 +509,7 @@
           <a:p>
             <a:r>
               <a:rPr lang="en-US" dirty="0"/>
-              <a:t>Good morning. This is a progress report on the Mitsubishi Electric forecasting project: the problem we were given, the work completed so far, and the plan to the semi-final and final presentations. (~40s)</a:t>
+              <a:t>Good morning. This is our progress report on the Mitsubishi Electric forecasting project. Three parts: what we have done, what we have faced, and what we will do next. (~35s)</a:t>
             </a:r>
             <a:endParaRPr lang="en-US" dirty="0"/>
           </a:p>
@@ -535,94 +533,6 @@
             <a:fld id="{F7021451-1387-4CA6-816F-3879F97B5CBC}" type="slidenum">
               <a:rPr lang="en-US"/>
               <a:t>1</a:t>
-            </a:fld>
-            <a:endParaRPr lang="en-US"/>
-          </a:p>
-        </p:txBody>
-      </p:sp>
-    </p:spTree>
-    <p:extLst>
-      <p:ext uri="{BB962C8B-B14F-4D97-AF65-F5344CB8AC3E}">
-        <p14:creationId xmlns:p14="http://schemas.microsoft.com/office/powerpoint/2010/main" val="1024086991"/>
-      </p:ext>
-    </p:extLst>
-  </p:cSld>
-  <p:clrMapOvr>
-    <a:masterClrMapping/>
-  </p:clrMapOvr>
-</p:notes>
-</file>
-
-<file path=ppt/notesSlides/notesSlide10.xml><?xml version="1.0" encoding="utf-8"?>
-<p:notes xmlns:a="http://schemas.openxmlformats.org/drawingml/2006/main" xmlns:r="http://schemas.openxmlformats.org/officeDocument/2006/relationships" xmlns:p="http://schemas.openxmlformats.org/presentationml/2006/main">
-  <p:cSld>
-    <p:spTree>
-      <p:nvGrpSpPr>
-        <p:cNvPr id="1" name=""/>
-        <p:cNvGrpSpPr/>
-        <p:nvPr/>
-      </p:nvGrpSpPr>
-      <p:grpSpPr>
-        <a:xfrm>
-          <a:off x="0" y="0"/>
-          <a:ext cx="0" cy="0"/>
-          <a:chOff x="0" y="0"/>
-          <a:chExt cx="0" cy="0"/>
-        </a:xfrm>
-      </p:grpSpPr>
-      <p:sp>
-        <p:nvSpPr>
-          <p:cNvPr id="2" name="Slide Image Placeholder 1"/>
-          <p:cNvSpPr>
-            <a:spLocks noGrp="1" noRot="1" noChangeAspect="1"/>
-          </p:cNvSpPr>
-          <p:nvPr>
-            <p:ph type="sldImg"/>
-          </p:nvPr>
-        </p:nvSpPr>
-        <p:spPr/>
-      </p:sp>
-      <p:sp>
-        <p:nvSpPr>
-          <p:cNvPr id="3" name="Notes Placeholder 2"/>
-          <p:cNvSpPr>
-            <a:spLocks noGrp="1"/>
-          </p:cNvSpPr>
-          <p:nvPr>
-            <p:ph type="body" idx="1"/>
-          </p:nvPr>
-        </p:nvSpPr>
-        <p:spPr/>
-        <p:txBody>
-          <a:bodyPr/>
-          <a:lstStyle/>
-          <a:p>
-            <a:r>
-              <a:rPr lang="en-US" dirty="0"/>
-              <a:t>To close: the build phase is complete and the data is understood. The numbers and their evidence arrive at the semi-final on 7 September. Now let me show you the dashboard itself, live. (~25s)</a:t>
-            </a:r>
-            <a:endParaRPr lang="en-US" dirty="0"/>
-          </a:p>
-        </p:txBody>
-      </p:sp>
-      <p:sp>
-        <p:nvSpPr>
-          <p:cNvPr id="4" name="Slide Number Placeholder 3"/>
-          <p:cNvSpPr>
-            <a:spLocks noGrp="1"/>
-          </p:cNvSpPr>
-          <p:nvPr>
-            <p:ph type="sldNum" sz="quarter" idx="10"/>
-          </p:nvPr>
-        </p:nvSpPr>
-        <p:spPr/>
-        <p:txBody>
-          <a:bodyPr/>
-          <a:lstStyle/>
-          <a:p>
-            <a:fld id="{F7021451-1387-4CA6-816F-3879F97B5CBC}" type="slidenum">
-              <a:rPr lang="en-US"/>
-              <a:t>10</a:t>
             </a:fld>
             <a:endParaRPr lang="en-US"/>
           </a:p>
@@ -687,7 +597,7 @@
           <a:p>
             <a:r>
               <a:rPr lang="en-US" dirty="0"/>
-              <a:t>The brief from Mitsubishi: both surplus and shortage at once, so no just-in-time supply. Our task: a monthly demand forecast for every product, a revenue forecast, and a system their whole team can use. They gave us four fiscal years of order history plus the item and customer masters. (~50s)</a:t>
+              <a:t>Part one: what we have done. First, the data. Four fiscal years, 272 thousand order lines, reconciled against both master lists - Mitsubishi's data is exceptionally clean. Where we found oddities we investigated rather than guessed, and every decision is written down. (~50s)</a:t>
             </a:r>
             <a:endParaRPr lang="en-US" dirty="0"/>
           </a:p>
@@ -775,7 +685,7 @@
           <a:p>
             <a:r>
               <a:rPr lang="en-US" dirty="0"/>
-              <a:t>Where the project stands today. The heavy engineering is done: data pipeline, the forecasting system itself, and a dashboard Mitsubishi's team can operate without us. A first FY2025 forecast exists end-to-end; we are holding the numbers for the semi-final, once the evidence pack is final. (~55s)</a:t>
+              <a:t>Second, model selection. We never assumed a model. Every product runs a tournament: up to 24 candidate methods each forecast two years we hid from them, and the most accurate wins that product. The same discipline applies to our own ideas - twelve tested, three adopted, failures kept on record. (~55s)</a:t>
             </a:r>
             <a:endParaRPr lang="en-US" dirty="0"/>
           </a:p>
@@ -863,7 +773,7 @@
           <a:p>
             <a:r>
               <a:rPr lang="en-US" dirty="0"/>
-              <a:t>Phase one was the data itself. The good news: Mitsubishi's data is exceptionally clean - the master lists reconcile perfectly. Where we found oddities, we investigated rather than guessed: the duplicate lines turned out to be genuine ERP behaviour, and zero prices are a business convention, not missing data. Everything is documented. (~55s)</a:t>
+              <a:t>Third, the deliverable Mitsubishi's team actually touches: the dashboard. Plain language, built for non-analysts, and the key requirement from the brief - anyone can upload next year's file and the whole system re-runs in about two minutes. I will demo it live shortly. (~45s)</a:t>
             </a:r>
             <a:endParaRPr lang="en-US" dirty="0"/>
           </a:p>
@@ -951,7 +861,7 @@
           <a:p>
             <a:r>
               <a:rPr lang="en-US" dirty="0"/>
-              <a:t>The most important analytical finding so far. This catalogue is extremely sparse and extremely concentrated - half a percent of order lines carry 16 percent of volume, and ten customers carry two-thirds of it. Much of this demand is discrete events, not smooth patterns. That diagnosis drives the system design you are about to see, and the roadmap after it. (~55s)</a:t>
+              <a:t>Part two: what we have faced. The first challenge is the nature of the demand itself. The catalogue is extremely sparse and extremely concentrated - half a percent of order lines carry 16 percent of volume. Much of this demand is discrete events, not smooth patterns, and that is a structural limit for any statistical method. (~50s)</a:t>
             </a:r>
             <a:endParaRPr lang="en-US" dirty="0"/>
           </a:p>
@@ -1039,7 +949,7 @@
           <a:p>
             <a:r>
               <a:rPr lang="en-US" dirty="0"/>
-              <a:t>The system in one slide. We did not pick a model - every product runs a tournament of up to 24 methods, judged on two years we hid from them. Because demand behaviour varies so much across the catalogue, seventeen different methods currently earn their place somewhere. (~50s)</a:t>
+              <a:t>The second challenge is accuracy itself. Two of our four history years are violent turning points that nothing in the data explains, and the textbook accuracy metric, MAPE, is mathematically undefined on months that sell zero - most months here. Our response: withheld-year back-testing, honest baselines, and ranges rather than false-precision points. The full evidence pack comes at the semi-final. (~55s)</a:t>
             </a:r>
             <a:endParaRPr lang="en-US" dirty="0"/>
           </a:p>
@@ -1127,7 +1037,7 @@
           <a:p>
             <a:r>
               <a:rPr lang="en-US" dirty="0"/>
-              <a:t>The deliverable Mitsubishi's team actually touches. Plain language throughout, and the key requirement from the brief: anyone can upload a new data file and the entire system re-runs in about two minutes - no code, no analyst. I will open it live in a moment and walk through it on the real data. (~45s)</a:t>
+              <a:t>Part three: what we will do next. At the semi-final on 7 September we present the outcomes - the FY2025 numbers with the accuracy evidence behind them. The final on 28 September delivers the final forecast, the written report and the handover. Between milestones the system keeps improving as new information arrives. (~45s)</a:t>
             </a:r>
             <a:endParaRPr lang="en-US" dirty="0"/>
           </a:p>
@@ -1215,7 +1125,7 @@
           <a:p>
             <a:r>
               <a:rPr lang="en-US" dirty="0"/>
-              <a:t>The working method, because for a graded forecast the process is the product. Every improvement idea is scored against a year we hid before any adoption - twelve tested so far, three survived. The failures are documented with their numbers, which is exactly what makes the successes credible. (~45s)</a:t>
+              <a:t>To close: the system is built, the challenges are understood, and the evidence arrives at the semi-final. Now let me show you the dashboard live. Thank you. (~20s)</a:t>
             </a:r>
             <a:endParaRPr lang="en-US" dirty="0"/>
           </a:p>
@@ -1239,94 +1149,6 @@
             <a:fld id="{F7021451-1387-4CA6-816F-3879F97B5CBC}" type="slidenum">
               <a:rPr lang="en-US"/>
               <a:t>8</a:t>
-            </a:fld>
-            <a:endParaRPr lang="en-US"/>
-          </a:p>
-        </p:txBody>
-      </p:sp>
-    </p:spTree>
-    <p:extLst>
-      <p:ext uri="{BB962C8B-B14F-4D97-AF65-F5344CB8AC3E}">
-        <p14:creationId xmlns:p14="http://schemas.microsoft.com/office/powerpoint/2010/main" val="1024086991"/>
-      </p:ext>
-    </p:extLst>
-  </p:cSld>
-  <p:clrMapOvr>
-    <a:masterClrMapping/>
-  </p:clrMapOvr>
-</p:notes>
-</file>
-
-<file path=ppt/notesSlides/notesSlide9.xml><?xml version="1.0" encoding="utf-8"?>
-<p:notes xmlns:a="http://schemas.openxmlformats.org/drawingml/2006/main" xmlns:r="http://schemas.openxmlformats.org/officeDocument/2006/relationships" xmlns:p="http://schemas.openxmlformats.org/presentationml/2006/main">
-  <p:cSld>
-    <p:spTree>
-      <p:nvGrpSpPr>
-        <p:cNvPr id="1" name=""/>
-        <p:cNvGrpSpPr/>
-        <p:nvPr/>
-      </p:nvGrpSpPr>
-      <p:grpSpPr>
-        <a:xfrm>
-          <a:off x="0" y="0"/>
-          <a:ext cx="0" cy="0"/>
-          <a:chOff x="0" y="0"/>
-          <a:chExt cx="0" cy="0"/>
-        </a:xfrm>
-      </p:grpSpPr>
-      <p:sp>
-        <p:nvSpPr>
-          <p:cNvPr id="2" name="Slide Image Placeholder 1"/>
-          <p:cNvSpPr>
-            <a:spLocks noGrp="1" noRot="1" noChangeAspect="1"/>
-          </p:cNvSpPr>
-          <p:nvPr>
-            <p:ph type="sldImg"/>
-          </p:nvPr>
-        </p:nvSpPr>
-        <p:spPr/>
-      </p:sp>
-      <p:sp>
-        <p:nvSpPr>
-          <p:cNvPr id="3" name="Notes Placeholder 2"/>
-          <p:cNvSpPr>
-            <a:spLocks noGrp="1"/>
-          </p:cNvSpPr>
-          <p:nvPr>
-            <p:ph type="body" idx="1"/>
-          </p:nvPr>
-        </p:nvSpPr>
-        <p:spPr/>
-        <p:txBody>
-          <a:bodyPr/>
-          <a:lstStyle/>
-          <a:p>
-            <a:r>
-              <a:rPr lang="en-US" dirty="0"/>
-              <a:t>The plan from here. Today: the build is done. At the semi-final on 7 September we present the outcomes - the FY2025 numbers with the accuracy evidence behind them, improved by whatever we take from today's discussion. The final on 28 September delivers the final forecast, the written report, and the handover. (~50s)</a:t>
-            </a:r>
-            <a:endParaRPr lang="en-US" dirty="0"/>
-          </a:p>
-        </p:txBody>
-      </p:sp>
-      <p:sp>
-        <p:nvSpPr>
-          <p:cNvPr id="4" name="Slide Number Placeholder 3"/>
-          <p:cNvSpPr>
-            <a:spLocks noGrp="1"/>
-          </p:cNvSpPr>
-          <p:nvPr>
-            <p:ph type="sldNum" sz="quarter" idx="10"/>
-          </p:nvPr>
-        </p:nvSpPr>
-        <p:spPr/>
-        <p:txBody>
-          <a:bodyPr/>
-          <a:lstStyle/>
-          <a:p>
-            <a:fld id="{F7021451-1387-4CA6-816F-3879F97B5CBC}" type="slidenum">
-              <a:rPr lang="en-US"/>
-              <a:t>9</a:t>
             </a:fld>
             <a:endParaRPr lang="en-US"/>
           </a:p>
@@ -1734,8 +1556,8 @@
         </p:nvSpPr>
         <p:spPr>
           <a:xfrm>
-            <a:off x="685800" y="1417320"/>
-            <a:ext cx="8229600" cy="320040"/>
+            <a:off x="685800" y="1554480"/>
+            <a:ext cx="8686800" cy="320040"/>
           </a:xfrm>
           <a:prstGeom prst="rect">
             <a:avLst/>
@@ -1759,7 +1581,7 @@
                 <a:ea typeface="Calibri" pitchFamily="34" charset="-122"/>
                 <a:cs typeface="Calibri" pitchFamily="34" charset="-120"/>
               </a:rPr>
-              <a:t>PROGRESS REPORT  —  ELEMENT OF SUCCESSFUL STARTUP</a:t>
+              <a:t>MITSUBISHI ELECTRIC  —  DEMAND &amp; REVENUE FORECASTING</a:t>
             </a:r>
             <a:endParaRPr lang="en-US" sz="1100" dirty="0"/>
           </a:p>
@@ -1773,27 +1595,24 @@
         </p:nvSpPr>
         <p:spPr>
           <a:xfrm>
-            <a:off x="685800" y="1874520"/>
-            <a:ext cx="8778240" cy="2103120"/>
-          </a:xfrm>
-          <a:prstGeom prst="rect">
-            <a:avLst/>
-          </a:prstGeom>
-          <a:noFill/>
-          <a:ln/>
-        </p:spPr>
-        <p:txBody>
-          <a:bodyPr wrap="square" lIns="0" tIns="0" rIns="0" bIns="0" rtlCol="0" anchor="ctr"/>
-          <a:lstStyle/>
-          <a:p>
-            <a:pPr indent="0" marL="0">
-              <a:lnSpc>
-                <a:spcPct val="105000"/>
-              </a:lnSpc>
-              <a:buNone/>
-            </a:pPr>
-            <a:r>
-              <a:rPr lang="en-US" sz="4800" b="1" dirty="0">
+            <a:off x="685800" y="2011680"/>
+            <a:ext cx="8778240" cy="1371600"/>
+          </a:xfrm>
+          <a:prstGeom prst="rect">
+            <a:avLst/>
+          </a:prstGeom>
+          <a:noFill/>
+          <a:ln/>
+        </p:spPr>
+        <p:txBody>
+          <a:bodyPr wrap="square" lIns="0" tIns="0" rIns="0" bIns="0" rtlCol="0" anchor="ctr"/>
+          <a:lstStyle/>
+          <a:p>
+            <a:pPr indent="0" marL="0">
+              <a:buNone/>
+            </a:pPr>
+            <a:r>
+              <a:rPr lang="en-US" sz="5400" b="1" dirty="0">
                 <a:solidFill>
                   <a:srgbClr val="FFFFFF"/>
                 </a:solidFill>
@@ -1801,29 +1620,9 @@
                 <a:ea typeface="Cambria" pitchFamily="34" charset="-122"/>
                 <a:cs typeface="Cambria" pitchFamily="34" charset="-120"/>
               </a:rPr>
-              <a:t>Forecasting demand for</a:t>
-            </a:r>
-            <a:endParaRPr lang="en-US" sz="4800" dirty="0"/>
-          </a:p>
-          <a:p>
-            <a:pPr indent="0" marL="0">
-              <a:lnSpc>
-                <a:spcPct val="105000"/>
-              </a:lnSpc>
-              <a:buNone/>
-            </a:pPr>
-            <a:r>
-              <a:rPr lang="en-US" sz="4800" b="1" dirty="0">
-                <a:solidFill>
-                  <a:srgbClr val="FFFFFF"/>
-                </a:solidFill>
-                <a:latin typeface="Cambria" pitchFamily="34" charset="0"/>
-                <a:ea typeface="Cambria" pitchFamily="34" charset="-122"/>
-                <a:cs typeface="Cambria" pitchFamily="34" charset="-120"/>
-              </a:rPr>
-              <a:t>Mitsubishi Electric</a:t>
-            </a:r>
-            <a:endParaRPr lang="en-US" sz="4800" dirty="0"/>
+              <a:t>Progress Report</a:t>
+            </a:r>
+            <a:endParaRPr lang="en-US" sz="5400" dirty="0"/>
           </a:p>
         </p:txBody>
       </p:sp>
@@ -1835,23 +1634,20 @@
         </p:nvSpPr>
         <p:spPr>
           <a:xfrm>
-            <a:off x="685800" y="4069080"/>
-            <a:ext cx="7772400" cy="777240"/>
-          </a:xfrm>
-          <a:prstGeom prst="rect">
-            <a:avLst/>
-          </a:prstGeom>
-          <a:noFill/>
-          <a:ln/>
-        </p:spPr>
-        <p:txBody>
-          <a:bodyPr wrap="square" lIns="0" tIns="0" rIns="0" bIns="0" rtlCol="0" anchor="ctr"/>
-          <a:lstStyle/>
-          <a:p>
-            <a:pPr indent="0" marL="0">
-              <a:lnSpc>
-                <a:spcPct val="115000"/>
-              </a:lnSpc>
+            <a:off x="685800" y="3566160"/>
+            <a:ext cx="7863840" cy="548640"/>
+          </a:xfrm>
+          <a:prstGeom prst="rect">
+            <a:avLst/>
+          </a:prstGeom>
+          <a:noFill/>
+          <a:ln/>
+        </p:spPr>
+        <p:txBody>
+          <a:bodyPr wrap="square" lIns="0" tIns="0" rIns="0" bIns="0" rtlCol="0" anchor="ctr"/>
+          <a:lstStyle/>
+          <a:p>
+            <a:pPr indent="0" marL="0">
               <a:buNone/>
             </a:pPr>
             <a:r>
@@ -1863,288 +1659,48 @@
                 <a:ea typeface="Calibri" pitchFamily="34" charset="-122"/>
                 <a:cs typeface="Calibri" pitchFamily="34" charset="-120"/>
               </a:rPr>
-              <a:t>Where the project stands, what we found in the data,</a:t>
+              <a:t>Solving stock surplus and stock shortage with a forecast the whole team can use.</a:t>
             </a:r>
             <a:endParaRPr lang="en-US" sz="1500" dirty="0"/>
           </a:p>
-          <a:p>
-            <a:pPr indent="0" marL="0">
-              <a:lnSpc>
-                <a:spcPct val="115000"/>
-              </a:lnSpc>
-              <a:buNone/>
-            </a:pPr>
-            <a:r>
-              <a:rPr lang="en-US" sz="1500" dirty="0">
-                <a:solidFill>
-                  <a:srgbClr val="A9B4C2"/>
+        </p:txBody>
+      </p:sp>
+      <p:sp>
+        <p:nvSpPr>
+          <p:cNvPr id="7" name="Text 5"/>
+          <p:cNvSpPr/>
+          <p:nvPr/>
+        </p:nvSpPr>
+        <p:spPr>
+          <a:xfrm>
+            <a:off x="685800" y="5989320"/>
+            <a:ext cx="8686800" cy="320040"/>
+          </a:xfrm>
+          <a:prstGeom prst="rect">
+            <a:avLst/>
+          </a:prstGeom>
+          <a:noFill/>
+          <a:ln/>
+        </p:spPr>
+        <p:txBody>
+          <a:bodyPr wrap="square" lIns="0" tIns="0" rIns="0" bIns="0" rtlCol="0" anchor="ctr"/>
+          <a:lstStyle/>
+          <a:p>
+            <a:pPr indent="0" marL="0">
+              <a:buNone/>
+            </a:pPr>
+            <a:r>
+              <a:rPr lang="en-US" sz="1150" dirty="0">
+                <a:solidFill>
+                  <a:srgbClr val="9AA4B0"/>
                 </a:solidFill>
                 <a:latin typeface="Calibri" pitchFamily="34" charset="0"/>
                 <a:ea typeface="Calibri" pitchFamily="34" charset="-122"/>
                 <a:cs typeface="Calibri" pitchFamily="34" charset="-120"/>
               </a:rPr>
-              <a:t>and the road to the final forecast.</a:t>
-            </a:r>
-            <a:endParaRPr lang="en-US" sz="1500" dirty="0"/>
-          </a:p>
-        </p:txBody>
-      </p:sp>
-      <p:sp>
-        <p:nvSpPr>
-          <p:cNvPr id="7" name="Text 5"/>
-          <p:cNvSpPr/>
-          <p:nvPr/>
-        </p:nvSpPr>
-        <p:spPr>
-          <a:xfrm>
-            <a:off x="685800" y="5989320"/>
-            <a:ext cx="7315200" cy="320040"/>
-          </a:xfrm>
-          <a:prstGeom prst="rect">
-            <a:avLst/>
-          </a:prstGeom>
-          <a:noFill/>
-          <a:ln/>
-        </p:spPr>
-        <p:txBody>
-          <a:bodyPr wrap="square" lIns="0" tIns="0" rIns="0" bIns="0" rtlCol="0" anchor="ctr"/>
-          <a:lstStyle/>
-          <a:p>
-            <a:pPr indent="0" marL="0">
-              <a:buNone/>
-            </a:pPr>
-            <a:r>
-              <a:rPr lang="en-US" sz="1150" dirty="0">
-                <a:solidFill>
-                  <a:srgbClr val="9AA4B0"/>
-                </a:solidFill>
-                <a:latin typeface="Calibri" pitchFamily="34" charset="0"/>
-                <a:ea typeface="Calibri" pitchFamily="34" charset="-122"/>
-                <a:cs typeface="Calibri" pitchFamily="34" charset="-120"/>
-              </a:rPr>
-              <a:t>Thai-Nichi Institute of Technology   ·   10 August 2026</a:t>
+              <a:t>Element of Successful Startup   ·   Thai-Nichi Institute of Technology   ·   10 August 2026</a:t>
             </a:r>
             <a:endParaRPr lang="en-US" sz="1150" dirty="0"/>
-          </a:p>
-        </p:txBody>
-      </p:sp>
-    </p:spTree>
-  </p:cSld>
-  <p:clrMapOvr>
-    <a:masterClrMapping/>
-  </p:clrMapOvr>
-</p:sld>
-</file>
-
-<file path=ppt/slides/slide10.xml><?xml version="1.0" encoding="utf-8"?>
-<p:sld xmlns:a="http://schemas.openxmlformats.org/drawingml/2006/main" xmlns:r="http://schemas.openxmlformats.org/officeDocument/2006/relationships" xmlns:p="http://schemas.openxmlformats.org/presentationml/2006/main">
-  <p:cSld name="Slide 10">
-    <p:bg>
-      <p:bgPr>
-        <a:solidFill>
-          <a:srgbClr val="1C2530"/>
-        </a:solidFill>
-      </p:bgPr>
-    </p:bg>
-    <p:spTree>
-      <p:nvGrpSpPr>
-        <p:cNvPr id="1" name=""/>
-        <p:cNvGrpSpPr/>
-        <p:nvPr/>
-      </p:nvGrpSpPr>
-      <p:grpSpPr>
-        <a:xfrm>
-          <a:off x="0" y="0"/>
-          <a:ext cx="0" cy="0"/>
-          <a:chOff x="0" y="0"/>
-          <a:chExt cx="0" cy="0"/>
-        </a:xfrm>
-      </p:grpSpPr>
-      <p:sp>
-        <p:nvSpPr>
-          <p:cNvPr id="2" name="Shape 0"/>
-          <p:cNvSpPr/>
-          <p:nvPr/>
-        </p:nvSpPr>
-        <p:spPr>
-          <a:xfrm>
-            <a:off x="9601200" y="-2286000"/>
-            <a:ext cx="4754880" cy="4754880"/>
-          </a:xfrm>
-          <a:prstGeom prst="ellipse">
-            <a:avLst/>
-          </a:prstGeom>
-          <a:solidFill>
-            <a:srgbClr val="1C2530"/>
-          </a:solidFill>
-          <a:ln w="15875">
-            <a:solidFill>
-              <a:srgbClr val="C8102E"/>
-            </a:solidFill>
-            <a:prstDash val="solid"/>
-          </a:ln>
-        </p:spPr>
-      </p:sp>
-      <p:sp>
-        <p:nvSpPr>
-          <p:cNvPr id="3" name="Text 1"/>
-          <p:cNvSpPr/>
-          <p:nvPr/>
-        </p:nvSpPr>
-        <p:spPr>
-          <a:xfrm>
-            <a:off x="685800" y="2103120"/>
-            <a:ext cx="10817352" cy="320040"/>
-          </a:xfrm>
-          <a:prstGeom prst="rect">
-            <a:avLst/>
-          </a:prstGeom>
-          <a:noFill/>
-          <a:ln/>
-        </p:spPr>
-        <p:txBody>
-          <a:bodyPr wrap="square" lIns="0" tIns="0" rIns="0" bIns="0" rtlCol="0" anchor="ctr"/>
-          <a:lstStyle/>
-          <a:p>
-            <a:pPr indent="0" marL="0">
-              <a:buNone/>
-            </a:pPr>
-            <a:r>
-              <a:rPr lang="en-US" sz="1100" b="1" spc="300" kern="0" dirty="0">
-                <a:solidFill>
-                  <a:srgbClr val="9AA4B0"/>
-                </a:solidFill>
-                <a:latin typeface="Calibri" pitchFamily="34" charset="0"/>
-                <a:ea typeface="Calibri" pitchFamily="34" charset="-122"/>
-                <a:cs typeface="Calibri" pitchFamily="34" charset="-120"/>
-              </a:rPr>
-              <a:t>THANK YOU</a:t>
-            </a:r>
-            <a:endParaRPr lang="en-US" sz="1100" dirty="0"/>
-          </a:p>
-        </p:txBody>
-      </p:sp>
-      <p:sp>
-        <p:nvSpPr>
-          <p:cNvPr id="4" name="Text 2"/>
-          <p:cNvSpPr/>
-          <p:nvPr/>
-        </p:nvSpPr>
-        <p:spPr>
-          <a:xfrm>
-            <a:off x="685800" y="2560320"/>
-            <a:ext cx="9601200" cy="1737360"/>
-          </a:xfrm>
-          <a:prstGeom prst="rect">
-            <a:avLst/>
-          </a:prstGeom>
-          <a:noFill/>
-          <a:ln/>
-        </p:spPr>
-        <p:txBody>
-          <a:bodyPr wrap="square" lIns="0" tIns="0" rIns="0" bIns="0" rtlCol="0" anchor="ctr"/>
-          <a:lstStyle/>
-          <a:p>
-            <a:pPr indent="0" marL="0">
-              <a:lnSpc>
-                <a:spcPct val="112000"/>
-              </a:lnSpc>
-              <a:buNone/>
-            </a:pPr>
-            <a:r>
-              <a:rPr lang="en-US" sz="4000" b="1" dirty="0">
-                <a:solidFill>
-                  <a:srgbClr val="FFFFFF"/>
-                </a:solidFill>
-                <a:latin typeface="Cambria" pitchFamily="34" charset="0"/>
-                <a:ea typeface="Cambria" pitchFamily="34" charset="-122"/>
-                <a:cs typeface="Cambria" pitchFamily="34" charset="-120"/>
-              </a:rPr>
-              <a:t>The system is built.</a:t>
-            </a:r>
-            <a:endParaRPr lang="en-US" sz="4000" dirty="0"/>
-          </a:p>
-          <a:p>
-            <a:pPr indent="0" marL="0">
-              <a:lnSpc>
-                <a:spcPct val="112000"/>
-              </a:lnSpc>
-              <a:buNone/>
-            </a:pPr>
-            <a:r>
-              <a:rPr lang="en-US" sz="4000" b="1" dirty="0">
-                <a:solidFill>
-                  <a:srgbClr val="FFFFFF"/>
-                </a:solidFill>
-                <a:latin typeface="Cambria" pitchFamily="34" charset="0"/>
-                <a:ea typeface="Cambria" pitchFamily="34" charset="-122"/>
-                <a:cs typeface="Cambria" pitchFamily="34" charset="-120"/>
-              </a:rPr>
-              <a:t>The evidence comes next.</a:t>
-            </a:r>
-            <a:endParaRPr lang="en-US" sz="4000" dirty="0"/>
-          </a:p>
-        </p:txBody>
-      </p:sp>
-      <p:sp>
-        <p:nvSpPr>
-          <p:cNvPr id="5" name="Text 3"/>
-          <p:cNvSpPr/>
-          <p:nvPr/>
-        </p:nvSpPr>
-        <p:spPr>
-          <a:xfrm>
-            <a:off x="685800" y="4709160"/>
-            <a:ext cx="8686800" cy="731520"/>
-          </a:xfrm>
-          <a:prstGeom prst="rect">
-            <a:avLst/>
-          </a:prstGeom>
-          <a:noFill/>
-          <a:ln/>
-        </p:spPr>
-        <p:txBody>
-          <a:bodyPr wrap="square" lIns="0" tIns="0" rIns="0" bIns="0" rtlCol="0" anchor="ctr"/>
-          <a:lstStyle/>
-          <a:p>
-            <a:pPr indent="0" marL="0">
-              <a:lnSpc>
-                <a:spcPct val="125000"/>
-              </a:lnSpc>
-              <a:buNone/>
-            </a:pPr>
-            <a:r>
-              <a:rPr lang="en-US" sz="1400" dirty="0">
-                <a:solidFill>
-                  <a:srgbClr val="A9B4C2"/>
-                </a:solidFill>
-                <a:latin typeface="Calibri" pitchFamily="34" charset="0"/>
-                <a:ea typeface="Calibri" pitchFamily="34" charset="-122"/>
-                <a:cs typeface="Calibri" pitchFamily="34" charset="-120"/>
-              </a:rPr>
-              <a:t>Results and accuracy evidence — semi-final, 7 September.</a:t>
-            </a:r>
-            <a:endParaRPr lang="en-US" sz="1400" dirty="0"/>
-          </a:p>
-          <a:p>
-            <a:pPr indent="0" marL="0">
-              <a:lnSpc>
-                <a:spcPct val="125000"/>
-              </a:lnSpc>
-              <a:buNone/>
-            </a:pPr>
-            <a:r>
-              <a:rPr lang="en-US" sz="1400" dirty="0">
-                <a:solidFill>
-                  <a:srgbClr val="A9B4C2"/>
-                </a:solidFill>
-                <a:latin typeface="Calibri" pitchFamily="34" charset="0"/>
-                <a:ea typeface="Calibri" pitchFamily="34" charset="-122"/>
-                <a:cs typeface="Calibri" pitchFamily="34" charset="-120"/>
-              </a:rPr>
-              <a:t>Live dashboard available now; questions welcome.</a:t>
-            </a:r>
-            <a:endParaRPr lang="en-US" sz="1400" dirty="0"/>
           </a:p>
         </p:txBody>
       </p:sp>
@@ -2201,7 +1757,7 @@
           <a:bodyPr wrap="square" lIns="0" tIns="0" rIns="0" bIns="0" rtlCol="0" anchor="ctr"/>
           <a:lstStyle/>
           <a:p>
-            <a:pPr algn="l" indent="0" marL="0">
+            <a:pPr indent="0" marL="0">
               <a:buNone/>
             </a:pPr>
             <a:r>
@@ -2213,7 +1769,7 @@
                 <a:ea typeface="Calibri" pitchFamily="34" charset="-122"/>
                 <a:cs typeface="Calibri" pitchFamily="34" charset="-120"/>
               </a:rPr>
-              <a:t>01 — THE PROBLEM</a:t>
+              <a:t>WHAT WE HAVE DONE — 01</a:t>
             </a:r>
             <a:endParaRPr lang="en-US" sz="1050" dirty="0"/>
           </a:p>
@@ -2240,7 +1796,7 @@
           <a:bodyPr wrap="square" lIns="0" tIns="0" rIns="0" bIns="0" rtlCol="0" anchor="ctr"/>
           <a:lstStyle/>
           <a:p>
-            <a:pPr algn="l" indent="0" marL="0">
+            <a:pPr indent="0" marL="0">
               <a:buNone/>
             </a:pPr>
             <a:r>
@@ -2252,7 +1808,7 @@
                 <a:ea typeface="Cambria" pitchFamily="34" charset="-122"/>
                 <a:cs typeface="Cambria" pitchFamily="34" charset="-120"/>
               </a:rPr>
-              <a:t>Stock surplus and stock shortage, at once.</a:t>
+              <a:t>Cleaned and reconciled the data.</a:t>
             </a:r>
             <a:endParaRPr lang="en-US" sz="3800" dirty="0"/>
           </a:p>
@@ -2266,35 +1822,32 @@
         </p:nvSpPr>
         <p:spPr>
           <a:xfrm>
-            <a:off x="685800" y="2057400"/>
-            <a:ext cx="8778240" cy="868680"/>
-          </a:xfrm>
-          <a:prstGeom prst="rect">
-            <a:avLst/>
-          </a:prstGeom>
-          <a:noFill/>
-          <a:ln/>
-        </p:spPr>
-        <p:txBody>
-          <a:bodyPr wrap="square" lIns="0" tIns="0" rIns="0" bIns="0" rtlCol="0" anchor="ctr"/>
-          <a:lstStyle/>
-          <a:p>
-            <a:pPr indent="0" marL="0">
-              <a:lnSpc>
-                <a:spcPct val="120000"/>
-              </a:lnSpc>
-              <a:buNone/>
-            </a:pPr>
-            <a:r>
-              <a:rPr lang="en-US" sz="1500" dirty="0">
-                <a:solidFill>
-                  <a:srgbClr val="6B7280"/>
+            <a:off x="685800" y="2286000"/>
+            <a:ext cx="4023360" cy="548640"/>
+          </a:xfrm>
+          <a:prstGeom prst="rect">
+            <a:avLst/>
+          </a:prstGeom>
+          <a:noFill/>
+          <a:ln/>
+        </p:spPr>
+        <p:txBody>
+          <a:bodyPr wrap="square" lIns="0" tIns="0" rIns="0" bIns="0" rtlCol="0" anchor="ctr"/>
+          <a:lstStyle/>
+          <a:p>
+            <a:pPr indent="0" marL="0">
+              <a:buNone/>
+            </a:pPr>
+            <a:r>
+              <a:rPr lang="en-US" sz="1500" b="1" dirty="0">
+                <a:solidFill>
+                  <a:srgbClr val="1C2530"/>
                 </a:solidFill>
                 <a:latin typeface="Calibri" pitchFamily="34" charset="0"/>
                 <a:ea typeface="Calibri" pitchFamily="34" charset="-122"/>
                 <a:cs typeface="Calibri" pitchFamily="34" charset="-120"/>
               </a:rPr>
-              <a:t>Mitsubishi Electric Thailand cannot supply customers just-in-time: some products sit overstocked while others run out. Planning needs forward demand numbers it can trust.</a:t>
+              <a:t>272,000 order lines</a:t>
             </a:r>
             <a:endParaRPr lang="en-US" sz="1500" dirty="0"/>
           </a:p>
@@ -2308,63 +1861,27 @@
         </p:nvSpPr>
         <p:spPr>
           <a:xfrm>
-            <a:off x="685800" y="3794760"/>
-            <a:ext cx="3285744" cy="914400"/>
-          </a:xfrm>
-          <a:prstGeom prst="rect">
-            <a:avLst/>
-          </a:prstGeom>
-          <a:noFill/>
-          <a:ln/>
-        </p:spPr>
-        <p:txBody>
-          <a:bodyPr wrap="square" lIns="0" tIns="0" rIns="0" bIns="0" rtlCol="0" anchor="ctr"/>
-          <a:lstStyle/>
-          <a:p>
-            <a:pPr indent="0" marL="0">
-              <a:buNone/>
-            </a:pPr>
-            <a:r>
-              <a:rPr lang="en-US" sz="4000" b="1" dirty="0">
-                <a:solidFill>
-                  <a:srgbClr val="1C2530"/>
-                </a:solidFill>
-                <a:latin typeface="Cambria" pitchFamily="34" charset="0"/>
-                <a:ea typeface="Cambria" pitchFamily="34" charset="-122"/>
-                <a:cs typeface="Cambria" pitchFamily="34" charset="-120"/>
-              </a:rPr>
-              <a:t>5,706</a:t>
-            </a:r>
-            <a:endParaRPr lang="en-US" sz="4000" dirty="0"/>
-          </a:p>
-        </p:txBody>
-      </p:sp>
-      <p:sp>
-        <p:nvSpPr>
-          <p:cNvPr id="6" name="Text 4"/>
-          <p:cNvSpPr/>
-          <p:nvPr/>
-        </p:nvSpPr>
-        <p:spPr>
-          <a:xfrm>
-            <a:off x="685800" y="4709160"/>
-            <a:ext cx="3285744" cy="548640"/>
-          </a:xfrm>
-          <a:prstGeom prst="rect">
-            <a:avLst/>
-          </a:prstGeom>
-          <a:noFill/>
-          <a:ln/>
-        </p:spPr>
-        <p:txBody>
-          <a:bodyPr wrap="square" lIns="0" tIns="0" rIns="0" bIns="0" rtlCol="0" anchor="ctr"/>
-          <a:lstStyle/>
-          <a:p>
-            <a:pPr indent="0" marL="0">
-              <a:buNone/>
-            </a:pPr>
-            <a:r>
-              <a:rPr lang="en-US" sz="1200" dirty="0">
+            <a:off x="5074920" y="2313432"/>
+            <a:ext cx="6428232" cy="594360"/>
+          </a:xfrm>
+          <a:prstGeom prst="rect">
+            <a:avLst/>
+          </a:prstGeom>
+          <a:noFill/>
+          <a:ln/>
+        </p:spPr>
+        <p:txBody>
+          <a:bodyPr wrap="square" lIns="0" tIns="0" rIns="0" bIns="0" rtlCol="0" anchor="ctr"/>
+          <a:lstStyle/>
+          <a:p>
+            <a:pPr indent="0" marL="0">
+              <a:lnSpc>
+                <a:spcPct val="110000"/>
+              </a:lnSpc>
+              <a:buNone/>
+            </a:pPr>
+            <a:r>
+              <a:rPr lang="en-US" sz="1150" dirty="0">
                 <a:solidFill>
                   <a:srgbClr val="6B7280"/>
                 </a:solidFill>
@@ -2372,11 +1889,34 @@
                 <a:ea typeface="Calibri" pitchFamily="34" charset="-122"/>
                 <a:cs typeface="Calibri" pitchFamily="34" charset="-120"/>
               </a:rPr>
-              <a:t>products in the catalogue</a:t>
-            </a:r>
-            <a:endParaRPr lang="en-US" sz="1200" dirty="0"/>
-          </a:p>
-        </p:txBody>
+              <a:t>checked against both master lists — every product and customer reconciles, no orphans</a:t>
+            </a:r>
+            <a:endParaRPr lang="en-US" sz="1150" dirty="0"/>
+          </a:p>
+        </p:txBody>
+      </p:sp>
+      <p:sp>
+        <p:nvSpPr>
+          <p:cNvPr id="6" name="Shape 4"/>
+          <p:cNvSpPr/>
+          <p:nvPr/>
+        </p:nvSpPr>
+        <p:spPr>
+          <a:xfrm>
+            <a:off x="685800" y="3035808"/>
+            <a:ext cx="10817352" cy="0"/>
+          </a:xfrm>
+          <a:prstGeom prst="line">
+            <a:avLst/>
+          </a:prstGeom>
+          <a:noFill/>
+          <a:ln w="9525">
+            <a:solidFill>
+              <a:srgbClr val="E2E6EA"/>
+            </a:solidFill>
+            <a:prstDash val="solid"/>
+          </a:ln>
+        </p:spPr>
       </p:sp>
       <p:sp>
         <p:nvSpPr>
@@ -2386,141 +1926,66 @@
         </p:nvSpPr>
         <p:spPr>
           <a:xfrm>
-            <a:off x="4291584" y="3794760"/>
-            <a:ext cx="3285744" cy="914400"/>
-          </a:xfrm>
-          <a:prstGeom prst="rect">
-            <a:avLst/>
-          </a:prstGeom>
-          <a:noFill/>
-          <a:ln/>
-        </p:spPr>
-        <p:txBody>
-          <a:bodyPr wrap="square" lIns="0" tIns="0" rIns="0" bIns="0" rtlCol="0" anchor="ctr"/>
-          <a:lstStyle/>
-          <a:p>
-            <a:pPr indent="0" marL="0">
-              <a:buNone/>
-            </a:pPr>
-            <a:r>
-              <a:rPr lang="en-US" sz="4000" b="1" dirty="0">
+            <a:off x="685800" y="3182112"/>
+            <a:ext cx="4023360" cy="548640"/>
+          </a:xfrm>
+          <a:prstGeom prst="rect">
+            <a:avLst/>
+          </a:prstGeom>
+          <a:noFill/>
+          <a:ln/>
+        </p:spPr>
+        <p:txBody>
+          <a:bodyPr wrap="square" lIns="0" tIns="0" rIns="0" bIns="0" rtlCol="0" anchor="ctr"/>
+          <a:lstStyle/>
+          <a:p>
+            <a:pPr indent="0" marL="0">
+              <a:buNone/>
+            </a:pPr>
+            <a:r>
+              <a:rPr lang="en-US" sz="1500" b="1" dirty="0">
                 <a:solidFill>
                   <a:srgbClr val="1C2530"/>
-                </a:solidFill>
-                <a:latin typeface="Cambria" pitchFamily="34" charset="0"/>
-                <a:ea typeface="Cambria" pitchFamily="34" charset="-122"/>
-                <a:cs typeface="Cambria" pitchFamily="34" charset="-120"/>
-              </a:rPr>
-              <a:t>272,000</a:t>
-            </a:r>
-            <a:endParaRPr lang="en-US" sz="4000" dirty="0"/>
-          </a:p>
-        </p:txBody>
-      </p:sp>
-      <p:sp>
-        <p:nvSpPr>
-          <p:cNvPr id="8" name="Text 6"/>
-          <p:cNvSpPr/>
-          <p:nvPr/>
-        </p:nvSpPr>
-        <p:spPr>
-          <a:xfrm>
-            <a:off x="4291584" y="4709160"/>
-            <a:ext cx="3285744" cy="548640"/>
-          </a:xfrm>
-          <a:prstGeom prst="rect">
-            <a:avLst/>
-          </a:prstGeom>
-          <a:noFill/>
-          <a:ln/>
-        </p:spPr>
-        <p:txBody>
-          <a:bodyPr wrap="square" lIns="0" tIns="0" rIns="0" bIns="0" rtlCol="0" anchor="ctr"/>
-          <a:lstStyle/>
-          <a:p>
-            <a:pPr indent="0" marL="0">
-              <a:buNone/>
-            </a:pPr>
-            <a:r>
-              <a:rPr lang="en-US" sz="1200" dirty="0">
-                <a:solidFill>
-                  <a:srgbClr val="6B7280"/>
                 </a:solidFill>
                 <a:latin typeface="Calibri" pitchFamily="34" charset="0"/>
                 <a:ea typeface="Calibri" pitchFamily="34" charset="-122"/>
                 <a:cs typeface="Calibri" pitchFamily="34" charset="-120"/>
               </a:rPr>
-              <a:t>order lines, four fiscal years</a:t>
-            </a:r>
-            <a:endParaRPr lang="en-US" sz="1200" dirty="0"/>
-          </a:p>
-        </p:txBody>
-      </p:sp>
-      <p:sp>
-        <p:nvSpPr>
-          <p:cNvPr id="9" name="Text 7"/>
-          <p:cNvSpPr/>
-          <p:nvPr/>
-        </p:nvSpPr>
-        <p:spPr>
-          <a:xfrm>
-            <a:off x="7897368" y="3794760"/>
-            <a:ext cx="3285744" cy="914400"/>
-          </a:xfrm>
-          <a:prstGeom prst="rect">
-            <a:avLst/>
-          </a:prstGeom>
-          <a:noFill/>
-          <a:ln/>
-        </p:spPr>
-        <p:txBody>
-          <a:bodyPr wrap="square" lIns="0" tIns="0" rIns="0" bIns="0" rtlCol="0" anchor="ctr"/>
-          <a:lstStyle/>
-          <a:p>
-            <a:pPr indent="0" marL="0">
-              <a:buNone/>
-            </a:pPr>
-            <a:r>
-              <a:rPr lang="en-US" sz="4000" b="1" dirty="0">
-                <a:solidFill>
-                  <a:srgbClr val="1C2530"/>
-                </a:solidFill>
-                <a:latin typeface="Cambria" pitchFamily="34" charset="0"/>
-                <a:ea typeface="Cambria" pitchFamily="34" charset="-122"/>
-                <a:cs typeface="Cambria" pitchFamily="34" charset="-120"/>
-              </a:rPr>
-              <a:t>48</a:t>
-            </a:r>
-            <a:endParaRPr lang="en-US" sz="4000" dirty="0"/>
-          </a:p>
-        </p:txBody>
-      </p:sp>
-      <p:sp>
-        <p:nvSpPr>
-          <p:cNvPr id="10" name="Text 8"/>
-          <p:cNvSpPr/>
-          <p:nvPr/>
-        </p:nvSpPr>
-        <p:spPr>
-          <a:xfrm>
-            <a:off x="7897368" y="4709160"/>
-            <a:ext cx="3285744" cy="548640"/>
-          </a:xfrm>
-          <a:prstGeom prst="rect">
-            <a:avLst/>
-          </a:prstGeom>
-          <a:noFill/>
-          <a:ln/>
-        </p:spPr>
-        <p:txBody>
-          <a:bodyPr wrap="square" lIns="0" tIns="0" rIns="0" bIns="0" rtlCol="0" anchor="ctr"/>
-          <a:lstStyle/>
-          <a:p>
-            <a:pPr indent="0" marL="0">
-              <a:buNone/>
-            </a:pPr>
-            <a:r>
-              <a:rPr lang="en-US" sz="1200" dirty="0">
+              <a:t>6,865 duplicate lines</a:t>
+            </a:r>
+            <a:endParaRPr lang="en-US" sz="1500" dirty="0"/>
+          </a:p>
+        </p:txBody>
+      </p:sp>
+      <p:sp>
+        <p:nvSpPr>
+          <p:cNvPr id="8" name="Text 6"/>
+          <p:cNvSpPr/>
+          <p:nvPr/>
+        </p:nvSpPr>
+        <p:spPr>
+          <a:xfrm>
+            <a:off x="5074920" y="3209544"/>
+            <a:ext cx="6428232" cy="594360"/>
+          </a:xfrm>
+          <a:prstGeom prst="rect">
+            <a:avLst/>
+          </a:prstGeom>
+          <a:noFill/>
+          <a:ln/>
+        </p:spPr>
+        <p:txBody>
+          <a:bodyPr wrap="square" lIns="0" tIns="0" rIns="0" bIns="0" rtlCol="0" anchor="ctr"/>
+          <a:lstStyle/>
+          <a:p>
+            <a:pPr indent="0" marL="0">
+              <a:lnSpc>
+                <a:spcPct val="110000"/>
+              </a:lnSpc>
+              <a:buNone/>
+            </a:pPr>
+            <a:r>
+              <a:rPr lang="en-US" sz="1150" dirty="0">
                 <a:solidFill>
                   <a:srgbClr val="6B7280"/>
                 </a:solidFill>
@@ -2528,9 +1993,256 @@
                 <a:ea typeface="Calibri" pitchFamily="34" charset="-122"/>
                 <a:cs typeface="Calibri" pitchFamily="34" charset="-120"/>
               </a:rPr>
-              <a:t>months of history — FY2021 to FY2024</a:t>
-            </a:r>
-            <a:endParaRPr lang="en-US" sz="1200" dirty="0"/>
+              <a:t>forensically investigated — genuine ERP entries, kept with the evidence recorded</a:t>
+            </a:r>
+            <a:endParaRPr lang="en-US" sz="1150" dirty="0"/>
+          </a:p>
+        </p:txBody>
+      </p:sp>
+      <p:sp>
+        <p:nvSpPr>
+          <p:cNvPr id="9" name="Shape 7"/>
+          <p:cNvSpPr/>
+          <p:nvPr/>
+        </p:nvSpPr>
+        <p:spPr>
+          <a:xfrm>
+            <a:off x="685800" y="3931920"/>
+            <a:ext cx="10817352" cy="0"/>
+          </a:xfrm>
+          <a:prstGeom prst="line">
+            <a:avLst/>
+          </a:prstGeom>
+          <a:noFill/>
+          <a:ln w="9525">
+            <a:solidFill>
+              <a:srgbClr val="E2E6EA"/>
+            </a:solidFill>
+            <a:prstDash val="solid"/>
+          </a:ln>
+        </p:spPr>
+      </p:sp>
+      <p:sp>
+        <p:nvSpPr>
+          <p:cNvPr id="10" name="Text 8"/>
+          <p:cNvSpPr/>
+          <p:nvPr/>
+        </p:nvSpPr>
+        <p:spPr>
+          <a:xfrm>
+            <a:off x="685800" y="4078224"/>
+            <a:ext cx="4023360" cy="548640"/>
+          </a:xfrm>
+          <a:prstGeom prst="rect">
+            <a:avLst/>
+          </a:prstGeom>
+          <a:noFill/>
+          <a:ln/>
+        </p:spPr>
+        <p:txBody>
+          <a:bodyPr wrap="square" lIns="0" tIns="0" rIns="0" bIns="0" rtlCol="0" anchor="ctr"/>
+          <a:lstStyle/>
+          <a:p>
+            <a:pPr indent="0" marL="0">
+              <a:buNone/>
+            </a:pPr>
+            <a:r>
+              <a:rPr lang="en-US" sz="1500" b="1" dirty="0">
+                <a:solidFill>
+                  <a:srgbClr val="1C2530"/>
+                </a:solidFill>
+                <a:latin typeface="Calibri" pitchFamily="34" charset="0"/>
+                <a:ea typeface="Calibri" pitchFamily="34" charset="-122"/>
+                <a:cs typeface="Calibri" pitchFamily="34" charset="-120"/>
+              </a:rPr>
+              <a:t>Zero-price orders</a:t>
+            </a:r>
+            <a:endParaRPr lang="en-US" sz="1500" dirty="0"/>
+          </a:p>
+        </p:txBody>
+      </p:sp>
+      <p:sp>
+        <p:nvSpPr>
+          <p:cNvPr id="11" name="Text 9"/>
+          <p:cNvSpPr/>
+          <p:nvPr/>
+        </p:nvSpPr>
+        <p:spPr>
+          <a:xfrm>
+            <a:off x="5074920" y="4105656"/>
+            <a:ext cx="6428232" cy="594360"/>
+          </a:xfrm>
+          <a:prstGeom prst="rect">
+            <a:avLst/>
+          </a:prstGeom>
+          <a:noFill/>
+          <a:ln/>
+        </p:spPr>
+        <p:txBody>
+          <a:bodyPr wrap="square" lIns="0" tIns="0" rIns="0" bIns="0" rtlCol="0" anchor="ctr"/>
+          <a:lstStyle/>
+          <a:p>
+            <a:pPr indent="0" marL="0">
+              <a:lnSpc>
+                <a:spcPct val="110000"/>
+              </a:lnSpc>
+              <a:buNone/>
+            </a:pPr>
+            <a:r>
+              <a:rPr lang="en-US" sz="1150" dirty="0">
+                <a:solidFill>
+                  <a:srgbClr val="6B7280"/>
+                </a:solidFill>
+                <a:latin typeface="Calibri" pitchFamily="34" charset="0"/>
+                <a:ea typeface="Calibri" pitchFamily="34" charset="-122"/>
+                <a:cs typeface="Calibri" pitchFamily="34" charset="-120"/>
+              </a:rPr>
+              <a:t>confirmed as quoted-per-order by the Japan branch — never counted as zero revenue</a:t>
+            </a:r>
+            <a:endParaRPr lang="en-US" sz="1150" dirty="0"/>
+          </a:p>
+        </p:txBody>
+      </p:sp>
+      <p:sp>
+        <p:nvSpPr>
+          <p:cNvPr id="12" name="Shape 10"/>
+          <p:cNvSpPr/>
+          <p:nvPr/>
+        </p:nvSpPr>
+        <p:spPr>
+          <a:xfrm>
+            <a:off x="685800" y="4828032"/>
+            <a:ext cx="10817352" cy="0"/>
+          </a:xfrm>
+          <a:prstGeom prst="line">
+            <a:avLst/>
+          </a:prstGeom>
+          <a:noFill/>
+          <a:ln w="9525">
+            <a:solidFill>
+              <a:srgbClr val="E2E6EA"/>
+            </a:solidFill>
+            <a:prstDash val="solid"/>
+          </a:ln>
+        </p:spPr>
+      </p:sp>
+      <p:sp>
+        <p:nvSpPr>
+          <p:cNvPr id="13" name="Text 11"/>
+          <p:cNvSpPr/>
+          <p:nvPr/>
+        </p:nvSpPr>
+        <p:spPr>
+          <a:xfrm>
+            <a:off x="685800" y="4974336"/>
+            <a:ext cx="4023360" cy="548640"/>
+          </a:xfrm>
+          <a:prstGeom prst="rect">
+            <a:avLst/>
+          </a:prstGeom>
+          <a:noFill/>
+          <a:ln/>
+        </p:spPr>
+        <p:txBody>
+          <a:bodyPr wrap="square" lIns="0" tIns="0" rIns="0" bIns="0" rtlCol="0" anchor="ctr"/>
+          <a:lstStyle/>
+          <a:p>
+            <a:pPr indent="0" marL="0">
+              <a:buNone/>
+            </a:pPr>
+            <a:r>
+              <a:rPr lang="en-US" sz="1500" b="1" dirty="0">
+                <a:solidFill>
+                  <a:srgbClr val="1C2530"/>
+                </a:solidFill>
+                <a:latin typeface="Calibri" pitchFamily="34" charset="0"/>
+                <a:ea typeface="Calibri" pitchFamily="34" charset="-122"/>
+                <a:cs typeface="Calibri" pitchFamily="34" charset="-120"/>
+              </a:rPr>
+              <a:t>Fiscal year April–March</a:t>
+            </a:r>
+            <a:endParaRPr lang="en-US" sz="1500" dirty="0"/>
+          </a:p>
+        </p:txBody>
+      </p:sp>
+      <p:sp>
+        <p:nvSpPr>
+          <p:cNvPr id="14" name="Text 12"/>
+          <p:cNvSpPr/>
+          <p:nvPr/>
+        </p:nvSpPr>
+        <p:spPr>
+          <a:xfrm>
+            <a:off x="5074920" y="5001768"/>
+            <a:ext cx="6428232" cy="594360"/>
+          </a:xfrm>
+          <a:prstGeom prst="rect">
+            <a:avLst/>
+          </a:prstGeom>
+          <a:noFill/>
+          <a:ln/>
+        </p:spPr>
+        <p:txBody>
+          <a:bodyPr wrap="square" lIns="0" tIns="0" rIns="0" bIns="0" rtlCol="0" anchor="ctr"/>
+          <a:lstStyle/>
+          <a:p>
+            <a:pPr indent="0" marL="0">
+              <a:lnSpc>
+                <a:spcPct val="110000"/>
+              </a:lnSpc>
+              <a:buNone/>
+            </a:pPr>
+            <a:r>
+              <a:rPr lang="en-US" sz="1150" dirty="0">
+                <a:solidFill>
+                  <a:srgbClr val="6B7280"/>
+                </a:solidFill>
+                <a:latin typeface="Calibri" pitchFamily="34" charset="0"/>
+                <a:ea typeface="Calibri" pitchFamily="34" charset="-122"/>
+                <a:cs typeface="Calibri" pitchFamily="34" charset="-120"/>
+              </a:rPr>
+              <a:t>verified from the data itself, three independent ways</a:t>
+            </a:r>
+            <a:endParaRPr lang="en-US" sz="1150" dirty="0"/>
+          </a:p>
+        </p:txBody>
+      </p:sp>
+      <p:sp>
+        <p:nvSpPr>
+          <p:cNvPr id="15" name="Text 13"/>
+          <p:cNvSpPr/>
+          <p:nvPr/>
+        </p:nvSpPr>
+        <p:spPr>
+          <a:xfrm>
+            <a:off x="685800" y="5806440"/>
+            <a:ext cx="10817352" cy="457200"/>
+          </a:xfrm>
+          <a:prstGeom prst="rect">
+            <a:avLst/>
+          </a:prstGeom>
+          <a:noFill/>
+          <a:ln/>
+        </p:spPr>
+        <p:txBody>
+          <a:bodyPr wrap="square" lIns="0" tIns="0" rIns="0" bIns="0" rtlCol="0" anchor="ctr"/>
+          <a:lstStyle/>
+          <a:p>
+            <a:pPr indent="0" marL="0">
+              <a:buNone/>
+            </a:pPr>
+            <a:r>
+              <a:rPr lang="en-US" sz="1250" i="1" dirty="0">
+                <a:solidFill>
+                  <a:srgbClr val="6B7280"/>
+                </a:solidFill>
+                <a:latin typeface="Calibri" pitchFamily="34" charset="0"/>
+                <a:ea typeface="Calibri" pitchFamily="34" charset="-122"/>
+                <a:cs typeface="Calibri" pitchFamily="34" charset="-120"/>
+              </a:rPr>
+              <a:t>Every cleaning decision is documented with its evidence — the numbers can be defended line by line.</a:t>
+            </a:r>
+            <a:endParaRPr lang="en-US" sz="1250" dirty="0"/>
           </a:p>
         </p:txBody>
       </p:sp>
@@ -2587,7 +2299,7 @@
           <a:bodyPr wrap="square" lIns="0" tIns="0" rIns="0" bIns="0" rtlCol="0" anchor="ctr"/>
           <a:lstStyle/>
           <a:p>
-            <a:pPr algn="l" indent="0" marL="0">
+            <a:pPr indent="0" marL="0">
               <a:buNone/>
             </a:pPr>
             <a:r>
@@ -2599,7 +2311,7 @@
                 <a:ea typeface="Calibri" pitchFamily="34" charset="-122"/>
                 <a:cs typeface="Calibri" pitchFamily="34" charset="-120"/>
               </a:rPr>
-              <a:t>02 — WHERE WE STAND</a:t>
+              <a:t>WHAT WE HAVE DONE — 02</a:t>
             </a:r>
             <a:endParaRPr lang="en-US" sz="1050" dirty="0"/>
           </a:p>
@@ -2626,7 +2338,7 @@
           <a:bodyPr wrap="square" lIns="0" tIns="0" rIns="0" bIns="0" rtlCol="0" anchor="ctr"/>
           <a:lstStyle/>
           <a:p>
-            <a:pPr algn="l" indent="0" marL="0">
+            <a:pPr indent="0" marL="0">
               <a:buNone/>
             </a:pPr>
             <a:r>
@@ -2638,7 +2350,7 @@
                 <a:ea typeface="Cambria" pitchFamily="34" charset="-122"/>
                 <a:cs typeface="Cambria" pitchFamily="34" charset="-120"/>
               </a:rPr>
-              <a:t>The build phase is complete.</a:t>
+              <a:t>Selected models by competition, not opinion.</a:t>
             </a:r>
             <a:endParaRPr lang="en-US" sz="3800" dirty="0"/>
           </a:p>
@@ -2652,24 +2364,24 @@
         </p:nvSpPr>
         <p:spPr>
           <a:xfrm>
-            <a:off x="685800" y="2313432"/>
-            <a:ext cx="777240" cy="548640"/>
-          </a:xfrm>
-          <a:prstGeom prst="rect">
-            <a:avLst/>
-          </a:prstGeom>
-          <a:noFill/>
-          <a:ln/>
-        </p:spPr>
-        <p:txBody>
-          <a:bodyPr wrap="square" lIns="0" tIns="0" rIns="0" bIns="0" rtlCol="0" anchor="ctr"/>
-          <a:lstStyle/>
-          <a:p>
-            <a:pPr indent="0" marL="0">
-              <a:buNone/>
-            </a:pPr>
-            <a:r>
-              <a:rPr lang="en-US" sz="2200" i="1" dirty="0">
+            <a:off x="685800" y="2286000"/>
+            <a:ext cx="2384298" cy="685800"/>
+          </a:xfrm>
+          <a:prstGeom prst="rect">
+            <a:avLst/>
+          </a:prstGeom>
+          <a:noFill/>
+          <a:ln/>
+        </p:spPr>
+        <p:txBody>
+          <a:bodyPr wrap="square" lIns="0" tIns="0" rIns="0" bIns="0" rtlCol="0" anchor="ctr"/>
+          <a:lstStyle/>
+          <a:p>
+            <a:pPr indent="0" marL="0">
+              <a:buNone/>
+            </a:pPr>
+            <a:r>
+              <a:rPr lang="en-US" sz="3000" i="1" dirty="0">
                 <a:solidFill>
                   <a:srgbClr val="C8102E"/>
                 </a:solidFill>
@@ -2679,7 +2391,7 @@
               </a:rPr>
               <a:t>01</a:t>
             </a:r>
-            <a:endParaRPr lang="en-US" sz="2200" dirty="0"/>
+            <a:endParaRPr lang="en-US" sz="3000" dirty="0"/>
           </a:p>
         </p:txBody>
       </p:sp>
@@ -2691,24 +2403,24 @@
         </p:nvSpPr>
         <p:spPr>
           <a:xfrm>
-            <a:off x="1645920" y="2286000"/>
-            <a:ext cx="4480560" cy="548640"/>
-          </a:xfrm>
-          <a:prstGeom prst="rect">
-            <a:avLst/>
-          </a:prstGeom>
-          <a:noFill/>
-          <a:ln/>
-        </p:spPr>
-        <p:txBody>
-          <a:bodyPr wrap="square" lIns="0" tIns="0" rIns="0" bIns="0" rtlCol="0" anchor="ctr"/>
-          <a:lstStyle/>
-          <a:p>
-            <a:pPr indent="0" marL="0">
-              <a:buNone/>
-            </a:pPr>
-            <a:r>
-              <a:rPr lang="en-US" sz="1550" b="1" dirty="0">
+            <a:off x="685800" y="3017520"/>
+            <a:ext cx="2384298" cy="411480"/>
+          </a:xfrm>
+          <a:prstGeom prst="rect">
+            <a:avLst/>
+          </a:prstGeom>
+          <a:noFill/>
+          <a:ln/>
+        </p:spPr>
+        <p:txBody>
+          <a:bodyPr wrap="square" lIns="0" tIns="0" rIns="0" bIns="0" rtlCol="0" anchor="ctr"/>
+          <a:lstStyle/>
+          <a:p>
+            <a:pPr indent="0" marL="0">
+              <a:buNone/>
+            </a:pPr>
+            <a:r>
+              <a:rPr lang="en-US" sz="1600" b="1" dirty="0">
                 <a:solidFill>
                   <a:srgbClr val="1C2530"/>
                 </a:solidFill>
@@ -2716,9 +2428,9 @@
                 <a:ea typeface="Calibri" pitchFamily="34" charset="-122"/>
                 <a:cs typeface="Calibri" pitchFamily="34" charset="-120"/>
               </a:rPr>
-              <a:t>Data cleaned and reconciled</a:t>
-            </a:r>
-            <a:endParaRPr lang="en-US" sz="1550" dirty="0"/>
+              <a:t>Candidates</a:t>
+            </a:r>
+            <a:endParaRPr lang="en-US" sz="1600" dirty="0"/>
           </a:p>
         </p:txBody>
       </p:sp>
@@ -2730,8 +2442,8 @@
         </p:nvSpPr>
         <p:spPr>
           <a:xfrm>
-            <a:off x="6355080" y="2322576"/>
-            <a:ext cx="5148072" cy="594360"/>
+            <a:off x="685800" y="3474720"/>
+            <a:ext cx="2384298" cy="1554480"/>
           </a:xfrm>
           <a:prstGeom prst="rect">
             <a:avLst/>
@@ -2745,12 +2457,12 @@
           <a:p>
             <a:pPr indent="0" marL="0">
               <a:lnSpc>
-                <a:spcPct val="110000"/>
+                <a:spcPct val="115000"/>
               </a:lnSpc>
               <a:buNone/>
             </a:pPr>
             <a:r>
-              <a:rPr lang="en-US" sz="1150" dirty="0">
+              <a:rPr lang="en-US" sz="1200" dirty="0">
                 <a:solidFill>
                   <a:srgbClr val="6B7280"/>
                 </a:solidFill>
@@ -2758,61 +2470,38 @@
                 <a:ea typeface="Calibri" pitchFamily="34" charset="-122"/>
                 <a:cs typeface="Calibri" pitchFamily="34" charset="-120"/>
               </a:rPr>
-              <a:t>every order line checked against both master lists; every decision documented</a:t>
-            </a:r>
-            <a:endParaRPr lang="en-US" sz="1150" dirty="0"/>
-          </a:p>
-        </p:txBody>
-      </p:sp>
-      <p:sp>
-        <p:nvSpPr>
-          <p:cNvPr id="7" name="Shape 5"/>
-          <p:cNvSpPr/>
-          <p:nvPr/>
-        </p:nvSpPr>
-        <p:spPr>
-          <a:xfrm>
-            <a:off x="685800" y="3035808"/>
-            <a:ext cx="10817352" cy="0"/>
-          </a:xfrm>
-          <a:prstGeom prst="line">
-            <a:avLst/>
-          </a:prstGeom>
-          <a:noFill/>
-          <a:ln w="9525">
-            <a:solidFill>
-              <a:srgbClr val="E2E6EA"/>
-            </a:solidFill>
-            <a:prstDash val="solid"/>
-          </a:ln>
-        </p:spPr>
-      </p:sp>
-      <p:sp>
-        <p:nvSpPr>
-          <p:cNvPr id="8" name="Text 6"/>
-          <p:cNvSpPr/>
-          <p:nvPr/>
-        </p:nvSpPr>
-        <p:spPr>
-          <a:xfrm>
-            <a:off x="685800" y="3209544"/>
-            <a:ext cx="777240" cy="548640"/>
-          </a:xfrm>
-          <a:prstGeom prst="rect">
-            <a:avLst/>
-          </a:prstGeom>
-          <a:noFill/>
-          <a:ln/>
-        </p:spPr>
-        <p:txBody>
-          <a:bodyPr wrap="square" lIns="0" tIns="0" rIns="0" bIns="0" rtlCol="0" anchor="ctr"/>
-          <a:lstStyle/>
-          <a:p>
-            <a:pPr indent="0" marL="0">
-              <a:buNone/>
-            </a:pPr>
-            <a:r>
-              <a:rPr lang="en-US" sz="2200" i="1" dirty="0">
+              <a:t>up to 24 methods per product — statistical, intermittent-demand and machine learning</a:t>
+            </a:r>
+            <a:endParaRPr lang="en-US" sz="1200" dirty="0"/>
+          </a:p>
+        </p:txBody>
+      </p:sp>
+      <p:sp>
+        <p:nvSpPr>
+          <p:cNvPr id="7" name="Text 5"/>
+          <p:cNvSpPr/>
+          <p:nvPr/>
+        </p:nvSpPr>
+        <p:spPr>
+          <a:xfrm>
+            <a:off x="3390138" y="2286000"/>
+            <a:ext cx="2384298" cy="685800"/>
+          </a:xfrm>
+          <a:prstGeom prst="rect">
+            <a:avLst/>
+          </a:prstGeom>
+          <a:noFill/>
+          <a:ln/>
+        </p:spPr>
+        <p:txBody>
+          <a:bodyPr wrap="square" lIns="0" tIns="0" rIns="0" bIns="0" rtlCol="0" anchor="ctr"/>
+          <a:lstStyle/>
+          <a:p>
+            <a:pPr indent="0" marL="0">
+              <a:buNone/>
+            </a:pPr>
+            <a:r>
+              <a:rPr lang="en-US" sz="3000" i="1" dirty="0">
                 <a:solidFill>
                   <a:srgbClr val="C8102E"/>
                 </a:solidFill>
@@ -2822,36 +2511,36 @@
               </a:rPr>
               <a:t>02</a:t>
             </a:r>
-            <a:endParaRPr lang="en-US" sz="2200" dirty="0"/>
-          </a:p>
-        </p:txBody>
-      </p:sp>
-      <p:sp>
-        <p:nvSpPr>
-          <p:cNvPr id="9" name="Text 7"/>
-          <p:cNvSpPr/>
-          <p:nvPr/>
-        </p:nvSpPr>
-        <p:spPr>
-          <a:xfrm>
-            <a:off x="1645920" y="3182112"/>
-            <a:ext cx="4480560" cy="548640"/>
-          </a:xfrm>
-          <a:prstGeom prst="rect">
-            <a:avLst/>
-          </a:prstGeom>
-          <a:noFill/>
-          <a:ln/>
-        </p:spPr>
-        <p:txBody>
-          <a:bodyPr wrap="square" lIns="0" tIns="0" rIns="0" bIns="0" rtlCol="0" anchor="ctr"/>
-          <a:lstStyle/>
-          <a:p>
-            <a:pPr indent="0" marL="0">
-              <a:buNone/>
-            </a:pPr>
-            <a:r>
-              <a:rPr lang="en-US" sz="1550" b="1" dirty="0">
+            <a:endParaRPr lang="en-US" sz="3000" dirty="0"/>
+          </a:p>
+        </p:txBody>
+      </p:sp>
+      <p:sp>
+        <p:nvSpPr>
+          <p:cNvPr id="8" name="Text 6"/>
+          <p:cNvSpPr/>
+          <p:nvPr/>
+        </p:nvSpPr>
+        <p:spPr>
+          <a:xfrm>
+            <a:off x="3390138" y="3017520"/>
+            <a:ext cx="2384298" cy="411480"/>
+          </a:xfrm>
+          <a:prstGeom prst="rect">
+            <a:avLst/>
+          </a:prstGeom>
+          <a:noFill/>
+          <a:ln/>
+        </p:spPr>
+        <p:txBody>
+          <a:bodyPr wrap="square" lIns="0" tIns="0" rIns="0" bIns="0" rtlCol="0" anchor="ctr"/>
+          <a:lstStyle/>
+          <a:p>
+            <a:pPr indent="0" marL="0">
+              <a:buNone/>
+            </a:pPr>
+            <a:r>
+              <a:rPr lang="en-US" sz="1600" b="1" dirty="0">
                 <a:solidFill>
                   <a:srgbClr val="1C2530"/>
                 </a:solidFill>
@@ -2859,22 +2548,22 @@
                 <a:ea typeface="Calibri" pitchFamily="34" charset="-122"/>
                 <a:cs typeface="Calibri" pitchFamily="34" charset="-120"/>
               </a:rPr>
-              <a:t>Forecasting system built</a:t>
-            </a:r>
-            <a:endParaRPr lang="en-US" sz="1550" dirty="0"/>
-          </a:p>
-        </p:txBody>
-      </p:sp>
-      <p:sp>
-        <p:nvSpPr>
-          <p:cNvPr id="10" name="Text 8"/>
-          <p:cNvSpPr/>
-          <p:nvPr/>
-        </p:nvSpPr>
-        <p:spPr>
-          <a:xfrm>
-            <a:off x="6355080" y="3218688"/>
-            <a:ext cx="5148072" cy="594360"/>
+              <a:t>Hidden years</a:t>
+            </a:r>
+            <a:endParaRPr lang="en-US" sz="1600" dirty="0"/>
+          </a:p>
+        </p:txBody>
+      </p:sp>
+      <p:sp>
+        <p:nvSpPr>
+          <p:cNvPr id="9" name="Text 7"/>
+          <p:cNvSpPr/>
+          <p:nvPr/>
+        </p:nvSpPr>
+        <p:spPr>
+          <a:xfrm>
+            <a:off x="3390138" y="3474720"/>
+            <a:ext cx="2384298" cy="1554480"/>
           </a:xfrm>
           <a:prstGeom prst="rect">
             <a:avLst/>
@@ -2888,12 +2577,12 @@
           <a:p>
             <a:pPr indent="0" marL="0">
               <a:lnSpc>
-                <a:spcPct val="110000"/>
+                <a:spcPct val="115000"/>
               </a:lnSpc>
               <a:buNone/>
             </a:pPr>
             <a:r>
-              <a:rPr lang="en-US" sz="1150" dirty="0">
+              <a:rPr lang="en-US" sz="1200" dirty="0">
                 <a:solidFill>
                   <a:srgbClr val="6B7280"/>
                 </a:solidFill>
@@ -2901,61 +2590,38 @@
                 <a:ea typeface="Calibri" pitchFamily="34" charset="-122"/>
                 <a:cs typeface="Calibri" pitchFamily="34" charset="-120"/>
               </a:rPr>
-              <a:t>per-product method competition, validated by back-testing on withheld years</a:t>
-            </a:r>
-            <a:endParaRPr lang="en-US" sz="1150" dirty="0"/>
-          </a:p>
-        </p:txBody>
-      </p:sp>
-      <p:sp>
-        <p:nvSpPr>
-          <p:cNvPr id="11" name="Shape 9"/>
-          <p:cNvSpPr/>
-          <p:nvPr/>
-        </p:nvSpPr>
-        <p:spPr>
-          <a:xfrm>
-            <a:off x="685800" y="3931920"/>
-            <a:ext cx="10817352" cy="0"/>
-          </a:xfrm>
-          <a:prstGeom prst="line">
-            <a:avLst/>
-          </a:prstGeom>
-          <a:noFill/>
-          <a:ln w="9525">
-            <a:solidFill>
-              <a:srgbClr val="E2E6EA"/>
-            </a:solidFill>
-            <a:prstDash val="solid"/>
-          </a:ln>
-        </p:spPr>
-      </p:sp>
-      <p:sp>
-        <p:nvSpPr>
-          <p:cNvPr id="12" name="Text 10"/>
-          <p:cNvSpPr/>
-          <p:nvPr/>
-        </p:nvSpPr>
-        <p:spPr>
-          <a:xfrm>
-            <a:off x="685800" y="4105656"/>
-            <a:ext cx="777240" cy="548640"/>
-          </a:xfrm>
-          <a:prstGeom prst="rect">
-            <a:avLst/>
-          </a:prstGeom>
-          <a:noFill/>
-          <a:ln/>
-        </p:spPr>
-        <p:txBody>
-          <a:bodyPr wrap="square" lIns="0" tIns="0" rIns="0" bIns="0" rtlCol="0" anchor="ctr"/>
-          <a:lstStyle/>
-          <a:p>
-            <a:pPr indent="0" marL="0">
-              <a:buNone/>
-            </a:pPr>
-            <a:r>
-              <a:rPr lang="en-US" sz="2200" i="1" dirty="0">
+              <a:t>every method forecasts two withheld fiscal years it has never seen</a:t>
+            </a:r>
+            <a:endParaRPr lang="en-US" sz="1200" dirty="0"/>
+          </a:p>
+        </p:txBody>
+      </p:sp>
+      <p:sp>
+        <p:nvSpPr>
+          <p:cNvPr id="10" name="Text 8"/>
+          <p:cNvSpPr/>
+          <p:nvPr/>
+        </p:nvSpPr>
+        <p:spPr>
+          <a:xfrm>
+            <a:off x="6094476" y="2286000"/>
+            <a:ext cx="2384298" cy="685800"/>
+          </a:xfrm>
+          <a:prstGeom prst="rect">
+            <a:avLst/>
+          </a:prstGeom>
+          <a:noFill/>
+          <a:ln/>
+        </p:spPr>
+        <p:txBody>
+          <a:bodyPr wrap="square" lIns="0" tIns="0" rIns="0" bIns="0" rtlCol="0" anchor="ctr"/>
+          <a:lstStyle/>
+          <a:p>
+            <a:pPr indent="0" marL="0">
+              <a:buNone/>
+            </a:pPr>
+            <a:r>
+              <a:rPr lang="en-US" sz="3000" i="1" dirty="0">
                 <a:solidFill>
                   <a:srgbClr val="C8102E"/>
                 </a:solidFill>
@@ -2965,36 +2631,36 @@
               </a:rPr>
               <a:t>03</a:t>
             </a:r>
-            <a:endParaRPr lang="en-US" sz="2200" dirty="0"/>
-          </a:p>
-        </p:txBody>
-      </p:sp>
-      <p:sp>
-        <p:nvSpPr>
-          <p:cNvPr id="13" name="Text 11"/>
-          <p:cNvSpPr/>
-          <p:nvPr/>
-        </p:nvSpPr>
-        <p:spPr>
-          <a:xfrm>
-            <a:off x="1645920" y="4078224"/>
-            <a:ext cx="4480560" cy="548640"/>
-          </a:xfrm>
-          <a:prstGeom prst="rect">
-            <a:avLst/>
-          </a:prstGeom>
-          <a:noFill/>
-          <a:ln/>
-        </p:spPr>
-        <p:txBody>
-          <a:bodyPr wrap="square" lIns="0" tIns="0" rIns="0" bIns="0" rtlCol="0" anchor="ctr"/>
-          <a:lstStyle/>
-          <a:p>
-            <a:pPr indent="0" marL="0">
-              <a:buNone/>
-            </a:pPr>
-            <a:r>
-              <a:rPr lang="en-US" sz="1550" b="1" dirty="0">
+            <a:endParaRPr lang="en-US" sz="3000" dirty="0"/>
+          </a:p>
+        </p:txBody>
+      </p:sp>
+      <p:sp>
+        <p:nvSpPr>
+          <p:cNvPr id="11" name="Text 9"/>
+          <p:cNvSpPr/>
+          <p:nvPr/>
+        </p:nvSpPr>
+        <p:spPr>
+          <a:xfrm>
+            <a:off x="6094476" y="3017520"/>
+            <a:ext cx="2384298" cy="411480"/>
+          </a:xfrm>
+          <a:prstGeom prst="rect">
+            <a:avLst/>
+          </a:prstGeom>
+          <a:noFill/>
+          <a:ln/>
+        </p:spPr>
+        <p:txBody>
+          <a:bodyPr wrap="square" lIns="0" tIns="0" rIns="0" bIns="0" rtlCol="0" anchor="ctr"/>
+          <a:lstStyle/>
+          <a:p>
+            <a:pPr indent="0" marL="0">
+              <a:buNone/>
+            </a:pPr>
+            <a:r>
+              <a:rPr lang="en-US" sz="1600" b="1" dirty="0">
                 <a:solidFill>
                   <a:srgbClr val="1C2530"/>
                 </a:solidFill>
@@ -3002,22 +2668,22 @@
                 <a:ea typeface="Calibri" pitchFamily="34" charset="-122"/>
                 <a:cs typeface="Calibri" pitchFamily="34" charset="-120"/>
               </a:rPr>
-              <a:t>Planning dashboard live</a:t>
-            </a:r>
-            <a:endParaRPr lang="en-US" sz="1550" dirty="0"/>
-          </a:p>
-        </p:txBody>
-      </p:sp>
-      <p:sp>
-        <p:nvSpPr>
-          <p:cNvPr id="14" name="Text 12"/>
-          <p:cNvSpPr/>
-          <p:nvPr/>
-        </p:nvSpPr>
-        <p:spPr>
-          <a:xfrm>
-            <a:off x="6355080" y="4114800"/>
-            <a:ext cx="5148072" cy="594360"/>
+              <a:t>Winner kept</a:t>
+            </a:r>
+            <a:endParaRPr lang="en-US" sz="1600" dirty="0"/>
+          </a:p>
+        </p:txBody>
+      </p:sp>
+      <p:sp>
+        <p:nvSpPr>
+          <p:cNvPr id="12" name="Text 10"/>
+          <p:cNvSpPr/>
+          <p:nvPr/>
+        </p:nvSpPr>
+        <p:spPr>
+          <a:xfrm>
+            <a:off x="6094476" y="3474720"/>
+            <a:ext cx="2384298" cy="1554480"/>
           </a:xfrm>
           <a:prstGeom prst="rect">
             <a:avLst/>
@@ -3031,12 +2697,12 @@
           <a:p>
             <a:pPr indent="0" marL="0">
               <a:lnSpc>
-                <a:spcPct val="110000"/>
+                <a:spcPct val="115000"/>
               </a:lnSpc>
               <a:buNone/>
             </a:pPr>
             <a:r>
-              <a:rPr lang="en-US" sz="1150" dirty="0">
+              <a:rPr lang="en-US" sz="1200" dirty="0">
                 <a:solidFill>
                   <a:srgbClr val="6B7280"/>
                 </a:solidFill>
@@ -3044,61 +2710,38 @@
                 <a:ea typeface="Calibri" pitchFamily="34" charset="-122"/>
                 <a:cs typeface="Calibri" pitchFamily="34" charset="-120"/>
               </a:rPr>
-              <a:t>eight pages, written for non-analysts; new data re-runs everything in two minutes</a:t>
-            </a:r>
-            <a:endParaRPr lang="en-US" sz="1150" dirty="0"/>
-          </a:p>
-        </p:txBody>
-      </p:sp>
-      <p:sp>
-        <p:nvSpPr>
-          <p:cNvPr id="15" name="Shape 13"/>
-          <p:cNvSpPr/>
-          <p:nvPr/>
-        </p:nvSpPr>
-        <p:spPr>
-          <a:xfrm>
-            <a:off x="685800" y="4828032"/>
-            <a:ext cx="10817352" cy="0"/>
-          </a:xfrm>
-          <a:prstGeom prst="line">
-            <a:avLst/>
-          </a:prstGeom>
-          <a:noFill/>
-          <a:ln w="9525">
-            <a:solidFill>
-              <a:srgbClr val="E2E6EA"/>
-            </a:solidFill>
-            <a:prstDash val="solid"/>
-          </a:ln>
-        </p:spPr>
-      </p:sp>
-      <p:sp>
-        <p:nvSpPr>
-          <p:cNvPr id="16" name="Text 14"/>
-          <p:cNvSpPr/>
-          <p:nvPr/>
-        </p:nvSpPr>
-        <p:spPr>
-          <a:xfrm>
-            <a:off x="685800" y="5001768"/>
-            <a:ext cx="777240" cy="548640"/>
-          </a:xfrm>
-          <a:prstGeom prst="rect">
-            <a:avLst/>
-          </a:prstGeom>
-          <a:noFill/>
-          <a:ln/>
-        </p:spPr>
-        <p:txBody>
-          <a:bodyPr wrap="square" lIns="0" tIns="0" rIns="0" bIns="0" rtlCol="0" anchor="ctr"/>
-          <a:lstStyle/>
-          <a:p>
-            <a:pPr indent="0" marL="0">
-              <a:buNone/>
-            </a:pPr>
-            <a:r>
-              <a:rPr lang="en-US" sz="2200" i="1" dirty="0">
+              <a:t>the most accurate method wins that product — 17 different methods currently earn a place</a:t>
+            </a:r>
+            <a:endParaRPr lang="en-US" sz="1200" dirty="0"/>
+          </a:p>
+        </p:txBody>
+      </p:sp>
+      <p:sp>
+        <p:nvSpPr>
+          <p:cNvPr id="13" name="Text 11"/>
+          <p:cNvSpPr/>
+          <p:nvPr/>
+        </p:nvSpPr>
+        <p:spPr>
+          <a:xfrm>
+            <a:off x="8798814" y="2286000"/>
+            <a:ext cx="2384298" cy="685800"/>
+          </a:xfrm>
+          <a:prstGeom prst="rect">
+            <a:avLst/>
+          </a:prstGeom>
+          <a:noFill/>
+          <a:ln/>
+        </p:spPr>
+        <p:txBody>
+          <a:bodyPr wrap="square" lIns="0" tIns="0" rIns="0" bIns="0" rtlCol="0" anchor="ctr"/>
+          <a:lstStyle/>
+          <a:p>
+            <a:pPr indent="0" marL="0">
+              <a:buNone/>
+            </a:pPr>
+            <a:r>
+              <a:rPr lang="en-US" sz="3000" i="1" dirty="0">
                 <a:solidFill>
                   <a:srgbClr val="C8102E"/>
                 </a:solidFill>
@@ -3108,36 +2751,36 @@
               </a:rPr>
               <a:t>04</a:t>
             </a:r>
-            <a:endParaRPr lang="en-US" sz="2200" dirty="0"/>
-          </a:p>
-        </p:txBody>
-      </p:sp>
-      <p:sp>
-        <p:nvSpPr>
-          <p:cNvPr id="17" name="Text 15"/>
-          <p:cNvSpPr/>
-          <p:nvPr/>
-        </p:nvSpPr>
-        <p:spPr>
-          <a:xfrm>
-            <a:off x="1645920" y="4974336"/>
-            <a:ext cx="4480560" cy="548640"/>
-          </a:xfrm>
-          <a:prstGeom prst="rect">
-            <a:avLst/>
-          </a:prstGeom>
-          <a:noFill/>
-          <a:ln/>
-        </p:spPr>
-        <p:txBody>
-          <a:bodyPr wrap="square" lIns="0" tIns="0" rIns="0" bIns="0" rtlCol="0" anchor="ctr"/>
-          <a:lstStyle/>
-          <a:p>
-            <a:pPr indent="0" marL="0">
-              <a:buNone/>
-            </a:pPr>
-            <a:r>
-              <a:rPr lang="en-US" sz="1550" b="1" dirty="0">
+            <a:endParaRPr lang="en-US" sz="3000" dirty="0"/>
+          </a:p>
+        </p:txBody>
+      </p:sp>
+      <p:sp>
+        <p:nvSpPr>
+          <p:cNvPr id="14" name="Text 12"/>
+          <p:cNvSpPr/>
+          <p:nvPr/>
+        </p:nvSpPr>
+        <p:spPr>
+          <a:xfrm>
+            <a:off x="8798814" y="3017520"/>
+            <a:ext cx="2384298" cy="411480"/>
+          </a:xfrm>
+          <a:prstGeom prst="rect">
+            <a:avLst/>
+          </a:prstGeom>
+          <a:noFill/>
+          <a:ln/>
+        </p:spPr>
+        <p:txBody>
+          <a:bodyPr wrap="square" lIns="0" tIns="0" rIns="0" bIns="0" rtlCol="0" anchor="ctr"/>
+          <a:lstStyle/>
+          <a:p>
+            <a:pPr indent="0" marL="0">
+              <a:buNone/>
+            </a:pPr>
+            <a:r>
+              <a:rPr lang="en-US" sz="1600" b="1" dirty="0">
                 <a:solidFill>
                   <a:srgbClr val="1C2530"/>
                 </a:solidFill>
@@ -3145,22 +2788,22 @@
                 <a:ea typeface="Calibri" pitchFamily="34" charset="-122"/>
                 <a:cs typeface="Calibri" pitchFamily="34" charset="-120"/>
               </a:rPr>
-              <a:t>FY2025 forecast produced</a:t>
-            </a:r>
-            <a:endParaRPr lang="en-US" sz="1550" dirty="0"/>
-          </a:p>
-        </p:txBody>
-      </p:sp>
-      <p:sp>
-        <p:nvSpPr>
-          <p:cNvPr id="18" name="Text 16"/>
-          <p:cNvSpPr/>
-          <p:nvPr/>
-        </p:nvSpPr>
-        <p:spPr>
-          <a:xfrm>
-            <a:off x="6355080" y="5010912"/>
-            <a:ext cx="5148072" cy="594360"/>
+              <a:t>Discipline</a:t>
+            </a:r>
+            <a:endParaRPr lang="en-US" sz="1600" dirty="0"/>
+          </a:p>
+        </p:txBody>
+      </p:sp>
+      <p:sp>
+        <p:nvSpPr>
+          <p:cNvPr id="15" name="Text 13"/>
+          <p:cNvSpPr/>
+          <p:nvPr/>
+        </p:nvSpPr>
+        <p:spPr>
+          <a:xfrm>
+            <a:off x="8798814" y="3474720"/>
+            <a:ext cx="2384298" cy="1554480"/>
           </a:xfrm>
           <a:prstGeom prst="rect">
             <a:avLst/>
@@ -3174,12 +2817,12 @@
           <a:p>
             <a:pPr indent="0" marL="0">
               <a:lnSpc>
-                <a:spcPct val="110000"/>
+                <a:spcPct val="115000"/>
               </a:lnSpc>
               <a:buNone/>
             </a:pPr>
             <a:r>
-              <a:rPr lang="en-US" sz="1150" dirty="0">
+              <a:rPr lang="en-US" sz="1200" dirty="0">
                 <a:solidFill>
                   <a:srgbClr val="6B7280"/>
                 </a:solidFill>
@@ -3187,9 +2830,48 @@
                 <a:ea typeface="Calibri" pitchFamily="34" charset="-122"/>
                 <a:cs typeface="Calibri" pitchFamily="34" charset="-120"/>
               </a:rPr>
-              <a:t>first full run complete — results and accuracy evidence presented at the semi-final</a:t>
-            </a:r>
-            <a:endParaRPr lang="en-US" sz="1150" dirty="0"/>
+              <a:t>twelve improvement ideas tested the same way; three survived, failures documented</a:t>
+            </a:r>
+            <a:endParaRPr lang="en-US" sz="1200" dirty="0"/>
+          </a:p>
+        </p:txBody>
+      </p:sp>
+      <p:sp>
+        <p:nvSpPr>
+          <p:cNvPr id="16" name="Text 14"/>
+          <p:cNvSpPr/>
+          <p:nvPr/>
+        </p:nvSpPr>
+        <p:spPr>
+          <a:xfrm>
+            <a:off x="685800" y="5623560"/>
+            <a:ext cx="10817352" cy="457200"/>
+          </a:xfrm>
+          <a:prstGeom prst="rect">
+            <a:avLst/>
+          </a:prstGeom>
+          <a:noFill/>
+          <a:ln/>
+        </p:spPr>
+        <p:txBody>
+          <a:bodyPr wrap="square" lIns="0" tIns="0" rIns="0" bIns="0" rtlCol="0" anchor="ctr"/>
+          <a:lstStyle/>
+          <a:p>
+            <a:pPr indent="0" marL="0">
+              <a:buNone/>
+            </a:pPr>
+            <a:r>
+              <a:rPr lang="en-US" sz="1250" i="1" dirty="0">
+                <a:solidFill>
+                  <a:srgbClr val="6B7280"/>
+                </a:solidFill>
+                <a:latin typeface="Calibri" pitchFamily="34" charset="0"/>
+                <a:ea typeface="Calibri" pitchFamily="34" charset="-122"/>
+                <a:cs typeface="Calibri" pitchFamily="34" charset="-120"/>
+              </a:rPr>
+              <a:t>No single model fits 5,706 products — the competition decides, per product, on evidence.</a:t>
+            </a:r>
+            <a:endParaRPr lang="en-US" sz="1250" dirty="0"/>
           </a:p>
         </p:txBody>
       </p:sp>
@@ -3246,7 +2928,7 @@
           <a:bodyPr wrap="square" lIns="0" tIns="0" rIns="0" bIns="0" rtlCol="0" anchor="ctr"/>
           <a:lstStyle/>
           <a:p>
-            <a:pPr algn="l" indent="0" marL="0">
+            <a:pPr indent="0" marL="0">
               <a:buNone/>
             </a:pPr>
             <a:r>
@@ -3258,7 +2940,7 @@
                 <a:ea typeface="Calibri" pitchFamily="34" charset="-122"/>
                 <a:cs typeface="Calibri" pitchFamily="34" charset="-120"/>
               </a:rPr>
-              <a:t>03 — WORK DONE: THE DATA</a:t>
+              <a:t>WHAT WE HAVE DONE — 03</a:t>
             </a:r>
             <a:endParaRPr lang="en-US" sz="1050" dirty="0"/>
           </a:p>
@@ -3285,7 +2967,7 @@
           <a:bodyPr wrap="square" lIns="0" tIns="0" rIns="0" bIns="0" rtlCol="0" anchor="ctr"/>
           <a:lstStyle/>
           <a:p>
-            <a:pPr algn="l" indent="0" marL="0">
+            <a:pPr indent="0" marL="0">
               <a:buNone/>
             </a:pPr>
             <a:r>
@@ -3297,7 +2979,7 @@
                 <a:ea typeface="Cambria" pitchFamily="34" charset="-122"/>
                 <a:cs typeface="Cambria" pitchFamily="34" charset="-120"/>
               </a:rPr>
-              <a:t>Cleaned, reconciled, understood.</a:t>
+              <a:t>A system the whole team can run.</a:t>
             </a:r>
             <a:endParaRPr lang="en-US" sz="3800" dirty="0"/>
           </a:p>
@@ -3305,53 +2987,188 @@
       </p:sp>
       <p:sp>
         <p:nvSpPr>
-          <p:cNvPr id="4" name="Text 2"/>
-          <p:cNvSpPr/>
-          <p:nvPr/>
-        </p:nvSpPr>
-        <p:spPr>
-          <a:xfrm>
-            <a:off x="685800" y="2286000"/>
-            <a:ext cx="4023360" cy="548640"/>
-          </a:xfrm>
-          <a:prstGeom prst="rect">
-            <a:avLst/>
-          </a:prstGeom>
-          <a:noFill/>
-          <a:ln/>
-        </p:spPr>
-        <p:txBody>
-          <a:bodyPr wrap="square" lIns="0" tIns="0" rIns="0" bIns="0" rtlCol="0" anchor="ctr"/>
-          <a:lstStyle/>
-          <a:p>
-            <a:pPr indent="0" marL="0">
-              <a:buNone/>
-            </a:pPr>
-            <a:r>
-              <a:rPr lang="en-US" sz="1500" b="1" dirty="0">
-                <a:solidFill>
-                  <a:srgbClr val="1C2530"/>
+          <p:cNvPr id="4" name="Shape 2"/>
+          <p:cNvSpPr/>
+          <p:nvPr/>
+        </p:nvSpPr>
+        <p:spPr>
+          <a:xfrm>
+            <a:off x="685800" y="2377440"/>
+            <a:ext cx="3429000" cy="2651760"/>
+          </a:xfrm>
+          <a:prstGeom prst="roundRect">
+            <a:avLst>
+              <a:gd name="adj" fmla="val 2759"/>
+            </a:avLst>
+          </a:prstGeom>
+          <a:solidFill>
+            <a:srgbClr val="1C2530"/>
+          </a:solidFill>
+          <a:ln w="12700">
+            <a:solidFill>
+              <a:srgbClr val="1C2530"/>
+            </a:solidFill>
+            <a:prstDash val="solid"/>
+          </a:ln>
+        </p:spPr>
+      </p:sp>
+      <p:sp>
+        <p:nvSpPr>
+          <p:cNvPr id="5" name="Text 3"/>
+          <p:cNvSpPr/>
+          <p:nvPr/>
+        </p:nvSpPr>
+        <p:spPr>
+          <a:xfrm>
+            <a:off x="1005840" y="2788920"/>
+            <a:ext cx="2788920" cy="777240"/>
+          </a:xfrm>
+          <a:prstGeom prst="rect">
+            <a:avLst/>
+          </a:prstGeom>
+          <a:noFill/>
+          <a:ln/>
+        </p:spPr>
+        <p:txBody>
+          <a:bodyPr wrap="square" lIns="0" tIns="0" rIns="0" bIns="0" rtlCol="0" anchor="ctr"/>
+          <a:lstStyle/>
+          <a:p>
+            <a:pPr indent="0" marL="0">
+              <a:buNone/>
+            </a:pPr>
+            <a:r>
+              <a:rPr lang="en-US" sz="1900" b="1" dirty="0">
+                <a:solidFill>
+                  <a:srgbClr val="F5F7FA"/>
+                </a:solidFill>
+                <a:latin typeface="Cambria" pitchFamily="34" charset="0"/>
+                <a:ea typeface="Cambria" pitchFamily="34" charset="-122"/>
+                <a:cs typeface="Cambria" pitchFamily="34" charset="-120"/>
+              </a:rPr>
+              <a:t>Forecast views</a:t>
+            </a:r>
+            <a:endParaRPr lang="en-US" sz="1900" dirty="0"/>
+          </a:p>
+        </p:txBody>
+      </p:sp>
+      <p:sp>
+        <p:nvSpPr>
+          <p:cNvPr id="6" name="Text 4"/>
+          <p:cNvSpPr/>
+          <p:nvPr/>
+        </p:nvSpPr>
+        <p:spPr>
+          <a:xfrm>
+            <a:off x="1005840" y="3611880"/>
+            <a:ext cx="2788920" cy="1188720"/>
+          </a:xfrm>
+          <a:prstGeom prst="rect">
+            <a:avLst/>
+          </a:prstGeom>
+          <a:noFill/>
+          <a:ln/>
+        </p:spPr>
+        <p:txBody>
+          <a:bodyPr wrap="square" lIns="0" tIns="0" rIns="0" bIns="0" rtlCol="0" anchor="ctr"/>
+          <a:lstStyle/>
+          <a:p>
+            <a:pPr indent="0" marL="0">
+              <a:lnSpc>
+                <a:spcPct val="120000"/>
+              </a:lnSpc>
+              <a:buNone/>
+            </a:pPr>
+            <a:r>
+              <a:rPr lang="en-US" sz="1200" dirty="0">
+                <a:solidFill>
+                  <a:srgbClr val="C9D2DB"/>
                 </a:solidFill>
                 <a:latin typeface="Calibri" pitchFamily="34" charset="0"/>
                 <a:ea typeface="Calibri" pitchFamily="34" charset="-122"/>
                 <a:cs typeface="Calibri" pitchFamily="34" charset="-120"/>
               </a:rPr>
-              <a:t>Perfect reconciliation</a:t>
-            </a:r>
-            <a:endParaRPr lang="en-US" sz="1500" dirty="0"/>
-          </a:p>
-        </p:txBody>
-      </p:sp>
-      <p:sp>
-        <p:nvSpPr>
-          <p:cNvPr id="5" name="Text 3"/>
-          <p:cNvSpPr/>
-          <p:nvPr/>
-        </p:nvSpPr>
-        <p:spPr>
-          <a:xfrm>
-            <a:off x="5074920" y="2313432"/>
-            <a:ext cx="6428232" cy="594360"/>
+              <a:t>company, category, product and customer — history and forecast on one chart</a:t>
+            </a:r>
+            <a:endParaRPr lang="en-US" sz="1200" dirty="0"/>
+          </a:p>
+        </p:txBody>
+      </p:sp>
+      <p:sp>
+        <p:nvSpPr>
+          <p:cNvPr id="7" name="Shape 5"/>
+          <p:cNvSpPr/>
+          <p:nvPr/>
+        </p:nvSpPr>
+        <p:spPr>
+          <a:xfrm>
+            <a:off x="4398264" y="2377440"/>
+            <a:ext cx="3429000" cy="2651760"/>
+          </a:xfrm>
+          <a:prstGeom prst="roundRect">
+            <a:avLst>
+              <a:gd name="adj" fmla="val 2759"/>
+            </a:avLst>
+          </a:prstGeom>
+          <a:solidFill>
+            <a:srgbClr val="1C2530"/>
+          </a:solidFill>
+          <a:ln w="12700">
+            <a:solidFill>
+              <a:srgbClr val="1C2530"/>
+            </a:solidFill>
+            <a:prstDash val="solid"/>
+          </a:ln>
+        </p:spPr>
+      </p:sp>
+      <p:sp>
+        <p:nvSpPr>
+          <p:cNvPr id="8" name="Text 6"/>
+          <p:cNvSpPr/>
+          <p:nvPr/>
+        </p:nvSpPr>
+        <p:spPr>
+          <a:xfrm>
+            <a:off x="4718304" y="2788920"/>
+            <a:ext cx="2788920" cy="777240"/>
+          </a:xfrm>
+          <a:prstGeom prst="rect">
+            <a:avLst/>
+          </a:prstGeom>
+          <a:noFill/>
+          <a:ln/>
+        </p:spPr>
+        <p:txBody>
+          <a:bodyPr wrap="square" lIns="0" tIns="0" rIns="0" bIns="0" rtlCol="0" anchor="ctr"/>
+          <a:lstStyle/>
+          <a:p>
+            <a:pPr indent="0" marL="0">
+              <a:buNone/>
+            </a:pPr>
+            <a:r>
+              <a:rPr lang="en-US" sz="1900" b="1" dirty="0">
+                <a:solidFill>
+                  <a:srgbClr val="F5F7FA"/>
+                </a:solidFill>
+                <a:latin typeface="Cambria" pitchFamily="34" charset="0"/>
+                <a:ea typeface="Cambria" pitchFamily="34" charset="-122"/>
+                <a:cs typeface="Cambria" pitchFamily="34" charset="-120"/>
+              </a:rPr>
+              <a:t>Inventory planning</a:t>
+            </a:r>
+            <a:endParaRPr lang="en-US" sz="1900" dirty="0"/>
+          </a:p>
+        </p:txBody>
+      </p:sp>
+      <p:sp>
+        <p:nvSpPr>
+          <p:cNvPr id="9" name="Text 7"/>
+          <p:cNvSpPr/>
+          <p:nvPr/>
+        </p:nvSpPr>
+        <p:spPr>
+          <a:xfrm>
+            <a:off x="4718304" y="3611880"/>
+            <a:ext cx="2788920" cy="1188720"/>
           </a:xfrm>
           <a:prstGeom prst="rect">
             <a:avLst/>
@@ -3365,43 +3182,47 @@
           <a:p>
             <a:pPr indent="0" marL="0">
               <a:lnSpc>
-                <a:spcPct val="110000"/>
+                <a:spcPct val="120000"/>
               </a:lnSpc>
               <a:buNone/>
             </a:pPr>
             <a:r>
-              <a:rPr lang="en-US" sz="1150" dirty="0">
-                <a:solidFill>
-                  <a:srgbClr val="6B7280"/>
+              <a:rPr lang="en-US" sz="1200" dirty="0">
+                <a:solidFill>
+                  <a:srgbClr val="C9D2DB"/>
                 </a:solidFill>
                 <a:latin typeface="Calibri" pitchFamily="34" charset="0"/>
                 <a:ea typeface="Calibri" pitchFamily="34" charset="-122"/>
                 <a:cs typeface="Calibri" pitchFamily="34" charset="-120"/>
               </a:rPr>
-              <a:t>every product and customer in the sales history exists in the master lists — no orphans</a:t>
-            </a:r>
-            <a:endParaRPr lang="en-US" sz="1150" dirty="0"/>
-          </a:p>
-        </p:txBody>
-      </p:sp>
-      <p:sp>
-        <p:nvSpPr>
-          <p:cNvPr id="6" name="Shape 4"/>
-          <p:cNvSpPr/>
-          <p:nvPr/>
-        </p:nvSpPr>
-        <p:spPr>
-          <a:xfrm>
-            <a:off x="685800" y="3035808"/>
-            <a:ext cx="10817352" cy="0"/>
-          </a:xfrm>
-          <a:prstGeom prst="line">
-            <a:avLst/>
-          </a:prstGeom>
-          <a:noFill/>
-          <a:ln w="9525">
+              <a:t>service level against stock held, simulated on a withheld year</a:t>
+            </a:r>
+            <a:endParaRPr lang="en-US" sz="1200" dirty="0"/>
+          </a:p>
+        </p:txBody>
+      </p:sp>
+      <p:sp>
+        <p:nvSpPr>
+          <p:cNvPr id="10" name="Shape 8"/>
+          <p:cNvSpPr/>
+          <p:nvPr/>
+        </p:nvSpPr>
+        <p:spPr>
+          <a:xfrm>
+            <a:off x="8110728" y="2377440"/>
+            <a:ext cx="3429000" cy="2651760"/>
+          </a:xfrm>
+          <a:prstGeom prst="roundRect">
+            <a:avLst>
+              <a:gd name="adj" fmla="val 2759"/>
+            </a:avLst>
+          </a:prstGeom>
+          <a:solidFill>
+            <a:srgbClr val="1C2530"/>
+          </a:solidFill>
+          <a:ln w="12700">
             <a:solidFill>
-              <a:srgbClr val="E2E6EA"/>
+              <a:srgbClr val="1C2530"/>
             </a:solidFill>
             <a:prstDash val="solid"/>
           </a:ln>
@@ -3409,72 +3230,111 @@
       </p:sp>
       <p:sp>
         <p:nvSpPr>
-          <p:cNvPr id="7" name="Text 5"/>
-          <p:cNvSpPr/>
-          <p:nvPr/>
-        </p:nvSpPr>
-        <p:spPr>
-          <a:xfrm>
-            <a:off x="685800" y="3182112"/>
-            <a:ext cx="4023360" cy="548640"/>
-          </a:xfrm>
-          <a:prstGeom prst="rect">
-            <a:avLst/>
-          </a:prstGeom>
-          <a:noFill/>
-          <a:ln/>
-        </p:spPr>
-        <p:txBody>
-          <a:bodyPr wrap="square" lIns="0" tIns="0" rIns="0" bIns="0" rtlCol="0" anchor="ctr"/>
-          <a:lstStyle/>
-          <a:p>
-            <a:pPr indent="0" marL="0">
-              <a:buNone/>
-            </a:pPr>
-            <a:r>
-              <a:rPr lang="en-US" sz="1500" b="1" dirty="0">
-                <a:solidFill>
-                  <a:srgbClr val="1C2530"/>
+          <p:cNvPr id="11" name="Text 9"/>
+          <p:cNvSpPr/>
+          <p:nvPr/>
+        </p:nvSpPr>
+        <p:spPr>
+          <a:xfrm>
+            <a:off x="8430768" y="2788920"/>
+            <a:ext cx="2788920" cy="777240"/>
+          </a:xfrm>
+          <a:prstGeom prst="rect">
+            <a:avLst/>
+          </a:prstGeom>
+          <a:noFill/>
+          <a:ln/>
+        </p:spPr>
+        <p:txBody>
+          <a:bodyPr wrap="square" lIns="0" tIns="0" rIns="0" bIns="0" rtlCol="0" anchor="ctr"/>
+          <a:lstStyle/>
+          <a:p>
+            <a:pPr indent="0" marL="0">
+              <a:buNone/>
+            </a:pPr>
+            <a:r>
+              <a:rPr lang="en-US" sz="1900" b="1" dirty="0">
+                <a:solidFill>
+                  <a:srgbClr val="F5F7FA"/>
+                </a:solidFill>
+                <a:latin typeface="Cambria" pitchFamily="34" charset="0"/>
+                <a:ea typeface="Cambria" pitchFamily="34" charset="-122"/>
+                <a:cs typeface="Cambria" pitchFamily="34" charset="-120"/>
+              </a:rPr>
+              <a:t>Upload &amp; re-run</a:t>
+            </a:r>
+            <a:endParaRPr lang="en-US" sz="1900" dirty="0"/>
+          </a:p>
+        </p:txBody>
+      </p:sp>
+      <p:sp>
+        <p:nvSpPr>
+          <p:cNvPr id="12" name="Text 10"/>
+          <p:cNvSpPr/>
+          <p:nvPr/>
+        </p:nvSpPr>
+        <p:spPr>
+          <a:xfrm>
+            <a:off x="8430768" y="3611880"/>
+            <a:ext cx="2788920" cy="1188720"/>
+          </a:xfrm>
+          <a:prstGeom prst="rect">
+            <a:avLst/>
+          </a:prstGeom>
+          <a:noFill/>
+          <a:ln/>
+        </p:spPr>
+        <p:txBody>
+          <a:bodyPr wrap="square" lIns="0" tIns="0" rIns="0" bIns="0" rtlCol="0" anchor="ctr"/>
+          <a:lstStyle/>
+          <a:p>
+            <a:pPr indent="0" marL="0">
+              <a:lnSpc>
+                <a:spcPct val="120000"/>
+              </a:lnSpc>
+              <a:buNone/>
+            </a:pPr>
+            <a:r>
+              <a:rPr lang="en-US" sz="1200" dirty="0">
+                <a:solidFill>
+                  <a:srgbClr val="C9D2DB"/>
                 </a:solidFill>
                 <a:latin typeface="Calibri" pitchFamily="34" charset="0"/>
                 <a:ea typeface="Calibri" pitchFamily="34" charset="-122"/>
                 <a:cs typeface="Calibri" pitchFamily="34" charset="-120"/>
               </a:rPr>
-              <a:t>Duplicates investigated</a:t>
-            </a:r>
-            <a:endParaRPr lang="en-US" sz="1500" dirty="0"/>
-          </a:p>
-        </p:txBody>
-      </p:sp>
-      <p:sp>
-        <p:nvSpPr>
-          <p:cNvPr id="8" name="Text 6"/>
-          <p:cNvSpPr/>
-          <p:nvPr/>
-        </p:nvSpPr>
-        <p:spPr>
-          <a:xfrm>
-            <a:off x="5074920" y="3209544"/>
-            <a:ext cx="6428232" cy="594360"/>
-          </a:xfrm>
-          <a:prstGeom prst="rect">
-            <a:avLst/>
-          </a:prstGeom>
-          <a:noFill/>
-          <a:ln/>
-        </p:spPr>
-        <p:txBody>
-          <a:bodyPr wrap="square" lIns="0" tIns="0" rIns="0" bIns="0" rtlCol="0" anchor="ctr"/>
-          <a:lstStyle/>
-          <a:p>
-            <a:pPr indent="0" marL="0">
-              <a:lnSpc>
-                <a:spcPct val="110000"/>
-              </a:lnSpc>
-              <a:buNone/>
-            </a:pPr>
-            <a:r>
-              <a:rPr lang="en-US" sz="1150" dirty="0">
+              <a:t>new data file in, complete re-run in about two minutes — no code, no analyst</a:t>
+            </a:r>
+            <a:endParaRPr lang="en-US" sz="1200" dirty="0"/>
+          </a:p>
+        </p:txBody>
+      </p:sp>
+      <p:sp>
+        <p:nvSpPr>
+          <p:cNvPr id="13" name="Text 11"/>
+          <p:cNvSpPr/>
+          <p:nvPr/>
+        </p:nvSpPr>
+        <p:spPr>
+          <a:xfrm>
+            <a:off x="685800" y="5623560"/>
+            <a:ext cx="10817352" cy="457200"/>
+          </a:xfrm>
+          <a:prstGeom prst="rect">
+            <a:avLst/>
+          </a:prstGeom>
+          <a:noFill/>
+          <a:ln/>
+        </p:spPr>
+        <p:txBody>
+          <a:bodyPr wrap="square" lIns="0" tIns="0" rIns="0" bIns="0" rtlCol="0" anchor="ctr"/>
+          <a:lstStyle/>
+          <a:p>
+            <a:pPr indent="0" marL="0">
+              <a:buNone/>
+            </a:pPr>
+            <a:r>
+              <a:rPr lang="en-US" sz="1250" i="1" dirty="0">
                 <a:solidFill>
                   <a:srgbClr val="6B7280"/>
                 </a:solidFill>
@@ -3482,254 +3342,7 @@
                 <a:ea typeface="Calibri" pitchFamily="34" charset="-122"/>
                 <a:cs typeface="Calibri" pitchFamily="34" charset="-120"/>
               </a:rPr>
-              <a:t>6,865 identical lines forensically tested — genuine ERP entries, kept with evidence</a:t>
-            </a:r>
-            <a:endParaRPr lang="en-US" sz="1150" dirty="0"/>
-          </a:p>
-        </p:txBody>
-      </p:sp>
-      <p:sp>
-        <p:nvSpPr>
-          <p:cNvPr id="9" name="Shape 7"/>
-          <p:cNvSpPr/>
-          <p:nvPr/>
-        </p:nvSpPr>
-        <p:spPr>
-          <a:xfrm>
-            <a:off x="685800" y="3931920"/>
-            <a:ext cx="10817352" cy="0"/>
-          </a:xfrm>
-          <a:prstGeom prst="line">
-            <a:avLst/>
-          </a:prstGeom>
-          <a:noFill/>
-          <a:ln w="9525">
-            <a:solidFill>
-              <a:srgbClr val="E2E6EA"/>
-            </a:solidFill>
-            <a:prstDash val="solid"/>
-          </a:ln>
-        </p:spPr>
-      </p:sp>
-      <p:sp>
-        <p:nvSpPr>
-          <p:cNvPr id="10" name="Text 8"/>
-          <p:cNvSpPr/>
-          <p:nvPr/>
-        </p:nvSpPr>
-        <p:spPr>
-          <a:xfrm>
-            <a:off x="685800" y="4078224"/>
-            <a:ext cx="4023360" cy="548640"/>
-          </a:xfrm>
-          <a:prstGeom prst="rect">
-            <a:avLst/>
-          </a:prstGeom>
-          <a:noFill/>
-          <a:ln/>
-        </p:spPr>
-        <p:txBody>
-          <a:bodyPr wrap="square" lIns="0" tIns="0" rIns="0" bIns="0" rtlCol="0" anchor="ctr"/>
-          <a:lstStyle/>
-          <a:p>
-            <a:pPr indent="0" marL="0">
-              <a:buNone/>
-            </a:pPr>
-            <a:r>
-              <a:rPr lang="en-US" sz="1500" b="1" dirty="0">
-                <a:solidFill>
-                  <a:srgbClr val="1C2530"/>
-                </a:solidFill>
-                <a:latin typeface="Calibri" pitchFamily="34" charset="0"/>
-                <a:ea typeface="Calibri" pitchFamily="34" charset="-122"/>
-                <a:cs typeface="Calibri" pitchFamily="34" charset="-120"/>
-              </a:rPr>
-              <a:t>Variable pricing handled</a:t>
-            </a:r>
-            <a:endParaRPr lang="en-US" sz="1500" dirty="0"/>
-          </a:p>
-        </p:txBody>
-      </p:sp>
-      <p:sp>
-        <p:nvSpPr>
-          <p:cNvPr id="11" name="Text 9"/>
-          <p:cNvSpPr/>
-          <p:nvPr/>
-        </p:nvSpPr>
-        <p:spPr>
-          <a:xfrm>
-            <a:off x="5074920" y="4105656"/>
-            <a:ext cx="6428232" cy="594360"/>
-          </a:xfrm>
-          <a:prstGeom prst="rect">
-            <a:avLst/>
-          </a:prstGeom>
-          <a:noFill/>
-          <a:ln/>
-        </p:spPr>
-        <p:txBody>
-          <a:bodyPr wrap="square" lIns="0" tIns="0" rIns="0" bIns="0" rtlCol="0" anchor="ctr"/>
-          <a:lstStyle/>
-          <a:p>
-            <a:pPr indent="0" marL="0">
-              <a:lnSpc>
-                <a:spcPct val="110000"/>
-              </a:lnSpc>
-              <a:buNone/>
-            </a:pPr>
-            <a:r>
-              <a:rPr lang="en-US" sz="1150" dirty="0">
-                <a:solidFill>
-                  <a:srgbClr val="6B7280"/>
-                </a:solidFill>
-                <a:latin typeface="Calibri" pitchFamily="34" charset="0"/>
-                <a:ea typeface="Calibri" pitchFamily="34" charset="-122"/>
-                <a:cs typeface="Calibri" pitchFamily="34" charset="-120"/>
-              </a:rPr>
-              <a:t>price-0 means quoted per order by Japan — never counted as zero revenue</a:t>
-            </a:r>
-            <a:endParaRPr lang="en-US" sz="1150" dirty="0"/>
-          </a:p>
-        </p:txBody>
-      </p:sp>
-      <p:sp>
-        <p:nvSpPr>
-          <p:cNvPr id="12" name="Shape 10"/>
-          <p:cNvSpPr/>
-          <p:nvPr/>
-        </p:nvSpPr>
-        <p:spPr>
-          <a:xfrm>
-            <a:off x="685800" y="4828032"/>
-            <a:ext cx="10817352" cy="0"/>
-          </a:xfrm>
-          <a:prstGeom prst="line">
-            <a:avLst/>
-          </a:prstGeom>
-          <a:noFill/>
-          <a:ln w="9525">
-            <a:solidFill>
-              <a:srgbClr val="E2E6EA"/>
-            </a:solidFill>
-            <a:prstDash val="solid"/>
-          </a:ln>
-        </p:spPr>
-      </p:sp>
-      <p:sp>
-        <p:nvSpPr>
-          <p:cNvPr id="13" name="Text 11"/>
-          <p:cNvSpPr/>
-          <p:nvPr/>
-        </p:nvSpPr>
-        <p:spPr>
-          <a:xfrm>
-            <a:off x="685800" y="4974336"/>
-            <a:ext cx="4023360" cy="548640"/>
-          </a:xfrm>
-          <a:prstGeom prst="rect">
-            <a:avLst/>
-          </a:prstGeom>
-          <a:noFill/>
-          <a:ln/>
-        </p:spPr>
-        <p:txBody>
-          <a:bodyPr wrap="square" lIns="0" tIns="0" rIns="0" bIns="0" rtlCol="0" anchor="ctr"/>
-          <a:lstStyle/>
-          <a:p>
-            <a:pPr indent="0" marL="0">
-              <a:buNone/>
-            </a:pPr>
-            <a:r>
-              <a:rPr lang="en-US" sz="1500" b="1" dirty="0">
-                <a:solidFill>
-                  <a:srgbClr val="1C2530"/>
-                </a:solidFill>
-                <a:latin typeface="Calibri" pitchFamily="34" charset="0"/>
-                <a:ea typeface="Calibri" pitchFamily="34" charset="-122"/>
-                <a:cs typeface="Calibri" pitchFamily="34" charset="-120"/>
-              </a:rPr>
-              <a:t>Fiscal year verified</a:t>
-            </a:r>
-            <a:endParaRPr lang="en-US" sz="1500" dirty="0"/>
-          </a:p>
-        </p:txBody>
-      </p:sp>
-      <p:sp>
-        <p:nvSpPr>
-          <p:cNvPr id="14" name="Text 12"/>
-          <p:cNvSpPr/>
-          <p:nvPr/>
-        </p:nvSpPr>
-        <p:spPr>
-          <a:xfrm>
-            <a:off x="5074920" y="5001768"/>
-            <a:ext cx="6428232" cy="594360"/>
-          </a:xfrm>
-          <a:prstGeom prst="rect">
-            <a:avLst/>
-          </a:prstGeom>
-          <a:noFill/>
-          <a:ln/>
-        </p:spPr>
-        <p:txBody>
-          <a:bodyPr wrap="square" lIns="0" tIns="0" rIns="0" bIns="0" rtlCol="0" anchor="ctr"/>
-          <a:lstStyle/>
-          <a:p>
-            <a:pPr indent="0" marL="0">
-              <a:lnSpc>
-                <a:spcPct val="110000"/>
-              </a:lnSpc>
-              <a:buNone/>
-            </a:pPr>
-            <a:r>
-              <a:rPr lang="en-US" sz="1150" dirty="0">
-                <a:solidFill>
-                  <a:srgbClr val="6B7280"/>
-                </a:solidFill>
-                <a:latin typeface="Calibri" pitchFamily="34" charset="0"/>
-                <a:ea typeface="Calibri" pitchFamily="34" charset="-122"/>
-                <a:cs typeface="Calibri" pitchFamily="34" charset="-120"/>
-              </a:rPr>
-              <a:t>April–March, detected from the data three independent ways</a:t>
-            </a:r>
-            <a:endParaRPr lang="en-US" sz="1150" dirty="0"/>
-          </a:p>
-        </p:txBody>
-      </p:sp>
-      <p:sp>
-        <p:nvSpPr>
-          <p:cNvPr id="15" name="Text 13"/>
-          <p:cNvSpPr/>
-          <p:nvPr/>
-        </p:nvSpPr>
-        <p:spPr>
-          <a:xfrm>
-            <a:off x="685800" y="5806440"/>
-            <a:ext cx="10817352" cy="457200"/>
-          </a:xfrm>
-          <a:prstGeom prst="rect">
-            <a:avLst/>
-          </a:prstGeom>
-          <a:noFill/>
-          <a:ln/>
-        </p:spPr>
-        <p:txBody>
-          <a:bodyPr wrap="square" lIns="0" tIns="0" rIns="0" bIns="0" rtlCol="0" anchor="ctr"/>
-          <a:lstStyle/>
-          <a:p>
-            <a:pPr indent="0" marL="0">
-              <a:buNone/>
-            </a:pPr>
-            <a:r>
-              <a:rPr lang="en-US" sz="1250" i="1" dirty="0">
-                <a:solidFill>
-                  <a:srgbClr val="6B7280"/>
-                </a:solidFill>
-                <a:latin typeface="Calibri" pitchFamily="34" charset="0"/>
-                <a:ea typeface="Calibri" pitchFamily="34" charset="-122"/>
-                <a:cs typeface="Calibri" pitchFamily="34" charset="-120"/>
-              </a:rPr>
-              <a:t>Every cleaning decision is written down with its evidence, so the numbers can be defended line by line.</a:t>
+              <a:t>Demonstrated live in a moment — on the real data.</a:t>
             </a:r>
             <a:endParaRPr lang="en-US" sz="1250" dirty="0"/>
           </a:p>
@@ -3788,7 +3401,7 @@
           <a:bodyPr wrap="square" lIns="0" tIns="0" rIns="0" bIns="0" rtlCol="0" anchor="ctr"/>
           <a:lstStyle/>
           <a:p>
-            <a:pPr algn="l" indent="0" marL="0">
+            <a:pPr indent="0" marL="0">
               <a:buNone/>
             </a:pPr>
             <a:r>
@@ -3800,7 +3413,7 @@
                 <a:ea typeface="Calibri" pitchFamily="34" charset="-122"/>
                 <a:cs typeface="Calibri" pitchFamily="34" charset="-120"/>
               </a:rPr>
-              <a:t>04 — WORK DONE: THE ANALYSIS</a:t>
+              <a:t>WHAT WE HAVE FACED — 01</a:t>
             </a:r>
             <a:endParaRPr lang="en-US" sz="1050" dirty="0"/>
           </a:p>
@@ -3827,7 +3440,7 @@
           <a:bodyPr wrap="square" lIns="0" tIns="0" rIns="0" bIns="0" rtlCol="0" anchor="ctr"/>
           <a:lstStyle/>
           <a:p>
-            <a:pPr algn="l" indent="0" marL="0">
+            <a:pPr indent="0" marL="0">
               <a:buNone/>
             </a:pPr>
             <a:r>
@@ -3839,7 +3452,7 @@
                 <a:ea typeface="Cambria" pitchFamily="34" charset="-122"/>
                 <a:cs typeface="Cambria" pitchFamily="34" charset="-120"/>
               </a:rPr>
-              <a:t>Demand here is events, not patterns.</a:t>
+              <a:t>Demand that behaves like events, not patterns.</a:t>
             </a:r>
             <a:endParaRPr lang="en-US" sz="3800" dirty="0"/>
           </a:p>
@@ -4018,7 +3631,7 @@
                 <a:ea typeface="Calibri" pitchFamily="34" charset="-122"/>
                 <a:cs typeface="Calibri" pitchFamily="34" charset="-120"/>
               </a:rPr>
-              <a:t>share of volume carried by the largest half-percent of order lines</a:t>
+              <a:t>share of total volume carried by the largest half-percent of order lines</a:t>
             </a:r>
             <a:endParaRPr lang="en-US" sz="1350" dirty="0"/>
           </a:p>
@@ -4158,7 +3771,7 @@
                 <a:ea typeface="Calibri" pitchFamily="34" charset="-122"/>
                 <a:cs typeface="Calibri" pitchFamily="34" charset="-120"/>
               </a:rPr>
-              <a:t>This finding shapes the whole approach: no single model fits such a catalogue, and the largest orders are knowable from the sales pipeline before any statistic sees them.</a:t>
+              <a:t>Statistical methods forecast patterns. Much of this demand is single large orders from a few accounts — a structural challenge every method must face.</a:t>
             </a:r>
             <a:endParaRPr lang="en-US" sz="1250" dirty="0"/>
           </a:p>
@@ -4217,7 +3830,7 @@
           <a:bodyPr wrap="square" lIns="0" tIns="0" rIns="0" bIns="0" rtlCol="0" anchor="ctr"/>
           <a:lstStyle/>
           <a:p>
-            <a:pPr algn="l" indent="0" marL="0">
+            <a:pPr indent="0" marL="0">
               <a:buNone/>
             </a:pPr>
             <a:r>
@@ -4229,7 +3842,7 @@
                 <a:ea typeface="Calibri" pitchFamily="34" charset="-122"/>
                 <a:cs typeface="Calibri" pitchFamily="34" charset="-120"/>
               </a:rPr>
-              <a:t>05 — WORK DONE: THE SYSTEM</a:t>
+              <a:t>WHAT WE HAVE FACED — 02</a:t>
             </a:r>
             <a:endParaRPr lang="en-US" sz="1050" dirty="0"/>
           </a:p>
@@ -4256,7 +3869,7 @@
           <a:bodyPr wrap="square" lIns="0" tIns="0" rIns="0" bIns="0" rtlCol="0" anchor="ctr"/>
           <a:lstStyle/>
           <a:p>
-            <a:pPr algn="l" indent="0" marL="0">
+            <a:pPr indent="0" marL="0">
               <a:buNone/>
             </a:pPr>
             <a:r>
@@ -4268,7 +3881,7 @@
                 <a:ea typeface="Cambria" pitchFamily="34" charset="-122"/>
                 <a:cs typeface="Cambria" pitchFamily="34" charset="-120"/>
               </a:rPr>
-              <a:t>One pipeline, four steps.</a:t>
+              <a:t>Accuracy is hard to earn — and to measure.</a:t>
             </a:r>
             <a:endParaRPr lang="en-US" sz="3800" dirty="0"/>
           </a:p>
@@ -4282,24 +3895,24 @@
         </p:nvSpPr>
         <p:spPr>
           <a:xfrm>
-            <a:off x="685800" y="2286000"/>
-            <a:ext cx="2384298" cy="685800"/>
-          </a:xfrm>
-          <a:prstGeom prst="rect">
-            <a:avLst/>
-          </a:prstGeom>
-          <a:noFill/>
-          <a:ln/>
-        </p:spPr>
-        <p:txBody>
-          <a:bodyPr wrap="square" lIns="0" tIns="0" rIns="0" bIns="0" rtlCol="0" anchor="ctr"/>
-          <a:lstStyle/>
-          <a:p>
-            <a:pPr indent="0" marL="0">
-              <a:buNone/>
-            </a:pPr>
-            <a:r>
-              <a:rPr lang="en-US" sz="3000" i="1" dirty="0">
+            <a:off x="685800" y="2322576"/>
+            <a:ext cx="777240" cy="548640"/>
+          </a:xfrm>
+          <a:prstGeom prst="rect">
+            <a:avLst/>
+          </a:prstGeom>
+          <a:noFill/>
+          <a:ln/>
+        </p:spPr>
+        <p:txBody>
+          <a:bodyPr wrap="square" lIns="0" tIns="0" rIns="0" bIns="0" rtlCol="0" anchor="ctr"/>
+          <a:lstStyle/>
+          <a:p>
+            <a:pPr indent="0" marL="0">
+              <a:buNone/>
+            </a:pPr>
+            <a:r>
+              <a:rPr lang="en-US" sz="2400" i="1" dirty="0">
                 <a:solidFill>
                   <a:srgbClr val="C8102E"/>
                 </a:solidFill>
@@ -4309,7 +3922,7 @@
               </a:rPr>
               <a:t>01</a:t>
             </a:r>
-            <a:endParaRPr lang="en-US" sz="3000" dirty="0"/>
+            <a:endParaRPr lang="en-US" sz="2400" dirty="0"/>
           </a:p>
         </p:txBody>
       </p:sp>
@@ -4321,24 +3934,24 @@
         </p:nvSpPr>
         <p:spPr>
           <a:xfrm>
-            <a:off x="685800" y="3017520"/>
-            <a:ext cx="2384298" cy="411480"/>
-          </a:xfrm>
-          <a:prstGeom prst="rect">
-            <a:avLst/>
-          </a:prstGeom>
-          <a:noFill/>
-          <a:ln/>
-        </p:spPr>
-        <p:txBody>
-          <a:bodyPr wrap="square" lIns="0" tIns="0" rIns="0" bIns="0" rtlCol="0" anchor="ctr"/>
-          <a:lstStyle/>
-          <a:p>
-            <a:pPr indent="0" marL="0">
-              <a:buNone/>
-            </a:pPr>
-            <a:r>
-              <a:rPr lang="en-US" sz="1700" b="1" dirty="0">
+            <a:off x="1691640" y="2286000"/>
+            <a:ext cx="9418320" cy="411480"/>
+          </a:xfrm>
+          <a:prstGeom prst="rect">
+            <a:avLst/>
+          </a:prstGeom>
+          <a:noFill/>
+          <a:ln/>
+        </p:spPr>
+        <p:txBody>
+          <a:bodyPr wrap="square" lIns="0" tIns="0" rIns="0" bIns="0" rtlCol="0" anchor="ctr"/>
+          <a:lstStyle/>
+          <a:p>
+            <a:pPr indent="0" marL="0">
+              <a:buNone/>
+            </a:pPr>
+            <a:r>
+              <a:rPr lang="en-US" sz="1550" b="1" dirty="0">
                 <a:solidFill>
                   <a:srgbClr val="1C2530"/>
                 </a:solidFill>
@@ -4346,9 +3959,9 @@
                 <a:ea typeface="Calibri" pitchFamily="34" charset="-122"/>
                 <a:cs typeface="Calibri" pitchFamily="34" charset="-120"/>
               </a:rPr>
-              <a:t>Clean</a:t>
-            </a:r>
-            <a:endParaRPr lang="en-US" sz="1700" dirty="0"/>
+              <a:t>Two turning-point years</a:t>
+            </a:r>
+            <a:endParaRPr lang="en-US" sz="1550" dirty="0"/>
           </a:p>
         </p:txBody>
       </p:sp>
@@ -4360,8 +3973,8 @@
         </p:nvSpPr>
         <p:spPr>
           <a:xfrm>
-            <a:off x="685800" y="3474720"/>
-            <a:ext cx="2384298" cy="1463040"/>
+            <a:off x="1691640" y="2724912"/>
+            <a:ext cx="9418320" cy="685800"/>
           </a:xfrm>
           <a:prstGeom prst="rect">
             <a:avLst/>
@@ -4388,7 +4001,7 @@
                 <a:ea typeface="Calibri" pitchFamily="34" charset="-122"/>
                 <a:cs typeface="Calibri" pitchFamily="34" charset="-120"/>
               </a:rPr>
-              <a:t>272,000 lines reconciled against both master lists; every decision logged</a:t>
+              <a:t>FY2023 fell 43%, FY2024 recovered 25% — neither was predictable from the data before it, and nothing in the files explains why</a:t>
             </a:r>
             <a:endParaRPr lang="en-US" sz="1200" dirty="0"/>
           </a:p>
@@ -4402,24 +4015,24 @@
         </p:nvSpPr>
         <p:spPr>
           <a:xfrm>
-            <a:off x="3390138" y="2286000"/>
-            <a:ext cx="2384298" cy="685800"/>
-          </a:xfrm>
-          <a:prstGeom prst="rect">
-            <a:avLst/>
-          </a:prstGeom>
-          <a:noFill/>
-          <a:ln/>
-        </p:spPr>
-        <p:txBody>
-          <a:bodyPr wrap="square" lIns="0" tIns="0" rIns="0" bIns="0" rtlCol="0" anchor="ctr"/>
-          <a:lstStyle/>
-          <a:p>
-            <a:pPr indent="0" marL="0">
-              <a:buNone/>
-            </a:pPr>
-            <a:r>
-              <a:rPr lang="en-US" sz="3000" i="1" dirty="0">
+            <a:off x="685800" y="3584448"/>
+            <a:ext cx="777240" cy="548640"/>
+          </a:xfrm>
+          <a:prstGeom prst="rect">
+            <a:avLst/>
+          </a:prstGeom>
+          <a:noFill/>
+          <a:ln/>
+        </p:spPr>
+        <p:txBody>
+          <a:bodyPr wrap="square" lIns="0" tIns="0" rIns="0" bIns="0" rtlCol="0" anchor="ctr"/>
+          <a:lstStyle/>
+          <a:p>
+            <a:pPr indent="0" marL="0">
+              <a:buNone/>
+            </a:pPr>
+            <a:r>
+              <a:rPr lang="en-US" sz="2400" i="1" dirty="0">
                 <a:solidFill>
                   <a:srgbClr val="C8102E"/>
                 </a:solidFill>
@@ -4429,7 +4042,7 @@
               </a:rPr>
               <a:t>02</a:t>
             </a:r>
-            <a:endParaRPr lang="en-US" sz="3000" dirty="0"/>
+            <a:endParaRPr lang="en-US" sz="2400" dirty="0"/>
           </a:p>
         </p:txBody>
       </p:sp>
@@ -4441,24 +4054,24 @@
         </p:nvSpPr>
         <p:spPr>
           <a:xfrm>
-            <a:off x="3390138" y="3017520"/>
-            <a:ext cx="2384298" cy="411480"/>
-          </a:xfrm>
-          <a:prstGeom prst="rect">
-            <a:avLst/>
-          </a:prstGeom>
-          <a:noFill/>
-          <a:ln/>
-        </p:spPr>
-        <p:txBody>
-          <a:bodyPr wrap="square" lIns="0" tIns="0" rIns="0" bIns="0" rtlCol="0" anchor="ctr"/>
-          <a:lstStyle/>
-          <a:p>
-            <a:pPr indent="0" marL="0">
-              <a:buNone/>
-            </a:pPr>
-            <a:r>
-              <a:rPr lang="en-US" sz="1700" b="1" dirty="0">
+            <a:off x="1691640" y="3547872"/>
+            <a:ext cx="9418320" cy="411480"/>
+          </a:xfrm>
+          <a:prstGeom prst="rect">
+            <a:avLst/>
+          </a:prstGeom>
+          <a:noFill/>
+          <a:ln/>
+        </p:spPr>
+        <p:txBody>
+          <a:bodyPr wrap="square" lIns="0" tIns="0" rIns="0" bIns="0" rtlCol="0" anchor="ctr"/>
+          <a:lstStyle/>
+          <a:p>
+            <a:pPr indent="0" marL="0">
+              <a:buNone/>
+            </a:pPr>
+            <a:r>
+              <a:rPr lang="en-US" sz="1550" b="1" dirty="0">
                 <a:solidFill>
                   <a:srgbClr val="1C2530"/>
                 </a:solidFill>
@@ -4466,9 +4079,9 @@
                 <a:ea typeface="Calibri" pitchFamily="34" charset="-122"/>
                 <a:cs typeface="Calibri" pitchFamily="34" charset="-120"/>
               </a:rPr>
-              <a:t>Compete</a:t>
-            </a:r>
-            <a:endParaRPr lang="en-US" sz="1700" dirty="0"/>
+              <a:t>Standard metrics break</a:t>
+            </a:r>
+            <a:endParaRPr lang="en-US" sz="1550" dirty="0"/>
           </a:p>
         </p:txBody>
       </p:sp>
@@ -4480,8 +4093,8 @@
         </p:nvSpPr>
         <p:spPr>
           <a:xfrm>
-            <a:off x="3390138" y="3474720"/>
-            <a:ext cx="2384298" cy="1463040"/>
+            <a:off x="1691640" y="3986784"/>
+            <a:ext cx="9418320" cy="685800"/>
           </a:xfrm>
           <a:prstGeom prst="rect">
             <a:avLst/>
@@ -4508,7 +4121,7 @@
                 <a:ea typeface="Calibri" pitchFamily="34" charset="-122"/>
                 <a:cs typeface="Calibri" pitchFamily="34" charset="-120"/>
               </a:rPr>
-              <a:t>Up to 24 forecasting methods fight per product on two hidden years</a:t>
+              <a:t>MAPE is undefined whenever a month sells zero — which is most product-months here — so we measure with WAPE and MASE instead</a:t>
             </a:r>
             <a:endParaRPr lang="en-US" sz="1200" dirty="0"/>
           </a:p>
@@ -4522,24 +4135,24 @@
         </p:nvSpPr>
         <p:spPr>
           <a:xfrm>
-            <a:off x="6094476" y="2286000"/>
-            <a:ext cx="2384298" cy="685800"/>
-          </a:xfrm>
-          <a:prstGeom prst="rect">
-            <a:avLst/>
-          </a:prstGeom>
-          <a:noFill/>
-          <a:ln/>
-        </p:spPr>
-        <p:txBody>
-          <a:bodyPr wrap="square" lIns="0" tIns="0" rIns="0" bIns="0" rtlCol="0" anchor="ctr"/>
-          <a:lstStyle/>
-          <a:p>
-            <a:pPr indent="0" marL="0">
-              <a:buNone/>
-            </a:pPr>
-            <a:r>
-              <a:rPr lang="en-US" sz="3000" i="1" dirty="0">
+            <a:off x="685800" y="4846320"/>
+            <a:ext cx="777240" cy="548640"/>
+          </a:xfrm>
+          <a:prstGeom prst="rect">
+            <a:avLst/>
+          </a:prstGeom>
+          <a:noFill/>
+          <a:ln/>
+        </p:spPr>
+        <p:txBody>
+          <a:bodyPr wrap="square" lIns="0" tIns="0" rIns="0" bIns="0" rtlCol="0" anchor="ctr"/>
+          <a:lstStyle/>
+          <a:p>
+            <a:pPr indent="0" marL="0">
+              <a:buNone/>
+            </a:pPr>
+            <a:r>
+              <a:rPr lang="en-US" sz="2400" i="1" dirty="0">
                 <a:solidFill>
                   <a:srgbClr val="C8102E"/>
                 </a:solidFill>
@@ -4549,7 +4162,7 @@
               </a:rPr>
               <a:t>03</a:t>
             </a:r>
-            <a:endParaRPr lang="en-US" sz="3000" dirty="0"/>
+            <a:endParaRPr lang="en-US" sz="2400" dirty="0"/>
           </a:p>
         </p:txBody>
       </p:sp>
@@ -4561,24 +4174,24 @@
         </p:nvSpPr>
         <p:spPr>
           <a:xfrm>
-            <a:off x="6094476" y="3017520"/>
-            <a:ext cx="2384298" cy="411480"/>
-          </a:xfrm>
-          <a:prstGeom prst="rect">
-            <a:avLst/>
-          </a:prstGeom>
-          <a:noFill/>
-          <a:ln/>
-        </p:spPr>
-        <p:txBody>
-          <a:bodyPr wrap="square" lIns="0" tIns="0" rIns="0" bIns="0" rtlCol="0" anchor="ctr"/>
-          <a:lstStyle/>
-          <a:p>
-            <a:pPr indent="0" marL="0">
-              <a:buNone/>
-            </a:pPr>
-            <a:r>
-              <a:rPr lang="en-US" sz="1700" b="1" dirty="0">
+            <a:off x="1691640" y="4809744"/>
+            <a:ext cx="9418320" cy="411480"/>
+          </a:xfrm>
+          <a:prstGeom prst="rect">
+            <a:avLst/>
+          </a:prstGeom>
+          <a:noFill/>
+          <a:ln/>
+        </p:spPr>
+        <p:txBody>
+          <a:bodyPr wrap="square" lIns="0" tIns="0" rIns="0" bIns="0" rtlCol="0" anchor="ctr"/>
+          <a:lstStyle/>
+          <a:p>
+            <a:pPr indent="0" marL="0">
+              <a:buNone/>
+            </a:pPr>
+            <a:r>
+              <a:rPr lang="en-US" sz="1550" b="1" dirty="0">
                 <a:solidFill>
                   <a:srgbClr val="1C2530"/>
                 </a:solidFill>
@@ -4586,9 +4199,9 @@
                 <a:ea typeface="Calibri" pitchFamily="34" charset="-122"/>
                 <a:cs typeface="Calibri" pitchFamily="34" charset="-120"/>
               </a:rPr>
-              <a:t>Forecast</a:t>
-            </a:r>
-            <a:endParaRPr lang="en-US" sz="1700" dirty="0"/>
+              <a:t>Our response</a:t>
+            </a:r>
+            <a:endParaRPr lang="en-US" sz="1550" dirty="0"/>
           </a:p>
         </p:txBody>
       </p:sp>
@@ -4600,8 +4213,8 @@
         </p:nvSpPr>
         <p:spPr>
           <a:xfrm>
-            <a:off x="6094476" y="3474720"/>
-            <a:ext cx="2384298" cy="1463040"/>
+            <a:off x="1691640" y="5248656"/>
+            <a:ext cx="9418320" cy="685800"/>
           </a:xfrm>
           <a:prstGeom prst="rect">
             <a:avLst/>
@@ -4628,168 +4241,9 @@
                 <a:ea typeface="Calibri" pitchFamily="34" charset="-122"/>
                 <a:cs typeface="Calibri" pitchFamily="34" charset="-120"/>
               </a:rPr>
-              <a:t>FY2025 by product and month, with a measured confidence range</a:t>
+              <a:t>back-testing on withheld years, honest comparison against simple baselines, and ranges instead of single numbers — full evidence at the semi-final</a:t>
             </a:r>
             <a:endParaRPr lang="en-US" sz="1200" dirty="0"/>
-          </a:p>
-        </p:txBody>
-      </p:sp>
-      <p:sp>
-        <p:nvSpPr>
-          <p:cNvPr id="13" name="Text 11"/>
-          <p:cNvSpPr/>
-          <p:nvPr/>
-        </p:nvSpPr>
-        <p:spPr>
-          <a:xfrm>
-            <a:off x="8798814" y="2286000"/>
-            <a:ext cx="2384298" cy="685800"/>
-          </a:xfrm>
-          <a:prstGeom prst="rect">
-            <a:avLst/>
-          </a:prstGeom>
-          <a:noFill/>
-          <a:ln/>
-        </p:spPr>
-        <p:txBody>
-          <a:bodyPr wrap="square" lIns="0" tIns="0" rIns="0" bIns="0" rtlCol="0" anchor="ctr"/>
-          <a:lstStyle/>
-          <a:p>
-            <a:pPr indent="0" marL="0">
-              <a:buNone/>
-            </a:pPr>
-            <a:r>
-              <a:rPr lang="en-US" sz="3000" i="1" dirty="0">
-                <a:solidFill>
-                  <a:srgbClr val="C8102E"/>
-                </a:solidFill>
-                <a:latin typeface="Cambria" pitchFamily="34" charset="0"/>
-                <a:ea typeface="Cambria" pitchFamily="34" charset="-122"/>
-                <a:cs typeface="Cambria" pitchFamily="34" charset="-120"/>
-              </a:rPr>
-              <a:t>04</a:t>
-            </a:r>
-            <a:endParaRPr lang="en-US" sz="3000" dirty="0"/>
-          </a:p>
-        </p:txBody>
-      </p:sp>
-      <p:sp>
-        <p:nvSpPr>
-          <p:cNvPr id="14" name="Text 12"/>
-          <p:cNvSpPr/>
-          <p:nvPr/>
-        </p:nvSpPr>
-        <p:spPr>
-          <a:xfrm>
-            <a:off x="8798814" y="3017520"/>
-            <a:ext cx="2384298" cy="411480"/>
-          </a:xfrm>
-          <a:prstGeom prst="rect">
-            <a:avLst/>
-          </a:prstGeom>
-          <a:noFill/>
-          <a:ln/>
-        </p:spPr>
-        <p:txBody>
-          <a:bodyPr wrap="square" lIns="0" tIns="0" rIns="0" bIns="0" rtlCol="0" anchor="ctr"/>
-          <a:lstStyle/>
-          <a:p>
-            <a:pPr indent="0" marL="0">
-              <a:buNone/>
-            </a:pPr>
-            <a:r>
-              <a:rPr lang="en-US" sz="1700" b="1" dirty="0">
-                <a:solidFill>
-                  <a:srgbClr val="1C2530"/>
-                </a:solidFill>
-                <a:latin typeface="Calibri" pitchFamily="34" charset="0"/>
-                <a:ea typeface="Calibri" pitchFamily="34" charset="-122"/>
-                <a:cs typeface="Calibri" pitchFamily="34" charset="-120"/>
-              </a:rPr>
-              <a:t>Decide</a:t>
-            </a:r>
-            <a:endParaRPr lang="en-US" sz="1700" dirty="0"/>
-          </a:p>
-        </p:txBody>
-      </p:sp>
-      <p:sp>
-        <p:nvSpPr>
-          <p:cNvPr id="15" name="Text 13"/>
-          <p:cNvSpPr/>
-          <p:nvPr/>
-        </p:nvSpPr>
-        <p:spPr>
-          <a:xfrm>
-            <a:off x="8798814" y="3474720"/>
-            <a:ext cx="2384298" cy="1463040"/>
-          </a:xfrm>
-          <a:prstGeom prst="rect">
-            <a:avLst/>
-          </a:prstGeom>
-          <a:noFill/>
-          <a:ln/>
-        </p:spPr>
-        <p:txBody>
-          <a:bodyPr wrap="square" lIns="0" tIns="0" rIns="0" bIns="0" rtlCol="0" anchor="ctr"/>
-          <a:lstStyle/>
-          <a:p>
-            <a:pPr indent="0" marL="0">
-              <a:lnSpc>
-                <a:spcPct val="115000"/>
-              </a:lnSpc>
-              <a:buNone/>
-            </a:pPr>
-            <a:r>
-              <a:rPr lang="en-US" sz="1200" dirty="0">
-                <a:solidFill>
-                  <a:srgbClr val="6B7280"/>
-                </a:solidFill>
-                <a:latin typeface="Calibri" pitchFamily="34" charset="0"/>
-                <a:ea typeface="Calibri" pitchFamily="34" charset="-122"/>
-                <a:cs typeface="Calibri" pitchFamily="34" charset="-120"/>
-              </a:rPr>
-              <a:t>A dashboard for non-analysts; new data re-runs everything in two minutes</a:t>
-            </a:r>
-            <a:endParaRPr lang="en-US" sz="1200" dirty="0"/>
-          </a:p>
-        </p:txBody>
-      </p:sp>
-      <p:sp>
-        <p:nvSpPr>
-          <p:cNvPr id="16" name="Text 14"/>
-          <p:cNvSpPr/>
-          <p:nvPr/>
-        </p:nvSpPr>
-        <p:spPr>
-          <a:xfrm>
-            <a:off x="685800" y="5623560"/>
-            <a:ext cx="10817352" cy="548640"/>
-          </a:xfrm>
-          <a:prstGeom prst="rect">
-            <a:avLst/>
-          </a:prstGeom>
-          <a:noFill/>
-          <a:ln/>
-        </p:spPr>
-        <p:txBody>
-          <a:bodyPr wrap="square" lIns="0" tIns="0" rIns="0" bIns="0" rtlCol="0" anchor="ctr"/>
-          <a:lstStyle/>
-          <a:p>
-            <a:pPr indent="0" marL="0">
-              <a:buNone/>
-            </a:pPr>
-            <a:r>
-              <a:rPr lang="en-US" sz="1250" i="1" dirty="0">
-                <a:solidFill>
-                  <a:srgbClr val="6B7280"/>
-                </a:solidFill>
-                <a:latin typeface="Calibri" pitchFamily="34" charset="0"/>
-                <a:ea typeface="Calibri" pitchFamily="34" charset="-122"/>
-                <a:cs typeface="Calibri" pitchFamily="34" charset="-120"/>
-              </a:rPr>
-              <a:t>No model was assumed. Each product’s method must win a back-test against every alternative its history can support.</a:t>
-            </a:r>
-            <a:endParaRPr lang="en-US" sz="1250" dirty="0"/>
           </a:p>
         </p:txBody>
       </p:sp>
@@ -4846,7 +4300,7 @@
           <a:bodyPr wrap="square" lIns="0" tIns="0" rIns="0" bIns="0" rtlCol="0" anchor="ctr"/>
           <a:lstStyle/>
           <a:p>
-            <a:pPr algn="l" indent="0" marL="0">
+            <a:pPr indent="0" marL="0">
               <a:buNone/>
             </a:pPr>
             <a:r>
@@ -4858,7 +4312,7 @@
                 <a:ea typeface="Calibri" pitchFamily="34" charset="-122"/>
                 <a:cs typeface="Calibri" pitchFamily="34" charset="-120"/>
               </a:rPr>
-              <a:t>06 — WORK DONE: THE DASHBOARD</a:t>
+              <a:t>WHAT WE WILL DO NEXT</a:t>
             </a:r>
             <a:endParaRPr lang="en-US" sz="1050" dirty="0"/>
           </a:p>
@@ -4885,7 +4339,7 @@
           <a:bodyPr wrap="square" lIns="0" tIns="0" rIns="0" bIns="0" rtlCol="0" anchor="ctr"/>
           <a:lstStyle/>
           <a:p>
-            <a:pPr algn="l" indent="0" marL="0">
+            <a:pPr indent="0" marL="0">
               <a:buNone/>
             </a:pPr>
             <a:r>
@@ -4897,7 +4351,7 @@
                 <a:ea typeface="Cambria" pitchFamily="34" charset="-122"/>
                 <a:cs typeface="Cambria" pitchFamily="34" charset="-120"/>
               </a:rPr>
-              <a:t>Built for the whole team, not analysts.</a:t>
+              <a:t>Two milestones to the final forecast.</a:t>
             </a:r>
             <a:endParaRPr lang="en-US" sz="3800" dirty="0"/>
           </a:p>
@@ -4911,12 +4365,159 @@
         </p:nvSpPr>
         <p:spPr>
           <a:xfrm>
-            <a:off x="685800" y="2377440"/>
-            <a:ext cx="3429000" cy="2651760"/>
+            <a:off x="685800" y="2331720"/>
+            <a:ext cx="3429000" cy="2926080"/>
           </a:xfrm>
           <a:prstGeom prst="roundRect">
             <a:avLst>
-              <a:gd name="adj" fmla="val 2759"/>
+              <a:gd name="adj" fmla="val 2500"/>
+            </a:avLst>
+          </a:prstGeom>
+          <a:solidFill>
+            <a:srgbClr val="C8102E"/>
+          </a:solidFill>
+          <a:ln w="12700">
+            <a:solidFill>
+              <a:srgbClr val="C8102E"/>
+            </a:solidFill>
+            <a:prstDash val="solid"/>
+          </a:ln>
+        </p:spPr>
+      </p:sp>
+      <p:sp>
+        <p:nvSpPr>
+          <p:cNvPr id="5" name="Text 3"/>
+          <p:cNvSpPr/>
+          <p:nvPr/>
+        </p:nvSpPr>
+        <p:spPr>
+          <a:xfrm>
+            <a:off x="1005840" y="2697480"/>
+            <a:ext cx="2788920" cy="320040"/>
+          </a:xfrm>
+          <a:prstGeom prst="rect">
+            <a:avLst/>
+          </a:prstGeom>
+          <a:noFill/>
+          <a:ln/>
+        </p:spPr>
+        <p:txBody>
+          <a:bodyPr wrap="square" lIns="0" tIns="0" rIns="0" bIns="0" rtlCol="0" anchor="ctr"/>
+          <a:lstStyle/>
+          <a:p>
+            <a:pPr indent="0" marL="0">
+              <a:buNone/>
+            </a:pPr>
+            <a:r>
+              <a:rPr lang="en-US" sz="1050" b="1" spc="200" kern="0" dirty="0">
+                <a:solidFill>
+                  <a:srgbClr val="F3C2CB"/>
+                </a:solidFill>
+                <a:latin typeface="Calibri" pitchFamily="34" charset="0"/>
+                <a:ea typeface="Calibri" pitchFamily="34" charset="-122"/>
+                <a:cs typeface="Calibri" pitchFamily="34" charset="-120"/>
+              </a:rPr>
+              <a:t>SEMI-FINAL — 7 SEP</a:t>
+            </a:r>
+            <a:endParaRPr lang="en-US" sz="1050" dirty="0"/>
+          </a:p>
+        </p:txBody>
+      </p:sp>
+      <p:sp>
+        <p:nvSpPr>
+          <p:cNvPr id="6" name="Text 4"/>
+          <p:cNvSpPr/>
+          <p:nvPr/>
+        </p:nvSpPr>
+        <p:spPr>
+          <a:xfrm>
+            <a:off x="1005840" y="3063240"/>
+            <a:ext cx="2788920" cy="777240"/>
+          </a:xfrm>
+          <a:prstGeom prst="rect">
+            <a:avLst/>
+          </a:prstGeom>
+          <a:noFill/>
+          <a:ln/>
+        </p:spPr>
+        <p:txBody>
+          <a:bodyPr wrap="square" lIns="0" tIns="0" rIns="0" bIns="0" rtlCol="0" anchor="ctr"/>
+          <a:lstStyle/>
+          <a:p>
+            <a:pPr indent="0" marL="0">
+              <a:buNone/>
+            </a:pPr>
+            <a:r>
+              <a:rPr lang="en-US" sz="1900" b="1" dirty="0">
+                <a:solidFill>
+                  <a:srgbClr val="F5F7FA"/>
+                </a:solidFill>
+                <a:latin typeface="Cambria" pitchFamily="34" charset="0"/>
+                <a:ea typeface="Cambria" pitchFamily="34" charset="-122"/>
+                <a:cs typeface="Cambria" pitchFamily="34" charset="-120"/>
+              </a:rPr>
+              <a:t>Results &amp; evidence</a:t>
+            </a:r>
+            <a:endParaRPr lang="en-US" sz="1900" dirty="0"/>
+          </a:p>
+        </p:txBody>
+      </p:sp>
+      <p:sp>
+        <p:nvSpPr>
+          <p:cNvPr id="7" name="Text 5"/>
+          <p:cNvSpPr/>
+          <p:nvPr/>
+        </p:nvSpPr>
+        <p:spPr>
+          <a:xfrm>
+            <a:off x="1005840" y="3886200"/>
+            <a:ext cx="2788920" cy="1280160"/>
+          </a:xfrm>
+          <a:prstGeom prst="rect">
+            <a:avLst/>
+          </a:prstGeom>
+          <a:noFill/>
+          <a:ln/>
+        </p:spPr>
+        <p:txBody>
+          <a:bodyPr wrap="square" lIns="0" tIns="0" rIns="0" bIns="0" rtlCol="0" anchor="ctr"/>
+          <a:lstStyle/>
+          <a:p>
+            <a:pPr indent="0" marL="0">
+              <a:lnSpc>
+                <a:spcPct val="120000"/>
+              </a:lnSpc>
+              <a:buNone/>
+            </a:pPr>
+            <a:r>
+              <a:rPr lang="en-US" sz="1150" dirty="0">
+                <a:solidFill>
+                  <a:srgbClr val="F3D9DD"/>
+                </a:solidFill>
+                <a:latin typeface="Calibri" pitchFamily="34" charset="0"/>
+                <a:ea typeface="Calibri" pitchFamily="34" charset="-122"/>
+                <a:cs typeface="Calibri" pitchFamily="34" charset="-120"/>
+              </a:rPr>
+              <a:t>the FY2025 numbers with accuracy evidence, the inventory trade-off, and refinements from today’s feedback</a:t>
+            </a:r>
+            <a:endParaRPr lang="en-US" sz="1150" dirty="0"/>
+          </a:p>
+        </p:txBody>
+      </p:sp>
+      <p:sp>
+        <p:nvSpPr>
+          <p:cNvPr id="8" name="Shape 6"/>
+          <p:cNvSpPr/>
+          <p:nvPr/>
+        </p:nvSpPr>
+        <p:spPr>
+          <a:xfrm>
+            <a:off x="4398264" y="2331720"/>
+            <a:ext cx="3429000" cy="2926080"/>
+          </a:xfrm>
+          <a:prstGeom prst="roundRect">
+            <a:avLst>
+              <a:gd name="adj" fmla="val 2500"/>
             </a:avLst>
           </a:prstGeom>
           <a:solidFill>
@@ -4932,13 +4533,52 @@
       </p:sp>
       <p:sp>
         <p:nvSpPr>
-          <p:cNvPr id="5" name="Text 3"/>
-          <p:cNvSpPr/>
-          <p:nvPr/>
-        </p:nvSpPr>
-        <p:spPr>
-          <a:xfrm>
-            <a:off x="1005840" y="2788920"/>
+          <p:cNvPr id="9" name="Text 7"/>
+          <p:cNvSpPr/>
+          <p:nvPr/>
+        </p:nvSpPr>
+        <p:spPr>
+          <a:xfrm>
+            <a:off x="4718304" y="2697480"/>
+            <a:ext cx="2788920" cy="320040"/>
+          </a:xfrm>
+          <a:prstGeom prst="rect">
+            <a:avLst/>
+          </a:prstGeom>
+          <a:noFill/>
+          <a:ln/>
+        </p:spPr>
+        <p:txBody>
+          <a:bodyPr wrap="square" lIns="0" tIns="0" rIns="0" bIns="0" rtlCol="0" anchor="ctr"/>
+          <a:lstStyle/>
+          <a:p>
+            <a:pPr indent="0" marL="0">
+              <a:buNone/>
+            </a:pPr>
+            <a:r>
+              <a:rPr lang="en-US" sz="1050" b="1" spc="200" kern="0" dirty="0">
+                <a:solidFill>
+                  <a:srgbClr val="9AA4B0"/>
+                </a:solidFill>
+                <a:latin typeface="Calibri" pitchFamily="34" charset="0"/>
+                <a:ea typeface="Calibri" pitchFamily="34" charset="-122"/>
+                <a:cs typeface="Calibri" pitchFamily="34" charset="-120"/>
+              </a:rPr>
+              <a:t>FINAL — 28 SEP</a:t>
+            </a:r>
+            <a:endParaRPr lang="en-US" sz="1050" dirty="0"/>
+          </a:p>
+        </p:txBody>
+      </p:sp>
+      <p:sp>
+        <p:nvSpPr>
+          <p:cNvPr id="10" name="Text 8"/>
+          <p:cNvSpPr/>
+          <p:nvPr/>
+        </p:nvSpPr>
+        <p:spPr>
+          <a:xfrm>
+            <a:off x="4718304" y="3063240"/>
             <a:ext cx="2788920" cy="777240"/>
           </a:xfrm>
           <a:prstGeom prst="rect">
@@ -4963,7 +4603,7 @@
                 <a:ea typeface="Cambria" pitchFamily="34" charset="-122"/>
                 <a:cs typeface="Cambria" pitchFamily="34" charset="-120"/>
               </a:rPr>
-              <a:t>Forecast views</a:t>
+              <a:t>Final forecast &amp; handover</a:t>
             </a:r>
             <a:endParaRPr lang="en-US" sz="1900" dirty="0"/>
           </a:p>
@@ -4971,14 +4611,14 @@
       </p:sp>
       <p:sp>
         <p:nvSpPr>
-          <p:cNvPr id="6" name="Text 4"/>
-          <p:cNvSpPr/>
-          <p:nvPr/>
-        </p:nvSpPr>
-        <p:spPr>
-          <a:xfrm>
-            <a:off x="1005840" y="3611880"/>
-            <a:ext cx="2788920" cy="1188720"/>
+          <p:cNvPr id="11" name="Text 9"/>
+          <p:cNvSpPr/>
+          <p:nvPr/>
+        </p:nvSpPr>
+        <p:spPr>
+          <a:xfrm>
+            <a:off x="4718304" y="3886200"/>
+            <a:ext cx="2788920" cy="1280160"/>
           </a:xfrm>
           <a:prstGeom prst="rect">
             <a:avLst/>
@@ -4997,7 +4637,7 @@
               <a:buNone/>
             </a:pPr>
             <a:r>
-              <a:rPr lang="en-US" sz="1200" dirty="0">
+              <a:rPr lang="en-US" sz="1150" dirty="0">
                 <a:solidFill>
                   <a:srgbClr val="C9D2DB"/>
                 </a:solidFill>
@@ -5005,26 +4645,26 @@
                 <a:ea typeface="Calibri" pitchFamily="34" charset="-122"/>
                 <a:cs typeface="Calibri" pitchFamily="34" charset="-120"/>
               </a:rPr>
-              <a:t>company, category, product and customer — history and forecast on one chart</a:t>
-            </a:r>
-            <a:endParaRPr lang="en-US" sz="1200" dirty="0"/>
-          </a:p>
-        </p:txBody>
-      </p:sp>
-      <p:sp>
-        <p:nvSpPr>
-          <p:cNvPr id="7" name="Shape 5"/>
-          <p:cNvSpPr/>
-          <p:nvPr/>
-        </p:nvSpPr>
-        <p:spPr>
-          <a:xfrm>
-            <a:off x="4398264" y="2377440"/>
-            <a:ext cx="3429000" cy="2651760"/>
+              <a:t>final forecast, full written report, documented assumptions, dashboard handed over</a:t>
+            </a:r>
+            <a:endParaRPr lang="en-US" sz="1150" dirty="0"/>
+          </a:p>
+        </p:txBody>
+      </p:sp>
+      <p:sp>
+        <p:nvSpPr>
+          <p:cNvPr id="12" name="Shape 10"/>
+          <p:cNvSpPr/>
+          <p:nvPr/>
+        </p:nvSpPr>
+        <p:spPr>
+          <a:xfrm>
+            <a:off x="8110728" y="2331720"/>
+            <a:ext cx="3429000" cy="2926080"/>
           </a:xfrm>
           <a:prstGeom prst="roundRect">
             <a:avLst>
-              <a:gd name="adj" fmla="val 2759"/>
+              <a:gd name="adj" fmla="val 2500"/>
             </a:avLst>
           </a:prstGeom>
           <a:solidFill>
@@ -5040,13 +4680,52 @@
       </p:sp>
       <p:sp>
         <p:nvSpPr>
-          <p:cNvPr id="8" name="Text 6"/>
-          <p:cNvSpPr/>
-          <p:nvPr/>
-        </p:nvSpPr>
-        <p:spPr>
-          <a:xfrm>
-            <a:off x="4718304" y="2788920"/>
+          <p:cNvPr id="13" name="Text 11"/>
+          <p:cNvSpPr/>
+          <p:nvPr/>
+        </p:nvSpPr>
+        <p:spPr>
+          <a:xfrm>
+            <a:off x="8430768" y="2697480"/>
+            <a:ext cx="2788920" cy="320040"/>
+          </a:xfrm>
+          <a:prstGeom prst="rect">
+            <a:avLst/>
+          </a:prstGeom>
+          <a:noFill/>
+          <a:ln/>
+        </p:spPr>
+        <p:txBody>
+          <a:bodyPr wrap="square" lIns="0" tIns="0" rIns="0" bIns="0" rtlCol="0" anchor="ctr"/>
+          <a:lstStyle/>
+          <a:p>
+            <a:pPr indent="0" marL="0">
+              <a:buNone/>
+            </a:pPr>
+            <a:r>
+              <a:rPr lang="en-US" sz="1050" b="1" spc="200" kern="0" dirty="0">
+                <a:solidFill>
+                  <a:srgbClr val="9AA4B0"/>
+                </a:solidFill>
+                <a:latin typeface="Calibri" pitchFamily="34" charset="0"/>
+                <a:ea typeface="Calibri" pitchFamily="34" charset="-122"/>
+                <a:cs typeface="Calibri" pitchFamily="34" charset="-120"/>
+              </a:rPr>
+              <a:t>IN BETWEEN</a:t>
+            </a:r>
+            <a:endParaRPr lang="en-US" sz="1050" dirty="0"/>
+          </a:p>
+        </p:txBody>
+      </p:sp>
+      <p:sp>
+        <p:nvSpPr>
+          <p:cNvPr id="14" name="Text 12"/>
+          <p:cNvSpPr/>
+          <p:nvPr/>
+        </p:nvSpPr>
+        <p:spPr>
+          <a:xfrm>
+            <a:off x="8430768" y="3063240"/>
             <a:ext cx="2788920" cy="777240"/>
           </a:xfrm>
           <a:prstGeom prst="rect">
@@ -5071,7 +4750,7 @@
                 <a:ea typeface="Cambria" pitchFamily="34" charset="-122"/>
                 <a:cs typeface="Cambria" pitchFamily="34" charset="-120"/>
               </a:rPr>
-              <a:t>Inventory planning</a:t>
+              <a:t>Continuous improvement</a:t>
             </a:r>
             <a:endParaRPr lang="en-US" sz="1900" dirty="0"/>
           </a:p>
@@ -5079,14 +4758,14 @@
       </p:sp>
       <p:sp>
         <p:nvSpPr>
-          <p:cNvPr id="9" name="Text 7"/>
-          <p:cNvSpPr/>
-          <p:nvPr/>
-        </p:nvSpPr>
-        <p:spPr>
-          <a:xfrm>
-            <a:off x="4718304" y="3611880"/>
-            <a:ext cx="2788920" cy="1188720"/>
+          <p:cNvPr id="15" name="Text 13"/>
+          <p:cNvSpPr/>
+          <p:nvPr/>
+        </p:nvSpPr>
+        <p:spPr>
+          <a:xfrm>
+            <a:off x="8430768" y="3886200"/>
+            <a:ext cx="2788920" cy="1280160"/>
           </a:xfrm>
           <a:prstGeom prst="rect">
             <a:avLst/>
@@ -5105,7 +4784,7 @@
               <a:buNone/>
             </a:pPr>
             <a:r>
-              <a:rPr lang="en-US" sz="1200" dirty="0">
+              <a:rPr lang="en-US" sz="1150" dirty="0">
                 <a:solidFill>
                   <a:srgbClr val="C9D2DB"/>
                 </a:solidFill>
@@ -5113,156 +4792,9 @@
                 <a:ea typeface="Calibri" pitchFamily="34" charset="-122"/>
                 <a:cs typeface="Calibri" pitchFamily="34" charset="-120"/>
               </a:rPr>
-              <a:t>service level against stock held, simulated on a withheld year</a:t>
-            </a:r>
-            <a:endParaRPr lang="en-US" sz="1200" dirty="0"/>
-          </a:p>
-        </p:txBody>
-      </p:sp>
-      <p:sp>
-        <p:nvSpPr>
-          <p:cNvPr id="10" name="Shape 8"/>
-          <p:cNvSpPr/>
-          <p:nvPr/>
-        </p:nvSpPr>
-        <p:spPr>
-          <a:xfrm>
-            <a:off x="8110728" y="2377440"/>
-            <a:ext cx="3429000" cy="2651760"/>
-          </a:xfrm>
-          <a:prstGeom prst="roundRect">
-            <a:avLst>
-              <a:gd name="adj" fmla="val 2759"/>
-            </a:avLst>
-          </a:prstGeom>
-          <a:solidFill>
-            <a:srgbClr val="1C2530"/>
-          </a:solidFill>
-          <a:ln w="12700">
-            <a:solidFill>
-              <a:srgbClr val="1C2530"/>
-            </a:solidFill>
-            <a:prstDash val="solid"/>
-          </a:ln>
-        </p:spPr>
-      </p:sp>
-      <p:sp>
-        <p:nvSpPr>
-          <p:cNvPr id="11" name="Text 9"/>
-          <p:cNvSpPr/>
-          <p:nvPr/>
-        </p:nvSpPr>
-        <p:spPr>
-          <a:xfrm>
-            <a:off x="8430768" y="2788920"/>
-            <a:ext cx="2788920" cy="777240"/>
-          </a:xfrm>
-          <a:prstGeom prst="rect">
-            <a:avLst/>
-          </a:prstGeom>
-          <a:noFill/>
-          <a:ln/>
-        </p:spPr>
-        <p:txBody>
-          <a:bodyPr wrap="square" lIns="0" tIns="0" rIns="0" bIns="0" rtlCol="0" anchor="ctr"/>
-          <a:lstStyle/>
-          <a:p>
-            <a:pPr indent="0" marL="0">
-              <a:buNone/>
-            </a:pPr>
-            <a:r>
-              <a:rPr lang="en-US" sz="1900" b="1" dirty="0">
-                <a:solidFill>
-                  <a:srgbClr val="F5F7FA"/>
-                </a:solidFill>
-                <a:latin typeface="Cambria" pitchFamily="34" charset="0"/>
-                <a:ea typeface="Cambria" pitchFamily="34" charset="-122"/>
-                <a:cs typeface="Cambria" pitchFamily="34" charset="-120"/>
-              </a:rPr>
-              <a:t>Evidence &amp; refresh</a:t>
-            </a:r>
-            <a:endParaRPr lang="en-US" sz="1900" dirty="0"/>
-          </a:p>
-        </p:txBody>
-      </p:sp>
-      <p:sp>
-        <p:nvSpPr>
-          <p:cNvPr id="12" name="Text 10"/>
-          <p:cNvSpPr/>
-          <p:nvPr/>
-        </p:nvSpPr>
-        <p:spPr>
-          <a:xfrm>
-            <a:off x="8430768" y="3611880"/>
-            <a:ext cx="2788920" cy="1188720"/>
-          </a:xfrm>
-          <a:prstGeom prst="rect">
-            <a:avLst/>
-          </a:prstGeom>
-          <a:noFill/>
-          <a:ln/>
-        </p:spPr>
-        <p:txBody>
-          <a:bodyPr wrap="square" lIns="0" tIns="0" rIns="0" bIns="0" rtlCol="0" anchor="ctr"/>
-          <a:lstStyle/>
-          <a:p>
-            <a:pPr indent="0" marL="0">
-              <a:lnSpc>
-                <a:spcPct val="120000"/>
-              </a:lnSpc>
-              <a:buNone/>
-            </a:pPr>
-            <a:r>
-              <a:rPr lang="en-US" sz="1200" dirty="0">
-                <a:solidFill>
-                  <a:srgbClr val="C9D2DB"/>
-                </a:solidFill>
-                <a:latin typeface="Calibri" pitchFamily="34" charset="0"/>
-                <a:ea typeface="Calibri" pitchFamily="34" charset="-122"/>
-                <a:cs typeface="Calibri" pitchFamily="34" charset="-120"/>
-              </a:rPr>
-              <a:t>accuracy pages in plain language; upload new data and re-run in two minutes</a:t>
-            </a:r>
-            <a:endParaRPr lang="en-US" sz="1200" dirty="0"/>
-          </a:p>
-        </p:txBody>
-      </p:sp>
-      <p:sp>
-        <p:nvSpPr>
-          <p:cNvPr id="13" name="Text 11"/>
-          <p:cNvSpPr/>
-          <p:nvPr/>
-        </p:nvSpPr>
-        <p:spPr>
-          <a:xfrm>
-            <a:off x="685800" y="5623560"/>
-            <a:ext cx="10817352" cy="457200"/>
-          </a:xfrm>
-          <a:prstGeom prst="rect">
-            <a:avLst/>
-          </a:prstGeom>
-          <a:noFill/>
-          <a:ln/>
-        </p:spPr>
-        <p:txBody>
-          <a:bodyPr wrap="square" lIns="0" tIns="0" rIns="0" bIns="0" rtlCol="0" anchor="ctr"/>
-          <a:lstStyle/>
-          <a:p>
-            <a:pPr indent="0" marL="0">
-              <a:buNone/>
-            </a:pPr>
-            <a:r>
-              <a:rPr lang="en-US" sz="1250" i="1" dirty="0">
-                <a:solidFill>
-                  <a:srgbClr val="6B7280"/>
-                </a:solidFill>
-                <a:latin typeface="Calibri" pitchFamily="34" charset="0"/>
-                <a:ea typeface="Calibri" pitchFamily="34" charset="-122"/>
-                <a:cs typeface="Calibri" pitchFamily="34" charset="-120"/>
-              </a:rPr>
-              <a:t>Demonstrated live in a moment — on the real data.</a:t>
-            </a:r>
-            <a:endParaRPr lang="en-US" sz="1250" dirty="0"/>
+              <a:t>monthly re-forecasts, a sales-input channel for event-driven products, refinements as new information arrives</a:t>
+            </a:r>
+            <a:endParaRPr lang="en-US" sz="1150" dirty="0"/>
           </a:p>
         </p:txBody>
       </p:sp>
@@ -5280,7 +4812,7 @@
     <p:bg>
       <p:bgPr>
         <a:solidFill>
-          <a:srgbClr val="FFFFFF"/>
+          <a:srgbClr val="1C2530"/>
         </a:solidFill>
       </p:bgPr>
     </p:bg>
@@ -5300,710 +4832,22 @@
       </p:grpSpPr>
       <p:sp>
         <p:nvSpPr>
-          <p:cNvPr id="2" name="Text 0"/>
-          <p:cNvSpPr/>
-          <p:nvPr/>
-        </p:nvSpPr>
-        <p:spPr>
-          <a:xfrm>
-            <a:off x="685800" y="566928"/>
-            <a:ext cx="10817352" cy="274320"/>
-          </a:xfrm>
-          <a:prstGeom prst="rect">
-            <a:avLst/>
-          </a:prstGeom>
-          <a:noFill/>
-          <a:ln/>
-        </p:spPr>
-        <p:txBody>
-          <a:bodyPr wrap="square" lIns="0" tIns="0" rIns="0" bIns="0" rtlCol="0" anchor="ctr"/>
-          <a:lstStyle/>
-          <a:p>
-            <a:pPr algn="l" indent="0" marL="0">
-              <a:buNone/>
-            </a:pPr>
-            <a:r>
-              <a:rPr lang="en-US" sz="1050" b="1" spc="300" kern="0" dirty="0">
-                <a:solidFill>
-                  <a:srgbClr val="6B7280"/>
-                </a:solidFill>
-                <a:latin typeface="Calibri" pitchFamily="34" charset="0"/>
-                <a:ea typeface="Calibri" pitchFamily="34" charset="-122"/>
-                <a:cs typeface="Calibri" pitchFamily="34" charset="-120"/>
-              </a:rPr>
-              <a:t>07 — HOW WE WORK</a:t>
-            </a:r>
-            <a:endParaRPr lang="en-US" sz="1050" dirty="0"/>
-          </a:p>
-        </p:txBody>
-      </p:sp>
-      <p:sp>
-        <p:nvSpPr>
-          <p:cNvPr id="3" name="Text 1"/>
-          <p:cNvSpPr/>
-          <p:nvPr/>
-        </p:nvSpPr>
-        <p:spPr>
-          <a:xfrm>
-            <a:off x="685800" y="914400"/>
-            <a:ext cx="10817352" cy="1051560"/>
-          </a:xfrm>
-          <a:prstGeom prst="rect">
-            <a:avLst/>
-          </a:prstGeom>
-          <a:noFill/>
-          <a:ln/>
-        </p:spPr>
-        <p:txBody>
-          <a:bodyPr wrap="square" lIns="0" tIns="0" rIns="0" bIns="0" rtlCol="0" anchor="ctr"/>
-          <a:lstStyle/>
-          <a:p>
-            <a:pPr algn="l" indent="0" marL="0">
-              <a:buNone/>
-            </a:pPr>
-            <a:r>
-              <a:rPr lang="en-US" sz="3800" b="1" dirty="0">
-                <a:solidFill>
-                  <a:srgbClr val="1C2530"/>
-                </a:solidFill>
-                <a:latin typeface="Cambria" pitchFamily="34" charset="0"/>
-                <a:ea typeface="Cambria" pitchFamily="34" charset="-122"/>
-                <a:cs typeface="Cambria" pitchFamily="34" charset="-120"/>
-              </a:rPr>
-              <a:t>Nothing is adopted on plausibility.</a:t>
-            </a:r>
-            <a:endParaRPr lang="en-US" sz="3800" dirty="0"/>
-          </a:p>
-        </p:txBody>
-      </p:sp>
-      <p:sp>
-        <p:nvSpPr>
-          <p:cNvPr id="4" name="Text 2"/>
-          <p:cNvSpPr/>
-          <p:nvPr/>
-        </p:nvSpPr>
-        <p:spPr>
-          <a:xfrm>
-            <a:off x="685800" y="2286000"/>
-            <a:ext cx="777240" cy="640080"/>
-          </a:xfrm>
-          <a:prstGeom prst="rect">
-            <a:avLst/>
-          </a:prstGeom>
-          <a:noFill/>
-          <a:ln/>
-        </p:spPr>
-        <p:txBody>
-          <a:bodyPr wrap="square" lIns="0" tIns="0" rIns="0" bIns="0" rtlCol="0" anchor="ctr"/>
-          <a:lstStyle/>
-          <a:p>
-            <a:pPr indent="0" marL="0">
-              <a:buNone/>
-            </a:pPr>
-            <a:r>
-              <a:rPr lang="en-US" sz="2400" i="1" dirty="0">
-                <a:solidFill>
-                  <a:srgbClr val="C8102E"/>
-                </a:solidFill>
-                <a:latin typeface="Cambria" pitchFamily="34" charset="0"/>
-                <a:ea typeface="Cambria" pitchFamily="34" charset="-122"/>
-                <a:cs typeface="Cambria" pitchFamily="34" charset="-120"/>
-              </a:rPr>
-              <a:t>01</a:t>
-            </a:r>
-            <a:endParaRPr lang="en-US" sz="2400" dirty="0"/>
-          </a:p>
-        </p:txBody>
-      </p:sp>
-      <p:sp>
-        <p:nvSpPr>
-          <p:cNvPr id="5" name="Text 3"/>
-          <p:cNvSpPr/>
-          <p:nvPr/>
-        </p:nvSpPr>
-        <p:spPr>
-          <a:xfrm>
-            <a:off x="1691640" y="2304288"/>
-            <a:ext cx="9418320" cy="411480"/>
-          </a:xfrm>
-          <a:prstGeom prst="rect">
-            <a:avLst/>
-          </a:prstGeom>
-          <a:noFill/>
-          <a:ln/>
-        </p:spPr>
-        <p:txBody>
-          <a:bodyPr wrap="square" lIns="0" tIns="0" rIns="0" bIns="0" rtlCol="0" anchor="ctr"/>
-          <a:lstStyle/>
-          <a:p>
-            <a:pPr indent="0" marL="0">
-              <a:buNone/>
-            </a:pPr>
-            <a:r>
-              <a:rPr lang="en-US" sz="1550" b="1" dirty="0">
-                <a:solidFill>
-                  <a:srgbClr val="1C2530"/>
-                </a:solidFill>
-                <a:latin typeface="Calibri" pitchFamily="34" charset="0"/>
-                <a:ea typeface="Calibri" pitchFamily="34" charset="-122"/>
-                <a:cs typeface="Calibri" pitchFamily="34" charset="-120"/>
-              </a:rPr>
-              <a:t>Every idea is tested on a withheld year</a:t>
-            </a:r>
-            <a:endParaRPr lang="en-US" sz="1550" dirty="0"/>
-          </a:p>
-        </p:txBody>
-      </p:sp>
-      <p:sp>
-        <p:nvSpPr>
-          <p:cNvPr id="6" name="Text 4"/>
-          <p:cNvSpPr/>
-          <p:nvPr/>
-        </p:nvSpPr>
-        <p:spPr>
-          <a:xfrm>
-            <a:off x="1691640" y="2743200"/>
-            <a:ext cx="9418320" cy="548640"/>
-          </a:xfrm>
-          <a:prstGeom prst="rect">
-            <a:avLst/>
-          </a:prstGeom>
-          <a:noFill/>
-          <a:ln/>
-        </p:spPr>
-        <p:txBody>
-          <a:bodyPr wrap="square" lIns="0" tIns="0" rIns="0" bIns="0" rtlCol="0" anchor="ctr"/>
-          <a:lstStyle/>
-          <a:p>
-            <a:pPr indent="0" marL="0">
-              <a:buNone/>
-            </a:pPr>
-            <a:r>
-              <a:rPr lang="en-US" sz="1200" dirty="0">
-                <a:solidFill>
-                  <a:srgbClr val="6B7280"/>
-                </a:solidFill>
-                <a:latin typeface="Calibri" pitchFamily="34" charset="0"/>
-                <a:ea typeface="Calibri" pitchFamily="34" charset="-122"/>
-                <a:cs typeface="Calibri" pitchFamily="34" charset="-120"/>
-              </a:rPr>
-              <a:t>twelve improvement ideas built and measured so far — three earned adoption</a:t>
-            </a:r>
-            <a:endParaRPr lang="en-US" sz="1200" dirty="0"/>
-          </a:p>
-        </p:txBody>
-      </p:sp>
-      <p:sp>
-        <p:nvSpPr>
-          <p:cNvPr id="7" name="Text 5"/>
-          <p:cNvSpPr/>
-          <p:nvPr/>
-        </p:nvSpPr>
-        <p:spPr>
-          <a:xfrm>
-            <a:off x="685800" y="3493008"/>
-            <a:ext cx="777240" cy="640080"/>
-          </a:xfrm>
-          <a:prstGeom prst="rect">
-            <a:avLst/>
-          </a:prstGeom>
-          <a:noFill/>
-          <a:ln/>
-        </p:spPr>
-        <p:txBody>
-          <a:bodyPr wrap="square" lIns="0" tIns="0" rIns="0" bIns="0" rtlCol="0" anchor="ctr"/>
-          <a:lstStyle/>
-          <a:p>
-            <a:pPr indent="0" marL="0">
-              <a:buNone/>
-            </a:pPr>
-            <a:r>
-              <a:rPr lang="en-US" sz="2400" i="1" dirty="0">
-                <a:solidFill>
-                  <a:srgbClr val="C8102E"/>
-                </a:solidFill>
-                <a:latin typeface="Cambria" pitchFamily="34" charset="0"/>
-                <a:ea typeface="Cambria" pitchFamily="34" charset="-122"/>
-                <a:cs typeface="Cambria" pitchFamily="34" charset="-120"/>
-              </a:rPr>
-              <a:t>02</a:t>
-            </a:r>
-            <a:endParaRPr lang="en-US" sz="2400" dirty="0"/>
-          </a:p>
-        </p:txBody>
-      </p:sp>
-      <p:sp>
-        <p:nvSpPr>
-          <p:cNvPr id="8" name="Text 6"/>
-          <p:cNvSpPr/>
-          <p:nvPr/>
-        </p:nvSpPr>
-        <p:spPr>
-          <a:xfrm>
-            <a:off x="1691640" y="3511296"/>
-            <a:ext cx="9418320" cy="411480"/>
-          </a:xfrm>
-          <a:prstGeom prst="rect">
-            <a:avLst/>
-          </a:prstGeom>
-          <a:noFill/>
-          <a:ln/>
-        </p:spPr>
-        <p:txBody>
-          <a:bodyPr wrap="square" lIns="0" tIns="0" rIns="0" bIns="0" rtlCol="0" anchor="ctr"/>
-          <a:lstStyle/>
-          <a:p>
-            <a:pPr indent="0" marL="0">
-              <a:buNone/>
-            </a:pPr>
-            <a:r>
-              <a:rPr lang="en-US" sz="1550" b="1" dirty="0">
-                <a:solidFill>
-                  <a:srgbClr val="1C2530"/>
-                </a:solidFill>
-                <a:latin typeface="Calibri" pitchFamily="34" charset="0"/>
-                <a:ea typeface="Calibri" pitchFamily="34" charset="-122"/>
-                <a:cs typeface="Calibri" pitchFamily="34" charset="-120"/>
-              </a:rPr>
-              <a:t>Failures are kept, with their numbers</a:t>
-            </a:r>
-            <a:endParaRPr lang="en-US" sz="1550" dirty="0"/>
-          </a:p>
-        </p:txBody>
-      </p:sp>
-      <p:sp>
-        <p:nvSpPr>
-          <p:cNvPr id="9" name="Text 7"/>
-          <p:cNvSpPr/>
-          <p:nvPr/>
-        </p:nvSpPr>
-        <p:spPr>
-          <a:xfrm>
-            <a:off x="1691640" y="3950208"/>
-            <a:ext cx="9418320" cy="548640"/>
-          </a:xfrm>
-          <a:prstGeom prst="rect">
-            <a:avLst/>
-          </a:prstGeom>
-          <a:noFill/>
-          <a:ln/>
-        </p:spPr>
-        <p:txBody>
-          <a:bodyPr wrap="square" lIns="0" tIns="0" rIns="0" bIns="0" rtlCol="0" anchor="ctr"/>
-          <a:lstStyle/>
-          <a:p>
-            <a:pPr indent="0" marL="0">
-              <a:buNone/>
-            </a:pPr>
-            <a:r>
-              <a:rPr lang="en-US" sz="1200" dirty="0">
-                <a:solidFill>
-                  <a:srgbClr val="6B7280"/>
-                </a:solidFill>
-                <a:latin typeface="Calibri" pitchFamily="34" charset="0"/>
-                <a:ea typeface="Calibri" pitchFamily="34" charset="-122"/>
-                <a:cs typeface="Calibri" pitchFamily="34" charset="-120"/>
-              </a:rPr>
-              <a:t>rejected techniques stay documented so no one re-tests a dead end</a:t>
-            </a:r>
-            <a:endParaRPr lang="en-US" sz="1200" dirty="0"/>
-          </a:p>
-        </p:txBody>
-      </p:sp>
-      <p:sp>
-        <p:nvSpPr>
-          <p:cNvPr id="10" name="Text 8"/>
-          <p:cNvSpPr/>
-          <p:nvPr/>
-        </p:nvSpPr>
-        <p:spPr>
-          <a:xfrm>
-            <a:off x="685800" y="4700016"/>
-            <a:ext cx="777240" cy="640080"/>
-          </a:xfrm>
-          <a:prstGeom prst="rect">
-            <a:avLst/>
-          </a:prstGeom>
-          <a:noFill/>
-          <a:ln/>
-        </p:spPr>
-        <p:txBody>
-          <a:bodyPr wrap="square" lIns="0" tIns="0" rIns="0" bIns="0" rtlCol="0" anchor="ctr"/>
-          <a:lstStyle/>
-          <a:p>
-            <a:pPr indent="0" marL="0">
-              <a:buNone/>
-            </a:pPr>
-            <a:r>
-              <a:rPr lang="en-US" sz="2400" i="1" dirty="0">
-                <a:solidFill>
-                  <a:srgbClr val="C8102E"/>
-                </a:solidFill>
-                <a:latin typeface="Cambria" pitchFamily="34" charset="0"/>
-                <a:ea typeface="Cambria" pitchFamily="34" charset="-122"/>
-                <a:cs typeface="Cambria" pitchFamily="34" charset="-120"/>
-              </a:rPr>
-              <a:t>03</a:t>
-            </a:r>
-            <a:endParaRPr lang="en-US" sz="2400" dirty="0"/>
-          </a:p>
-        </p:txBody>
-      </p:sp>
-      <p:sp>
-        <p:nvSpPr>
-          <p:cNvPr id="11" name="Text 9"/>
-          <p:cNvSpPr/>
-          <p:nvPr/>
-        </p:nvSpPr>
-        <p:spPr>
-          <a:xfrm>
-            <a:off x="1691640" y="4718304"/>
-            <a:ext cx="9418320" cy="411480"/>
-          </a:xfrm>
-          <a:prstGeom prst="rect">
-            <a:avLst/>
-          </a:prstGeom>
-          <a:noFill/>
-          <a:ln/>
-        </p:spPr>
-        <p:txBody>
-          <a:bodyPr wrap="square" lIns="0" tIns="0" rIns="0" bIns="0" rtlCol="0" anchor="ctr"/>
-          <a:lstStyle/>
-          <a:p>
-            <a:pPr indent="0" marL="0">
-              <a:buNone/>
-            </a:pPr>
-            <a:r>
-              <a:rPr lang="en-US" sz="1550" b="1" dirty="0">
-                <a:solidFill>
-                  <a:srgbClr val="1C2530"/>
-                </a:solidFill>
-                <a:latin typeface="Calibri" pitchFamily="34" charset="0"/>
-                <a:ea typeface="Calibri" pitchFamily="34" charset="-122"/>
-                <a:cs typeface="Calibri" pitchFamily="34" charset="-120"/>
-              </a:rPr>
-              <a:t>Every assumption is written down</a:t>
-            </a:r>
-            <a:endParaRPr lang="en-US" sz="1550" dirty="0"/>
-          </a:p>
-        </p:txBody>
-      </p:sp>
-      <p:sp>
-        <p:nvSpPr>
-          <p:cNvPr id="12" name="Text 10"/>
-          <p:cNvSpPr/>
-          <p:nvPr/>
-        </p:nvSpPr>
-        <p:spPr>
-          <a:xfrm>
-            <a:off x="1691640" y="5157216"/>
-            <a:ext cx="9418320" cy="548640"/>
-          </a:xfrm>
-          <a:prstGeom prst="rect">
-            <a:avLst/>
-          </a:prstGeom>
-          <a:noFill/>
-          <a:ln/>
-        </p:spPr>
-        <p:txBody>
-          <a:bodyPr wrap="square" lIns="0" tIns="0" rIns="0" bIns="0" rtlCol="0" anchor="ctr"/>
-          <a:lstStyle/>
-          <a:p>
-            <a:pPr indent="0" marL="0">
-              <a:buNone/>
-            </a:pPr>
-            <a:r>
-              <a:rPr lang="en-US" sz="1200" dirty="0">
-                <a:solidFill>
-                  <a:srgbClr val="6B7280"/>
-                </a:solidFill>
-                <a:latin typeface="Calibri" pitchFamily="34" charset="0"/>
-                <a:ea typeface="Calibri" pitchFamily="34" charset="-122"/>
-                <a:cs typeface="Calibri" pitchFamily="34" charset="-120"/>
-              </a:rPr>
-              <a:t>twenty-one documented decisions, each reversible by one configuration line</a:t>
-            </a:r>
-            <a:endParaRPr lang="en-US" sz="1200" dirty="0"/>
-          </a:p>
-        </p:txBody>
-      </p:sp>
-    </p:spTree>
-  </p:cSld>
-  <p:clrMapOvr>
-    <a:masterClrMapping/>
-  </p:clrMapOvr>
-</p:sld>
-</file>
-
-<file path=ppt/slides/slide9.xml><?xml version="1.0" encoding="utf-8"?>
-<p:sld xmlns:a="http://schemas.openxmlformats.org/drawingml/2006/main" xmlns:r="http://schemas.openxmlformats.org/officeDocument/2006/relationships" xmlns:p="http://schemas.openxmlformats.org/presentationml/2006/main">
-  <p:cSld name="Slide 9">
-    <p:bg>
-      <p:bgPr>
-        <a:solidFill>
-          <a:srgbClr val="FFFFFF"/>
-        </a:solidFill>
-      </p:bgPr>
-    </p:bg>
-    <p:spTree>
-      <p:nvGrpSpPr>
-        <p:cNvPr id="1" name=""/>
-        <p:cNvGrpSpPr/>
-        <p:nvPr/>
-      </p:nvGrpSpPr>
-      <p:grpSpPr>
-        <a:xfrm>
-          <a:off x="0" y="0"/>
-          <a:ext cx="0" cy="0"/>
-          <a:chOff x="0" y="0"/>
-          <a:chExt cx="0" cy="0"/>
-        </a:xfrm>
-      </p:grpSpPr>
-      <p:sp>
-        <p:nvSpPr>
-          <p:cNvPr id="2" name="Text 0"/>
-          <p:cNvSpPr/>
-          <p:nvPr/>
-        </p:nvSpPr>
-        <p:spPr>
-          <a:xfrm>
-            <a:off x="685800" y="566928"/>
-            <a:ext cx="10817352" cy="274320"/>
-          </a:xfrm>
-          <a:prstGeom prst="rect">
-            <a:avLst/>
-          </a:prstGeom>
-          <a:noFill/>
-          <a:ln/>
-        </p:spPr>
-        <p:txBody>
-          <a:bodyPr wrap="square" lIns="0" tIns="0" rIns="0" bIns="0" rtlCol="0" anchor="ctr"/>
-          <a:lstStyle/>
-          <a:p>
-            <a:pPr algn="l" indent="0" marL="0">
-              <a:buNone/>
-            </a:pPr>
-            <a:r>
-              <a:rPr lang="en-US" sz="1050" b="1" spc="300" kern="0" dirty="0">
-                <a:solidFill>
-                  <a:srgbClr val="6B7280"/>
-                </a:solidFill>
-                <a:latin typeface="Calibri" pitchFamily="34" charset="0"/>
-                <a:ea typeface="Calibri" pitchFamily="34" charset="-122"/>
-                <a:cs typeface="Calibri" pitchFamily="34" charset="-120"/>
-              </a:rPr>
-              <a:t>09 — THE ROAD AHEAD</a:t>
-            </a:r>
-            <a:endParaRPr lang="en-US" sz="1050" dirty="0"/>
-          </a:p>
-        </p:txBody>
-      </p:sp>
-      <p:sp>
-        <p:nvSpPr>
-          <p:cNvPr id="3" name="Text 1"/>
-          <p:cNvSpPr/>
-          <p:nvPr/>
-        </p:nvSpPr>
-        <p:spPr>
-          <a:xfrm>
-            <a:off x="685800" y="914400"/>
-            <a:ext cx="10817352" cy="1051560"/>
-          </a:xfrm>
-          <a:prstGeom prst="rect">
-            <a:avLst/>
-          </a:prstGeom>
-          <a:noFill/>
-          <a:ln/>
-        </p:spPr>
-        <p:txBody>
-          <a:bodyPr wrap="square" lIns="0" tIns="0" rIns="0" bIns="0" rtlCol="0" anchor="ctr"/>
-          <a:lstStyle/>
-          <a:p>
-            <a:pPr algn="l" indent="0" marL="0">
-              <a:buNone/>
-            </a:pPr>
-            <a:r>
-              <a:rPr lang="en-US" sz="3800" b="1" dirty="0">
-                <a:solidFill>
-                  <a:srgbClr val="1C2530"/>
-                </a:solidFill>
-                <a:latin typeface="Cambria" pitchFamily="34" charset="0"/>
-                <a:ea typeface="Cambria" pitchFamily="34" charset="-122"/>
-                <a:cs typeface="Cambria" pitchFamily="34" charset="-120"/>
-              </a:rPr>
-              <a:t>Two milestones to the final forecast.</a:t>
-            </a:r>
-            <a:endParaRPr lang="en-US" sz="3800" dirty="0"/>
-          </a:p>
-        </p:txBody>
-      </p:sp>
-      <p:sp>
-        <p:nvSpPr>
-          <p:cNvPr id="4" name="Shape 2"/>
-          <p:cNvSpPr/>
-          <p:nvPr/>
-        </p:nvSpPr>
-        <p:spPr>
-          <a:xfrm>
-            <a:off x="685800" y="2331720"/>
-            <a:ext cx="3429000" cy="2926080"/>
-          </a:xfrm>
-          <a:prstGeom prst="roundRect">
-            <a:avLst>
-              <a:gd name="adj" fmla="val 2500"/>
-            </a:avLst>
+          <p:cNvPr id="2" name="Shape 0"/>
+          <p:cNvSpPr/>
+          <p:nvPr/>
+        </p:nvSpPr>
+        <p:spPr>
+          <a:xfrm>
+            <a:off x="9601200" y="-2286000"/>
+            <a:ext cx="4754880" cy="4754880"/>
+          </a:xfrm>
+          <a:prstGeom prst="ellipse">
+            <a:avLst/>
           </a:prstGeom>
           <a:solidFill>
             <a:srgbClr val="1C2530"/>
           </a:solidFill>
-          <a:ln w="12700">
-            <a:solidFill>
-              <a:srgbClr val="1C2530"/>
-            </a:solidFill>
-            <a:prstDash val="solid"/>
-          </a:ln>
-        </p:spPr>
-      </p:sp>
-      <p:sp>
-        <p:nvSpPr>
-          <p:cNvPr id="5" name="Text 3"/>
-          <p:cNvSpPr/>
-          <p:nvPr/>
-        </p:nvSpPr>
-        <p:spPr>
-          <a:xfrm>
-            <a:off x="1005840" y="2697480"/>
-            <a:ext cx="2788920" cy="320040"/>
-          </a:xfrm>
-          <a:prstGeom prst="rect">
-            <a:avLst/>
-          </a:prstGeom>
-          <a:noFill/>
-          <a:ln/>
-        </p:spPr>
-        <p:txBody>
-          <a:bodyPr wrap="square" lIns="0" tIns="0" rIns="0" bIns="0" rtlCol="0" anchor="ctr"/>
-          <a:lstStyle/>
-          <a:p>
-            <a:pPr indent="0" marL="0">
-              <a:buNone/>
-            </a:pPr>
-            <a:r>
-              <a:rPr lang="en-US" sz="1050" b="1" spc="200" kern="0" dirty="0">
-                <a:solidFill>
-                  <a:srgbClr val="9AA4B0"/>
-                </a:solidFill>
-                <a:latin typeface="Calibri" pitchFamily="34" charset="0"/>
-                <a:ea typeface="Calibri" pitchFamily="34" charset="-122"/>
-                <a:cs typeface="Calibri" pitchFamily="34" charset="-120"/>
-              </a:rPr>
-              <a:t>TODAY — 10 AUG</a:t>
-            </a:r>
-            <a:endParaRPr lang="en-US" sz="1050" dirty="0"/>
-          </a:p>
-        </p:txBody>
-      </p:sp>
-      <p:sp>
-        <p:nvSpPr>
-          <p:cNvPr id="6" name="Text 4"/>
-          <p:cNvSpPr/>
-          <p:nvPr/>
-        </p:nvSpPr>
-        <p:spPr>
-          <a:xfrm>
-            <a:off x="1005840" y="3063240"/>
-            <a:ext cx="2788920" cy="777240"/>
-          </a:xfrm>
-          <a:prstGeom prst="rect">
-            <a:avLst/>
-          </a:prstGeom>
-          <a:noFill/>
-          <a:ln/>
-        </p:spPr>
-        <p:txBody>
-          <a:bodyPr wrap="square" lIns="0" tIns="0" rIns="0" bIns="0" rtlCol="0" anchor="ctr"/>
-          <a:lstStyle/>
-          <a:p>
-            <a:pPr indent="0" marL="0">
-              <a:buNone/>
-            </a:pPr>
-            <a:r>
-              <a:rPr lang="en-US" sz="1900" b="1" dirty="0">
-                <a:solidFill>
-                  <a:srgbClr val="F5F7FA"/>
-                </a:solidFill>
-                <a:latin typeface="Cambria" pitchFamily="34" charset="0"/>
-                <a:ea typeface="Cambria" pitchFamily="34" charset="-122"/>
-                <a:cs typeface="Cambria" pitchFamily="34" charset="-120"/>
-              </a:rPr>
-              <a:t>Progress report</a:t>
-            </a:r>
-            <a:endParaRPr lang="en-US" sz="1900" dirty="0"/>
-          </a:p>
-        </p:txBody>
-      </p:sp>
-      <p:sp>
-        <p:nvSpPr>
-          <p:cNvPr id="7" name="Text 5"/>
-          <p:cNvSpPr/>
-          <p:nvPr/>
-        </p:nvSpPr>
-        <p:spPr>
-          <a:xfrm>
-            <a:off x="1005840" y="3886200"/>
-            <a:ext cx="2788920" cy="1234440"/>
-          </a:xfrm>
-          <a:prstGeom prst="rect">
-            <a:avLst/>
-          </a:prstGeom>
-          <a:noFill/>
-          <a:ln/>
-        </p:spPr>
-        <p:txBody>
-          <a:bodyPr wrap="square" lIns="0" tIns="0" rIns="0" bIns="0" rtlCol="0" anchor="ctr"/>
-          <a:lstStyle/>
-          <a:p>
-            <a:pPr indent="0" marL="0">
-              <a:lnSpc>
-                <a:spcPct val="120000"/>
-              </a:lnSpc>
-              <a:buNone/>
-            </a:pPr>
-            <a:r>
-              <a:rPr lang="en-US" sz="1150" dirty="0">
-                <a:solidFill>
-                  <a:srgbClr val="C9D2DB"/>
-                </a:solidFill>
-                <a:latin typeface="Calibri" pitchFamily="34" charset="0"/>
-                <a:ea typeface="Calibri" pitchFamily="34" charset="-122"/>
-                <a:cs typeface="Calibri" pitchFamily="34" charset="-120"/>
-              </a:rPr>
-              <a:t>system built and running; data understood; questions raised</a:t>
-            </a:r>
-            <a:endParaRPr lang="en-US" sz="1150" dirty="0"/>
-          </a:p>
-        </p:txBody>
-      </p:sp>
-      <p:sp>
-        <p:nvSpPr>
-          <p:cNvPr id="8" name="Shape 6"/>
-          <p:cNvSpPr/>
-          <p:nvPr/>
-        </p:nvSpPr>
-        <p:spPr>
-          <a:xfrm>
-            <a:off x="4398264" y="2331720"/>
-            <a:ext cx="3429000" cy="2926080"/>
-          </a:xfrm>
-          <a:prstGeom prst="roundRect">
-            <a:avLst>
-              <a:gd name="adj" fmla="val 2500"/>
-            </a:avLst>
-          </a:prstGeom>
-          <a:solidFill>
-            <a:srgbClr val="C8102E"/>
-          </a:solidFill>
-          <a:ln w="12700">
+          <a:ln w="15875">
             <a:solidFill>
               <a:srgbClr val="C8102E"/>
             </a:solidFill>
@@ -6013,92 +4857,92 @@
       </p:sp>
       <p:sp>
         <p:nvSpPr>
-          <p:cNvPr id="9" name="Text 7"/>
-          <p:cNvSpPr/>
-          <p:nvPr/>
-        </p:nvSpPr>
-        <p:spPr>
-          <a:xfrm>
-            <a:off x="4718304" y="2697480"/>
-            <a:ext cx="2788920" cy="320040"/>
-          </a:xfrm>
-          <a:prstGeom prst="rect">
-            <a:avLst/>
-          </a:prstGeom>
-          <a:noFill/>
-          <a:ln/>
-        </p:spPr>
-        <p:txBody>
-          <a:bodyPr wrap="square" lIns="0" tIns="0" rIns="0" bIns="0" rtlCol="0" anchor="ctr"/>
-          <a:lstStyle/>
-          <a:p>
-            <a:pPr indent="0" marL="0">
-              <a:buNone/>
-            </a:pPr>
-            <a:r>
-              <a:rPr lang="en-US" sz="1050" b="1" spc="200" kern="0" dirty="0">
-                <a:solidFill>
-                  <a:srgbClr val="F3C2CB"/>
+          <p:cNvPr id="3" name="Text 1"/>
+          <p:cNvSpPr/>
+          <p:nvPr/>
+        </p:nvSpPr>
+        <p:spPr>
+          <a:xfrm>
+            <a:off x="685800" y="2103120"/>
+            <a:ext cx="10817352" cy="320040"/>
+          </a:xfrm>
+          <a:prstGeom prst="rect">
+            <a:avLst/>
+          </a:prstGeom>
+          <a:noFill/>
+          <a:ln/>
+        </p:spPr>
+        <p:txBody>
+          <a:bodyPr wrap="square" lIns="0" tIns="0" rIns="0" bIns="0" rtlCol="0" anchor="ctr"/>
+          <a:lstStyle/>
+          <a:p>
+            <a:pPr indent="0" marL="0">
+              <a:buNone/>
+            </a:pPr>
+            <a:r>
+              <a:rPr lang="en-US" sz="1100" b="1" spc="300" kern="0" dirty="0">
+                <a:solidFill>
+                  <a:srgbClr val="9AA4B0"/>
                 </a:solidFill>
                 <a:latin typeface="Calibri" pitchFamily="34" charset="0"/>
                 <a:ea typeface="Calibri" pitchFamily="34" charset="-122"/>
                 <a:cs typeface="Calibri" pitchFamily="34" charset="-120"/>
               </a:rPr>
-              <a:t>SEMI-FINAL — 7 SEP</a:t>
-            </a:r>
-            <a:endParaRPr lang="en-US" sz="1050" dirty="0"/>
-          </a:p>
-        </p:txBody>
-      </p:sp>
-      <p:sp>
-        <p:nvSpPr>
-          <p:cNvPr id="10" name="Text 8"/>
-          <p:cNvSpPr/>
-          <p:nvPr/>
-        </p:nvSpPr>
-        <p:spPr>
-          <a:xfrm>
-            <a:off x="4718304" y="3063240"/>
-            <a:ext cx="2788920" cy="777240"/>
-          </a:xfrm>
-          <a:prstGeom prst="rect">
-            <a:avLst/>
-          </a:prstGeom>
-          <a:noFill/>
-          <a:ln/>
-        </p:spPr>
-        <p:txBody>
-          <a:bodyPr wrap="square" lIns="0" tIns="0" rIns="0" bIns="0" rtlCol="0" anchor="ctr"/>
-          <a:lstStyle/>
-          <a:p>
-            <a:pPr indent="0" marL="0">
-              <a:buNone/>
-            </a:pPr>
-            <a:r>
-              <a:rPr lang="en-US" sz="1900" b="1" dirty="0">
-                <a:solidFill>
-                  <a:srgbClr val="F5F7FA"/>
+              <a:t>THANK YOU</a:t>
+            </a:r>
+            <a:endParaRPr lang="en-US" sz="1100" dirty="0"/>
+          </a:p>
+        </p:txBody>
+      </p:sp>
+      <p:sp>
+        <p:nvSpPr>
+          <p:cNvPr id="4" name="Text 2"/>
+          <p:cNvSpPr/>
+          <p:nvPr/>
+        </p:nvSpPr>
+        <p:spPr>
+          <a:xfrm>
+            <a:off x="685800" y="2560320"/>
+            <a:ext cx="9601200" cy="1097280"/>
+          </a:xfrm>
+          <a:prstGeom prst="rect">
+            <a:avLst/>
+          </a:prstGeom>
+          <a:noFill/>
+          <a:ln/>
+        </p:spPr>
+        <p:txBody>
+          <a:bodyPr wrap="square" lIns="0" tIns="0" rIns="0" bIns="0" rtlCol="0" anchor="ctr"/>
+          <a:lstStyle/>
+          <a:p>
+            <a:pPr indent="0" marL="0">
+              <a:buNone/>
+            </a:pPr>
+            <a:r>
+              <a:rPr lang="en-US" sz="4400" b="1" dirty="0">
+                <a:solidFill>
+                  <a:srgbClr val="FFFFFF"/>
                 </a:solidFill>
                 <a:latin typeface="Cambria" pitchFamily="34" charset="0"/>
                 <a:ea typeface="Cambria" pitchFamily="34" charset="-122"/>
                 <a:cs typeface="Cambria" pitchFamily="34" charset="-120"/>
               </a:rPr>
-              <a:t>Results &amp; evidence</a:t>
-            </a:r>
-            <a:endParaRPr lang="en-US" sz="1900" dirty="0"/>
-          </a:p>
-        </p:txBody>
-      </p:sp>
-      <p:sp>
-        <p:nvSpPr>
-          <p:cNvPr id="11" name="Text 9"/>
-          <p:cNvSpPr/>
-          <p:nvPr/>
-        </p:nvSpPr>
-        <p:spPr>
-          <a:xfrm>
-            <a:off x="4718304" y="3886200"/>
-            <a:ext cx="2788920" cy="1234440"/>
+              <a:t>Built. Tested. Improving.</a:t>
+            </a:r>
+            <a:endParaRPr lang="en-US" sz="4400" dirty="0"/>
+          </a:p>
+        </p:txBody>
+      </p:sp>
+      <p:sp>
+        <p:nvSpPr>
+          <p:cNvPr id="5" name="Text 3"/>
+          <p:cNvSpPr/>
+          <p:nvPr/>
+        </p:nvSpPr>
+        <p:spPr>
+          <a:xfrm>
+            <a:off x="685800" y="3977640"/>
+            <a:ext cx="8686800" cy="731520"/>
           </a:xfrm>
           <a:prstGeom prst="rect">
             <a:avLst/>
@@ -6112,208 +4956,42 @@
           <a:p>
             <a:pPr indent="0" marL="0">
               <a:lnSpc>
-                <a:spcPct val="120000"/>
+                <a:spcPct val="125000"/>
               </a:lnSpc>
               <a:buNone/>
             </a:pPr>
             <a:r>
-              <a:rPr lang="en-US" sz="1150" dirty="0">
-                <a:solidFill>
-                  <a:srgbClr val="F3D9DD"/>
+              <a:rPr lang="en-US" sz="1400" dirty="0">
+                <a:solidFill>
+                  <a:srgbClr val="A9B4C2"/>
                 </a:solidFill>
                 <a:latin typeface="Calibri" pitchFamily="34" charset="0"/>
                 <a:ea typeface="Calibri" pitchFamily="34" charset="-122"/>
                 <a:cs typeface="Calibri" pitchFamily="34" charset="-120"/>
               </a:rPr>
-              <a:t>the FY2025 numbers, accuracy against withheld years, inventory trade-off, refinements from your feedback</a:t>
-            </a:r>
-            <a:endParaRPr lang="en-US" sz="1150" dirty="0"/>
-          </a:p>
-        </p:txBody>
-      </p:sp>
-      <p:sp>
-        <p:nvSpPr>
-          <p:cNvPr id="12" name="Shape 10"/>
-          <p:cNvSpPr/>
-          <p:nvPr/>
-        </p:nvSpPr>
-        <p:spPr>
-          <a:xfrm>
-            <a:off x="8110728" y="2331720"/>
-            <a:ext cx="3429000" cy="2926080"/>
-          </a:xfrm>
-          <a:prstGeom prst="roundRect">
-            <a:avLst>
-              <a:gd name="adj" fmla="val 2500"/>
-            </a:avLst>
-          </a:prstGeom>
-          <a:solidFill>
-            <a:srgbClr val="1C2530"/>
-          </a:solidFill>
-          <a:ln w="12700">
-            <a:solidFill>
-              <a:srgbClr val="1C2530"/>
-            </a:solidFill>
-            <a:prstDash val="solid"/>
-          </a:ln>
-        </p:spPr>
-      </p:sp>
-      <p:sp>
-        <p:nvSpPr>
-          <p:cNvPr id="13" name="Text 11"/>
-          <p:cNvSpPr/>
-          <p:nvPr/>
-        </p:nvSpPr>
-        <p:spPr>
-          <a:xfrm>
-            <a:off x="8430768" y="2697480"/>
-            <a:ext cx="2788920" cy="320040"/>
-          </a:xfrm>
-          <a:prstGeom prst="rect">
-            <a:avLst/>
-          </a:prstGeom>
-          <a:noFill/>
-          <a:ln/>
-        </p:spPr>
-        <p:txBody>
-          <a:bodyPr wrap="square" lIns="0" tIns="0" rIns="0" bIns="0" rtlCol="0" anchor="ctr"/>
-          <a:lstStyle/>
-          <a:p>
-            <a:pPr indent="0" marL="0">
-              <a:buNone/>
-            </a:pPr>
-            <a:r>
-              <a:rPr lang="en-US" sz="1050" b="1" spc="200" kern="0" dirty="0">
-                <a:solidFill>
-                  <a:srgbClr val="9AA4B0"/>
+              <a:t>Results and accuracy evidence — semi-final, 7 September.</a:t>
+            </a:r>
+            <a:endParaRPr lang="en-US" sz="1400" dirty="0"/>
+          </a:p>
+          <a:p>
+            <a:pPr indent="0" marL="0">
+              <a:lnSpc>
+                <a:spcPct val="125000"/>
+              </a:lnSpc>
+              <a:buNone/>
+            </a:pPr>
+            <a:r>
+              <a:rPr lang="en-US" sz="1400" dirty="0">
+                <a:solidFill>
+                  <a:srgbClr val="A9B4C2"/>
                 </a:solidFill>
                 <a:latin typeface="Calibri" pitchFamily="34" charset="0"/>
                 <a:ea typeface="Calibri" pitchFamily="34" charset="-122"/>
                 <a:cs typeface="Calibri" pitchFamily="34" charset="-120"/>
               </a:rPr>
-              <a:t>FINAL — 28 SEP</a:t>
-            </a:r>
-            <a:endParaRPr lang="en-US" sz="1050" dirty="0"/>
-          </a:p>
-        </p:txBody>
-      </p:sp>
-      <p:sp>
-        <p:nvSpPr>
-          <p:cNvPr id="14" name="Text 12"/>
-          <p:cNvSpPr/>
-          <p:nvPr/>
-        </p:nvSpPr>
-        <p:spPr>
-          <a:xfrm>
-            <a:off x="8430768" y="3063240"/>
-            <a:ext cx="2788920" cy="777240"/>
-          </a:xfrm>
-          <a:prstGeom prst="rect">
-            <a:avLst/>
-          </a:prstGeom>
-          <a:noFill/>
-          <a:ln/>
-        </p:spPr>
-        <p:txBody>
-          <a:bodyPr wrap="square" lIns="0" tIns="0" rIns="0" bIns="0" rtlCol="0" anchor="ctr"/>
-          <a:lstStyle/>
-          <a:p>
-            <a:pPr indent="0" marL="0">
-              <a:buNone/>
-            </a:pPr>
-            <a:r>
-              <a:rPr lang="en-US" sz="1900" b="1" dirty="0">
-                <a:solidFill>
-                  <a:srgbClr val="F5F7FA"/>
-                </a:solidFill>
-                <a:latin typeface="Cambria" pitchFamily="34" charset="0"/>
-                <a:ea typeface="Cambria" pitchFamily="34" charset="-122"/>
-                <a:cs typeface="Cambria" pitchFamily="34" charset="-120"/>
-              </a:rPr>
-              <a:t>Final forecast &amp; handover</a:t>
-            </a:r>
-            <a:endParaRPr lang="en-US" sz="1900" dirty="0"/>
-          </a:p>
-        </p:txBody>
-      </p:sp>
-      <p:sp>
-        <p:nvSpPr>
-          <p:cNvPr id="15" name="Text 13"/>
-          <p:cNvSpPr/>
-          <p:nvPr/>
-        </p:nvSpPr>
-        <p:spPr>
-          <a:xfrm>
-            <a:off x="8430768" y="3886200"/>
-            <a:ext cx="2788920" cy="1234440"/>
-          </a:xfrm>
-          <a:prstGeom prst="rect">
-            <a:avLst/>
-          </a:prstGeom>
-          <a:noFill/>
-          <a:ln/>
-        </p:spPr>
-        <p:txBody>
-          <a:bodyPr wrap="square" lIns="0" tIns="0" rIns="0" bIns="0" rtlCol="0" anchor="ctr"/>
-          <a:lstStyle/>
-          <a:p>
-            <a:pPr indent="0" marL="0">
-              <a:lnSpc>
-                <a:spcPct val="120000"/>
-              </a:lnSpc>
-              <a:buNone/>
-            </a:pPr>
-            <a:r>
-              <a:rPr lang="en-US" sz="1150" dirty="0">
-                <a:solidFill>
-                  <a:srgbClr val="C9D2DB"/>
-                </a:solidFill>
-                <a:latin typeface="Calibri" pitchFamily="34" charset="0"/>
-                <a:ea typeface="Calibri" pitchFamily="34" charset="-122"/>
-                <a:cs typeface="Calibri" pitchFamily="34" charset="-120"/>
-              </a:rPr>
-              <a:t>final forecast with full written report, documented assumptions, and the dashboard handed over</a:t>
-            </a:r>
-            <a:endParaRPr lang="en-US" sz="1150" dirty="0"/>
-          </a:p>
-        </p:txBody>
-      </p:sp>
-      <p:sp>
-        <p:nvSpPr>
-          <p:cNvPr id="16" name="Text 14"/>
-          <p:cNvSpPr/>
-          <p:nvPr/>
-        </p:nvSpPr>
-        <p:spPr>
-          <a:xfrm>
-            <a:off x="685800" y="5760720"/>
-            <a:ext cx="10817352" cy="548640"/>
-          </a:xfrm>
-          <a:prstGeom prst="rect">
-            <a:avLst/>
-          </a:prstGeom>
-          <a:noFill/>
-          <a:ln/>
-        </p:spPr>
-        <p:txBody>
-          <a:bodyPr wrap="square" lIns="0" tIns="0" rIns="0" bIns="0" rtlCol="0" anchor="ctr"/>
-          <a:lstStyle/>
-          <a:p>
-            <a:pPr indent="0" marL="0">
-              <a:buNone/>
-            </a:pPr>
-            <a:r>
-              <a:rPr lang="en-US" sz="1250" i="1" dirty="0">
-                <a:solidFill>
-                  <a:srgbClr val="6B7280"/>
-                </a:solidFill>
-                <a:latin typeface="Calibri" pitchFamily="34" charset="0"/>
-                <a:ea typeface="Calibri" pitchFamily="34" charset="-122"/>
-                <a:cs typeface="Calibri" pitchFamily="34" charset="-120"/>
-              </a:rPr>
-              <a:t>Between milestones: sales-input channel for the event-driven products, monthly re-forecast rhythm, and refinements from today’s discussion.</a:t>
-            </a:r>
-            <a:endParaRPr lang="en-US" sz="1250" dirty="0"/>
+              <a:t>Next: a live demonstration of the dashboard.</a:t>
+            </a:r>
+            <a:endParaRPr lang="en-US" sz="1400" dirty="0"/>
           </a:p>
         </p:txBody>
       </p:sp>
